--- a/deliverables/Effective-Assessment-Practices-KATON-2026.pptx
+++ b/deliverables/Effective-Assessment-Practices-KATON-2026.pptx
@@ -3926,6 +3926,12 @@
           <a:p>
             <a:r>
               <a:t>DO NOT let anyone feel accused. Frame it as something we inherited, not something we chose. Then move on briskly - do not let the icebreaker run past five minutes.</a:t>
+            </a:r>
+          </a:p>
+          <a:p/>
+          <a:p>
+            <a:r>
+              <a:t>KEEP THE BOARD. You will call back to these words on the closing slide.</a:t>
             </a:r>
           </a:p>
         </p:txBody>
@@ -14623,15 +14629,14 @@
         </p:nvPicPr>
         <p:blipFill>
           <a:blip r:embed="rId2"/>
-          <a:srcRect l="15033" r="15033"/>
           <a:stretch>
             <a:fillRect/>
           </a:stretch>
         </p:blipFill>
         <p:spPr>
           <a:xfrm>
-            <a:off x="6732727" y="1417320"/>
-            <a:ext cx="4892040" cy="4663440"/>
+            <a:off x="5909767" y="1417320"/>
+            <a:ext cx="5715000" cy="3810000"/>
           </a:xfrm>
           <a:prstGeom prst="rect">
             <a:avLst/>
@@ -14646,8 +14651,8 @@
         </p:nvSpPr>
         <p:spPr>
           <a:xfrm>
-            <a:off x="6732727" y="1417320"/>
-            <a:ext cx="4892040" cy="59436"/>
+            <a:off x="5909767" y="1417320"/>
+            <a:ext cx="5715000" cy="59436"/>
           </a:xfrm>
           <a:prstGeom prst="rect">
             <a:avLst/>
@@ -14690,8 +14695,8 @@
         </p:nvSpPr>
         <p:spPr>
           <a:xfrm>
-            <a:off x="6732727" y="6144768"/>
-            <a:ext cx="4892040" cy="365760"/>
+            <a:off x="5909767" y="5273040"/>
+            <a:ext cx="5715000" cy="365760"/>
           </a:xfrm>
           <a:prstGeom prst="rect">
             <a:avLst/>
@@ -14736,7 +14741,7 @@
         <p:spPr>
           <a:xfrm>
             <a:off x="566928" y="1426464"/>
-            <a:ext cx="5781751" cy="804176"/>
+            <a:ext cx="4958791" cy="729996"/>
           </a:xfrm>
           <a:prstGeom prst="roundRect">
             <a:avLst>
@@ -14782,7 +14787,7 @@
         <p:spPr>
           <a:xfrm>
             <a:off x="566928" y="1426464"/>
-            <a:ext cx="45720" cy="804176"/>
+            <a:ext cx="45720" cy="729996"/>
           </a:xfrm>
           <a:prstGeom prst="rect">
             <a:avLst/>
@@ -14826,7 +14831,7 @@
         <p:spPr>
           <a:xfrm>
             <a:off x="768096" y="1563624"/>
-            <a:ext cx="5379415" cy="529856"/>
+            <a:ext cx="4556455" cy="455676"/>
           </a:xfrm>
           <a:prstGeom prst="rect">
             <a:avLst/>
@@ -14892,8 +14897,8 @@
         </p:nvSpPr>
         <p:spPr>
           <a:xfrm>
-            <a:off x="566928" y="2340368"/>
-            <a:ext cx="5781751" cy="655815"/>
+            <a:off x="566928" y="2266188"/>
+            <a:ext cx="4958791" cy="729996"/>
           </a:xfrm>
           <a:prstGeom prst="roundRect">
             <a:avLst>
@@ -14938,8 +14943,8 @@
         </p:nvSpPr>
         <p:spPr>
           <a:xfrm>
-            <a:off x="566928" y="2340368"/>
-            <a:ext cx="45720" cy="655815"/>
+            <a:off x="566928" y="2266188"/>
+            <a:ext cx="45720" cy="729996"/>
           </a:xfrm>
           <a:prstGeom prst="rect">
             <a:avLst/>
@@ -14982,8 +14987,8 @@
         </p:nvSpPr>
         <p:spPr>
           <a:xfrm>
-            <a:off x="768096" y="2477528"/>
-            <a:ext cx="5379415" cy="381495"/>
+            <a:off x="768096" y="2403348"/>
+            <a:ext cx="4556455" cy="455676"/>
           </a:xfrm>
           <a:prstGeom prst="rect">
             <a:avLst/>
@@ -15050,7 +15055,7 @@
         <p:spPr>
           <a:xfrm>
             <a:off x="566928" y="3105912"/>
-            <a:ext cx="5781751" cy="655815"/>
+            <a:ext cx="4958791" cy="729996"/>
           </a:xfrm>
           <a:prstGeom prst="roundRect">
             <a:avLst>
@@ -15096,7 +15101,7 @@
         <p:spPr>
           <a:xfrm>
             <a:off x="566928" y="3105912"/>
-            <a:ext cx="45720" cy="655815"/>
+            <a:ext cx="45720" cy="729996"/>
           </a:xfrm>
           <a:prstGeom prst="rect">
             <a:avLst/>
@@ -15140,7 +15145,7 @@
         <p:spPr>
           <a:xfrm>
             <a:off x="768096" y="3243072"/>
-            <a:ext cx="5379415" cy="381495"/>
+            <a:ext cx="4556455" cy="455676"/>
           </a:xfrm>
           <a:prstGeom prst="rect">
             <a:avLst/>
@@ -15206,8 +15211,8 @@
         </p:nvSpPr>
         <p:spPr>
           <a:xfrm>
-            <a:off x="566928" y="3871455"/>
-            <a:ext cx="5781751" cy="655815"/>
+            <a:off x="566928" y="3945636"/>
+            <a:ext cx="4958791" cy="729996"/>
           </a:xfrm>
           <a:prstGeom prst="roundRect">
             <a:avLst>
@@ -15252,8 +15257,8 @@
         </p:nvSpPr>
         <p:spPr>
           <a:xfrm>
-            <a:off x="566928" y="3871455"/>
-            <a:ext cx="45720" cy="655815"/>
+            <a:off x="566928" y="3945636"/>
+            <a:ext cx="45720" cy="729996"/>
           </a:xfrm>
           <a:prstGeom prst="rect">
             <a:avLst/>
@@ -15296,8 +15301,8 @@
         </p:nvSpPr>
         <p:spPr>
           <a:xfrm>
-            <a:off x="768096" y="4008615"/>
-            <a:ext cx="5379415" cy="381495"/>
+            <a:off x="768096" y="4082796"/>
+            <a:ext cx="4556455" cy="455676"/>
           </a:xfrm>
           <a:prstGeom prst="rect">
             <a:avLst/>
@@ -15363,8 +15368,8 @@
         </p:nvSpPr>
         <p:spPr>
           <a:xfrm>
-            <a:off x="566928" y="4636998"/>
-            <a:ext cx="5781751" cy="804176"/>
+            <a:off x="566928" y="4785360"/>
+            <a:ext cx="4958791" cy="729996"/>
           </a:xfrm>
           <a:prstGeom prst="roundRect">
             <a:avLst>
@@ -15409,8 +15414,8 @@
         </p:nvSpPr>
         <p:spPr>
           <a:xfrm>
-            <a:off x="566928" y="4636998"/>
-            <a:ext cx="45720" cy="804176"/>
+            <a:off x="566928" y="4785360"/>
+            <a:ext cx="45720" cy="729996"/>
           </a:xfrm>
           <a:prstGeom prst="rect">
             <a:avLst/>
@@ -15453,8 +15458,8 @@
         </p:nvSpPr>
         <p:spPr>
           <a:xfrm>
-            <a:off x="768096" y="4774158"/>
-            <a:ext cx="5379415" cy="529856"/>
+            <a:off x="768096" y="4922520"/>
+            <a:ext cx="4556455" cy="455676"/>
           </a:xfrm>
           <a:prstGeom prst="rect">
             <a:avLst/>
@@ -15520,8 +15525,8 @@
         </p:nvSpPr>
         <p:spPr>
           <a:xfrm>
-            <a:off x="566928" y="5550903"/>
-            <a:ext cx="5781751" cy="804176"/>
+            <a:off x="566928" y="5625084"/>
+            <a:ext cx="4958791" cy="729996"/>
           </a:xfrm>
           <a:prstGeom prst="roundRect">
             <a:avLst>
@@ -15566,8 +15571,8 @@
         </p:nvSpPr>
         <p:spPr>
           <a:xfrm>
-            <a:off x="566928" y="5550903"/>
-            <a:ext cx="45720" cy="804176"/>
+            <a:off x="566928" y="5625084"/>
+            <a:ext cx="45720" cy="729996"/>
           </a:xfrm>
           <a:prstGeom prst="rect">
             <a:avLst/>
@@ -15610,8 +15615,8 @@
         </p:nvSpPr>
         <p:spPr>
           <a:xfrm>
-            <a:off x="768096" y="5688063"/>
-            <a:ext cx="5379415" cy="529856"/>
+            <a:off x="768096" y="5762244"/>
+            <a:ext cx="4556455" cy="455676"/>
           </a:xfrm>
           <a:prstGeom prst="rect">
             <a:avLst/>
@@ -17102,15 +17107,14 @@
         </p:nvPicPr>
         <p:blipFill>
           <a:blip r:embed="rId2"/>
-          <a:srcRect l="15033" r="15033"/>
           <a:stretch>
             <a:fillRect/>
           </a:stretch>
         </p:blipFill>
         <p:spPr>
           <a:xfrm>
-            <a:off x="6732727" y="1417320"/>
-            <a:ext cx="4892040" cy="4663440"/>
+            <a:off x="5909767" y="1417320"/>
+            <a:ext cx="5715000" cy="3810000"/>
           </a:xfrm>
           <a:prstGeom prst="rect">
             <a:avLst/>
@@ -17125,8 +17129,8 @@
         </p:nvSpPr>
         <p:spPr>
           <a:xfrm>
-            <a:off x="6732727" y="1417320"/>
-            <a:ext cx="4892040" cy="59436"/>
+            <a:off x="5909767" y="1417320"/>
+            <a:ext cx="5715000" cy="59436"/>
           </a:xfrm>
           <a:prstGeom prst="rect">
             <a:avLst/>
@@ -17169,8 +17173,8 @@
         </p:nvSpPr>
         <p:spPr>
           <a:xfrm>
-            <a:off x="6732727" y="6144768"/>
-            <a:ext cx="4892040" cy="365760"/>
+            <a:off x="5909767" y="5273040"/>
+            <a:ext cx="5715000" cy="365760"/>
           </a:xfrm>
           <a:prstGeom prst="rect">
             <a:avLst/>
@@ -17215,7 +17219,7 @@
         <p:spPr>
           <a:xfrm>
             <a:off x="566928" y="1426464"/>
-            <a:ext cx="5781751" cy="832002"/>
+            <a:ext cx="4958791" cy="803978"/>
           </a:xfrm>
           <a:prstGeom prst="roundRect">
             <a:avLst>
@@ -17261,7 +17265,7 @@
         <p:spPr>
           <a:xfrm>
             <a:off x="566928" y="1426464"/>
-            <a:ext cx="45720" cy="832002"/>
+            <a:ext cx="45720" cy="803978"/>
           </a:xfrm>
           <a:prstGeom prst="rect">
             <a:avLst/>
@@ -17305,7 +17309,7 @@
         <p:spPr>
           <a:xfrm>
             <a:off x="768096" y="1563624"/>
-            <a:ext cx="5379415" cy="557682"/>
+            <a:ext cx="4556455" cy="529658"/>
           </a:xfrm>
           <a:prstGeom prst="rect">
             <a:avLst/>
@@ -17330,7 +17334,7 @@
               </a:spcAft>
             </a:pPr>
             <a:r>
-              <a:rPr sz="1100" b="1" i="0">
+              <a:rPr sz="1050" b="1" i="0">
                 <a:solidFill>
                   <a:srgbClr val="C1440E"/>
                 </a:solidFill>
@@ -17352,7 +17356,7 @@
               </a:spcAft>
             </a:pPr>
             <a:r>
-              <a:rPr sz="1000" b="0" i="0">
+              <a:rPr sz="950" b="0" i="0">
                 <a:solidFill>
                   <a:srgbClr val="14262E"/>
                 </a:solidFill>
@@ -17371,8 +17375,8 @@
         </p:nvSpPr>
         <p:spPr>
           <a:xfrm>
-            <a:off x="566928" y="2368194"/>
-            <a:ext cx="5781751" cy="832002"/>
+            <a:off x="566928" y="2340170"/>
+            <a:ext cx="4958791" cy="960582"/>
           </a:xfrm>
           <a:prstGeom prst="roundRect">
             <a:avLst>
@@ -17417,8 +17421,8 @@
         </p:nvSpPr>
         <p:spPr>
           <a:xfrm>
-            <a:off x="566928" y="2368194"/>
-            <a:ext cx="45720" cy="832002"/>
+            <a:off x="566928" y="2340170"/>
+            <a:ext cx="45720" cy="960582"/>
           </a:xfrm>
           <a:prstGeom prst="rect">
             <a:avLst/>
@@ -17461,8 +17465,8 @@
         </p:nvSpPr>
         <p:spPr>
           <a:xfrm>
-            <a:off x="768096" y="2505354"/>
-            <a:ext cx="5379415" cy="557682"/>
+            <a:off x="768096" y="2477330"/>
+            <a:ext cx="4556455" cy="686262"/>
           </a:xfrm>
           <a:prstGeom prst="rect">
             <a:avLst/>
@@ -17487,7 +17491,7 @@
               </a:spcAft>
             </a:pPr>
             <a:r>
-              <a:rPr sz="1100" b="1" i="0">
+              <a:rPr sz="1050" b="1" i="0">
                 <a:solidFill>
                   <a:srgbClr val="C1440E"/>
                 </a:solidFill>
@@ -17509,7 +17513,7 @@
               </a:spcAft>
             </a:pPr>
             <a:r>
-              <a:rPr sz="1000" b="0" i="0">
+              <a:rPr sz="950" b="0" i="0">
                 <a:solidFill>
                   <a:srgbClr val="14262E"/>
                 </a:solidFill>
@@ -17528,8 +17532,8 @@
         </p:nvSpPr>
         <p:spPr>
           <a:xfrm>
-            <a:off x="566928" y="3309924"/>
-            <a:ext cx="5781751" cy="996848"/>
+            <a:off x="566928" y="3410480"/>
+            <a:ext cx="4958791" cy="960582"/>
           </a:xfrm>
           <a:prstGeom prst="roundRect">
             <a:avLst>
@@ -17574,8 +17578,8 @@
         </p:nvSpPr>
         <p:spPr>
           <a:xfrm>
-            <a:off x="566928" y="3309924"/>
-            <a:ext cx="45720" cy="996848"/>
+            <a:off x="566928" y="3410480"/>
+            <a:ext cx="45720" cy="960582"/>
           </a:xfrm>
           <a:prstGeom prst="rect">
             <a:avLst/>
@@ -17618,8 +17622,8 @@
         </p:nvSpPr>
         <p:spPr>
           <a:xfrm>
-            <a:off x="768096" y="3447084"/>
-            <a:ext cx="5379415" cy="722528"/>
+            <a:off x="768096" y="3547640"/>
+            <a:ext cx="4556455" cy="686262"/>
           </a:xfrm>
           <a:prstGeom prst="rect">
             <a:avLst/>
@@ -17644,7 +17648,7 @@
               </a:spcAft>
             </a:pPr>
             <a:r>
-              <a:rPr sz="1100" b="1" i="0">
+              <a:rPr sz="1050" b="1" i="0">
                 <a:solidFill>
                   <a:srgbClr val="C1440E"/>
                 </a:solidFill>
@@ -17666,7 +17670,7 @@
               </a:spcAft>
             </a:pPr>
             <a:r>
-              <a:rPr sz="1000" b="0" i="0">
+              <a:rPr sz="950" b="0" i="0">
                 <a:solidFill>
                   <a:srgbClr val="14262E"/>
                 </a:solidFill>
@@ -17685,8 +17689,8 @@
         </p:nvSpPr>
         <p:spPr>
           <a:xfrm>
-            <a:off x="566928" y="4416501"/>
-            <a:ext cx="5781751" cy="996848"/>
+            <a:off x="566928" y="4480791"/>
+            <a:ext cx="4958791" cy="960582"/>
           </a:xfrm>
           <a:prstGeom prst="roundRect">
             <a:avLst>
@@ -17731,8 +17735,8 @@
         </p:nvSpPr>
         <p:spPr>
           <a:xfrm>
-            <a:off x="566928" y="4416501"/>
-            <a:ext cx="45720" cy="996848"/>
+            <a:off x="566928" y="4480791"/>
+            <a:ext cx="45720" cy="960582"/>
           </a:xfrm>
           <a:prstGeom prst="rect">
             <a:avLst/>
@@ -17775,8 +17779,8 @@
         </p:nvSpPr>
         <p:spPr>
           <a:xfrm>
-            <a:off x="768096" y="4553661"/>
-            <a:ext cx="5379415" cy="722528"/>
+            <a:off x="768096" y="4617951"/>
+            <a:ext cx="4556455" cy="686262"/>
           </a:xfrm>
           <a:prstGeom prst="rect">
             <a:avLst/>
@@ -17801,7 +17805,7 @@
               </a:spcAft>
             </a:pPr>
             <a:r>
-              <a:rPr sz="1100" b="1" i="0">
+              <a:rPr sz="1050" b="1" i="0">
                 <a:solidFill>
                   <a:srgbClr val="C1440E"/>
                 </a:solidFill>
@@ -17823,7 +17827,7 @@
               </a:spcAft>
             </a:pPr>
             <a:r>
-              <a:rPr sz="1000" b="0" i="0">
+              <a:rPr sz="950" b="0" i="0">
                 <a:solidFill>
                   <a:srgbClr val="14262E"/>
                 </a:solidFill>
@@ -17842,8 +17846,8 @@
         </p:nvSpPr>
         <p:spPr>
           <a:xfrm>
-            <a:off x="566928" y="5523077"/>
-            <a:ext cx="5781751" cy="832002"/>
+            <a:off x="566928" y="5551101"/>
+            <a:ext cx="4958791" cy="803978"/>
           </a:xfrm>
           <a:prstGeom prst="roundRect">
             <a:avLst>
@@ -17888,8 +17892,8 @@
         </p:nvSpPr>
         <p:spPr>
           <a:xfrm>
-            <a:off x="566928" y="5523077"/>
-            <a:ext cx="45720" cy="832002"/>
+            <a:off x="566928" y="5551101"/>
+            <a:ext cx="45720" cy="803978"/>
           </a:xfrm>
           <a:prstGeom prst="rect">
             <a:avLst/>
@@ -17932,8 +17936,8 @@
         </p:nvSpPr>
         <p:spPr>
           <a:xfrm>
-            <a:off x="768096" y="5660237"/>
-            <a:ext cx="5379415" cy="557682"/>
+            <a:off x="768096" y="5688261"/>
+            <a:ext cx="4556455" cy="529658"/>
           </a:xfrm>
           <a:prstGeom prst="rect">
             <a:avLst/>
@@ -17958,7 +17962,7 @@
               </a:spcAft>
             </a:pPr>
             <a:r>
-              <a:rPr sz="1100" b="1" i="0">
+              <a:rPr sz="1050" b="1" i="0">
                 <a:solidFill>
                   <a:srgbClr val="C1440E"/>
                 </a:solidFill>
@@ -17980,7 +17984,7 @@
               </a:spcAft>
             </a:pPr>
             <a:r>
-              <a:rPr sz="1000" b="0" i="0">
+              <a:rPr sz="950" b="0" i="0">
                 <a:solidFill>
                   <a:srgbClr val="14262E"/>
                 </a:solidFill>
@@ -18465,7 +18469,7 @@
         <p:spPr>
           <a:xfrm>
             <a:off x="566928" y="2249424"/>
-            <a:ext cx="11057839" cy="859536"/>
+            <a:ext cx="11057839" cy="672084"/>
           </a:xfrm>
           <a:prstGeom prst="rect">
             <a:avLst/>
@@ -18509,7 +18513,7 @@
         <p:spPr>
           <a:xfrm>
             <a:off x="685800" y="2313432"/>
-            <a:ext cx="2642615" cy="768096"/>
+            <a:ext cx="2642615" cy="580644"/>
           </a:xfrm>
           <a:prstGeom prst="rect">
             <a:avLst/>
@@ -18534,7 +18538,7 @@
               </a:spcAft>
             </a:pPr>
             <a:r>
-              <a:rPr sz="1100" b="1" i="0">
+              <a:rPr sz="960" b="1" i="0">
                 <a:solidFill>
                   <a:srgbClr val="14262E"/>
                 </a:solidFill>
@@ -18554,7 +18558,7 @@
         <p:spPr>
           <a:xfrm>
             <a:off x="3566160" y="2313432"/>
-            <a:ext cx="4151376" cy="768096"/>
+            <a:ext cx="4151376" cy="580644"/>
           </a:xfrm>
           <a:prstGeom prst="rect">
             <a:avLst/>
@@ -18579,7 +18583,7 @@
               </a:spcAft>
             </a:pPr>
             <a:r>
-              <a:rPr sz="1100" b="0" i="0">
+              <a:rPr sz="960" b="0" i="0">
                 <a:solidFill>
                   <a:srgbClr val="14262E"/>
                 </a:solidFill>
@@ -18599,7 +18603,7 @@
         <p:spPr>
           <a:xfrm>
             <a:off x="7955280" y="2313432"/>
-            <a:ext cx="3547872" cy="768096"/>
+            <a:ext cx="3547872" cy="580644"/>
           </a:xfrm>
           <a:prstGeom prst="rect">
             <a:avLst/>
@@ -18624,7 +18628,7 @@
               </a:spcAft>
             </a:pPr>
             <a:r>
-              <a:rPr sz="1100" b="0" i="0">
+              <a:rPr sz="960" b="0" i="0">
                 <a:solidFill>
                   <a:srgbClr val="14262E"/>
                 </a:solidFill>
@@ -18643,8 +18647,8 @@
         </p:nvSpPr>
         <p:spPr>
           <a:xfrm>
-            <a:off x="566928" y="3108960"/>
-            <a:ext cx="11057839" cy="859536"/>
+            <a:off x="566928" y="2921508"/>
+            <a:ext cx="11057839" cy="672084"/>
           </a:xfrm>
           <a:prstGeom prst="rect">
             <a:avLst/>
@@ -18687,8 +18691,8 @@
         </p:nvSpPr>
         <p:spPr>
           <a:xfrm>
-            <a:off x="685800" y="3172968"/>
-            <a:ext cx="2642615" cy="768096"/>
+            <a:off x="685800" y="2985515"/>
+            <a:ext cx="2642615" cy="580644"/>
           </a:xfrm>
           <a:prstGeom prst="rect">
             <a:avLst/>
@@ -18713,7 +18717,7 @@
               </a:spcAft>
             </a:pPr>
             <a:r>
-              <a:rPr sz="1100" b="1" i="0">
+              <a:rPr sz="960" b="1" i="0">
                 <a:solidFill>
                   <a:srgbClr val="14262E"/>
                 </a:solidFill>
@@ -18732,8 +18736,8 @@
         </p:nvSpPr>
         <p:spPr>
           <a:xfrm>
-            <a:off x="3566160" y="3172968"/>
-            <a:ext cx="4151376" cy="768096"/>
+            <a:off x="3566160" y="2985515"/>
+            <a:ext cx="4151376" cy="580644"/>
           </a:xfrm>
           <a:prstGeom prst="rect">
             <a:avLst/>
@@ -18758,7 +18762,7 @@
               </a:spcAft>
             </a:pPr>
             <a:r>
-              <a:rPr sz="1100" b="0" i="0">
+              <a:rPr sz="960" b="0" i="0">
                 <a:solidFill>
                   <a:srgbClr val="14262E"/>
                 </a:solidFill>
@@ -18777,8 +18781,8 @@
         </p:nvSpPr>
         <p:spPr>
           <a:xfrm>
-            <a:off x="7955280" y="3172968"/>
-            <a:ext cx="3547872" cy="768096"/>
+            <a:off x="7955280" y="2985515"/>
+            <a:ext cx="3547872" cy="580644"/>
           </a:xfrm>
           <a:prstGeom prst="rect">
             <a:avLst/>
@@ -18803,7 +18807,7 @@
               </a:spcAft>
             </a:pPr>
             <a:r>
-              <a:rPr sz="1100" b="0" i="0">
+              <a:rPr sz="960" b="0" i="0">
                 <a:solidFill>
                   <a:srgbClr val="14262E"/>
                 </a:solidFill>
@@ -18822,8 +18826,8 @@
         </p:nvSpPr>
         <p:spPr>
           <a:xfrm>
-            <a:off x="566928" y="3968496"/>
-            <a:ext cx="11057839" cy="859536"/>
+            <a:off x="566928" y="3593591"/>
+            <a:ext cx="11057839" cy="672084"/>
           </a:xfrm>
           <a:prstGeom prst="rect">
             <a:avLst/>
@@ -18866,8 +18870,8 @@
         </p:nvSpPr>
         <p:spPr>
           <a:xfrm>
-            <a:off x="685800" y="4032504"/>
-            <a:ext cx="2642615" cy="768096"/>
+            <a:off x="685800" y="3657599"/>
+            <a:ext cx="2642615" cy="580644"/>
           </a:xfrm>
           <a:prstGeom prst="rect">
             <a:avLst/>
@@ -18892,7 +18896,7 @@
               </a:spcAft>
             </a:pPr>
             <a:r>
-              <a:rPr sz="1100" b="1" i="0">
+              <a:rPr sz="960" b="1" i="0">
                 <a:solidFill>
                   <a:srgbClr val="14262E"/>
                 </a:solidFill>
@@ -18911,8 +18915,8 @@
         </p:nvSpPr>
         <p:spPr>
           <a:xfrm>
-            <a:off x="3566160" y="4032504"/>
-            <a:ext cx="4151376" cy="768096"/>
+            <a:off x="3566160" y="3657599"/>
+            <a:ext cx="4151376" cy="580644"/>
           </a:xfrm>
           <a:prstGeom prst="rect">
             <a:avLst/>
@@ -18937,7 +18941,7 @@
               </a:spcAft>
             </a:pPr>
             <a:r>
-              <a:rPr sz="1100" b="0" i="0">
+              <a:rPr sz="960" b="0" i="0">
                 <a:solidFill>
                   <a:srgbClr val="14262E"/>
                 </a:solidFill>
@@ -18956,8 +18960,8 @@
         </p:nvSpPr>
         <p:spPr>
           <a:xfrm>
-            <a:off x="7955280" y="4032504"/>
-            <a:ext cx="3547872" cy="768096"/>
+            <a:off x="7955280" y="3657599"/>
+            <a:ext cx="3547872" cy="580644"/>
           </a:xfrm>
           <a:prstGeom prst="rect">
             <a:avLst/>
@@ -18982,7 +18986,7 @@
               </a:spcAft>
             </a:pPr>
             <a:r>
-              <a:rPr sz="1100" b="0" i="0">
+              <a:rPr sz="960" b="0" i="0">
                 <a:solidFill>
                   <a:srgbClr val="14262E"/>
                 </a:solidFill>
@@ -19001,8 +19005,8 @@
         </p:nvSpPr>
         <p:spPr>
           <a:xfrm>
-            <a:off x="566928" y="4828031"/>
-            <a:ext cx="11057839" cy="859536"/>
+            <a:off x="566928" y="4265676"/>
+            <a:ext cx="11057839" cy="672084"/>
           </a:xfrm>
           <a:prstGeom prst="rect">
             <a:avLst/>
@@ -19045,8 +19049,8 @@
         </p:nvSpPr>
         <p:spPr>
           <a:xfrm>
-            <a:off x="685800" y="4892040"/>
-            <a:ext cx="2642615" cy="768096"/>
+            <a:off x="685800" y="4329684"/>
+            <a:ext cx="2642615" cy="580644"/>
           </a:xfrm>
           <a:prstGeom prst="rect">
             <a:avLst/>
@@ -19071,7 +19075,7 @@
               </a:spcAft>
             </a:pPr>
             <a:r>
-              <a:rPr sz="1100" b="1" i="0">
+              <a:rPr sz="960" b="1" i="0">
                 <a:solidFill>
                   <a:srgbClr val="14262E"/>
                 </a:solidFill>
@@ -19090,8 +19094,8 @@
         </p:nvSpPr>
         <p:spPr>
           <a:xfrm>
-            <a:off x="3566160" y="4892040"/>
-            <a:ext cx="4151376" cy="768096"/>
+            <a:off x="3566160" y="4329684"/>
+            <a:ext cx="4151376" cy="580644"/>
           </a:xfrm>
           <a:prstGeom prst="rect">
             <a:avLst/>
@@ -19116,7 +19120,7 @@
               </a:spcAft>
             </a:pPr>
             <a:r>
-              <a:rPr sz="1100" b="0" i="0">
+              <a:rPr sz="960" b="0" i="0">
                 <a:solidFill>
                   <a:srgbClr val="14262E"/>
                 </a:solidFill>
@@ -19135,8 +19139,8 @@
         </p:nvSpPr>
         <p:spPr>
           <a:xfrm>
-            <a:off x="7955280" y="4892040"/>
-            <a:ext cx="3547872" cy="768096"/>
+            <a:off x="7955280" y="4329684"/>
+            <a:ext cx="3547872" cy="580644"/>
           </a:xfrm>
           <a:prstGeom prst="rect">
             <a:avLst/>
@@ -19161,7 +19165,7 @@
               </a:spcAft>
             </a:pPr>
             <a:r>
-              <a:rPr sz="1100" b="0" i="0">
+              <a:rPr sz="960" b="0" i="0">
                 <a:solidFill>
                   <a:srgbClr val="14262E"/>
                 </a:solidFill>
@@ -19180,8 +19184,8 @@
         </p:nvSpPr>
         <p:spPr>
           <a:xfrm>
-            <a:off x="566928" y="5687567"/>
-            <a:ext cx="11057839" cy="859536"/>
+            <a:off x="566928" y="4937760"/>
+            <a:ext cx="11057839" cy="672084"/>
           </a:xfrm>
           <a:prstGeom prst="rect">
             <a:avLst/>
@@ -19224,8 +19228,8 @@
         </p:nvSpPr>
         <p:spPr>
           <a:xfrm>
-            <a:off x="685800" y="5751575"/>
-            <a:ext cx="2642615" cy="768096"/>
+            <a:off x="685800" y="5001768"/>
+            <a:ext cx="2642615" cy="580644"/>
           </a:xfrm>
           <a:prstGeom prst="rect">
             <a:avLst/>
@@ -19250,7 +19254,7 @@
               </a:spcAft>
             </a:pPr>
             <a:r>
-              <a:rPr sz="1100" b="1" i="0">
+              <a:rPr sz="960" b="1" i="0">
                 <a:solidFill>
                   <a:srgbClr val="14262E"/>
                 </a:solidFill>
@@ -19269,8 +19273,8 @@
         </p:nvSpPr>
         <p:spPr>
           <a:xfrm>
-            <a:off x="3566160" y="5751575"/>
-            <a:ext cx="4151376" cy="768096"/>
+            <a:off x="3566160" y="5001768"/>
+            <a:ext cx="4151376" cy="580644"/>
           </a:xfrm>
           <a:prstGeom prst="rect">
             <a:avLst/>
@@ -19295,7 +19299,7 @@
               </a:spcAft>
             </a:pPr>
             <a:r>
-              <a:rPr sz="1100" b="0" i="0">
+              <a:rPr sz="960" b="0" i="0">
                 <a:solidFill>
                   <a:srgbClr val="14262E"/>
                 </a:solidFill>
@@ -19314,8 +19318,8 @@
         </p:nvSpPr>
         <p:spPr>
           <a:xfrm>
-            <a:off x="7955280" y="5751575"/>
-            <a:ext cx="3547872" cy="768096"/>
+            <a:off x="7955280" y="5001768"/>
+            <a:ext cx="3547872" cy="580644"/>
           </a:xfrm>
           <a:prstGeom prst="rect">
             <a:avLst/>
@@ -19340,7 +19344,7 @@
               </a:spcAft>
             </a:pPr>
             <a:r>
-              <a:rPr sz="1100" b="0" i="0">
+              <a:rPr sz="960" b="0" i="0">
                 <a:solidFill>
                   <a:srgbClr val="14262E"/>
                 </a:solidFill>
@@ -19359,8 +19363,8 @@
         </p:nvSpPr>
         <p:spPr>
           <a:xfrm>
-            <a:off x="566928" y="6547103"/>
-            <a:ext cx="11057839" cy="859536"/>
+            <a:off x="566928" y="5609844"/>
+            <a:ext cx="11057839" cy="672084"/>
           </a:xfrm>
           <a:prstGeom prst="rect">
             <a:avLst/>
@@ -19403,8 +19407,8 @@
         </p:nvSpPr>
         <p:spPr>
           <a:xfrm>
-            <a:off x="685800" y="6611111"/>
-            <a:ext cx="2642615" cy="768096"/>
+            <a:off x="685800" y="5673852"/>
+            <a:ext cx="2642615" cy="580644"/>
           </a:xfrm>
           <a:prstGeom prst="rect">
             <a:avLst/>
@@ -19429,7 +19433,7 @@
               </a:spcAft>
             </a:pPr>
             <a:r>
-              <a:rPr sz="1100" b="1" i="0">
+              <a:rPr sz="960" b="1" i="0">
                 <a:solidFill>
                   <a:srgbClr val="14262E"/>
                 </a:solidFill>
@@ -19448,8 +19452,8 @@
         </p:nvSpPr>
         <p:spPr>
           <a:xfrm>
-            <a:off x="3566160" y="6611111"/>
-            <a:ext cx="4151376" cy="768096"/>
+            <a:off x="3566160" y="5673852"/>
+            <a:ext cx="4151376" cy="580644"/>
           </a:xfrm>
           <a:prstGeom prst="rect">
             <a:avLst/>
@@ -19474,7 +19478,7 @@
               </a:spcAft>
             </a:pPr>
             <a:r>
-              <a:rPr sz="1100" b="0" i="0">
+              <a:rPr sz="960" b="0" i="0">
                 <a:solidFill>
                   <a:srgbClr val="14262E"/>
                 </a:solidFill>
@@ -19493,8 +19497,8 @@
         </p:nvSpPr>
         <p:spPr>
           <a:xfrm>
-            <a:off x="7955280" y="6611111"/>
-            <a:ext cx="3547872" cy="768096"/>
+            <a:off x="7955280" y="5673852"/>
+            <a:ext cx="3547872" cy="580644"/>
           </a:xfrm>
           <a:prstGeom prst="rect">
             <a:avLst/>
@@ -19519,7 +19523,7 @@
               </a:spcAft>
             </a:pPr>
             <a:r>
-              <a:rPr sz="1100" b="0" i="0">
+              <a:rPr sz="960" b="0" i="0">
                 <a:solidFill>
                   <a:srgbClr val="14262E"/>
                 </a:solidFill>
@@ -23969,7 +23973,6 @@
         </p:nvPicPr>
         <p:blipFill>
           <a:blip r:embed="rId2"/>
-          <a:srcRect l="21895" r="21895"/>
           <a:stretch>
             <a:fillRect/>
           </a:stretch>
@@ -23977,7 +23980,7 @@
         <p:spPr>
           <a:xfrm>
             <a:off x="566928" y="1417320"/>
-            <a:ext cx="3931920" cy="4663440"/>
+            <a:ext cx="4160520" cy="2773680"/>
           </a:xfrm>
           <a:prstGeom prst="rect">
             <a:avLst/>
@@ -23993,7 +23996,7 @@
         <p:spPr>
           <a:xfrm>
             <a:off x="566928" y="1417320"/>
-            <a:ext cx="3931920" cy="59436"/>
+            <a:ext cx="4160520" cy="59436"/>
           </a:xfrm>
           <a:prstGeom prst="rect">
             <a:avLst/>
@@ -24036,8 +24039,8 @@
         </p:nvSpPr>
         <p:spPr>
           <a:xfrm>
-            <a:off x="566928" y="6144768"/>
-            <a:ext cx="3931920" cy="365760"/>
+            <a:off x="566928" y="4236720"/>
+            <a:ext cx="4160520" cy="365760"/>
           </a:xfrm>
           <a:prstGeom prst="rect">
             <a:avLst/>
@@ -24081,8 +24084,8 @@
         </p:nvSpPr>
         <p:spPr>
           <a:xfrm>
-            <a:off x="4864608" y="1426464"/>
-            <a:ext cx="3279495" cy="1149858"/>
+            <a:off x="5093208" y="1426464"/>
+            <a:ext cx="3165195" cy="1149858"/>
           </a:xfrm>
           <a:prstGeom prst="roundRect">
             <a:avLst>
@@ -24127,8 +24130,8 @@
         </p:nvSpPr>
         <p:spPr>
           <a:xfrm>
-            <a:off x="4864608" y="1426464"/>
-            <a:ext cx="3279495" cy="50292"/>
+            <a:off x="5093208" y="1426464"/>
+            <a:ext cx="3165195" cy="50292"/>
           </a:xfrm>
           <a:prstGeom prst="rect">
             <a:avLst/>
@@ -24171,8 +24174,8 @@
         </p:nvSpPr>
         <p:spPr>
           <a:xfrm>
-            <a:off x="5065776" y="1609344"/>
-            <a:ext cx="2877159" cy="820674"/>
+            <a:off x="5294376" y="1609344"/>
+            <a:ext cx="2762859" cy="820674"/>
           </a:xfrm>
           <a:prstGeom prst="rect">
             <a:avLst/>
@@ -24238,8 +24241,8 @@
         </p:nvSpPr>
         <p:spPr>
           <a:xfrm>
-            <a:off x="8345271" y="1426464"/>
-            <a:ext cx="3279495" cy="1149858"/>
+            <a:off x="8459571" y="1426464"/>
+            <a:ext cx="3165195" cy="1149858"/>
           </a:xfrm>
           <a:prstGeom prst="roundRect">
             <a:avLst>
@@ -24284,8 +24287,8 @@
         </p:nvSpPr>
         <p:spPr>
           <a:xfrm>
-            <a:off x="8345271" y="1426464"/>
-            <a:ext cx="3279495" cy="50292"/>
+            <a:off x="8459571" y="1426464"/>
+            <a:ext cx="3165195" cy="50292"/>
           </a:xfrm>
           <a:prstGeom prst="rect">
             <a:avLst/>
@@ -24328,8 +24331,8 @@
         </p:nvSpPr>
         <p:spPr>
           <a:xfrm>
-            <a:off x="8546439" y="1609344"/>
-            <a:ext cx="2877159" cy="820674"/>
+            <a:off x="8660739" y="1609344"/>
+            <a:ext cx="2762859" cy="820674"/>
           </a:xfrm>
           <a:prstGeom prst="rect">
             <a:avLst/>
@@ -24395,8 +24398,8 @@
         </p:nvSpPr>
         <p:spPr>
           <a:xfrm>
-            <a:off x="4864608" y="2686050"/>
-            <a:ext cx="3279495" cy="1149858"/>
+            <a:off x="5093208" y="2686050"/>
+            <a:ext cx="3165195" cy="1149858"/>
           </a:xfrm>
           <a:prstGeom prst="roundRect">
             <a:avLst>
@@ -24441,8 +24444,8 @@
         </p:nvSpPr>
         <p:spPr>
           <a:xfrm>
-            <a:off x="4864608" y="2686050"/>
-            <a:ext cx="3279495" cy="50292"/>
+            <a:off x="5093208" y="2686050"/>
+            <a:ext cx="3165195" cy="50292"/>
           </a:xfrm>
           <a:prstGeom prst="rect">
             <a:avLst/>
@@ -24485,8 +24488,8 @@
         </p:nvSpPr>
         <p:spPr>
           <a:xfrm>
-            <a:off x="5065776" y="2868930"/>
-            <a:ext cx="2877159" cy="820674"/>
+            <a:off x="5294376" y="2868930"/>
+            <a:ext cx="2762859" cy="820674"/>
           </a:xfrm>
           <a:prstGeom prst="rect">
             <a:avLst/>
@@ -24552,8 +24555,8 @@
         </p:nvSpPr>
         <p:spPr>
           <a:xfrm>
-            <a:off x="8345271" y="2686050"/>
-            <a:ext cx="3279495" cy="1149858"/>
+            <a:off x="8459571" y="2686050"/>
+            <a:ext cx="3165195" cy="1149858"/>
           </a:xfrm>
           <a:prstGeom prst="roundRect">
             <a:avLst>
@@ -24598,8 +24601,8 @@
         </p:nvSpPr>
         <p:spPr>
           <a:xfrm>
-            <a:off x="8345271" y="2686050"/>
-            <a:ext cx="3279495" cy="50292"/>
+            <a:off x="8459571" y="2686050"/>
+            <a:ext cx="3165195" cy="50292"/>
           </a:xfrm>
           <a:prstGeom prst="rect">
             <a:avLst/>
@@ -24642,8 +24645,8 @@
         </p:nvSpPr>
         <p:spPr>
           <a:xfrm>
-            <a:off x="8546439" y="2868930"/>
-            <a:ext cx="2877159" cy="820674"/>
+            <a:off x="8660739" y="2868930"/>
+            <a:ext cx="2762859" cy="820674"/>
           </a:xfrm>
           <a:prstGeom prst="rect">
             <a:avLst/>
@@ -24709,8 +24712,8 @@
         </p:nvSpPr>
         <p:spPr>
           <a:xfrm>
-            <a:off x="4864608" y="3945635"/>
-            <a:ext cx="3279495" cy="1149858"/>
+            <a:off x="5093208" y="3945635"/>
+            <a:ext cx="3165195" cy="1149858"/>
           </a:xfrm>
           <a:prstGeom prst="roundRect">
             <a:avLst>
@@ -24755,8 +24758,8 @@
         </p:nvSpPr>
         <p:spPr>
           <a:xfrm>
-            <a:off x="4864608" y="3945635"/>
-            <a:ext cx="3279495" cy="50292"/>
+            <a:off x="5093208" y="3945635"/>
+            <a:ext cx="3165195" cy="50292"/>
           </a:xfrm>
           <a:prstGeom prst="rect">
             <a:avLst/>
@@ -24799,8 +24802,8 @@
         </p:nvSpPr>
         <p:spPr>
           <a:xfrm>
-            <a:off x="5065776" y="4128515"/>
-            <a:ext cx="2877159" cy="820674"/>
+            <a:off x="5294376" y="4128515"/>
+            <a:ext cx="2762859" cy="820674"/>
           </a:xfrm>
           <a:prstGeom prst="rect">
             <a:avLst/>
@@ -24866,8 +24869,8 @@
         </p:nvSpPr>
         <p:spPr>
           <a:xfrm>
-            <a:off x="8345271" y="3945635"/>
-            <a:ext cx="3279495" cy="1149858"/>
+            <a:off x="8459571" y="3945635"/>
+            <a:ext cx="3165195" cy="1149858"/>
           </a:xfrm>
           <a:prstGeom prst="roundRect">
             <a:avLst>
@@ -24912,8 +24915,8 @@
         </p:nvSpPr>
         <p:spPr>
           <a:xfrm>
-            <a:off x="8345271" y="3945635"/>
-            <a:ext cx="3279495" cy="50292"/>
+            <a:off x="8459571" y="3945635"/>
+            <a:ext cx="3165195" cy="50292"/>
           </a:xfrm>
           <a:prstGeom prst="rect">
             <a:avLst/>
@@ -24956,8 +24959,8 @@
         </p:nvSpPr>
         <p:spPr>
           <a:xfrm>
-            <a:off x="8546439" y="4128515"/>
-            <a:ext cx="2877159" cy="820674"/>
+            <a:off x="8660739" y="4128515"/>
+            <a:ext cx="2762859" cy="820674"/>
           </a:xfrm>
           <a:prstGeom prst="rect">
             <a:avLst/>
@@ -25023,8 +25026,8 @@
         </p:nvSpPr>
         <p:spPr>
           <a:xfrm>
-            <a:off x="4864608" y="5205222"/>
-            <a:ext cx="3279495" cy="1149858"/>
+            <a:off x="5093208" y="5205222"/>
+            <a:ext cx="3165195" cy="1149858"/>
           </a:xfrm>
           <a:prstGeom prst="roundRect">
             <a:avLst>
@@ -25069,8 +25072,8 @@
         </p:nvSpPr>
         <p:spPr>
           <a:xfrm>
-            <a:off x="4864608" y="5205222"/>
-            <a:ext cx="3279495" cy="50292"/>
+            <a:off x="5093208" y="5205222"/>
+            <a:ext cx="3165195" cy="50292"/>
           </a:xfrm>
           <a:prstGeom prst="rect">
             <a:avLst/>
@@ -25113,8 +25116,8 @@
         </p:nvSpPr>
         <p:spPr>
           <a:xfrm>
-            <a:off x="5065776" y="5388102"/>
-            <a:ext cx="2877159" cy="820674"/>
+            <a:off x="5294376" y="5388102"/>
+            <a:ext cx="2762859" cy="820674"/>
           </a:xfrm>
           <a:prstGeom prst="rect">
             <a:avLst/>
@@ -26118,15 +26121,14 @@
         </p:nvPicPr>
         <p:blipFill>
           <a:blip r:embed="rId2"/>
-          <a:srcRect l="21250" r="21250"/>
           <a:stretch>
             <a:fillRect/>
           </a:stretch>
         </p:blipFill>
         <p:spPr>
           <a:xfrm>
-            <a:off x="6732727" y="1417320"/>
-            <a:ext cx="4892040" cy="4663440"/>
+            <a:off x="5909767" y="1417320"/>
+            <a:ext cx="5715000" cy="3132534"/>
           </a:xfrm>
           <a:prstGeom prst="rect">
             <a:avLst/>
@@ -26141,8 +26143,8 @@
         </p:nvSpPr>
         <p:spPr>
           <a:xfrm>
-            <a:off x="6732727" y="1417320"/>
-            <a:ext cx="4892040" cy="59436"/>
+            <a:off x="5909767" y="1417320"/>
+            <a:ext cx="5715000" cy="59436"/>
           </a:xfrm>
           <a:prstGeom prst="rect">
             <a:avLst/>
@@ -26185,8 +26187,8 @@
         </p:nvSpPr>
         <p:spPr>
           <a:xfrm>
-            <a:off x="6732727" y="6144768"/>
-            <a:ext cx="4892040" cy="365760"/>
+            <a:off x="5909767" y="4595574"/>
+            <a:ext cx="5715000" cy="365760"/>
           </a:xfrm>
           <a:prstGeom prst="rect">
             <a:avLst/>
@@ -26231,7 +26233,7 @@
         <p:spPr>
           <a:xfrm>
             <a:off x="566928" y="1426464"/>
-            <a:ext cx="5781751" cy="912891"/>
+            <a:ext cx="4958791" cy="877862"/>
           </a:xfrm>
           <a:prstGeom prst="roundRect">
             <a:avLst>
@@ -26277,7 +26279,7 @@
         <p:spPr>
           <a:xfrm>
             <a:off x="566928" y="1426464"/>
-            <a:ext cx="45720" cy="912891"/>
+            <a:ext cx="45720" cy="877862"/>
           </a:xfrm>
           <a:prstGeom prst="rect">
             <a:avLst/>
@@ -26321,7 +26323,7 @@
         <p:spPr>
           <a:xfrm>
             <a:off x="768096" y="1563624"/>
-            <a:ext cx="5379415" cy="638571"/>
+            <a:ext cx="4556455" cy="603542"/>
           </a:xfrm>
           <a:prstGeom prst="rect">
             <a:avLst/>
@@ -26346,7 +26348,7 @@
               </a:spcAft>
             </a:pPr>
             <a:r>
-              <a:rPr sz="1250" b="1" i="0">
+              <a:rPr sz="1200" b="1" i="0">
                 <a:solidFill>
                   <a:srgbClr val="0B6E4F"/>
                 </a:solidFill>
@@ -26368,7 +26370,7 @@
               </a:spcAft>
             </a:pPr>
             <a:r>
-              <a:rPr sz="1150" b="0" i="0">
+              <a:rPr sz="1100" b="0" i="0">
                 <a:solidFill>
                   <a:srgbClr val="14262E"/>
                 </a:solidFill>
@@ -26387,8 +26389,8 @@
         </p:nvSpPr>
         <p:spPr>
           <a:xfrm>
-            <a:off x="566928" y="2449083"/>
-            <a:ext cx="5781751" cy="1292037"/>
+            <a:off x="566928" y="2414054"/>
+            <a:ext cx="4958791" cy="1240523"/>
           </a:xfrm>
           <a:prstGeom prst="roundRect">
             <a:avLst>
@@ -26433,8 +26435,8 @@
         </p:nvSpPr>
         <p:spPr>
           <a:xfrm>
-            <a:off x="566928" y="2449083"/>
-            <a:ext cx="45720" cy="1292037"/>
+            <a:off x="566928" y="2414054"/>
+            <a:ext cx="45720" cy="1240523"/>
           </a:xfrm>
           <a:prstGeom prst="rect">
             <a:avLst/>
@@ -26477,8 +26479,8 @@
         </p:nvSpPr>
         <p:spPr>
           <a:xfrm>
-            <a:off x="768096" y="2586243"/>
-            <a:ext cx="5379415" cy="1017717"/>
+            <a:off x="768096" y="2551214"/>
+            <a:ext cx="4556455" cy="966203"/>
           </a:xfrm>
           <a:prstGeom prst="rect">
             <a:avLst/>
@@ -26503,7 +26505,7 @@
               </a:spcAft>
             </a:pPr>
             <a:r>
-              <a:rPr sz="1250" b="1" i="0">
+              <a:rPr sz="1200" b="1" i="0">
                 <a:solidFill>
                   <a:srgbClr val="0B6E4F"/>
                 </a:solidFill>
@@ -26525,7 +26527,7 @@
               </a:spcAft>
             </a:pPr>
             <a:r>
-              <a:rPr sz="1150" b="0" i="0">
+              <a:rPr sz="1100" b="0" i="0">
                 <a:solidFill>
                   <a:srgbClr val="14262E"/>
                 </a:solidFill>
@@ -26544,8 +26546,8 @@
         </p:nvSpPr>
         <p:spPr>
           <a:xfrm>
-            <a:off x="566928" y="3850849"/>
-            <a:ext cx="5781751" cy="1292037"/>
+            <a:off x="566928" y="3764305"/>
+            <a:ext cx="4958791" cy="1240523"/>
           </a:xfrm>
           <a:prstGeom prst="roundRect">
             <a:avLst>
@@ -26590,8 +26592,8 @@
         </p:nvSpPr>
         <p:spPr>
           <a:xfrm>
-            <a:off x="566928" y="3850849"/>
-            <a:ext cx="45720" cy="1292037"/>
+            <a:off x="566928" y="3764305"/>
+            <a:ext cx="45720" cy="1240523"/>
           </a:xfrm>
           <a:prstGeom prst="rect">
             <a:avLst/>
@@ -26634,8 +26636,8 @@
         </p:nvSpPr>
         <p:spPr>
           <a:xfrm>
-            <a:off x="768096" y="3988009"/>
-            <a:ext cx="5379415" cy="1017717"/>
+            <a:off x="768096" y="3901465"/>
+            <a:ext cx="4556455" cy="966203"/>
           </a:xfrm>
           <a:prstGeom prst="rect">
             <a:avLst/>
@@ -26660,7 +26662,7 @@
               </a:spcAft>
             </a:pPr>
             <a:r>
-              <a:rPr sz="1250" b="1" i="0">
+              <a:rPr sz="1200" b="1" i="0">
                 <a:solidFill>
                   <a:srgbClr val="0B6E4F"/>
                 </a:solidFill>
@@ -26682,7 +26684,7 @@
               </a:spcAft>
             </a:pPr>
             <a:r>
-              <a:rPr sz="1150" b="0" i="0">
+              <a:rPr sz="1100" b="0" i="0">
                 <a:solidFill>
                   <a:srgbClr val="14262E"/>
                 </a:solidFill>
@@ -26701,8 +26703,8 @@
         </p:nvSpPr>
         <p:spPr>
           <a:xfrm>
-            <a:off x="566928" y="5252615"/>
-            <a:ext cx="5781751" cy="1102464"/>
+            <a:off x="566928" y="5114556"/>
+            <a:ext cx="4958791" cy="1240523"/>
           </a:xfrm>
           <a:prstGeom prst="roundRect">
             <a:avLst>
@@ -26747,8 +26749,8 @@
         </p:nvSpPr>
         <p:spPr>
           <a:xfrm>
-            <a:off x="566928" y="5252615"/>
-            <a:ext cx="45720" cy="1102464"/>
+            <a:off x="566928" y="5114556"/>
+            <a:ext cx="45720" cy="1240523"/>
           </a:xfrm>
           <a:prstGeom prst="rect">
             <a:avLst/>
@@ -26791,8 +26793,8 @@
         </p:nvSpPr>
         <p:spPr>
           <a:xfrm>
-            <a:off x="768096" y="5389775"/>
-            <a:ext cx="5379415" cy="828144"/>
+            <a:off x="768096" y="5251716"/>
+            <a:ext cx="4556455" cy="966203"/>
           </a:xfrm>
           <a:prstGeom prst="rect">
             <a:avLst/>
@@ -26817,7 +26819,7 @@
               </a:spcAft>
             </a:pPr>
             <a:r>
-              <a:rPr sz="1250" b="1" i="0">
+              <a:rPr sz="1200" b="1" i="0">
                 <a:solidFill>
                   <a:srgbClr val="0B6E4F"/>
                 </a:solidFill>
@@ -26839,7 +26841,7 @@
               </a:spcAft>
             </a:pPr>
             <a:r>
-              <a:rPr sz="1150" b="0" i="0">
+              <a:rPr sz="1100" b="0" i="0">
                 <a:solidFill>
                   <a:srgbClr val="14262E"/>
                 </a:solidFill>
@@ -32096,15 +32098,14 @@
         </p:nvPicPr>
         <p:blipFill>
           <a:blip r:embed="rId2"/>
-          <a:srcRect l="15033" r="15033"/>
           <a:stretch>
             <a:fillRect/>
           </a:stretch>
         </p:blipFill>
         <p:spPr>
           <a:xfrm>
-            <a:off x="6732727" y="1417320"/>
-            <a:ext cx="4892040" cy="4663440"/>
+            <a:off x="5909767" y="1417320"/>
+            <a:ext cx="5715000" cy="3810000"/>
           </a:xfrm>
           <a:prstGeom prst="rect">
             <a:avLst/>
@@ -32119,8 +32120,8 @@
         </p:nvSpPr>
         <p:spPr>
           <a:xfrm>
-            <a:off x="6732727" y="1417320"/>
-            <a:ext cx="4892040" cy="59436"/>
+            <a:off x="5909767" y="1417320"/>
+            <a:ext cx="5715000" cy="59436"/>
           </a:xfrm>
           <a:prstGeom prst="rect">
             <a:avLst/>
@@ -32163,8 +32164,8 @@
         </p:nvSpPr>
         <p:spPr>
           <a:xfrm>
-            <a:off x="6732727" y="6144768"/>
-            <a:ext cx="4892040" cy="365760"/>
+            <a:off x="5909767" y="5273040"/>
+            <a:ext cx="5715000" cy="365760"/>
           </a:xfrm>
           <a:prstGeom prst="rect">
             <a:avLst/>
@@ -32209,7 +32210,7 @@
         <p:spPr>
           <a:xfrm>
             <a:off x="566928" y="1426464"/>
-            <a:ext cx="5781751" cy="996848"/>
+            <a:ext cx="4958791" cy="960582"/>
           </a:xfrm>
           <a:prstGeom prst="roundRect">
             <a:avLst>
@@ -32255,7 +32256,7 @@
         <p:spPr>
           <a:xfrm>
             <a:off x="566928" y="1426464"/>
-            <a:ext cx="45720" cy="996848"/>
+            <a:ext cx="45720" cy="960582"/>
           </a:xfrm>
           <a:prstGeom prst="rect">
             <a:avLst/>
@@ -32299,7 +32300,7 @@
         <p:spPr>
           <a:xfrm>
             <a:off x="768096" y="1563624"/>
-            <a:ext cx="5379415" cy="722528"/>
+            <a:ext cx="4556455" cy="686262"/>
           </a:xfrm>
           <a:prstGeom prst="rect">
             <a:avLst/>
@@ -32324,7 +32325,7 @@
               </a:spcAft>
             </a:pPr>
             <a:r>
-              <a:rPr sz="1100" b="1" i="0">
+              <a:rPr sz="1050" b="1" i="0">
                 <a:solidFill>
                   <a:srgbClr val="0B6E4F"/>
                 </a:solidFill>
@@ -32346,7 +32347,7 @@
               </a:spcAft>
             </a:pPr>
             <a:r>
-              <a:rPr sz="1000" b="0" i="0">
+              <a:rPr sz="950" b="0" i="0">
                 <a:solidFill>
                   <a:srgbClr val="14262E"/>
                 </a:solidFill>
@@ -32365,8 +32366,8 @@
         </p:nvSpPr>
         <p:spPr>
           <a:xfrm>
-            <a:off x="566928" y="2533040"/>
-            <a:ext cx="5781751" cy="996848"/>
+            <a:off x="566928" y="2496774"/>
+            <a:ext cx="4958791" cy="960582"/>
           </a:xfrm>
           <a:prstGeom prst="roundRect">
             <a:avLst>
@@ -32411,8 +32412,8 @@
         </p:nvSpPr>
         <p:spPr>
           <a:xfrm>
-            <a:off x="566928" y="2533040"/>
-            <a:ext cx="45720" cy="996848"/>
+            <a:off x="566928" y="2496774"/>
+            <a:ext cx="45720" cy="960582"/>
           </a:xfrm>
           <a:prstGeom prst="rect">
             <a:avLst/>
@@ -32455,8 +32456,8 @@
         </p:nvSpPr>
         <p:spPr>
           <a:xfrm>
-            <a:off x="768096" y="2670200"/>
-            <a:ext cx="5379415" cy="722528"/>
+            <a:off x="768096" y="2633934"/>
+            <a:ext cx="4556455" cy="686262"/>
           </a:xfrm>
           <a:prstGeom prst="rect">
             <a:avLst/>
@@ -32481,7 +32482,7 @@
               </a:spcAft>
             </a:pPr>
             <a:r>
-              <a:rPr sz="1100" b="1" i="0">
+              <a:rPr sz="1050" b="1" i="0">
                 <a:solidFill>
                   <a:srgbClr val="0B6E4F"/>
                 </a:solidFill>
@@ -32503,7 +32504,7 @@
               </a:spcAft>
             </a:pPr>
             <a:r>
-              <a:rPr sz="1000" b="0" i="0">
+              <a:rPr sz="950" b="0" i="0">
                 <a:solidFill>
                   <a:srgbClr val="14262E"/>
                 </a:solidFill>
@@ -32522,8 +32523,8 @@
         </p:nvSpPr>
         <p:spPr>
           <a:xfrm>
-            <a:off x="566928" y="3639616"/>
-            <a:ext cx="5781751" cy="832002"/>
+            <a:off x="566928" y="3567084"/>
+            <a:ext cx="4958791" cy="960582"/>
           </a:xfrm>
           <a:prstGeom prst="roundRect">
             <a:avLst>
@@ -32568,8 +32569,8 @@
         </p:nvSpPr>
         <p:spPr>
           <a:xfrm>
-            <a:off x="566928" y="3639616"/>
-            <a:ext cx="45720" cy="832002"/>
+            <a:off x="566928" y="3567084"/>
+            <a:ext cx="45720" cy="960582"/>
           </a:xfrm>
           <a:prstGeom prst="rect">
             <a:avLst/>
@@ -32612,8 +32613,8 @@
         </p:nvSpPr>
         <p:spPr>
           <a:xfrm>
-            <a:off x="768096" y="3776776"/>
-            <a:ext cx="5379415" cy="557682"/>
+            <a:off x="768096" y="3704244"/>
+            <a:ext cx="4556455" cy="686262"/>
           </a:xfrm>
           <a:prstGeom prst="rect">
             <a:avLst/>
@@ -32638,7 +32639,7 @@
               </a:spcAft>
             </a:pPr>
             <a:r>
-              <a:rPr sz="1100" b="1" i="0">
+              <a:rPr sz="1050" b="1" i="0">
                 <a:solidFill>
                   <a:srgbClr val="0B6E4F"/>
                 </a:solidFill>
@@ -32660,7 +32661,7 @@
               </a:spcAft>
             </a:pPr>
             <a:r>
-              <a:rPr sz="1000" b="0" i="0">
+              <a:rPr sz="950" b="0" i="0">
                 <a:solidFill>
                   <a:srgbClr val="14262E"/>
                 </a:solidFill>
@@ -32679,8 +32680,8 @@
         </p:nvSpPr>
         <p:spPr>
           <a:xfrm>
-            <a:off x="566928" y="4581347"/>
-            <a:ext cx="5781751" cy="832002"/>
+            <a:off x="566928" y="4637394"/>
+            <a:ext cx="4958791" cy="803978"/>
           </a:xfrm>
           <a:prstGeom prst="roundRect">
             <a:avLst>
@@ -32725,8 +32726,8 @@
         </p:nvSpPr>
         <p:spPr>
           <a:xfrm>
-            <a:off x="566928" y="4581347"/>
-            <a:ext cx="45720" cy="832002"/>
+            <a:off x="566928" y="4637394"/>
+            <a:ext cx="45720" cy="803978"/>
           </a:xfrm>
           <a:prstGeom prst="rect">
             <a:avLst/>
@@ -32769,8 +32770,8 @@
         </p:nvSpPr>
         <p:spPr>
           <a:xfrm>
-            <a:off x="768096" y="4718507"/>
-            <a:ext cx="5379415" cy="557682"/>
+            <a:off x="768096" y="4774554"/>
+            <a:ext cx="4556455" cy="529658"/>
           </a:xfrm>
           <a:prstGeom prst="rect">
             <a:avLst/>
@@ -32795,7 +32796,7 @@
               </a:spcAft>
             </a:pPr>
             <a:r>
-              <a:rPr sz="1100" b="1" i="0">
+              <a:rPr sz="1050" b="1" i="0">
                 <a:solidFill>
                   <a:srgbClr val="0B6E4F"/>
                 </a:solidFill>
@@ -32817,7 +32818,7 @@
               </a:spcAft>
             </a:pPr>
             <a:r>
-              <a:rPr sz="1000" b="0" i="0">
+              <a:rPr sz="950" b="0" i="0">
                 <a:solidFill>
                   <a:srgbClr val="14262E"/>
                 </a:solidFill>
@@ -32836,8 +32837,8 @@
         </p:nvSpPr>
         <p:spPr>
           <a:xfrm>
-            <a:off x="566928" y="5523077"/>
-            <a:ext cx="5781751" cy="832002"/>
+            <a:off x="566928" y="5551101"/>
+            <a:ext cx="4958791" cy="803978"/>
           </a:xfrm>
           <a:prstGeom prst="roundRect">
             <a:avLst>
@@ -32882,8 +32883,8 @@
         </p:nvSpPr>
         <p:spPr>
           <a:xfrm>
-            <a:off x="566928" y="5523077"/>
-            <a:ext cx="45720" cy="832002"/>
+            <a:off x="566928" y="5551101"/>
+            <a:ext cx="45720" cy="803978"/>
           </a:xfrm>
           <a:prstGeom prst="rect">
             <a:avLst/>
@@ -32926,8 +32927,8 @@
         </p:nvSpPr>
         <p:spPr>
           <a:xfrm>
-            <a:off x="768096" y="5660237"/>
-            <a:ext cx="5379415" cy="557682"/>
+            <a:off x="768096" y="5688261"/>
+            <a:ext cx="4556455" cy="529658"/>
           </a:xfrm>
           <a:prstGeom prst="rect">
             <a:avLst/>
@@ -32952,7 +32953,7 @@
               </a:spcAft>
             </a:pPr>
             <a:r>
-              <a:rPr sz="1100" b="1" i="0">
+              <a:rPr sz="1050" b="1" i="0">
                 <a:solidFill>
                   <a:srgbClr val="0B6E4F"/>
                 </a:solidFill>
@@ -32974,7 +32975,7 @@
               </a:spcAft>
             </a:pPr>
             <a:r>
-              <a:rPr sz="1000" b="0" i="0">
+              <a:rPr sz="950" b="0" i="0">
                 <a:solidFill>
                   <a:srgbClr val="14262E"/>
                 </a:solidFill>
@@ -34642,15 +34643,14 @@
         </p:nvPicPr>
         <p:blipFill>
           <a:blip r:embed="rId2"/>
-          <a:srcRect l="15033" r="15033"/>
           <a:stretch>
             <a:fillRect/>
           </a:stretch>
         </p:blipFill>
         <p:spPr>
           <a:xfrm>
-            <a:off x="6732727" y="1417320"/>
-            <a:ext cx="4892040" cy="4663440"/>
+            <a:off x="5909767" y="1417320"/>
+            <a:ext cx="5715000" cy="3810000"/>
           </a:xfrm>
           <a:prstGeom prst="rect">
             <a:avLst/>
@@ -34665,8 +34665,8 @@
         </p:nvSpPr>
         <p:spPr>
           <a:xfrm>
-            <a:off x="6732727" y="1417320"/>
-            <a:ext cx="4892040" cy="59436"/>
+            <a:off x="5909767" y="1417320"/>
+            <a:ext cx="5715000" cy="59436"/>
           </a:xfrm>
           <a:prstGeom prst="rect">
             <a:avLst/>
@@ -34709,8 +34709,8 @@
         </p:nvSpPr>
         <p:spPr>
           <a:xfrm>
-            <a:off x="6732727" y="6144768"/>
-            <a:ext cx="4892040" cy="365760"/>
+            <a:off x="5909767" y="5273040"/>
+            <a:ext cx="5715000" cy="365760"/>
           </a:xfrm>
           <a:prstGeom prst="rect">
             <a:avLst/>
@@ -34755,7 +34755,7 @@
         <p:spPr>
           <a:xfrm>
             <a:off x="566928" y="1426464"/>
-            <a:ext cx="5781751" cy="996848"/>
+            <a:ext cx="4958791" cy="927613"/>
           </a:xfrm>
           <a:prstGeom prst="roundRect">
             <a:avLst>
@@ -34801,7 +34801,7 @@
         <p:spPr>
           <a:xfrm>
             <a:off x="566928" y="1426464"/>
-            <a:ext cx="45720" cy="996848"/>
+            <a:ext cx="45720" cy="927613"/>
           </a:xfrm>
           <a:prstGeom prst="rect">
             <a:avLst/>
@@ -34845,7 +34845,7 @@
         <p:spPr>
           <a:xfrm>
             <a:off x="768096" y="1563624"/>
-            <a:ext cx="5379415" cy="722528"/>
+            <a:ext cx="4556455" cy="653293"/>
           </a:xfrm>
           <a:prstGeom prst="rect">
             <a:avLst/>
@@ -34870,7 +34870,7 @@
               </a:spcAft>
             </a:pPr>
             <a:r>
-              <a:rPr sz="1100" b="1" i="0">
+              <a:rPr sz="1000" b="1" i="0">
                 <a:solidFill>
                   <a:srgbClr val="0B6E4F"/>
                 </a:solidFill>
@@ -34892,7 +34892,7 @@
               </a:spcAft>
             </a:pPr>
             <a:r>
-              <a:rPr sz="1000" b="0" i="0">
+              <a:rPr sz="900" b="0" i="0">
                 <a:solidFill>
                   <a:srgbClr val="14262E"/>
                 </a:solidFill>
@@ -34911,8 +34911,8 @@
         </p:nvSpPr>
         <p:spPr>
           <a:xfrm>
-            <a:off x="566928" y="2533040"/>
-            <a:ext cx="5781751" cy="996848"/>
+            <a:off x="566928" y="2463805"/>
+            <a:ext cx="4958791" cy="1075974"/>
           </a:xfrm>
           <a:prstGeom prst="roundRect">
             <a:avLst>
@@ -34957,8 +34957,8 @@
         </p:nvSpPr>
         <p:spPr>
           <a:xfrm>
-            <a:off x="566928" y="2533040"/>
-            <a:ext cx="45720" cy="996848"/>
+            <a:off x="566928" y="2463805"/>
+            <a:ext cx="45720" cy="1075974"/>
           </a:xfrm>
           <a:prstGeom prst="rect">
             <a:avLst/>
@@ -35001,8 +35001,8 @@
         </p:nvSpPr>
         <p:spPr>
           <a:xfrm>
-            <a:off x="768096" y="2670200"/>
-            <a:ext cx="5379415" cy="722528"/>
+            <a:off x="768096" y="2600965"/>
+            <a:ext cx="4556455" cy="801654"/>
           </a:xfrm>
           <a:prstGeom prst="rect">
             <a:avLst/>
@@ -35027,7 +35027,7 @@
               </a:spcAft>
             </a:pPr>
             <a:r>
-              <a:rPr sz="1100" b="1" i="0">
+              <a:rPr sz="1000" b="1" i="0">
                 <a:solidFill>
                   <a:srgbClr val="0B6E4F"/>
                 </a:solidFill>
@@ -35049,7 +35049,7 @@
               </a:spcAft>
             </a:pPr>
             <a:r>
-              <a:rPr sz="1000" b="0" i="0">
+              <a:rPr sz="900" b="0" i="0">
                 <a:solidFill>
                   <a:srgbClr val="14262E"/>
                 </a:solidFill>
@@ -35068,8 +35068,8 @@
         </p:nvSpPr>
         <p:spPr>
           <a:xfrm>
-            <a:off x="566928" y="3639616"/>
-            <a:ext cx="5781751" cy="832002"/>
+            <a:off x="566928" y="3649507"/>
+            <a:ext cx="4958791" cy="927613"/>
           </a:xfrm>
           <a:prstGeom prst="roundRect">
             <a:avLst>
@@ -35114,8 +35114,8 @@
         </p:nvSpPr>
         <p:spPr>
           <a:xfrm>
-            <a:off x="566928" y="3639616"/>
-            <a:ext cx="45720" cy="832002"/>
+            <a:off x="566928" y="3649507"/>
+            <a:ext cx="45720" cy="927613"/>
           </a:xfrm>
           <a:prstGeom prst="rect">
             <a:avLst/>
@@ -35158,8 +35158,8 @@
         </p:nvSpPr>
         <p:spPr>
           <a:xfrm>
-            <a:off x="768096" y="3776776"/>
-            <a:ext cx="5379415" cy="557682"/>
+            <a:off x="768096" y="3786667"/>
+            <a:ext cx="4556455" cy="653293"/>
           </a:xfrm>
           <a:prstGeom prst="rect">
             <a:avLst/>
@@ -35184,7 +35184,7 @@
               </a:spcAft>
             </a:pPr>
             <a:r>
-              <a:rPr sz="1100" b="1" i="0">
+              <a:rPr sz="1000" b="1" i="0">
                 <a:solidFill>
                   <a:srgbClr val="0B6E4F"/>
                 </a:solidFill>
@@ -35206,7 +35206,7 @@
               </a:spcAft>
             </a:pPr>
             <a:r>
-              <a:rPr sz="1000" b="0" i="0">
+              <a:rPr sz="900" b="0" i="0">
                 <a:solidFill>
                   <a:srgbClr val="14262E"/>
                 </a:solidFill>
@@ -35225,8 +35225,8 @@
         </p:nvSpPr>
         <p:spPr>
           <a:xfrm>
-            <a:off x="566928" y="4581347"/>
-            <a:ext cx="5781751" cy="832002"/>
+            <a:off x="566928" y="4686848"/>
+            <a:ext cx="4958791" cy="779251"/>
           </a:xfrm>
           <a:prstGeom prst="roundRect">
             <a:avLst>
@@ -35271,8 +35271,8 @@
         </p:nvSpPr>
         <p:spPr>
           <a:xfrm>
-            <a:off x="566928" y="4581347"/>
-            <a:ext cx="45720" cy="832002"/>
+            <a:off x="566928" y="4686848"/>
+            <a:ext cx="45720" cy="779251"/>
           </a:xfrm>
           <a:prstGeom prst="rect">
             <a:avLst/>
@@ -35315,8 +35315,8 @@
         </p:nvSpPr>
         <p:spPr>
           <a:xfrm>
-            <a:off x="768096" y="4718507"/>
-            <a:ext cx="5379415" cy="557682"/>
+            <a:off x="768096" y="4824008"/>
+            <a:ext cx="4556455" cy="504931"/>
           </a:xfrm>
           <a:prstGeom prst="rect">
             <a:avLst/>
@@ -35341,7 +35341,7 @@
               </a:spcAft>
             </a:pPr>
             <a:r>
-              <a:rPr sz="1100" b="1" i="0">
+              <a:rPr sz="1000" b="1" i="0">
                 <a:solidFill>
                   <a:srgbClr val="0B6E4F"/>
                 </a:solidFill>
@@ -35363,7 +35363,7 @@
               </a:spcAft>
             </a:pPr>
             <a:r>
-              <a:rPr sz="1000" b="0" i="0">
+              <a:rPr sz="900" b="0" i="0">
                 <a:solidFill>
                   <a:srgbClr val="14262E"/>
                 </a:solidFill>
@@ -35382,8 +35382,8 @@
         </p:nvSpPr>
         <p:spPr>
           <a:xfrm>
-            <a:off x="566928" y="5523077"/>
-            <a:ext cx="5781751" cy="832002"/>
+            <a:off x="566928" y="5575828"/>
+            <a:ext cx="4958791" cy="779251"/>
           </a:xfrm>
           <a:prstGeom prst="roundRect">
             <a:avLst>
@@ -35428,8 +35428,8 @@
         </p:nvSpPr>
         <p:spPr>
           <a:xfrm>
-            <a:off x="566928" y="5523077"/>
-            <a:ext cx="45720" cy="832002"/>
+            <a:off x="566928" y="5575828"/>
+            <a:ext cx="45720" cy="779251"/>
           </a:xfrm>
           <a:prstGeom prst="rect">
             <a:avLst/>
@@ -35472,8 +35472,8 @@
         </p:nvSpPr>
         <p:spPr>
           <a:xfrm>
-            <a:off x="768096" y="5660237"/>
-            <a:ext cx="5379415" cy="557682"/>
+            <a:off x="768096" y="5712988"/>
+            <a:ext cx="4556455" cy="504931"/>
           </a:xfrm>
           <a:prstGeom prst="rect">
             <a:avLst/>
@@ -35498,7 +35498,7 @@
               </a:spcAft>
             </a:pPr>
             <a:r>
-              <a:rPr sz="1100" b="1" i="0">
+              <a:rPr sz="1000" b="1" i="0">
                 <a:solidFill>
                   <a:srgbClr val="0B6E4F"/>
                 </a:solidFill>
@@ -35520,7 +35520,7 @@
               </a:spcAft>
             </a:pPr>
             <a:r>
-              <a:rPr sz="1000" b="0" i="0">
+              <a:rPr sz="900" b="0" i="0">
                 <a:solidFill>
                   <a:srgbClr val="14262E"/>
                 </a:solidFill>
@@ -35782,7 +35782,6 @@
         </p:nvPicPr>
         <p:blipFill>
           <a:blip r:embed="rId2"/>
-          <a:srcRect l="15033" r="15033"/>
           <a:stretch>
             <a:fillRect/>
           </a:stretch>
@@ -35790,7 +35789,7 @@
         <p:spPr>
           <a:xfrm>
             <a:off x="566928" y="1417320"/>
-            <a:ext cx="4892040" cy="4663440"/>
+            <a:ext cx="5715000" cy="3810000"/>
           </a:xfrm>
           <a:prstGeom prst="rect">
             <a:avLst/>
@@ -35806,7 +35805,7 @@
         <p:spPr>
           <a:xfrm>
             <a:off x="566928" y="1417320"/>
-            <a:ext cx="4892040" cy="59436"/>
+            <a:ext cx="5715000" cy="59436"/>
           </a:xfrm>
           <a:prstGeom prst="rect">
             <a:avLst/>
@@ -35849,8 +35848,8 @@
         </p:nvSpPr>
         <p:spPr>
           <a:xfrm>
-            <a:off x="566928" y="6144768"/>
-            <a:ext cx="4892040" cy="365760"/>
+            <a:off x="566928" y="5273040"/>
+            <a:ext cx="5715000" cy="365760"/>
           </a:xfrm>
           <a:prstGeom prst="rect">
             <a:avLst/>
@@ -35894,8 +35893,8 @@
         </p:nvSpPr>
         <p:spPr>
           <a:xfrm>
-            <a:off x="5843016" y="1426464"/>
-            <a:ext cx="5781751" cy="1149858"/>
+            <a:off x="6665976" y="1426464"/>
+            <a:ext cx="4958791" cy="1149858"/>
           </a:xfrm>
           <a:prstGeom prst="roundRect">
             <a:avLst>
@@ -35940,7 +35939,7 @@
         </p:nvSpPr>
         <p:spPr>
           <a:xfrm>
-            <a:off x="5843016" y="1426464"/>
+            <a:off x="6665976" y="1426464"/>
             <a:ext cx="45720" cy="1149858"/>
           </a:xfrm>
           <a:prstGeom prst="rect">
@@ -35984,8 +35983,8 @@
         </p:nvSpPr>
         <p:spPr>
           <a:xfrm>
-            <a:off x="6044183" y="1563624"/>
-            <a:ext cx="5379415" cy="875538"/>
+            <a:off x="6867144" y="1563624"/>
+            <a:ext cx="4556455" cy="875538"/>
           </a:xfrm>
           <a:prstGeom prst="rect">
             <a:avLst/>
@@ -36051,8 +36050,8 @@
         </p:nvSpPr>
         <p:spPr>
           <a:xfrm>
-            <a:off x="5843016" y="2686050"/>
-            <a:ext cx="5781751" cy="1149858"/>
+            <a:off x="6665976" y="2686050"/>
+            <a:ext cx="4958791" cy="1149858"/>
           </a:xfrm>
           <a:prstGeom prst="roundRect">
             <a:avLst>
@@ -36097,7 +36096,7 @@
         </p:nvSpPr>
         <p:spPr>
           <a:xfrm>
-            <a:off x="5843016" y="2686050"/>
+            <a:off x="6665976" y="2686050"/>
             <a:ext cx="45720" cy="1149858"/>
           </a:xfrm>
           <a:prstGeom prst="rect">
@@ -36141,8 +36140,8 @@
         </p:nvSpPr>
         <p:spPr>
           <a:xfrm>
-            <a:off x="6044183" y="2823210"/>
-            <a:ext cx="5379415" cy="875538"/>
+            <a:off x="6867144" y="2823210"/>
+            <a:ext cx="4556455" cy="875538"/>
           </a:xfrm>
           <a:prstGeom prst="rect">
             <a:avLst/>
@@ -36208,8 +36207,8 @@
         </p:nvSpPr>
         <p:spPr>
           <a:xfrm>
-            <a:off x="5843016" y="3945635"/>
-            <a:ext cx="5781751" cy="1149858"/>
+            <a:off x="6665976" y="3945635"/>
+            <a:ext cx="4958791" cy="1149858"/>
           </a:xfrm>
           <a:prstGeom prst="roundRect">
             <a:avLst>
@@ -36254,7 +36253,7 @@
         </p:nvSpPr>
         <p:spPr>
           <a:xfrm>
-            <a:off x="5843016" y="3945635"/>
+            <a:off x="6665976" y="3945635"/>
             <a:ext cx="45720" cy="1149858"/>
           </a:xfrm>
           <a:prstGeom prst="rect">
@@ -36298,8 +36297,8 @@
         </p:nvSpPr>
         <p:spPr>
           <a:xfrm>
-            <a:off x="6044183" y="4082796"/>
-            <a:ext cx="5379415" cy="875538"/>
+            <a:off x="6867144" y="4082796"/>
+            <a:ext cx="4556455" cy="875538"/>
           </a:xfrm>
           <a:prstGeom prst="rect">
             <a:avLst/>
@@ -36365,8 +36364,8 @@
         </p:nvSpPr>
         <p:spPr>
           <a:xfrm>
-            <a:off x="5843016" y="5205221"/>
-            <a:ext cx="5781751" cy="1149858"/>
+            <a:off x="6665976" y="5205221"/>
+            <a:ext cx="4958791" cy="1149858"/>
           </a:xfrm>
           <a:prstGeom prst="roundRect">
             <a:avLst>
@@ -36411,7 +36410,7 @@
         </p:nvSpPr>
         <p:spPr>
           <a:xfrm>
-            <a:off x="5843016" y="5205221"/>
+            <a:off x="6665976" y="5205221"/>
             <a:ext cx="45720" cy="1149858"/>
           </a:xfrm>
           <a:prstGeom prst="rect">
@@ -36455,8 +36454,8 @@
         </p:nvSpPr>
         <p:spPr>
           <a:xfrm>
-            <a:off x="6044183" y="5342381"/>
-            <a:ext cx="5379415" cy="875538"/>
+            <a:off x="6867144" y="5342381"/>
+            <a:ext cx="4556455" cy="875538"/>
           </a:xfrm>
           <a:prstGeom prst="rect">
             <a:avLst/>
@@ -36765,15 +36764,14 @@
         </p:nvPicPr>
         <p:blipFill>
           <a:blip r:embed="rId2"/>
-          <a:srcRect l="15033" r="15033"/>
           <a:stretch>
             <a:fillRect/>
           </a:stretch>
         </p:blipFill>
         <p:spPr>
           <a:xfrm>
-            <a:off x="6732727" y="1417320"/>
-            <a:ext cx="4892040" cy="4663440"/>
+            <a:off x="5909767" y="1417320"/>
+            <a:ext cx="5715000" cy="3810000"/>
           </a:xfrm>
           <a:prstGeom prst="rect">
             <a:avLst/>
@@ -36788,8 +36786,8 @@
         </p:nvSpPr>
         <p:spPr>
           <a:xfrm>
-            <a:off x="6732727" y="1417320"/>
-            <a:ext cx="4892040" cy="59436"/>
+            <a:off x="5909767" y="1417320"/>
+            <a:ext cx="5715000" cy="59436"/>
           </a:xfrm>
           <a:prstGeom prst="rect">
             <a:avLst/>
@@ -36832,8 +36830,8 @@
         </p:nvSpPr>
         <p:spPr>
           <a:xfrm>
-            <a:off x="6732727" y="6144768"/>
-            <a:ext cx="4892040" cy="365760"/>
+            <a:off x="5909767" y="5273040"/>
+            <a:ext cx="5715000" cy="365760"/>
           </a:xfrm>
           <a:prstGeom prst="rect">
             <a:avLst/>
@@ -36878,7 +36876,7 @@
         <p:spPr>
           <a:xfrm>
             <a:off x="566928" y="1426464"/>
-            <a:ext cx="5781751" cy="832002"/>
+            <a:ext cx="4958791" cy="808923"/>
           </a:xfrm>
           <a:prstGeom prst="roundRect">
             <a:avLst>
@@ -36924,7 +36922,7 @@
         <p:spPr>
           <a:xfrm>
             <a:off x="566928" y="1426464"/>
-            <a:ext cx="45720" cy="832002"/>
+            <a:ext cx="45720" cy="808923"/>
           </a:xfrm>
           <a:prstGeom prst="rect">
             <a:avLst/>
@@ -36968,7 +36966,7 @@
         <p:spPr>
           <a:xfrm>
             <a:off x="768096" y="1563624"/>
-            <a:ext cx="5379415" cy="557682"/>
+            <a:ext cx="4556455" cy="534603"/>
           </a:xfrm>
           <a:prstGeom prst="rect">
             <a:avLst/>
@@ -36993,7 +36991,7 @@
               </a:spcAft>
             </a:pPr>
             <a:r>
-              <a:rPr sz="1100" b="1" i="0">
+              <a:rPr sz="1000" b="1" i="0">
                 <a:solidFill>
                   <a:srgbClr val="0B6E4F"/>
                 </a:solidFill>
@@ -37015,7 +37013,7 @@
               </a:spcAft>
             </a:pPr>
             <a:r>
-              <a:rPr sz="1000" b="0" i="0">
+              <a:rPr sz="900" b="0" i="0">
                 <a:solidFill>
                   <a:srgbClr val="14262E"/>
                 </a:solidFill>
@@ -37034,8 +37032,8 @@
         </p:nvSpPr>
         <p:spPr>
           <a:xfrm>
-            <a:off x="566928" y="2368194"/>
-            <a:ext cx="5781751" cy="996848"/>
+            <a:off x="566928" y="2345115"/>
+            <a:ext cx="4958791" cy="957285"/>
           </a:xfrm>
           <a:prstGeom prst="roundRect">
             <a:avLst>
@@ -37080,8 +37078,8 @@
         </p:nvSpPr>
         <p:spPr>
           <a:xfrm>
-            <a:off x="566928" y="2368194"/>
-            <a:ext cx="45720" cy="996848"/>
+            <a:off x="566928" y="2345115"/>
+            <a:ext cx="45720" cy="957285"/>
           </a:xfrm>
           <a:prstGeom prst="rect">
             <a:avLst/>
@@ -37124,8 +37122,8 @@
         </p:nvSpPr>
         <p:spPr>
           <a:xfrm>
-            <a:off x="768096" y="2505354"/>
-            <a:ext cx="5379415" cy="722528"/>
+            <a:off x="768096" y="2482275"/>
+            <a:ext cx="4556455" cy="682965"/>
           </a:xfrm>
           <a:prstGeom prst="rect">
             <a:avLst/>
@@ -37150,7 +37148,7 @@
               </a:spcAft>
             </a:pPr>
             <a:r>
-              <a:rPr sz="1100" b="1" i="0">
+              <a:rPr sz="1000" b="1" i="0">
                 <a:solidFill>
                   <a:srgbClr val="0B6E4F"/>
                 </a:solidFill>
@@ -37172,7 +37170,7 @@
               </a:spcAft>
             </a:pPr>
             <a:r>
-              <a:rPr sz="1000" b="0" i="0">
+              <a:rPr sz="900" b="0" i="0">
                 <a:solidFill>
                   <a:srgbClr val="14262E"/>
                 </a:solidFill>
@@ -37191,8 +37189,8 @@
         </p:nvSpPr>
         <p:spPr>
           <a:xfrm>
-            <a:off x="566928" y="3474770"/>
-            <a:ext cx="5781751" cy="996848"/>
+            <a:off x="566928" y="3412129"/>
+            <a:ext cx="4958791" cy="957285"/>
           </a:xfrm>
           <a:prstGeom prst="roundRect">
             <a:avLst>
@@ -37237,8 +37235,8 @@
         </p:nvSpPr>
         <p:spPr>
           <a:xfrm>
-            <a:off x="566928" y="3474770"/>
-            <a:ext cx="45720" cy="996848"/>
+            <a:off x="566928" y="3412129"/>
+            <a:ext cx="45720" cy="957285"/>
           </a:xfrm>
           <a:prstGeom prst="rect">
             <a:avLst/>
@@ -37281,8 +37279,8 @@
         </p:nvSpPr>
         <p:spPr>
           <a:xfrm>
-            <a:off x="768096" y="3611930"/>
-            <a:ext cx="5379415" cy="722528"/>
+            <a:off x="768096" y="3549289"/>
+            <a:ext cx="4556455" cy="682965"/>
           </a:xfrm>
           <a:prstGeom prst="rect">
             <a:avLst/>
@@ -37307,7 +37305,7 @@
               </a:spcAft>
             </a:pPr>
             <a:r>
-              <a:rPr sz="1100" b="1" i="0">
+              <a:rPr sz="1000" b="1" i="0">
                 <a:solidFill>
                   <a:srgbClr val="0B6E4F"/>
                 </a:solidFill>
@@ -37329,7 +37327,7 @@
               </a:spcAft>
             </a:pPr>
             <a:r>
-              <a:rPr sz="1000" b="0" i="0">
+              <a:rPr sz="900" b="0" i="0">
                 <a:solidFill>
                   <a:srgbClr val="14262E"/>
                 </a:solidFill>
@@ -37348,8 +37346,8 @@
         </p:nvSpPr>
         <p:spPr>
           <a:xfrm>
-            <a:off x="566928" y="4581347"/>
-            <a:ext cx="5781751" cy="832002"/>
+            <a:off x="566928" y="4479142"/>
+            <a:ext cx="4958791" cy="957285"/>
           </a:xfrm>
           <a:prstGeom prst="roundRect">
             <a:avLst>
@@ -37394,8 +37392,8 @@
         </p:nvSpPr>
         <p:spPr>
           <a:xfrm>
-            <a:off x="566928" y="4581347"/>
-            <a:ext cx="45720" cy="832002"/>
+            <a:off x="566928" y="4479142"/>
+            <a:ext cx="45720" cy="957285"/>
           </a:xfrm>
           <a:prstGeom prst="rect">
             <a:avLst/>
@@ -37438,8 +37436,8 @@
         </p:nvSpPr>
         <p:spPr>
           <a:xfrm>
-            <a:off x="768096" y="4718507"/>
-            <a:ext cx="5379415" cy="557682"/>
+            <a:off x="768096" y="4616302"/>
+            <a:ext cx="4556455" cy="682965"/>
           </a:xfrm>
           <a:prstGeom prst="rect">
             <a:avLst/>
@@ -37464,7 +37462,7 @@
               </a:spcAft>
             </a:pPr>
             <a:r>
-              <a:rPr sz="1100" b="1" i="0">
+              <a:rPr sz="1000" b="1" i="0">
                 <a:solidFill>
                   <a:srgbClr val="0B6E4F"/>
                 </a:solidFill>
@@ -37486,7 +37484,7 @@
               </a:spcAft>
             </a:pPr>
             <a:r>
-              <a:rPr sz="1000" b="0" i="0">
+              <a:rPr sz="900" b="0" i="0">
                 <a:solidFill>
                   <a:srgbClr val="14262E"/>
                 </a:solidFill>
@@ -37505,8 +37503,8 @@
         </p:nvSpPr>
         <p:spPr>
           <a:xfrm>
-            <a:off x="566928" y="5523077"/>
-            <a:ext cx="5781751" cy="832002"/>
+            <a:off x="566928" y="5546156"/>
+            <a:ext cx="4958791" cy="808923"/>
           </a:xfrm>
           <a:prstGeom prst="roundRect">
             <a:avLst>
@@ -37551,8 +37549,8 @@
         </p:nvSpPr>
         <p:spPr>
           <a:xfrm>
-            <a:off x="566928" y="5523077"/>
-            <a:ext cx="45720" cy="832002"/>
+            <a:off x="566928" y="5546156"/>
+            <a:ext cx="45720" cy="808923"/>
           </a:xfrm>
           <a:prstGeom prst="rect">
             <a:avLst/>
@@ -37595,8 +37593,8 @@
         </p:nvSpPr>
         <p:spPr>
           <a:xfrm>
-            <a:off x="768096" y="5660237"/>
-            <a:ext cx="5379415" cy="557682"/>
+            <a:off x="768096" y="5683316"/>
+            <a:ext cx="4556455" cy="534603"/>
           </a:xfrm>
           <a:prstGeom prst="rect">
             <a:avLst/>
@@ -37621,7 +37619,7 @@
               </a:spcAft>
             </a:pPr>
             <a:r>
-              <a:rPr sz="1100" b="1" i="0">
+              <a:rPr sz="1000" b="1" i="0">
                 <a:solidFill>
                   <a:srgbClr val="0B6E4F"/>
                 </a:solidFill>
@@ -37643,7 +37641,7 @@
               </a:spcAft>
             </a:pPr>
             <a:r>
-              <a:rPr sz="1000" b="0" i="0">
+              <a:rPr sz="900" b="0" i="0">
                 <a:solidFill>
                   <a:srgbClr val="14262E"/>
                 </a:solidFill>
@@ -37905,7 +37903,6 @@
         </p:nvPicPr>
         <p:blipFill>
           <a:blip r:embed="rId2"/>
-          <a:srcRect l="15033" r="15033"/>
           <a:stretch>
             <a:fillRect/>
           </a:stretch>
@@ -37913,7 +37910,7 @@
         <p:spPr>
           <a:xfrm>
             <a:off x="566928" y="1417320"/>
-            <a:ext cx="4892040" cy="4663440"/>
+            <a:ext cx="5715000" cy="3810000"/>
           </a:xfrm>
           <a:prstGeom prst="rect">
             <a:avLst/>
@@ -37929,7 +37926,7 @@
         <p:spPr>
           <a:xfrm>
             <a:off x="566928" y="1417320"/>
-            <a:ext cx="4892040" cy="59436"/>
+            <a:ext cx="5715000" cy="59436"/>
           </a:xfrm>
           <a:prstGeom prst="rect">
             <a:avLst/>
@@ -37972,8 +37969,8 @@
         </p:nvSpPr>
         <p:spPr>
           <a:xfrm>
-            <a:off x="566928" y="6144768"/>
-            <a:ext cx="4892040" cy="365760"/>
+            <a:off x="566928" y="5273040"/>
+            <a:ext cx="5715000" cy="365760"/>
           </a:xfrm>
           <a:prstGeom prst="rect">
             <a:avLst/>
@@ -38017,8 +38014,8 @@
         </p:nvSpPr>
         <p:spPr>
           <a:xfrm>
-            <a:off x="5843016" y="1426464"/>
-            <a:ext cx="5781751" cy="863323"/>
+            <a:off x="6665976" y="1426464"/>
+            <a:ext cx="4958791" cy="832002"/>
           </a:xfrm>
           <a:prstGeom prst="roundRect">
             <a:avLst>
@@ -38063,8 +38060,8 @@
         </p:nvSpPr>
         <p:spPr>
           <a:xfrm>
-            <a:off x="5843016" y="1426464"/>
-            <a:ext cx="45720" cy="863323"/>
+            <a:off x="6665976" y="1426464"/>
+            <a:ext cx="45720" cy="832002"/>
           </a:xfrm>
           <a:prstGeom prst="rect">
             <a:avLst/>
@@ -38107,8 +38104,8 @@
         </p:nvSpPr>
         <p:spPr>
           <a:xfrm>
-            <a:off x="6044183" y="1563624"/>
-            <a:ext cx="5379415" cy="589003"/>
+            <a:off x="6867144" y="1563624"/>
+            <a:ext cx="4556455" cy="557682"/>
           </a:xfrm>
           <a:prstGeom prst="rect">
             <a:avLst/>
@@ -38133,7 +38130,7 @@
               </a:spcAft>
             </a:pPr>
             <a:r>
-              <a:rPr sz="1150" b="1" i="0">
+              <a:rPr sz="1100" b="1" i="0">
                 <a:solidFill>
                   <a:srgbClr val="F4B400"/>
                 </a:solidFill>
@@ -38155,7 +38152,7 @@
               </a:spcAft>
             </a:pPr>
             <a:r>
-              <a:rPr sz="1050" b="0" i="0">
+              <a:rPr sz="1000" b="0" i="0">
                 <a:solidFill>
                   <a:srgbClr val="14262E"/>
                 </a:solidFill>
@@ -38174,8 +38171,8 @@
         </p:nvSpPr>
         <p:spPr>
           <a:xfrm>
-            <a:off x="5843016" y="2399515"/>
-            <a:ext cx="5781751" cy="1036411"/>
+            <a:off x="6665976" y="2368194"/>
+            <a:ext cx="4958791" cy="996848"/>
           </a:xfrm>
           <a:prstGeom prst="roundRect">
             <a:avLst>
@@ -38220,8 +38217,8 @@
         </p:nvSpPr>
         <p:spPr>
           <a:xfrm>
-            <a:off x="5843016" y="2399515"/>
-            <a:ext cx="45720" cy="1036411"/>
+            <a:off x="6665976" y="2368194"/>
+            <a:ext cx="45720" cy="996848"/>
           </a:xfrm>
           <a:prstGeom prst="rect">
             <a:avLst/>
@@ -38264,8 +38261,8 @@
         </p:nvSpPr>
         <p:spPr>
           <a:xfrm>
-            <a:off x="6044183" y="2536675"/>
-            <a:ext cx="5379415" cy="762091"/>
+            <a:off x="6867144" y="2505354"/>
+            <a:ext cx="4556455" cy="722528"/>
           </a:xfrm>
           <a:prstGeom prst="rect">
             <a:avLst/>
@@ -38290,7 +38287,7 @@
               </a:spcAft>
             </a:pPr>
             <a:r>
-              <a:rPr sz="1150" b="1" i="0">
+              <a:rPr sz="1100" b="1" i="0">
                 <a:solidFill>
                   <a:srgbClr val="F4B400"/>
                 </a:solidFill>
@@ -38312,7 +38309,7 @@
               </a:spcAft>
             </a:pPr>
             <a:r>
-              <a:rPr sz="1050" b="0" i="0">
+              <a:rPr sz="1000" b="0" i="0">
                 <a:solidFill>
                   <a:srgbClr val="14262E"/>
                 </a:solidFill>
@@ -38331,8 +38328,8 @@
         </p:nvSpPr>
         <p:spPr>
           <a:xfrm>
-            <a:off x="5843016" y="3545654"/>
-            <a:ext cx="5781751" cy="863323"/>
+            <a:off x="6665976" y="3474770"/>
+            <a:ext cx="4958791" cy="996848"/>
           </a:xfrm>
           <a:prstGeom prst="roundRect">
             <a:avLst>
@@ -38377,8 +38374,8 @@
         </p:nvSpPr>
         <p:spPr>
           <a:xfrm>
-            <a:off x="5843016" y="3545654"/>
-            <a:ext cx="45720" cy="863323"/>
+            <a:off x="6665976" y="3474770"/>
+            <a:ext cx="45720" cy="996848"/>
           </a:xfrm>
           <a:prstGeom prst="rect">
             <a:avLst/>
@@ -38421,8 +38418,8 @@
         </p:nvSpPr>
         <p:spPr>
           <a:xfrm>
-            <a:off x="6044183" y="3682814"/>
-            <a:ext cx="5379415" cy="589003"/>
+            <a:off x="6867144" y="3611930"/>
+            <a:ext cx="4556455" cy="722528"/>
           </a:xfrm>
           <a:prstGeom prst="rect">
             <a:avLst/>
@@ -38447,7 +38444,7 @@
               </a:spcAft>
             </a:pPr>
             <a:r>
-              <a:rPr sz="1150" b="1" i="0">
+              <a:rPr sz="1100" b="1" i="0">
                 <a:solidFill>
                   <a:srgbClr val="F4B400"/>
                 </a:solidFill>
@@ -38469,7 +38466,7 @@
               </a:spcAft>
             </a:pPr>
             <a:r>
-              <a:rPr sz="1050" b="0" i="0">
+              <a:rPr sz="1000" b="0" i="0">
                 <a:solidFill>
                   <a:srgbClr val="14262E"/>
                 </a:solidFill>
@@ -38488,8 +38485,8 @@
         </p:nvSpPr>
         <p:spPr>
           <a:xfrm>
-            <a:off x="5843016" y="4518705"/>
-            <a:ext cx="5781751" cy="863323"/>
+            <a:off x="6665976" y="4581347"/>
+            <a:ext cx="4958791" cy="832002"/>
           </a:xfrm>
           <a:prstGeom prst="roundRect">
             <a:avLst>
@@ -38534,8 +38531,8 @@
         </p:nvSpPr>
         <p:spPr>
           <a:xfrm>
-            <a:off x="5843016" y="4518705"/>
-            <a:ext cx="45720" cy="863323"/>
+            <a:off x="6665976" y="4581347"/>
+            <a:ext cx="45720" cy="832002"/>
           </a:xfrm>
           <a:prstGeom prst="rect">
             <a:avLst/>
@@ -38578,8 +38575,8 @@
         </p:nvSpPr>
         <p:spPr>
           <a:xfrm>
-            <a:off x="6044183" y="4655865"/>
-            <a:ext cx="5379415" cy="589003"/>
+            <a:off x="6867144" y="4718507"/>
+            <a:ext cx="4556455" cy="557682"/>
           </a:xfrm>
           <a:prstGeom prst="rect">
             <a:avLst/>
@@ -38604,7 +38601,7 @@
               </a:spcAft>
             </a:pPr>
             <a:r>
-              <a:rPr sz="1150" b="1" i="0">
+              <a:rPr sz="1100" b="1" i="0">
                 <a:solidFill>
                   <a:srgbClr val="F4B400"/>
                 </a:solidFill>
@@ -38626,7 +38623,7 @@
               </a:spcAft>
             </a:pPr>
             <a:r>
-              <a:rPr sz="1050" b="0" i="0">
+              <a:rPr sz="1000" b="0" i="0">
                 <a:solidFill>
                   <a:srgbClr val="14262E"/>
                 </a:solidFill>
@@ -38645,8 +38642,8 @@
         </p:nvSpPr>
         <p:spPr>
           <a:xfrm>
-            <a:off x="5843016" y="5491756"/>
-            <a:ext cx="5781751" cy="863323"/>
+            <a:off x="6665976" y="5523077"/>
+            <a:ext cx="4958791" cy="832002"/>
           </a:xfrm>
           <a:prstGeom prst="roundRect">
             <a:avLst>
@@ -38691,8 +38688,8 @@
         </p:nvSpPr>
         <p:spPr>
           <a:xfrm>
-            <a:off x="5843016" y="5491756"/>
-            <a:ext cx="45720" cy="863323"/>
+            <a:off x="6665976" y="5523077"/>
+            <a:ext cx="45720" cy="832002"/>
           </a:xfrm>
           <a:prstGeom prst="rect">
             <a:avLst/>
@@ -38735,8 +38732,8 @@
         </p:nvSpPr>
         <p:spPr>
           <a:xfrm>
-            <a:off x="6044183" y="5628916"/>
-            <a:ext cx="5379415" cy="589003"/>
+            <a:off x="6867144" y="5660237"/>
+            <a:ext cx="4556455" cy="557682"/>
           </a:xfrm>
           <a:prstGeom prst="rect">
             <a:avLst/>
@@ -38761,7 +38758,7 @@
               </a:spcAft>
             </a:pPr>
             <a:r>
-              <a:rPr sz="1150" b="1" i="0">
+              <a:rPr sz="1100" b="1" i="0">
                 <a:solidFill>
                   <a:srgbClr val="F4B400"/>
                 </a:solidFill>
@@ -38783,7 +38780,7 @@
               </a:spcAft>
             </a:pPr>
             <a:r>
-              <a:rPr sz="1050" b="0" i="0">
+              <a:rPr sz="1000" b="0" i="0">
                 <a:solidFill>
                   <a:srgbClr val="14262E"/>
                 </a:solidFill>
@@ -40675,15 +40672,14 @@
         </p:nvPicPr>
         <p:blipFill>
           <a:blip r:embed="rId2"/>
-          <a:srcRect l="15033" r="15033"/>
           <a:stretch>
             <a:fillRect/>
           </a:stretch>
         </p:blipFill>
         <p:spPr>
           <a:xfrm>
-            <a:off x="6732727" y="1417320"/>
-            <a:ext cx="4892040" cy="4663440"/>
+            <a:off x="5909767" y="1417320"/>
+            <a:ext cx="5715000" cy="3810000"/>
           </a:xfrm>
           <a:prstGeom prst="rect">
             <a:avLst/>
@@ -40698,8 +40694,8 @@
         </p:nvSpPr>
         <p:spPr>
           <a:xfrm>
-            <a:off x="6732727" y="1417320"/>
-            <a:ext cx="4892040" cy="59436"/>
+            <a:off x="5909767" y="1417320"/>
+            <a:ext cx="5715000" cy="59436"/>
           </a:xfrm>
           <a:prstGeom prst="rect">
             <a:avLst/>
@@ -40742,8 +40738,8 @@
         </p:nvSpPr>
         <p:spPr>
           <a:xfrm>
-            <a:off x="6732727" y="6144768"/>
-            <a:ext cx="4892040" cy="365760"/>
+            <a:off x="5909767" y="5273040"/>
+            <a:ext cx="5715000" cy="365760"/>
           </a:xfrm>
           <a:prstGeom prst="rect">
             <a:avLst/>
@@ -40788,7 +40784,7 @@
         <p:spPr>
           <a:xfrm>
             <a:off x="566928" y="1426464"/>
-            <a:ext cx="5781751" cy="996848"/>
+            <a:ext cx="4958791" cy="960582"/>
           </a:xfrm>
           <a:prstGeom prst="roundRect">
             <a:avLst>
@@ -40834,7 +40830,7 @@
         <p:spPr>
           <a:xfrm>
             <a:off x="566928" y="1426464"/>
-            <a:ext cx="45720" cy="996848"/>
+            <a:ext cx="45720" cy="960582"/>
           </a:xfrm>
           <a:prstGeom prst="rect">
             <a:avLst/>
@@ -40878,7 +40874,7 @@
         <p:spPr>
           <a:xfrm>
             <a:off x="768096" y="1563624"/>
-            <a:ext cx="5379415" cy="722528"/>
+            <a:ext cx="4556455" cy="686262"/>
           </a:xfrm>
           <a:prstGeom prst="rect">
             <a:avLst/>
@@ -40903,7 +40899,7 @@
               </a:spcAft>
             </a:pPr>
             <a:r>
-              <a:rPr sz="1100" b="1" i="0">
+              <a:rPr sz="1050" b="1" i="0">
                 <a:solidFill>
                   <a:srgbClr val="F4B400"/>
                 </a:solidFill>
@@ -40925,7 +40921,7 @@
               </a:spcAft>
             </a:pPr>
             <a:r>
-              <a:rPr sz="1000" b="0" i="0">
+              <a:rPr sz="950" b="0" i="0">
                 <a:solidFill>
                   <a:srgbClr val="14262E"/>
                 </a:solidFill>
@@ -40944,8 +40940,8 @@
         </p:nvSpPr>
         <p:spPr>
           <a:xfrm>
-            <a:off x="566928" y="2533040"/>
-            <a:ext cx="5781751" cy="832002"/>
+            <a:off x="566928" y="2496774"/>
+            <a:ext cx="4958791" cy="803978"/>
           </a:xfrm>
           <a:prstGeom prst="roundRect">
             <a:avLst>
@@ -40990,8 +40986,8 @@
         </p:nvSpPr>
         <p:spPr>
           <a:xfrm>
-            <a:off x="566928" y="2533040"/>
-            <a:ext cx="45720" cy="832002"/>
+            <a:off x="566928" y="2496774"/>
+            <a:ext cx="45720" cy="803978"/>
           </a:xfrm>
           <a:prstGeom prst="rect">
             <a:avLst/>
@@ -41034,8 +41030,8 @@
         </p:nvSpPr>
         <p:spPr>
           <a:xfrm>
-            <a:off x="768096" y="2670200"/>
-            <a:ext cx="5379415" cy="557682"/>
+            <a:off x="768096" y="2633934"/>
+            <a:ext cx="4556455" cy="529658"/>
           </a:xfrm>
           <a:prstGeom prst="rect">
             <a:avLst/>
@@ -41060,7 +41056,7 @@
               </a:spcAft>
             </a:pPr>
             <a:r>
-              <a:rPr sz="1100" b="1" i="0">
+              <a:rPr sz="1050" b="1" i="0">
                 <a:solidFill>
                   <a:srgbClr val="F4B400"/>
                 </a:solidFill>
@@ -41082,7 +41078,7 @@
               </a:spcAft>
             </a:pPr>
             <a:r>
-              <a:rPr sz="1000" b="0" i="0">
+              <a:rPr sz="950" b="0" i="0">
                 <a:solidFill>
                   <a:srgbClr val="14262E"/>
                 </a:solidFill>
@@ -41101,8 +41097,8 @@
         </p:nvSpPr>
         <p:spPr>
           <a:xfrm>
-            <a:off x="566928" y="3474770"/>
-            <a:ext cx="5781751" cy="996848"/>
+            <a:off x="566928" y="3410480"/>
+            <a:ext cx="4958791" cy="960582"/>
           </a:xfrm>
           <a:prstGeom prst="roundRect">
             <a:avLst>
@@ -41147,8 +41143,8 @@
         </p:nvSpPr>
         <p:spPr>
           <a:xfrm>
-            <a:off x="566928" y="3474770"/>
-            <a:ext cx="45720" cy="996848"/>
+            <a:off x="566928" y="3410480"/>
+            <a:ext cx="45720" cy="960582"/>
           </a:xfrm>
           <a:prstGeom prst="rect">
             <a:avLst/>
@@ -41191,8 +41187,8 @@
         </p:nvSpPr>
         <p:spPr>
           <a:xfrm>
-            <a:off x="768096" y="3611930"/>
-            <a:ext cx="5379415" cy="722528"/>
+            <a:off x="768096" y="3547640"/>
+            <a:ext cx="4556455" cy="686262"/>
           </a:xfrm>
           <a:prstGeom prst="rect">
             <a:avLst/>
@@ -41217,7 +41213,7 @@
               </a:spcAft>
             </a:pPr>
             <a:r>
-              <a:rPr sz="1100" b="1" i="0">
+              <a:rPr sz="1050" b="1" i="0">
                 <a:solidFill>
                   <a:srgbClr val="F4B400"/>
                 </a:solidFill>
@@ -41239,7 +41235,7 @@
               </a:spcAft>
             </a:pPr>
             <a:r>
-              <a:rPr sz="1000" b="0" i="0">
+              <a:rPr sz="950" b="0" i="0">
                 <a:solidFill>
                   <a:srgbClr val="14262E"/>
                 </a:solidFill>
@@ -41258,8 +41254,8 @@
         </p:nvSpPr>
         <p:spPr>
           <a:xfrm>
-            <a:off x="566928" y="4581347"/>
-            <a:ext cx="5781751" cy="832002"/>
+            <a:off x="566928" y="4480791"/>
+            <a:ext cx="4958791" cy="803978"/>
           </a:xfrm>
           <a:prstGeom prst="roundRect">
             <a:avLst>
@@ -41304,8 +41300,8 @@
         </p:nvSpPr>
         <p:spPr>
           <a:xfrm>
-            <a:off x="566928" y="4581347"/>
-            <a:ext cx="45720" cy="832002"/>
+            <a:off x="566928" y="4480791"/>
+            <a:ext cx="45720" cy="803978"/>
           </a:xfrm>
           <a:prstGeom prst="rect">
             <a:avLst/>
@@ -41348,8 +41344,8 @@
         </p:nvSpPr>
         <p:spPr>
           <a:xfrm>
-            <a:off x="768096" y="4718507"/>
-            <a:ext cx="5379415" cy="557682"/>
+            <a:off x="768096" y="4617951"/>
+            <a:ext cx="4556455" cy="529658"/>
           </a:xfrm>
           <a:prstGeom prst="rect">
             <a:avLst/>
@@ -41374,7 +41370,7 @@
               </a:spcAft>
             </a:pPr>
             <a:r>
-              <a:rPr sz="1100" b="1" i="0">
+              <a:rPr sz="1050" b="1" i="0">
                 <a:solidFill>
                   <a:srgbClr val="F4B400"/>
                 </a:solidFill>
@@ -41396,7 +41392,7 @@
               </a:spcAft>
             </a:pPr>
             <a:r>
-              <a:rPr sz="1000" b="0" i="0">
+              <a:rPr sz="950" b="0" i="0">
                 <a:solidFill>
                   <a:srgbClr val="14262E"/>
                 </a:solidFill>
@@ -41415,8 +41411,8 @@
         </p:nvSpPr>
         <p:spPr>
           <a:xfrm>
-            <a:off x="566928" y="5523077"/>
-            <a:ext cx="5781751" cy="832002"/>
+            <a:off x="566928" y="5394497"/>
+            <a:ext cx="4958791" cy="960582"/>
           </a:xfrm>
           <a:prstGeom prst="roundRect">
             <a:avLst>
@@ -41461,8 +41457,8 @@
         </p:nvSpPr>
         <p:spPr>
           <a:xfrm>
-            <a:off x="566928" y="5523077"/>
-            <a:ext cx="45720" cy="832002"/>
+            <a:off x="566928" y="5394497"/>
+            <a:ext cx="45720" cy="960582"/>
           </a:xfrm>
           <a:prstGeom prst="rect">
             <a:avLst/>
@@ -41505,8 +41501,8 @@
         </p:nvSpPr>
         <p:spPr>
           <a:xfrm>
-            <a:off x="768096" y="5660237"/>
-            <a:ext cx="5379415" cy="557682"/>
+            <a:off x="768096" y="5531657"/>
+            <a:ext cx="4556455" cy="686262"/>
           </a:xfrm>
           <a:prstGeom prst="rect">
             <a:avLst/>
@@ -41531,7 +41527,7 @@
               </a:spcAft>
             </a:pPr>
             <a:r>
-              <a:rPr sz="1100" b="1" i="0">
+              <a:rPr sz="1050" b="1" i="0">
                 <a:solidFill>
                   <a:srgbClr val="F4B400"/>
                 </a:solidFill>
@@ -41553,7 +41549,7 @@
               </a:spcAft>
             </a:pPr>
             <a:r>
-              <a:rPr sz="1000" b="0" i="0">
+              <a:rPr sz="950" b="0" i="0">
                 <a:solidFill>
                   <a:srgbClr val="14262E"/>
                 </a:solidFill>
@@ -42123,7 +42119,6 @@
         </p:nvPicPr>
         <p:blipFill>
           <a:blip r:embed="rId2"/>
-          <a:srcRect l="16667" r="16667"/>
           <a:stretch>
             <a:fillRect/>
           </a:stretch>
@@ -42131,7 +42126,7 @@
         <p:spPr>
           <a:xfrm>
             <a:off x="566928" y="1417320"/>
-            <a:ext cx="4663440" cy="4663440"/>
+            <a:ext cx="5074920" cy="3383279"/>
           </a:xfrm>
           <a:prstGeom prst="rect">
             <a:avLst/>
@@ -42147,7 +42142,7 @@
         <p:spPr>
           <a:xfrm>
             <a:off x="566928" y="1417320"/>
-            <a:ext cx="4663440" cy="59436"/>
+            <a:ext cx="5074920" cy="59436"/>
           </a:xfrm>
           <a:prstGeom prst="rect">
             <a:avLst/>
@@ -42190,7 +42185,164 @@
         </p:nvSpPr>
         <p:spPr>
           <a:xfrm>
-            <a:off x="5614416" y="1408176"/>
+            <a:off x="566928" y="4919472"/>
+            <a:ext cx="5074920" cy="1481328"/>
+          </a:xfrm>
+          <a:prstGeom prst="roundRect">
+            <a:avLst>
+              <a:gd name="adj" fmla="val 6000"/>
+            </a:avLst>
+          </a:prstGeom>
+          <a:solidFill>
+            <a:srgbClr val="E3F1EA"/>
+          </a:solidFill>
+          <a:ln>
+            <a:noFill/>
+          </a:ln>
+          <a:effectLst/>
+        </p:spPr>
+        <p:style>
+          <a:lnRef idx="1">
+            <a:schemeClr val="accent1"/>
+          </a:lnRef>
+          <a:fillRef idx="3">
+            <a:schemeClr val="accent1"/>
+          </a:fillRef>
+          <a:effectRef idx="2">
+            <a:schemeClr val="accent1"/>
+          </a:effectRef>
+          <a:fontRef idx="minor">
+            <a:schemeClr val="lt1"/>
+          </a:fontRef>
+        </p:style>
+        <p:txBody>
+          <a:bodyPr rtlCol="0" anchor="ctr"/>
+          <a:lstStyle/>
+          <a:p>
+            <a:pPr algn="ctr"/>
+          </a:p>
+        </p:txBody>
+      </p:sp>
+      <p:sp>
+        <p:nvSpPr>
+          <p:cNvPr id="9" name="Rectangle 8"/>
+          <p:cNvSpPr/>
+          <p:nvPr/>
+        </p:nvSpPr>
+        <p:spPr>
+          <a:xfrm>
+            <a:off x="566928" y="4919472"/>
+            <a:ext cx="50292" cy="1481328"/>
+          </a:xfrm>
+          <a:prstGeom prst="rect">
+            <a:avLst/>
+          </a:prstGeom>
+          <a:solidFill>
+            <a:srgbClr val="0B6E4F"/>
+          </a:solidFill>
+          <a:ln>
+            <a:noFill/>
+          </a:ln>
+          <a:effectLst/>
+        </p:spPr>
+        <p:style>
+          <a:lnRef idx="1">
+            <a:schemeClr val="accent1"/>
+          </a:lnRef>
+          <a:fillRef idx="3">
+            <a:schemeClr val="accent1"/>
+          </a:fillRef>
+          <a:effectRef idx="2">
+            <a:schemeClr val="accent1"/>
+          </a:effectRef>
+          <a:fontRef idx="minor">
+            <a:schemeClr val="lt1"/>
+          </a:fontRef>
+        </p:style>
+        <p:txBody>
+          <a:bodyPr rtlCol="0" anchor="ctr"/>
+          <a:lstStyle/>
+          <a:p>
+            <a:pPr algn="ctr"/>
+          </a:p>
+        </p:txBody>
+      </p:sp>
+      <p:sp>
+        <p:nvSpPr>
+          <p:cNvPr id="10" name="TextBox 9"/>
+          <p:cNvSpPr txBox="1"/>
+          <p:nvPr/>
+        </p:nvSpPr>
+        <p:spPr>
+          <a:xfrm>
+            <a:off x="804672" y="5084064"/>
+            <a:ext cx="4599431" cy="1152144"/>
+          </a:xfrm>
+          <a:prstGeom prst="rect">
+            <a:avLst/>
+          </a:prstGeom>
+          <a:noFill/>
+        </p:spPr>
+        <p:txBody>
+          <a:bodyPr wrap="square" lIns="0" rIns="0" tIns="0" bIns="0">
+            <a:spAutoFit/>
+          </a:bodyPr>
+          <a:lstStyle/>
+          <a:p>
+            <a:pPr algn="l">
+              <a:lnSpc>
+                <a:spcPct val="100000"/>
+              </a:lnSpc>
+              <a:spcBef>
+                <a:spcPts val="0"/>
+              </a:spcBef>
+              <a:spcAft>
+                <a:spcPts val="500"/>
+              </a:spcAft>
+            </a:pPr>
+            <a:r>
+              <a:rPr sz="1050" b="1" i="0">
+                <a:solidFill>
+                  <a:srgbClr val="0B6E4F"/>
+                </a:solidFill>
+                <a:latin typeface="Trebuchet MS"/>
+              </a:rPr>
+              <a:t>WHY WE START HERE</a:t>
+            </a:r>
+          </a:p>
+          <a:p>
+            <a:pPr algn="l">
+              <a:lnSpc>
+                <a:spcPct val="112000"/>
+              </a:lnSpc>
+              <a:spcBef>
+                <a:spcPts val="0"/>
+              </a:spcBef>
+              <a:spcAft>
+                <a:spcPts val="0"/>
+              </a:spcAft>
+            </a:pPr>
+            <a:r>
+              <a:rPr sz="1100" b="0" i="0">
+                <a:solidFill>
+                  <a:srgbClr val="14262E"/>
+                </a:solidFill>
+                <a:latin typeface="Calibri"/>
+              </a:rPr>
+              <a:t>You will hear words like stress, marks, fear, pressure, paperwork, ranking. You may also hear growth, feedback, help, understanding. Both sets are honest — and the difference between them is the whole point of today.</a:t>
+            </a:r>
+          </a:p>
+        </p:txBody>
+      </p:sp>
+      <p:sp>
+        <p:nvSpPr>
+          <p:cNvPr id="11" name="Rounded Rectangle 10"/>
+          <p:cNvSpPr/>
+          <p:nvPr/>
+        </p:nvSpPr>
+        <p:spPr>
+          <a:xfrm>
+            <a:off x="6053328" y="1408176"/>
             <a:ext cx="1417320" cy="384048"/>
           </a:xfrm>
           <a:prstGeom prst="roundRect">
@@ -42249,14 +42401,14 @@
       </p:sp>
       <p:sp>
         <p:nvSpPr>
-          <p:cNvPr id="9" name="Rounded Rectangle 8"/>
+          <p:cNvPr id="12" name="Rounded Rectangle 11"/>
           <p:cNvSpPr/>
           <p:nvPr/>
         </p:nvSpPr>
         <p:spPr>
           <a:xfrm>
-            <a:off x="5614416" y="1938528"/>
-            <a:ext cx="6010351" cy="1097280"/>
+            <a:off x="6053328" y="1938528"/>
+            <a:ext cx="5571439" cy="1359408"/>
           </a:xfrm>
           <a:prstGeom prst="roundRect">
             <a:avLst>
@@ -42295,14 +42447,14 @@
       </p:sp>
       <p:sp>
         <p:nvSpPr>
-          <p:cNvPr id="10" name="Rectangle 9"/>
+          <p:cNvPr id="13" name="Rectangle 12"/>
           <p:cNvSpPr/>
           <p:nvPr/>
         </p:nvSpPr>
         <p:spPr>
           <a:xfrm>
-            <a:off x="5614416" y="1938528"/>
-            <a:ext cx="50292" cy="1097280"/>
+            <a:off x="6053328" y="1938528"/>
+            <a:ext cx="50292" cy="1359408"/>
           </a:xfrm>
           <a:prstGeom prst="rect">
             <a:avLst/>
@@ -42339,14 +42491,14 @@
       </p:sp>
       <p:sp>
         <p:nvSpPr>
-          <p:cNvPr id="11" name="TextBox 10"/>
+          <p:cNvPr id="14" name="TextBox 13"/>
           <p:cNvSpPr txBox="1"/>
           <p:nvPr/>
         </p:nvSpPr>
         <p:spPr>
           <a:xfrm>
-            <a:off x="5833872" y="2066544"/>
-            <a:ext cx="5571439" cy="841247"/>
+            <a:off x="6291072" y="2139696"/>
+            <a:ext cx="5095951" cy="957072"/>
           </a:xfrm>
           <a:prstGeom prst="rect">
             <a:avLst/>
@@ -42367,11 +42519,11 @@
                 <a:spcPts val="0"/>
               </a:spcBef>
               <a:spcAft>
-                <a:spcPts val="300"/>
-              </a:spcAft>
-            </a:pPr>
-            <a:r>
-              <a:rPr sz="1250" b="1" i="0">
+                <a:spcPts val="600"/>
+              </a:spcAft>
+            </a:pPr>
+            <a:r>
+              <a:rPr sz="1350" b="1" i="0">
                 <a:solidFill>
                   <a:srgbClr val="C1440E"/>
                 </a:solidFill>
@@ -42383,17 +42535,17 @@
           <a:p>
             <a:pPr algn="l">
               <a:lnSpc>
-                <a:spcPct val="110000"/>
-              </a:lnSpc>
-              <a:spcBef>
-                <a:spcPts val="0"/>
-              </a:spcBef>
-              <a:spcAft>
-                <a:spcPts val="0"/>
-              </a:spcAft>
-            </a:pPr>
-            <a:r>
-              <a:rPr sz="1150" b="0" i="0">
+                <a:spcPct val="114000"/>
+              </a:lnSpc>
+              <a:spcBef>
+                <a:spcPts val="0"/>
+              </a:spcBef>
+              <a:spcAft>
+                <a:spcPts val="0"/>
+              </a:spcAft>
+            </a:pPr>
+            <a:r>
+              <a:rPr sz="1200" b="0" i="0">
                 <a:solidFill>
                   <a:srgbClr val="14262E"/>
                 </a:solidFill>
@@ -42406,14 +42558,14 @@
       </p:sp>
       <p:sp>
         <p:nvSpPr>
-          <p:cNvPr id="12" name="Rounded Rectangle 11"/>
+          <p:cNvPr id="15" name="Rounded Rectangle 14"/>
           <p:cNvSpPr/>
           <p:nvPr/>
         </p:nvSpPr>
         <p:spPr>
           <a:xfrm>
-            <a:off x="5614416" y="3127248"/>
-            <a:ext cx="6010351" cy="1097280"/>
+            <a:off x="6053328" y="3444240"/>
+            <a:ext cx="5571439" cy="1359408"/>
           </a:xfrm>
           <a:prstGeom prst="roundRect">
             <a:avLst>
@@ -42452,14 +42604,14 @@
       </p:sp>
       <p:sp>
         <p:nvSpPr>
-          <p:cNvPr id="13" name="Rectangle 12"/>
+          <p:cNvPr id="16" name="Rectangle 15"/>
           <p:cNvSpPr/>
           <p:nvPr/>
         </p:nvSpPr>
         <p:spPr>
           <a:xfrm>
-            <a:off x="5614416" y="3127248"/>
-            <a:ext cx="50292" cy="1097280"/>
+            <a:off x="6053328" y="3444240"/>
+            <a:ext cx="50292" cy="1359408"/>
           </a:xfrm>
           <a:prstGeom prst="rect">
             <a:avLst/>
@@ -42496,14 +42648,14 @@
       </p:sp>
       <p:sp>
         <p:nvSpPr>
-          <p:cNvPr id="14" name="TextBox 13"/>
+          <p:cNvPr id="17" name="TextBox 16"/>
           <p:cNvSpPr txBox="1"/>
           <p:nvPr/>
         </p:nvSpPr>
         <p:spPr>
           <a:xfrm>
-            <a:off x="5833872" y="3255264"/>
-            <a:ext cx="5571439" cy="841247"/>
+            <a:off x="6291072" y="3645408"/>
+            <a:ext cx="5095951" cy="957072"/>
           </a:xfrm>
           <a:prstGeom prst="rect">
             <a:avLst/>
@@ -42524,11 +42676,11 @@
                 <a:spcPts val="0"/>
               </a:spcBef>
               <a:spcAft>
-                <a:spcPts val="300"/>
-              </a:spcAft>
-            </a:pPr>
-            <a:r>
-              <a:rPr sz="1250" b="1" i="0">
+                <a:spcPts val="600"/>
+              </a:spcAft>
+            </a:pPr>
+            <a:r>
+              <a:rPr sz="1350" b="1" i="0">
                 <a:solidFill>
                   <a:srgbClr val="C1440E"/>
                 </a:solidFill>
@@ -42540,17 +42692,17 @@
           <a:p>
             <a:pPr algn="l">
               <a:lnSpc>
-                <a:spcPct val="110000"/>
-              </a:lnSpc>
-              <a:spcBef>
-                <a:spcPts val="0"/>
-              </a:spcBef>
-              <a:spcAft>
-                <a:spcPts val="0"/>
-              </a:spcAft>
-            </a:pPr>
-            <a:r>
-              <a:rPr sz="1150" b="0" i="0">
+                <a:spcPct val="114000"/>
+              </a:lnSpc>
+              <a:spcBef>
+                <a:spcPts val="0"/>
+              </a:spcBef>
+              <a:spcAft>
+                <a:spcPts val="0"/>
+              </a:spcAft>
+            </a:pPr>
+            <a:r>
+              <a:rPr sz="1200" b="0" i="0">
                 <a:solidFill>
                   <a:srgbClr val="14262E"/>
                 </a:solidFill>
@@ -42563,14 +42715,14 @@
       </p:sp>
       <p:sp>
         <p:nvSpPr>
-          <p:cNvPr id="15" name="Rounded Rectangle 14"/>
+          <p:cNvPr id="18" name="Rounded Rectangle 17"/>
           <p:cNvSpPr/>
           <p:nvPr/>
         </p:nvSpPr>
         <p:spPr>
           <a:xfrm>
-            <a:off x="5614416" y="4315968"/>
-            <a:ext cx="6010351" cy="1097280"/>
+            <a:off x="6053328" y="4949952"/>
+            <a:ext cx="5571439" cy="1359408"/>
           </a:xfrm>
           <a:prstGeom prst="roundRect">
             <a:avLst>
@@ -42609,14 +42761,14 @@
       </p:sp>
       <p:sp>
         <p:nvSpPr>
-          <p:cNvPr id="16" name="Rectangle 15"/>
+          <p:cNvPr id="19" name="Rectangle 18"/>
           <p:cNvSpPr/>
           <p:nvPr/>
         </p:nvSpPr>
         <p:spPr>
           <a:xfrm>
-            <a:off x="5614416" y="4315968"/>
-            <a:ext cx="50292" cy="1097280"/>
+            <a:off x="6053328" y="4949952"/>
+            <a:ext cx="50292" cy="1359408"/>
           </a:xfrm>
           <a:prstGeom prst="rect">
             <a:avLst/>
@@ -42653,14 +42805,14 @@
       </p:sp>
       <p:sp>
         <p:nvSpPr>
-          <p:cNvPr id="17" name="TextBox 16"/>
+          <p:cNvPr id="20" name="TextBox 19"/>
           <p:cNvSpPr txBox="1"/>
           <p:nvPr/>
         </p:nvSpPr>
         <p:spPr>
           <a:xfrm>
-            <a:off x="5833872" y="4443984"/>
-            <a:ext cx="5571439" cy="841247"/>
+            <a:off x="6291072" y="5151120"/>
+            <a:ext cx="5095951" cy="957072"/>
           </a:xfrm>
           <a:prstGeom prst="rect">
             <a:avLst/>
@@ -42681,11 +42833,11 @@
                 <a:spcPts val="0"/>
               </a:spcBef>
               <a:spcAft>
-                <a:spcPts val="300"/>
-              </a:spcAft>
-            </a:pPr>
-            <a:r>
-              <a:rPr sz="1250" b="1" i="0">
+                <a:spcPts val="600"/>
+              </a:spcAft>
+            </a:pPr>
+            <a:r>
+              <a:rPr sz="1350" b="1" i="0">
                 <a:solidFill>
                   <a:srgbClr val="C1440E"/>
                 </a:solidFill>
@@ -42697,180 +42849,23 @@
           <a:p>
             <a:pPr algn="l">
               <a:lnSpc>
-                <a:spcPct val="110000"/>
-              </a:lnSpc>
-              <a:spcBef>
-                <a:spcPts val="0"/>
-              </a:spcBef>
-              <a:spcAft>
-                <a:spcPts val="0"/>
-              </a:spcAft>
-            </a:pPr>
-            <a:r>
-              <a:rPr sz="1150" b="0" i="0">
+                <a:spcPct val="114000"/>
+              </a:lnSpc>
+              <a:spcBef>
+                <a:spcPts val="0"/>
+              </a:spcBef>
+              <a:spcAft>
+                <a:spcPts val="0"/>
+              </a:spcAft>
+            </a:pPr>
+            <a:r>
+              <a:rPr sz="1200" b="0" i="0">
                 <a:solidFill>
                   <a:srgbClr val="14262E"/>
                 </a:solidFill>
                 <a:latin typeface="Calibri"/>
               </a:rPr>
               <a:t>We will hear a few out loud. Every word is welcome — including the uncomfortable ones.</a:t>
-            </a:r>
-          </a:p>
-        </p:txBody>
-      </p:sp>
-      <p:sp>
-        <p:nvSpPr>
-          <p:cNvPr id="18" name="Rounded Rectangle 17"/>
-          <p:cNvSpPr/>
-          <p:nvPr/>
-        </p:nvSpPr>
-        <p:spPr>
-          <a:xfrm>
-            <a:off x="5614416" y="5413248"/>
-            <a:ext cx="6010351" cy="1572768"/>
-          </a:xfrm>
-          <a:prstGeom prst="roundRect">
-            <a:avLst>
-              <a:gd name="adj" fmla="val 6000"/>
-            </a:avLst>
-          </a:prstGeom>
-          <a:solidFill>
-            <a:srgbClr val="E3F1EA"/>
-          </a:solidFill>
-          <a:ln>
-            <a:noFill/>
-          </a:ln>
-          <a:effectLst/>
-        </p:spPr>
-        <p:style>
-          <a:lnRef idx="1">
-            <a:schemeClr val="accent1"/>
-          </a:lnRef>
-          <a:fillRef idx="3">
-            <a:schemeClr val="accent1"/>
-          </a:fillRef>
-          <a:effectRef idx="2">
-            <a:schemeClr val="accent1"/>
-          </a:effectRef>
-          <a:fontRef idx="minor">
-            <a:schemeClr val="lt1"/>
-          </a:fontRef>
-        </p:style>
-        <p:txBody>
-          <a:bodyPr rtlCol="0" anchor="ctr"/>
-          <a:lstStyle/>
-          <a:p>
-            <a:pPr algn="ctr"/>
-          </a:p>
-        </p:txBody>
-      </p:sp>
-      <p:sp>
-        <p:nvSpPr>
-          <p:cNvPr id="19" name="Rectangle 18"/>
-          <p:cNvSpPr/>
-          <p:nvPr/>
-        </p:nvSpPr>
-        <p:spPr>
-          <a:xfrm>
-            <a:off x="5614416" y="5413248"/>
-            <a:ext cx="50292" cy="1572768"/>
-          </a:xfrm>
-          <a:prstGeom prst="rect">
-            <a:avLst/>
-          </a:prstGeom>
-          <a:solidFill>
-            <a:srgbClr val="0B6E4F"/>
-          </a:solidFill>
-          <a:ln>
-            <a:noFill/>
-          </a:ln>
-          <a:effectLst/>
-        </p:spPr>
-        <p:style>
-          <a:lnRef idx="1">
-            <a:schemeClr val="accent1"/>
-          </a:lnRef>
-          <a:fillRef idx="3">
-            <a:schemeClr val="accent1"/>
-          </a:fillRef>
-          <a:effectRef idx="2">
-            <a:schemeClr val="accent1"/>
-          </a:effectRef>
-          <a:fontRef idx="minor">
-            <a:schemeClr val="lt1"/>
-          </a:fontRef>
-        </p:style>
-        <p:txBody>
-          <a:bodyPr rtlCol="0" anchor="ctr"/>
-          <a:lstStyle/>
-          <a:p>
-            <a:pPr algn="ctr"/>
-          </a:p>
-        </p:txBody>
-      </p:sp>
-      <p:sp>
-        <p:nvSpPr>
-          <p:cNvPr id="20" name="TextBox 19"/>
-          <p:cNvSpPr txBox="1"/>
-          <p:nvPr/>
-        </p:nvSpPr>
-        <p:spPr>
-          <a:xfrm>
-            <a:off x="5833872" y="5559552"/>
-            <a:ext cx="5571439" cy="1316736"/>
-          </a:xfrm>
-          <a:prstGeom prst="rect">
-            <a:avLst/>
-          </a:prstGeom>
-          <a:noFill/>
-        </p:spPr>
-        <p:txBody>
-          <a:bodyPr wrap="square" lIns="0" rIns="0" tIns="0" bIns="0">
-            <a:spAutoFit/>
-          </a:bodyPr>
-          <a:lstStyle/>
-          <a:p>
-            <a:pPr algn="l">
-              <a:lnSpc>
-                <a:spcPct val="100000"/>
-              </a:lnSpc>
-              <a:spcBef>
-                <a:spcPts val="0"/>
-              </a:spcBef>
-              <a:spcAft>
-                <a:spcPts val="500"/>
-              </a:spcAft>
-            </a:pPr>
-            <a:r>
-              <a:rPr sz="1050" b="1" i="0">
-                <a:solidFill>
-                  <a:srgbClr val="0B6E4F"/>
-                </a:solidFill>
-                <a:latin typeface="Trebuchet MS"/>
-              </a:rPr>
-              <a:t>WHY WE START HERE</a:t>
-            </a:r>
-          </a:p>
-          <a:p>
-            <a:pPr algn="l">
-              <a:lnSpc>
-                <a:spcPct val="112000"/>
-              </a:lnSpc>
-              <a:spcBef>
-                <a:spcPts val="0"/>
-              </a:spcBef>
-              <a:spcAft>
-                <a:spcPts val="0"/>
-              </a:spcAft>
-            </a:pPr>
-            <a:r>
-              <a:rPr sz="1100" b="0" i="0">
-                <a:solidFill>
-                  <a:srgbClr val="14262E"/>
-                </a:solidFill>
-                <a:latin typeface="Calibri"/>
-              </a:rPr>
-              <a:t>You will hear words like stress, marks, fear, pressure, paperwork, ranking. You may also hear growth, feedback, help, understanding. Both sets are honest — and the difference between them is the whole point of today.</a:t>
             </a:r>
           </a:p>
         </p:txBody>
@@ -43126,7 +43121,6 @@
         </p:nvPicPr>
         <p:blipFill>
           <a:blip r:embed="rId2"/>
-          <a:srcRect l="23529" r="23529"/>
           <a:stretch>
             <a:fillRect/>
           </a:stretch>
@@ -43134,7 +43128,7 @@
         <p:spPr>
           <a:xfrm>
             <a:off x="566928" y="1417320"/>
-            <a:ext cx="3703320" cy="4663440"/>
+            <a:ext cx="4160520" cy="2773680"/>
           </a:xfrm>
           <a:prstGeom prst="rect">
             <a:avLst/>
@@ -43150,7 +43144,7 @@
         <p:spPr>
           <a:xfrm>
             <a:off x="566928" y="1417320"/>
-            <a:ext cx="3703320" cy="59436"/>
+            <a:ext cx="4160520" cy="59436"/>
           </a:xfrm>
           <a:prstGeom prst="rect">
             <a:avLst/>
@@ -43187,13 +43181,58 @@
       </p:sp>
       <p:sp>
         <p:nvSpPr>
-          <p:cNvPr id="8" name="Rounded Rectangle 7"/>
+          <p:cNvPr id="8" name="TextBox 7"/>
+          <p:cNvSpPr txBox="1"/>
+          <p:nvPr/>
+        </p:nvSpPr>
+        <p:spPr>
+          <a:xfrm>
+            <a:off x="566928" y="4273296"/>
+            <a:ext cx="4160520" cy="411480"/>
+          </a:xfrm>
+          <a:prstGeom prst="rect">
+            <a:avLst/>
+          </a:prstGeom>
+          <a:noFill/>
+        </p:spPr>
+        <p:txBody>
+          <a:bodyPr wrap="square" lIns="0" rIns="0" tIns="0" bIns="0">
+            <a:spAutoFit/>
+          </a:bodyPr>
+          <a:lstStyle/>
+          <a:p>
+            <a:pPr algn="ctr">
+              <a:lnSpc>
+                <a:spcPct val="108000"/>
+              </a:lnSpc>
+              <a:spcBef>
+                <a:spcPts val="0"/>
+              </a:spcBef>
+              <a:spcAft>
+                <a:spcPts val="0"/>
+              </a:spcAft>
+            </a:pPr>
+            <a:r>
+              <a:rPr sz="1050" b="0" i="1">
+                <a:solidFill>
+                  <a:srgbClr val="5A6B72"/>
+                </a:solidFill>
+                <a:latin typeface="Calibri"/>
+              </a:rPr>
+              <a:t>You will need: A3 or flip-chart paper, marker pens, sticky notes.</a:t>
+            </a:r>
+          </a:p>
+        </p:txBody>
+      </p:sp>
+      <p:sp>
+        <p:nvSpPr>
+          <p:cNvPr id="9" name="Rounded Rectangle 8"/>
           <p:cNvSpPr/>
           <p:nvPr/>
         </p:nvSpPr>
         <p:spPr>
           <a:xfrm>
-            <a:off x="4654296" y="1389888"/>
+            <a:off x="5138928" y="1389888"/>
             <a:ext cx="1691640" cy="402336"/>
           </a:xfrm>
           <a:prstGeom prst="roundRect">
@@ -43252,14 +43291,14 @@
       </p:sp>
       <p:sp>
         <p:nvSpPr>
-          <p:cNvPr id="9" name="Rounded Rectangle 8"/>
+          <p:cNvPr id="10" name="Rounded Rectangle 9"/>
           <p:cNvSpPr/>
           <p:nvPr/>
         </p:nvSpPr>
         <p:spPr>
           <a:xfrm>
-            <a:off x="4654296" y="1920240"/>
-            <a:ext cx="6970471" cy="826617"/>
+            <a:off x="5138928" y="1920240"/>
+            <a:ext cx="6485839" cy="826617"/>
           </a:xfrm>
           <a:prstGeom prst="roundRect">
             <a:avLst>
@@ -43298,13 +43337,13 @@
       </p:sp>
       <p:sp>
         <p:nvSpPr>
-          <p:cNvPr id="10" name="Rectangle 9"/>
+          <p:cNvPr id="11" name="Rectangle 10"/>
           <p:cNvSpPr/>
           <p:nvPr/>
         </p:nvSpPr>
         <p:spPr>
           <a:xfrm>
-            <a:off x="4654296" y="1920240"/>
+            <a:off x="5138928" y="1920240"/>
             <a:ext cx="50292" cy="826617"/>
           </a:xfrm>
           <a:prstGeom prst="rect">
@@ -43342,13 +43381,13 @@
       </p:sp>
       <p:sp>
         <p:nvSpPr>
-          <p:cNvPr id="11" name="Oval 10"/>
+          <p:cNvPr id="12" name="Oval 11"/>
           <p:cNvSpPr/>
           <p:nvPr/>
         </p:nvSpPr>
         <p:spPr>
           <a:xfrm>
-            <a:off x="4837176" y="2178100"/>
+            <a:off x="5321808" y="2178100"/>
             <a:ext cx="310896" cy="310896"/>
           </a:xfrm>
           <a:prstGeom prst="ellipse">
@@ -43405,14 +43444,14 @@
       </p:sp>
       <p:sp>
         <p:nvSpPr>
-          <p:cNvPr id="12" name="TextBox 11"/>
+          <p:cNvPr id="13" name="TextBox 12"/>
           <p:cNvSpPr txBox="1"/>
           <p:nvPr/>
         </p:nvSpPr>
         <p:spPr>
           <a:xfrm>
-            <a:off x="5276088" y="2011680"/>
-            <a:ext cx="6129223" cy="643737"/>
+            <a:off x="5760720" y="2011680"/>
+            <a:ext cx="5644591" cy="643737"/>
           </a:xfrm>
           <a:prstGeom prst="rect">
             <a:avLst/>
@@ -43472,14 +43511,14 @@
       </p:sp>
       <p:sp>
         <p:nvSpPr>
-          <p:cNvPr id="13" name="Rounded Rectangle 12"/>
+          <p:cNvPr id="14" name="Rounded Rectangle 13"/>
           <p:cNvSpPr/>
           <p:nvPr/>
         </p:nvSpPr>
         <p:spPr>
           <a:xfrm>
-            <a:off x="4654296" y="2829153"/>
-            <a:ext cx="6970471" cy="826617"/>
+            <a:off x="5138928" y="2829153"/>
+            <a:ext cx="6485839" cy="826617"/>
           </a:xfrm>
           <a:prstGeom prst="roundRect">
             <a:avLst>
@@ -43518,13 +43557,13 @@
       </p:sp>
       <p:sp>
         <p:nvSpPr>
-          <p:cNvPr id="14" name="Rectangle 13"/>
+          <p:cNvPr id="15" name="Rectangle 14"/>
           <p:cNvSpPr/>
           <p:nvPr/>
         </p:nvSpPr>
         <p:spPr>
           <a:xfrm>
-            <a:off x="4654296" y="2829153"/>
+            <a:off x="5138928" y="2829153"/>
             <a:ext cx="50292" cy="826617"/>
           </a:xfrm>
           <a:prstGeom prst="rect">
@@ -43562,13 +43601,13 @@
       </p:sp>
       <p:sp>
         <p:nvSpPr>
-          <p:cNvPr id="15" name="Oval 14"/>
+          <p:cNvPr id="16" name="Oval 15"/>
           <p:cNvSpPr/>
           <p:nvPr/>
         </p:nvSpPr>
         <p:spPr>
           <a:xfrm>
-            <a:off x="4837176" y="3087014"/>
+            <a:off x="5321808" y="3087014"/>
             <a:ext cx="310896" cy="310896"/>
           </a:xfrm>
           <a:prstGeom prst="ellipse">
@@ -43625,14 +43664,14 @@
       </p:sp>
       <p:sp>
         <p:nvSpPr>
-          <p:cNvPr id="16" name="TextBox 15"/>
+          <p:cNvPr id="17" name="TextBox 16"/>
           <p:cNvSpPr txBox="1"/>
           <p:nvPr/>
         </p:nvSpPr>
         <p:spPr>
           <a:xfrm>
-            <a:off x="5276088" y="2920593"/>
-            <a:ext cx="6129223" cy="643737"/>
+            <a:off x="5760720" y="2920593"/>
+            <a:ext cx="5644591" cy="643737"/>
           </a:xfrm>
           <a:prstGeom prst="rect">
             <a:avLst/>
@@ -43692,14 +43731,14 @@
       </p:sp>
       <p:sp>
         <p:nvSpPr>
-          <p:cNvPr id="17" name="Rounded Rectangle 16"/>
+          <p:cNvPr id="18" name="Rounded Rectangle 17"/>
           <p:cNvSpPr/>
           <p:nvPr/>
         </p:nvSpPr>
         <p:spPr>
           <a:xfrm>
-            <a:off x="4654296" y="3738067"/>
-            <a:ext cx="6970471" cy="826617"/>
+            <a:off x="5138928" y="3738067"/>
+            <a:ext cx="6485839" cy="826617"/>
           </a:xfrm>
           <a:prstGeom prst="roundRect">
             <a:avLst>
@@ -43738,13 +43777,13 @@
       </p:sp>
       <p:sp>
         <p:nvSpPr>
-          <p:cNvPr id="18" name="Rectangle 17"/>
+          <p:cNvPr id="19" name="Rectangle 18"/>
           <p:cNvSpPr/>
           <p:nvPr/>
         </p:nvSpPr>
         <p:spPr>
           <a:xfrm>
-            <a:off x="4654296" y="3738067"/>
+            <a:off x="5138928" y="3738067"/>
             <a:ext cx="50292" cy="826617"/>
           </a:xfrm>
           <a:prstGeom prst="rect">
@@ -43782,13 +43821,13 @@
       </p:sp>
       <p:sp>
         <p:nvSpPr>
-          <p:cNvPr id="19" name="Oval 18"/>
+          <p:cNvPr id="20" name="Oval 19"/>
           <p:cNvSpPr/>
           <p:nvPr/>
         </p:nvSpPr>
         <p:spPr>
           <a:xfrm>
-            <a:off x="4837176" y="3995928"/>
+            <a:off x="5321808" y="3995928"/>
             <a:ext cx="310896" cy="310896"/>
           </a:xfrm>
           <a:prstGeom prst="ellipse">
@@ -43845,14 +43884,14 @@
       </p:sp>
       <p:sp>
         <p:nvSpPr>
-          <p:cNvPr id="20" name="TextBox 19"/>
+          <p:cNvPr id="21" name="TextBox 20"/>
           <p:cNvSpPr txBox="1"/>
           <p:nvPr/>
         </p:nvSpPr>
         <p:spPr>
           <a:xfrm>
-            <a:off x="5276088" y="3829507"/>
-            <a:ext cx="6129223" cy="643737"/>
+            <a:off x="5760720" y="3829507"/>
+            <a:ext cx="5644591" cy="643737"/>
           </a:xfrm>
           <a:prstGeom prst="rect">
             <a:avLst/>
@@ -43912,14 +43951,14 @@
       </p:sp>
       <p:sp>
         <p:nvSpPr>
-          <p:cNvPr id="21" name="Rounded Rectangle 20"/>
+          <p:cNvPr id="22" name="Rounded Rectangle 21"/>
           <p:cNvSpPr/>
           <p:nvPr/>
         </p:nvSpPr>
         <p:spPr>
           <a:xfrm>
-            <a:off x="4654296" y="4646980"/>
-            <a:ext cx="6970471" cy="826617"/>
+            <a:off x="5138928" y="4646980"/>
+            <a:ext cx="6485839" cy="826617"/>
           </a:xfrm>
           <a:prstGeom prst="roundRect">
             <a:avLst>
@@ -43958,13 +43997,13 @@
       </p:sp>
       <p:sp>
         <p:nvSpPr>
-          <p:cNvPr id="22" name="Rectangle 21"/>
+          <p:cNvPr id="23" name="Rectangle 22"/>
           <p:cNvSpPr/>
           <p:nvPr/>
         </p:nvSpPr>
         <p:spPr>
           <a:xfrm>
-            <a:off x="4654296" y="4646980"/>
+            <a:off x="5138928" y="4646980"/>
             <a:ext cx="50292" cy="826617"/>
           </a:xfrm>
           <a:prstGeom prst="rect">
@@ -44002,13 +44041,13 @@
       </p:sp>
       <p:sp>
         <p:nvSpPr>
-          <p:cNvPr id="23" name="Oval 22"/>
+          <p:cNvPr id="24" name="Oval 23"/>
           <p:cNvSpPr/>
           <p:nvPr/>
         </p:nvSpPr>
         <p:spPr>
           <a:xfrm>
-            <a:off x="4837176" y="4904841"/>
+            <a:off x="5321808" y="4904841"/>
             <a:ext cx="310896" cy="310896"/>
           </a:xfrm>
           <a:prstGeom prst="ellipse">
@@ -44065,14 +44104,14 @@
       </p:sp>
       <p:sp>
         <p:nvSpPr>
-          <p:cNvPr id="24" name="TextBox 23"/>
+          <p:cNvPr id="25" name="TextBox 24"/>
           <p:cNvSpPr txBox="1"/>
           <p:nvPr/>
         </p:nvSpPr>
         <p:spPr>
           <a:xfrm>
-            <a:off x="5276088" y="4738420"/>
-            <a:ext cx="6129223" cy="643737"/>
+            <a:off x="5760720" y="4738420"/>
+            <a:ext cx="5644591" cy="643737"/>
           </a:xfrm>
           <a:prstGeom prst="rect">
             <a:avLst/>
@@ -44132,14 +44171,14 @@
       </p:sp>
       <p:sp>
         <p:nvSpPr>
-          <p:cNvPr id="25" name="Rounded Rectangle 24"/>
+          <p:cNvPr id="26" name="Rounded Rectangle 25"/>
           <p:cNvSpPr/>
           <p:nvPr/>
         </p:nvSpPr>
         <p:spPr>
           <a:xfrm>
-            <a:off x="4654296" y="5555894"/>
-            <a:ext cx="6970471" cy="826617"/>
+            <a:off x="5138928" y="5555894"/>
+            <a:ext cx="6485839" cy="826617"/>
           </a:xfrm>
           <a:prstGeom prst="roundRect">
             <a:avLst>
@@ -44178,13 +44217,13 @@
       </p:sp>
       <p:sp>
         <p:nvSpPr>
-          <p:cNvPr id="26" name="Rectangle 25"/>
+          <p:cNvPr id="27" name="Rectangle 26"/>
           <p:cNvSpPr/>
           <p:nvPr/>
         </p:nvSpPr>
         <p:spPr>
           <a:xfrm>
-            <a:off x="4654296" y="5555894"/>
+            <a:off x="5138928" y="5555894"/>
             <a:ext cx="50292" cy="826617"/>
           </a:xfrm>
           <a:prstGeom prst="rect">
@@ -44222,13 +44261,13 @@
       </p:sp>
       <p:sp>
         <p:nvSpPr>
-          <p:cNvPr id="27" name="Oval 26"/>
+          <p:cNvPr id="28" name="Oval 27"/>
           <p:cNvSpPr/>
           <p:nvPr/>
         </p:nvSpPr>
         <p:spPr>
           <a:xfrm>
-            <a:off x="4837176" y="5813755"/>
+            <a:off x="5321808" y="5813755"/>
             <a:ext cx="310896" cy="310896"/>
           </a:xfrm>
           <a:prstGeom prst="ellipse">
@@ -44285,14 +44324,14 @@
       </p:sp>
       <p:sp>
         <p:nvSpPr>
-          <p:cNvPr id="28" name="TextBox 27"/>
+          <p:cNvPr id="29" name="TextBox 28"/>
           <p:cNvSpPr txBox="1"/>
           <p:nvPr/>
         </p:nvSpPr>
         <p:spPr>
           <a:xfrm>
-            <a:off x="5276088" y="5647334"/>
-            <a:ext cx="6129223" cy="643737"/>
+            <a:off x="5760720" y="5647334"/>
+            <a:ext cx="5644591" cy="643737"/>
           </a:xfrm>
           <a:prstGeom prst="rect">
             <a:avLst/>
@@ -44352,7 +44391,7 @@
       </p:sp>
       <p:sp>
         <p:nvSpPr>
-          <p:cNvPr id="29" name="TextBox 28"/>
+          <p:cNvPr id="30" name="TextBox 29"/>
           <p:cNvSpPr txBox="1"/>
           <p:nvPr/>
         </p:nvSpPr>
@@ -47186,7 +47225,7 @@
         <p:spPr>
           <a:xfrm>
             <a:off x="566928" y="2249424"/>
-            <a:ext cx="11057839" cy="758952"/>
+            <a:ext cx="11057839" cy="694944"/>
           </a:xfrm>
           <a:prstGeom prst="rect">
             <a:avLst/>
@@ -47230,7 +47269,7 @@
         <p:spPr>
           <a:xfrm>
             <a:off x="685800" y="2313432"/>
-            <a:ext cx="1728216" cy="667512"/>
+            <a:ext cx="1728216" cy="603504"/>
           </a:xfrm>
           <a:prstGeom prst="rect">
             <a:avLst/>
@@ -47255,7 +47294,7 @@
               </a:spcAft>
             </a:pPr>
             <a:r>
-              <a:rPr sz="1100" b="1" i="0">
+              <a:rPr sz="1050" b="1" i="0">
                 <a:solidFill>
                   <a:srgbClr val="14262E"/>
                 </a:solidFill>
@@ -47275,7 +47314,7 @@
         <p:spPr>
           <a:xfrm>
             <a:off x="2651760" y="2313432"/>
-            <a:ext cx="5568696" cy="667512"/>
+            <a:ext cx="5568696" cy="603504"/>
           </a:xfrm>
           <a:prstGeom prst="rect">
             <a:avLst/>
@@ -47300,7 +47339,7 @@
               </a:spcAft>
             </a:pPr>
             <a:r>
-              <a:rPr sz="1100" b="0" i="0">
+              <a:rPr sz="1050" b="0" i="0">
                 <a:solidFill>
                   <a:srgbClr val="14262E"/>
                 </a:solidFill>
@@ -47320,7 +47359,7 @@
         <p:spPr>
           <a:xfrm>
             <a:off x="8458200" y="2313432"/>
-            <a:ext cx="3044952" cy="667512"/>
+            <a:ext cx="3044952" cy="603504"/>
           </a:xfrm>
           <a:prstGeom prst="rect">
             <a:avLst/>
@@ -47345,7 +47384,7 @@
               </a:spcAft>
             </a:pPr>
             <a:r>
-              <a:rPr sz="1100" b="0" i="0">
+              <a:rPr sz="1050" b="0" i="0">
                 <a:solidFill>
                   <a:srgbClr val="14262E"/>
                 </a:solidFill>
@@ -47364,8 +47403,8 @@
         </p:nvSpPr>
         <p:spPr>
           <a:xfrm>
-            <a:off x="566928" y="3008376"/>
-            <a:ext cx="11057839" cy="758952"/>
+            <a:off x="566928" y="2944368"/>
+            <a:ext cx="11057839" cy="694944"/>
           </a:xfrm>
           <a:prstGeom prst="rect">
             <a:avLst/>
@@ -47408,8 +47447,8 @@
         </p:nvSpPr>
         <p:spPr>
           <a:xfrm>
-            <a:off x="685800" y="3072384"/>
-            <a:ext cx="1728216" cy="667512"/>
+            <a:off x="685800" y="3008375"/>
+            <a:ext cx="1728216" cy="603504"/>
           </a:xfrm>
           <a:prstGeom prst="rect">
             <a:avLst/>
@@ -47434,7 +47473,7 @@
               </a:spcAft>
             </a:pPr>
             <a:r>
-              <a:rPr sz="1100" b="1" i="0">
+              <a:rPr sz="1050" b="1" i="0">
                 <a:solidFill>
                   <a:srgbClr val="14262E"/>
                 </a:solidFill>
@@ -47453,8 +47492,8 @@
         </p:nvSpPr>
         <p:spPr>
           <a:xfrm>
-            <a:off x="2651760" y="3072384"/>
-            <a:ext cx="5568696" cy="667512"/>
+            <a:off x="2651760" y="3008375"/>
+            <a:ext cx="5568696" cy="603504"/>
           </a:xfrm>
           <a:prstGeom prst="rect">
             <a:avLst/>
@@ -47479,7 +47518,7 @@
               </a:spcAft>
             </a:pPr>
             <a:r>
-              <a:rPr sz="1100" b="0" i="0">
+              <a:rPr sz="1050" b="0" i="0">
                 <a:solidFill>
                   <a:srgbClr val="14262E"/>
                 </a:solidFill>
@@ -47498,8 +47537,8 @@
         </p:nvSpPr>
         <p:spPr>
           <a:xfrm>
-            <a:off x="8458200" y="3072384"/>
-            <a:ext cx="3044952" cy="667512"/>
+            <a:off x="8458200" y="3008375"/>
+            <a:ext cx="3044952" cy="603504"/>
           </a:xfrm>
           <a:prstGeom prst="rect">
             <a:avLst/>
@@ -47524,7 +47563,7 @@
               </a:spcAft>
             </a:pPr>
             <a:r>
-              <a:rPr sz="1100" b="0" i="0">
+              <a:rPr sz="1050" b="0" i="0">
                 <a:solidFill>
                   <a:srgbClr val="14262E"/>
                 </a:solidFill>
@@ -47543,8 +47582,8 @@
         </p:nvSpPr>
         <p:spPr>
           <a:xfrm>
-            <a:off x="566928" y="3767328"/>
-            <a:ext cx="11057839" cy="758952"/>
+            <a:off x="566928" y="3639311"/>
+            <a:ext cx="11057839" cy="694944"/>
           </a:xfrm>
           <a:prstGeom prst="rect">
             <a:avLst/>
@@ -47587,8 +47626,8 @@
         </p:nvSpPr>
         <p:spPr>
           <a:xfrm>
-            <a:off x="685800" y="3831336"/>
-            <a:ext cx="1728216" cy="667512"/>
+            <a:off x="685800" y="3703320"/>
+            <a:ext cx="1728216" cy="603504"/>
           </a:xfrm>
           <a:prstGeom prst="rect">
             <a:avLst/>
@@ -47613,7 +47652,7 @@
               </a:spcAft>
             </a:pPr>
             <a:r>
-              <a:rPr sz="1100" b="1" i="0">
+              <a:rPr sz="1050" b="1" i="0">
                 <a:solidFill>
                   <a:srgbClr val="14262E"/>
                 </a:solidFill>
@@ -47632,8 +47671,8 @@
         </p:nvSpPr>
         <p:spPr>
           <a:xfrm>
-            <a:off x="2651760" y="3831336"/>
-            <a:ext cx="5568696" cy="667512"/>
+            <a:off x="2651760" y="3703320"/>
+            <a:ext cx="5568696" cy="603504"/>
           </a:xfrm>
           <a:prstGeom prst="rect">
             <a:avLst/>
@@ -47658,7 +47697,7 @@
               </a:spcAft>
             </a:pPr>
             <a:r>
-              <a:rPr sz="1100" b="0" i="0">
+              <a:rPr sz="1050" b="0" i="0">
                 <a:solidFill>
                   <a:srgbClr val="14262E"/>
                 </a:solidFill>
@@ -47677,8 +47716,8 @@
         </p:nvSpPr>
         <p:spPr>
           <a:xfrm>
-            <a:off x="8458200" y="3831336"/>
-            <a:ext cx="3044952" cy="667512"/>
+            <a:off x="8458200" y="3703320"/>
+            <a:ext cx="3044952" cy="603504"/>
           </a:xfrm>
           <a:prstGeom prst="rect">
             <a:avLst/>
@@ -47703,7 +47742,7 @@
               </a:spcAft>
             </a:pPr>
             <a:r>
-              <a:rPr sz="1100" b="0" i="0">
+              <a:rPr sz="1050" b="0" i="0">
                 <a:solidFill>
                   <a:srgbClr val="14262E"/>
                 </a:solidFill>
@@ -47722,8 +47761,8 @@
         </p:nvSpPr>
         <p:spPr>
           <a:xfrm>
-            <a:off x="566928" y="4526280"/>
-            <a:ext cx="11057839" cy="758952"/>
+            <a:off x="566928" y="4334255"/>
+            <a:ext cx="11057839" cy="694944"/>
           </a:xfrm>
           <a:prstGeom prst="rect">
             <a:avLst/>
@@ -47766,8 +47805,8 @@
         </p:nvSpPr>
         <p:spPr>
           <a:xfrm>
-            <a:off x="685800" y="4590288"/>
-            <a:ext cx="1728216" cy="667512"/>
+            <a:off x="685800" y="4398264"/>
+            <a:ext cx="1728216" cy="603504"/>
           </a:xfrm>
           <a:prstGeom prst="rect">
             <a:avLst/>
@@ -47792,7 +47831,7 @@
               </a:spcAft>
             </a:pPr>
             <a:r>
-              <a:rPr sz="1100" b="1" i="0">
+              <a:rPr sz="1050" b="1" i="0">
                 <a:solidFill>
                   <a:srgbClr val="14262E"/>
                 </a:solidFill>
@@ -47811,8 +47850,8 @@
         </p:nvSpPr>
         <p:spPr>
           <a:xfrm>
-            <a:off x="2651760" y="4590288"/>
-            <a:ext cx="5568696" cy="667512"/>
+            <a:off x="2651760" y="4398264"/>
+            <a:ext cx="5568696" cy="603504"/>
           </a:xfrm>
           <a:prstGeom prst="rect">
             <a:avLst/>
@@ -47837,7 +47876,7 @@
               </a:spcAft>
             </a:pPr>
             <a:r>
-              <a:rPr sz="1100" b="0" i="0">
+              <a:rPr sz="1050" b="0" i="0">
                 <a:solidFill>
                   <a:srgbClr val="14262E"/>
                 </a:solidFill>
@@ -47856,8 +47895,8 @@
         </p:nvSpPr>
         <p:spPr>
           <a:xfrm>
-            <a:off x="8458200" y="4590288"/>
-            <a:ext cx="3044952" cy="667512"/>
+            <a:off x="8458200" y="4398264"/>
+            <a:ext cx="3044952" cy="603504"/>
           </a:xfrm>
           <a:prstGeom prst="rect">
             <a:avLst/>
@@ -47882,7 +47921,7 @@
               </a:spcAft>
             </a:pPr>
             <a:r>
-              <a:rPr sz="1100" b="0" i="0">
+              <a:rPr sz="1050" b="0" i="0">
                 <a:solidFill>
                   <a:srgbClr val="14262E"/>
                 </a:solidFill>
@@ -47901,8 +47940,8 @@
         </p:nvSpPr>
         <p:spPr>
           <a:xfrm>
-            <a:off x="566928" y="5285232"/>
-            <a:ext cx="11057839" cy="758952"/>
+            <a:off x="566928" y="5029199"/>
+            <a:ext cx="11057839" cy="694944"/>
           </a:xfrm>
           <a:prstGeom prst="rect">
             <a:avLst/>
@@ -47945,8 +47984,8 @@
         </p:nvSpPr>
         <p:spPr>
           <a:xfrm>
-            <a:off x="685800" y="5349240"/>
-            <a:ext cx="1728216" cy="667512"/>
+            <a:off x="685800" y="5093207"/>
+            <a:ext cx="1728216" cy="603504"/>
           </a:xfrm>
           <a:prstGeom prst="rect">
             <a:avLst/>
@@ -47971,7 +48010,7 @@
               </a:spcAft>
             </a:pPr>
             <a:r>
-              <a:rPr sz="1100" b="1" i="0">
+              <a:rPr sz="1050" b="1" i="0">
                 <a:solidFill>
                   <a:srgbClr val="14262E"/>
                 </a:solidFill>
@@ -47990,8 +48029,8 @@
         </p:nvSpPr>
         <p:spPr>
           <a:xfrm>
-            <a:off x="2651760" y="5349240"/>
-            <a:ext cx="5568696" cy="667512"/>
+            <a:off x="2651760" y="5093207"/>
+            <a:ext cx="5568696" cy="603504"/>
           </a:xfrm>
           <a:prstGeom prst="rect">
             <a:avLst/>
@@ -48016,7 +48055,7 @@
               </a:spcAft>
             </a:pPr>
             <a:r>
-              <a:rPr sz="1100" b="0" i="0">
+              <a:rPr sz="1050" b="0" i="0">
                 <a:solidFill>
                   <a:srgbClr val="14262E"/>
                 </a:solidFill>
@@ -48035,8 +48074,8 @@
         </p:nvSpPr>
         <p:spPr>
           <a:xfrm>
-            <a:off x="8458200" y="5349240"/>
-            <a:ext cx="3044952" cy="667512"/>
+            <a:off x="8458200" y="5093207"/>
+            <a:ext cx="3044952" cy="603504"/>
           </a:xfrm>
           <a:prstGeom prst="rect">
             <a:avLst/>
@@ -48061,7 +48100,7 @@
               </a:spcAft>
             </a:pPr>
             <a:r>
-              <a:rPr sz="1100" b="0" i="0">
+              <a:rPr sz="1050" b="0" i="0">
                 <a:solidFill>
                   <a:srgbClr val="14262E"/>
                 </a:solidFill>
@@ -48080,8 +48119,8 @@
         </p:nvSpPr>
         <p:spPr>
           <a:xfrm>
-            <a:off x="566928" y="6044184"/>
-            <a:ext cx="11057839" cy="758952"/>
+            <a:off x="566928" y="5724143"/>
+            <a:ext cx="11057839" cy="694944"/>
           </a:xfrm>
           <a:prstGeom prst="rect">
             <a:avLst/>
@@ -48124,8 +48163,8 @@
         </p:nvSpPr>
         <p:spPr>
           <a:xfrm>
-            <a:off x="685800" y="6108192"/>
-            <a:ext cx="1728216" cy="667512"/>
+            <a:off x="685800" y="5788151"/>
+            <a:ext cx="1728216" cy="603504"/>
           </a:xfrm>
           <a:prstGeom prst="rect">
             <a:avLst/>
@@ -48150,7 +48189,7 @@
               </a:spcAft>
             </a:pPr>
             <a:r>
-              <a:rPr sz="1100" b="1" i="0">
+              <a:rPr sz="1050" b="1" i="0">
                 <a:solidFill>
                   <a:srgbClr val="14262E"/>
                 </a:solidFill>
@@ -48169,8 +48208,8 @@
         </p:nvSpPr>
         <p:spPr>
           <a:xfrm>
-            <a:off x="2651760" y="6108192"/>
-            <a:ext cx="5568696" cy="667512"/>
+            <a:off x="2651760" y="5788151"/>
+            <a:ext cx="5568696" cy="603504"/>
           </a:xfrm>
           <a:prstGeom prst="rect">
             <a:avLst/>
@@ -48195,7 +48234,7 @@
               </a:spcAft>
             </a:pPr>
             <a:r>
-              <a:rPr sz="1100" b="0" i="0">
+              <a:rPr sz="1050" b="0" i="0">
                 <a:solidFill>
                   <a:srgbClr val="14262E"/>
                 </a:solidFill>
@@ -48214,8 +48253,8 @@
         </p:nvSpPr>
         <p:spPr>
           <a:xfrm>
-            <a:off x="8458200" y="6108192"/>
-            <a:ext cx="3044952" cy="667512"/>
+            <a:off x="8458200" y="5788151"/>
+            <a:ext cx="3044952" cy="603504"/>
           </a:xfrm>
           <a:prstGeom prst="rect">
             <a:avLst/>
@@ -48240,7 +48279,7 @@
               </a:spcAft>
             </a:pPr>
             <a:r>
-              <a:rPr sz="1100" b="0" i="0">
+              <a:rPr sz="1050" b="0" i="0">
                 <a:solidFill>
                   <a:srgbClr val="14262E"/>
                 </a:solidFill>
@@ -48502,7 +48541,6 @@
         </p:nvPicPr>
         <p:blipFill>
           <a:blip r:embed="rId2"/>
-          <a:srcRect l="23529" r="23529"/>
           <a:stretch>
             <a:fillRect/>
           </a:stretch>
@@ -48510,7 +48548,7 @@
         <p:spPr>
           <a:xfrm>
             <a:off x="566928" y="1417320"/>
-            <a:ext cx="3703320" cy="4663440"/>
+            <a:ext cx="4160520" cy="2773680"/>
           </a:xfrm>
           <a:prstGeom prst="rect">
             <a:avLst/>
@@ -48526,7 +48564,7 @@
         <p:spPr>
           <a:xfrm>
             <a:off x="566928" y="1417320"/>
-            <a:ext cx="3703320" cy="59436"/>
+            <a:ext cx="4160520" cy="59436"/>
           </a:xfrm>
           <a:prstGeom prst="rect">
             <a:avLst/>
@@ -48563,13 +48601,58 @@
       </p:sp>
       <p:sp>
         <p:nvSpPr>
-          <p:cNvPr id="8" name="Rounded Rectangle 7"/>
+          <p:cNvPr id="8" name="TextBox 7"/>
+          <p:cNvSpPr txBox="1"/>
+          <p:nvPr/>
+        </p:nvSpPr>
+        <p:spPr>
+          <a:xfrm>
+            <a:off x="566928" y="4273296"/>
+            <a:ext cx="4160520" cy="411480"/>
+          </a:xfrm>
+          <a:prstGeom prst="rect">
+            <a:avLst/>
+          </a:prstGeom>
+          <a:noFill/>
+        </p:spPr>
+        <p:txBody>
+          <a:bodyPr wrap="square" lIns="0" rIns="0" tIns="0" bIns="0">
+            <a:spAutoFit/>
+          </a:bodyPr>
+          <a:lstStyle/>
+          <a:p>
+            <a:pPr algn="ctr">
+              <a:lnSpc>
+                <a:spcPct val="108000"/>
+              </a:lnSpc>
+              <a:spcBef>
+                <a:spcPts val="0"/>
+              </a:spcBef>
+              <a:spcAft>
+                <a:spcPts val="0"/>
+              </a:spcAft>
+            </a:pPr>
+            <a:r>
+              <a:rPr sz="1050" b="0" i="1">
+                <a:solidFill>
+                  <a:srgbClr val="5A6B72"/>
+                </a:solidFill>
+                <a:latin typeface="Calibri"/>
+              </a:rPr>
+              <a:t>You will need: A3 or flip-chart paper, marker pens, sticky notes.</a:t>
+            </a:r>
+          </a:p>
+        </p:txBody>
+      </p:sp>
+      <p:sp>
+        <p:nvSpPr>
+          <p:cNvPr id="9" name="Rounded Rectangle 8"/>
           <p:cNvSpPr/>
           <p:nvPr/>
         </p:nvSpPr>
         <p:spPr>
           <a:xfrm>
-            <a:off x="4654296" y="1389888"/>
+            <a:off x="5138928" y="1389888"/>
             <a:ext cx="1691640" cy="402336"/>
           </a:xfrm>
           <a:prstGeom prst="roundRect">
@@ -48628,14 +48711,14 @@
       </p:sp>
       <p:sp>
         <p:nvSpPr>
-          <p:cNvPr id="9" name="Rounded Rectangle 8"/>
+          <p:cNvPr id="10" name="Rounded Rectangle 9"/>
           <p:cNvSpPr/>
           <p:nvPr/>
         </p:nvSpPr>
         <p:spPr>
           <a:xfrm>
-            <a:off x="4654296" y="1920240"/>
-            <a:ext cx="6970471" cy="826617"/>
+            <a:off x="5138928" y="1920240"/>
+            <a:ext cx="6485839" cy="826617"/>
           </a:xfrm>
           <a:prstGeom prst="roundRect">
             <a:avLst>
@@ -48674,13 +48757,13 @@
       </p:sp>
       <p:sp>
         <p:nvSpPr>
-          <p:cNvPr id="10" name="Rectangle 9"/>
+          <p:cNvPr id="11" name="Rectangle 10"/>
           <p:cNvSpPr/>
           <p:nvPr/>
         </p:nvSpPr>
         <p:spPr>
           <a:xfrm>
-            <a:off x="4654296" y="1920240"/>
+            <a:off x="5138928" y="1920240"/>
             <a:ext cx="50292" cy="826617"/>
           </a:xfrm>
           <a:prstGeom prst="rect">
@@ -48718,13 +48801,13 @@
       </p:sp>
       <p:sp>
         <p:nvSpPr>
-          <p:cNvPr id="11" name="Oval 10"/>
+          <p:cNvPr id="12" name="Oval 11"/>
           <p:cNvSpPr/>
           <p:nvPr/>
         </p:nvSpPr>
         <p:spPr>
           <a:xfrm>
-            <a:off x="4837176" y="2178100"/>
+            <a:off x="5321808" y="2178100"/>
             <a:ext cx="310896" cy="310896"/>
           </a:xfrm>
           <a:prstGeom prst="ellipse">
@@ -48781,14 +48864,14 @@
       </p:sp>
       <p:sp>
         <p:nvSpPr>
-          <p:cNvPr id="12" name="TextBox 11"/>
+          <p:cNvPr id="13" name="TextBox 12"/>
           <p:cNvSpPr txBox="1"/>
           <p:nvPr/>
         </p:nvSpPr>
         <p:spPr>
           <a:xfrm>
-            <a:off x="5276088" y="2011680"/>
-            <a:ext cx="6129223" cy="643737"/>
+            <a:off x="5760720" y="2011680"/>
+            <a:ext cx="5644591" cy="643737"/>
           </a:xfrm>
           <a:prstGeom prst="rect">
             <a:avLst/>
@@ -48848,14 +48931,14 @@
       </p:sp>
       <p:sp>
         <p:nvSpPr>
-          <p:cNvPr id="13" name="Rounded Rectangle 12"/>
+          <p:cNvPr id="14" name="Rounded Rectangle 13"/>
           <p:cNvSpPr/>
           <p:nvPr/>
         </p:nvSpPr>
         <p:spPr>
           <a:xfrm>
-            <a:off x="4654296" y="2829153"/>
-            <a:ext cx="6970471" cy="826617"/>
+            <a:off x="5138928" y="2829153"/>
+            <a:ext cx="6485839" cy="826617"/>
           </a:xfrm>
           <a:prstGeom prst="roundRect">
             <a:avLst>
@@ -48894,13 +48977,13 @@
       </p:sp>
       <p:sp>
         <p:nvSpPr>
-          <p:cNvPr id="14" name="Rectangle 13"/>
+          <p:cNvPr id="15" name="Rectangle 14"/>
           <p:cNvSpPr/>
           <p:nvPr/>
         </p:nvSpPr>
         <p:spPr>
           <a:xfrm>
-            <a:off x="4654296" y="2829153"/>
+            <a:off x="5138928" y="2829153"/>
             <a:ext cx="50292" cy="826617"/>
           </a:xfrm>
           <a:prstGeom prst="rect">
@@ -48938,13 +49021,13 @@
       </p:sp>
       <p:sp>
         <p:nvSpPr>
-          <p:cNvPr id="15" name="Oval 14"/>
+          <p:cNvPr id="16" name="Oval 15"/>
           <p:cNvSpPr/>
           <p:nvPr/>
         </p:nvSpPr>
         <p:spPr>
           <a:xfrm>
-            <a:off x="4837176" y="3087014"/>
+            <a:off x="5321808" y="3087014"/>
             <a:ext cx="310896" cy="310896"/>
           </a:xfrm>
           <a:prstGeom prst="ellipse">
@@ -49001,14 +49084,14 @@
       </p:sp>
       <p:sp>
         <p:nvSpPr>
-          <p:cNvPr id="16" name="TextBox 15"/>
+          <p:cNvPr id="17" name="TextBox 16"/>
           <p:cNvSpPr txBox="1"/>
           <p:nvPr/>
         </p:nvSpPr>
         <p:spPr>
           <a:xfrm>
-            <a:off x="5276088" y="2920593"/>
-            <a:ext cx="6129223" cy="643737"/>
+            <a:off x="5760720" y="2920593"/>
+            <a:ext cx="5644591" cy="643737"/>
           </a:xfrm>
           <a:prstGeom prst="rect">
             <a:avLst/>
@@ -49068,14 +49151,14 @@
       </p:sp>
       <p:sp>
         <p:nvSpPr>
-          <p:cNvPr id="17" name="Rounded Rectangle 16"/>
+          <p:cNvPr id="18" name="Rounded Rectangle 17"/>
           <p:cNvSpPr/>
           <p:nvPr/>
         </p:nvSpPr>
         <p:spPr>
           <a:xfrm>
-            <a:off x="4654296" y="3738067"/>
-            <a:ext cx="6970471" cy="826617"/>
+            <a:off x="5138928" y="3738067"/>
+            <a:ext cx="6485839" cy="826617"/>
           </a:xfrm>
           <a:prstGeom prst="roundRect">
             <a:avLst>
@@ -49114,13 +49197,13 @@
       </p:sp>
       <p:sp>
         <p:nvSpPr>
-          <p:cNvPr id="18" name="Rectangle 17"/>
+          <p:cNvPr id="19" name="Rectangle 18"/>
           <p:cNvSpPr/>
           <p:nvPr/>
         </p:nvSpPr>
         <p:spPr>
           <a:xfrm>
-            <a:off x="4654296" y="3738067"/>
+            <a:off x="5138928" y="3738067"/>
             <a:ext cx="50292" cy="826617"/>
           </a:xfrm>
           <a:prstGeom prst="rect">
@@ -49158,13 +49241,13 @@
       </p:sp>
       <p:sp>
         <p:nvSpPr>
-          <p:cNvPr id="19" name="Oval 18"/>
+          <p:cNvPr id="20" name="Oval 19"/>
           <p:cNvSpPr/>
           <p:nvPr/>
         </p:nvSpPr>
         <p:spPr>
           <a:xfrm>
-            <a:off x="4837176" y="3995928"/>
+            <a:off x="5321808" y="3995928"/>
             <a:ext cx="310896" cy="310896"/>
           </a:xfrm>
           <a:prstGeom prst="ellipse">
@@ -49221,14 +49304,14 @@
       </p:sp>
       <p:sp>
         <p:nvSpPr>
-          <p:cNvPr id="20" name="TextBox 19"/>
+          <p:cNvPr id="21" name="TextBox 20"/>
           <p:cNvSpPr txBox="1"/>
           <p:nvPr/>
         </p:nvSpPr>
         <p:spPr>
           <a:xfrm>
-            <a:off x="5276088" y="3829507"/>
-            <a:ext cx="6129223" cy="643737"/>
+            <a:off x="5760720" y="3829507"/>
+            <a:ext cx="5644591" cy="643737"/>
           </a:xfrm>
           <a:prstGeom prst="rect">
             <a:avLst/>
@@ -49288,14 +49371,14 @@
       </p:sp>
       <p:sp>
         <p:nvSpPr>
-          <p:cNvPr id="21" name="Rounded Rectangle 20"/>
+          <p:cNvPr id="22" name="Rounded Rectangle 21"/>
           <p:cNvSpPr/>
           <p:nvPr/>
         </p:nvSpPr>
         <p:spPr>
           <a:xfrm>
-            <a:off x="4654296" y="4646980"/>
-            <a:ext cx="6970471" cy="826617"/>
+            <a:off x="5138928" y="4646980"/>
+            <a:ext cx="6485839" cy="826617"/>
           </a:xfrm>
           <a:prstGeom prst="roundRect">
             <a:avLst>
@@ -49334,13 +49417,13 @@
       </p:sp>
       <p:sp>
         <p:nvSpPr>
-          <p:cNvPr id="22" name="Rectangle 21"/>
+          <p:cNvPr id="23" name="Rectangle 22"/>
           <p:cNvSpPr/>
           <p:nvPr/>
         </p:nvSpPr>
         <p:spPr>
           <a:xfrm>
-            <a:off x="4654296" y="4646980"/>
+            <a:off x="5138928" y="4646980"/>
             <a:ext cx="50292" cy="826617"/>
           </a:xfrm>
           <a:prstGeom prst="rect">
@@ -49378,13 +49461,13 @@
       </p:sp>
       <p:sp>
         <p:nvSpPr>
-          <p:cNvPr id="23" name="Oval 22"/>
+          <p:cNvPr id="24" name="Oval 23"/>
           <p:cNvSpPr/>
           <p:nvPr/>
         </p:nvSpPr>
         <p:spPr>
           <a:xfrm>
-            <a:off x="4837176" y="4904841"/>
+            <a:off x="5321808" y="4904841"/>
             <a:ext cx="310896" cy="310896"/>
           </a:xfrm>
           <a:prstGeom prst="ellipse">
@@ -49441,14 +49524,14 @@
       </p:sp>
       <p:sp>
         <p:nvSpPr>
-          <p:cNvPr id="24" name="TextBox 23"/>
+          <p:cNvPr id="25" name="TextBox 24"/>
           <p:cNvSpPr txBox="1"/>
           <p:nvPr/>
         </p:nvSpPr>
         <p:spPr>
           <a:xfrm>
-            <a:off x="5276088" y="4738420"/>
-            <a:ext cx="6129223" cy="643737"/>
+            <a:off x="5760720" y="4738420"/>
+            <a:ext cx="5644591" cy="643737"/>
           </a:xfrm>
           <a:prstGeom prst="rect">
             <a:avLst/>
@@ -49508,14 +49591,14 @@
       </p:sp>
       <p:sp>
         <p:nvSpPr>
-          <p:cNvPr id="25" name="Rounded Rectangle 24"/>
+          <p:cNvPr id="26" name="Rounded Rectangle 25"/>
           <p:cNvSpPr/>
           <p:nvPr/>
         </p:nvSpPr>
         <p:spPr>
           <a:xfrm>
-            <a:off x="4654296" y="5555894"/>
-            <a:ext cx="6970471" cy="826617"/>
+            <a:off x="5138928" y="5555894"/>
+            <a:ext cx="6485839" cy="826617"/>
           </a:xfrm>
           <a:prstGeom prst="roundRect">
             <a:avLst>
@@ -49554,13 +49637,13 @@
       </p:sp>
       <p:sp>
         <p:nvSpPr>
-          <p:cNvPr id="26" name="Rectangle 25"/>
+          <p:cNvPr id="27" name="Rectangle 26"/>
           <p:cNvSpPr/>
           <p:nvPr/>
         </p:nvSpPr>
         <p:spPr>
           <a:xfrm>
-            <a:off x="4654296" y="5555894"/>
+            <a:off x="5138928" y="5555894"/>
             <a:ext cx="50292" cy="826617"/>
           </a:xfrm>
           <a:prstGeom prst="rect">
@@ -49598,13 +49681,13 @@
       </p:sp>
       <p:sp>
         <p:nvSpPr>
-          <p:cNvPr id="27" name="Oval 26"/>
+          <p:cNvPr id="28" name="Oval 27"/>
           <p:cNvSpPr/>
           <p:nvPr/>
         </p:nvSpPr>
         <p:spPr>
           <a:xfrm>
-            <a:off x="4837176" y="5813755"/>
+            <a:off x="5321808" y="5813755"/>
             <a:ext cx="310896" cy="310896"/>
           </a:xfrm>
           <a:prstGeom prst="ellipse">
@@ -49661,14 +49744,14 @@
       </p:sp>
       <p:sp>
         <p:nvSpPr>
-          <p:cNvPr id="28" name="TextBox 27"/>
+          <p:cNvPr id="29" name="TextBox 28"/>
           <p:cNvSpPr txBox="1"/>
           <p:nvPr/>
         </p:nvSpPr>
         <p:spPr>
           <a:xfrm>
-            <a:off x="5276088" y="5647334"/>
-            <a:ext cx="6129223" cy="643737"/>
+            <a:off x="5760720" y="5647334"/>
+            <a:ext cx="5644591" cy="643737"/>
           </a:xfrm>
           <a:prstGeom prst="rect">
             <a:avLst/>
@@ -49728,7 +49811,7 @@
       </p:sp>
       <p:sp>
         <p:nvSpPr>
-          <p:cNvPr id="29" name="TextBox 28"/>
+          <p:cNvPr id="30" name="TextBox 29"/>
           <p:cNvSpPr txBox="1"/>
           <p:nvPr/>
         </p:nvSpPr>
@@ -50285,15 +50368,14 @@
         </p:nvPicPr>
         <p:blipFill>
           <a:blip r:embed="rId2"/>
-          <a:srcRect l="15033" r="15033"/>
           <a:stretch>
             <a:fillRect/>
           </a:stretch>
         </p:blipFill>
         <p:spPr>
           <a:xfrm>
-            <a:off x="6732727" y="1417320"/>
-            <a:ext cx="4892040" cy="4663440"/>
+            <a:off x="5909767" y="1417320"/>
+            <a:ext cx="5715000" cy="3810000"/>
           </a:xfrm>
           <a:prstGeom prst="rect">
             <a:avLst/>
@@ -50308,8 +50390,8 @@
         </p:nvSpPr>
         <p:spPr>
           <a:xfrm>
-            <a:off x="6732727" y="1417320"/>
-            <a:ext cx="4892040" cy="59436"/>
+            <a:off x="5909767" y="1417320"/>
+            <a:ext cx="5715000" cy="59436"/>
           </a:xfrm>
           <a:prstGeom prst="rect">
             <a:avLst/>
@@ -50352,8 +50434,8 @@
         </p:nvSpPr>
         <p:spPr>
           <a:xfrm>
-            <a:off x="6732727" y="6144768"/>
-            <a:ext cx="4892040" cy="365760"/>
+            <a:off x="5909767" y="5273040"/>
+            <a:ext cx="5715000" cy="365760"/>
           </a:xfrm>
           <a:prstGeom prst="rect">
             <a:avLst/>
@@ -50398,7 +50480,7 @@
         <p:spPr>
           <a:xfrm>
             <a:off x="566928" y="1426464"/>
-            <a:ext cx="5781751" cy="897940"/>
+            <a:ext cx="4958791" cy="832002"/>
           </a:xfrm>
           <a:prstGeom prst="roundRect">
             <a:avLst>
@@ -50444,7 +50526,7 @@
         <p:spPr>
           <a:xfrm>
             <a:off x="566928" y="1426464"/>
-            <a:ext cx="45720" cy="897940"/>
+            <a:ext cx="45720" cy="832002"/>
           </a:xfrm>
           <a:prstGeom prst="rect">
             <a:avLst/>
@@ -50488,7 +50570,7 @@
         <p:spPr>
           <a:xfrm>
             <a:off x="768096" y="1563624"/>
-            <a:ext cx="5379415" cy="623620"/>
+            <a:ext cx="4556455" cy="557682"/>
           </a:xfrm>
           <a:prstGeom prst="rect">
             <a:avLst/>
@@ -50513,7 +50595,7 @@
               </a:spcAft>
             </a:pPr>
             <a:r>
-              <a:rPr sz="1150" b="1" i="0">
+              <a:rPr sz="1100" b="1" i="0">
                 <a:solidFill>
                   <a:srgbClr val="C1440E"/>
                 </a:solidFill>
@@ -50535,7 +50617,7 @@
               </a:spcAft>
             </a:pPr>
             <a:r>
-              <a:rPr sz="1050" b="0" i="0">
+              <a:rPr sz="1000" b="0" i="0">
                 <a:solidFill>
                   <a:srgbClr val="14262E"/>
                 </a:solidFill>
@@ -50554,8 +50636,8 @@
         </p:nvSpPr>
         <p:spPr>
           <a:xfrm>
-            <a:off x="566928" y="2434132"/>
-            <a:ext cx="5781751" cy="897940"/>
+            <a:off x="566928" y="2368194"/>
+            <a:ext cx="4958791" cy="832002"/>
           </a:xfrm>
           <a:prstGeom prst="roundRect">
             <a:avLst>
@@ -50600,8 +50682,8 @@
         </p:nvSpPr>
         <p:spPr>
           <a:xfrm>
-            <a:off x="566928" y="2434132"/>
-            <a:ext cx="45720" cy="897940"/>
+            <a:off x="566928" y="2368194"/>
+            <a:ext cx="45720" cy="832002"/>
           </a:xfrm>
           <a:prstGeom prst="rect">
             <a:avLst/>
@@ -50644,8 +50726,8 @@
         </p:nvSpPr>
         <p:spPr>
           <a:xfrm>
-            <a:off x="768096" y="2571292"/>
-            <a:ext cx="5379415" cy="623620"/>
+            <a:off x="768096" y="2505354"/>
+            <a:ext cx="4556455" cy="557682"/>
           </a:xfrm>
           <a:prstGeom prst="rect">
             <a:avLst/>
@@ -50670,7 +50752,7 @@
               </a:spcAft>
             </a:pPr>
             <a:r>
-              <a:rPr sz="1150" b="1" i="0">
+              <a:rPr sz="1100" b="1" i="0">
                 <a:solidFill>
                   <a:srgbClr val="C1440E"/>
                 </a:solidFill>
@@ -50692,7 +50774,7 @@
               </a:spcAft>
             </a:pPr>
             <a:r>
-              <a:rPr sz="1050" b="0" i="0">
+              <a:rPr sz="1000" b="0" i="0">
                 <a:solidFill>
                   <a:srgbClr val="14262E"/>
                 </a:solidFill>
@@ -50711,8 +50793,8 @@
         </p:nvSpPr>
         <p:spPr>
           <a:xfrm>
-            <a:off x="566928" y="3441801"/>
-            <a:ext cx="5781751" cy="897940"/>
+            <a:off x="566928" y="3309924"/>
+            <a:ext cx="4958791" cy="832002"/>
           </a:xfrm>
           <a:prstGeom prst="roundRect">
             <a:avLst>
@@ -50757,8 +50839,8 @@
         </p:nvSpPr>
         <p:spPr>
           <a:xfrm>
-            <a:off x="566928" y="3441801"/>
-            <a:ext cx="45720" cy="897940"/>
+            <a:off x="566928" y="3309924"/>
+            <a:ext cx="45720" cy="832002"/>
           </a:xfrm>
           <a:prstGeom prst="rect">
             <a:avLst/>
@@ -50801,8 +50883,8 @@
         </p:nvSpPr>
         <p:spPr>
           <a:xfrm>
-            <a:off x="768096" y="3578961"/>
-            <a:ext cx="5379415" cy="623620"/>
+            <a:off x="768096" y="3447084"/>
+            <a:ext cx="4556455" cy="557682"/>
           </a:xfrm>
           <a:prstGeom prst="rect">
             <a:avLst/>
@@ -50827,7 +50909,7 @@
               </a:spcAft>
             </a:pPr>
             <a:r>
-              <a:rPr sz="1150" b="1" i="0">
+              <a:rPr sz="1100" b="1" i="0">
                 <a:solidFill>
                   <a:srgbClr val="C1440E"/>
                 </a:solidFill>
@@ -50849,7 +50931,7 @@
               </a:spcAft>
             </a:pPr>
             <a:r>
-              <a:rPr sz="1050" b="0" i="0">
+              <a:rPr sz="1000" b="0" i="0">
                 <a:solidFill>
                   <a:srgbClr val="14262E"/>
                 </a:solidFill>
@@ -50868,8 +50950,8 @@
         </p:nvSpPr>
         <p:spPr>
           <a:xfrm>
-            <a:off x="566928" y="4449470"/>
-            <a:ext cx="5781751" cy="897940"/>
+            <a:off x="566928" y="4251655"/>
+            <a:ext cx="4958791" cy="996848"/>
           </a:xfrm>
           <a:prstGeom prst="roundRect">
             <a:avLst>
@@ -50914,8 +50996,8 @@
         </p:nvSpPr>
         <p:spPr>
           <a:xfrm>
-            <a:off x="566928" y="4449470"/>
-            <a:ext cx="45720" cy="897940"/>
+            <a:off x="566928" y="4251655"/>
+            <a:ext cx="45720" cy="996848"/>
           </a:xfrm>
           <a:prstGeom prst="rect">
             <a:avLst/>
@@ -50958,8 +51040,8 @@
         </p:nvSpPr>
         <p:spPr>
           <a:xfrm>
-            <a:off x="768096" y="4586630"/>
-            <a:ext cx="5379415" cy="623620"/>
+            <a:off x="768096" y="4388815"/>
+            <a:ext cx="4556455" cy="722528"/>
           </a:xfrm>
           <a:prstGeom prst="rect">
             <a:avLst/>
@@ -50984,7 +51066,7 @@
               </a:spcAft>
             </a:pPr>
             <a:r>
-              <a:rPr sz="1150" b="1" i="0">
+              <a:rPr sz="1100" b="1" i="0">
                 <a:solidFill>
                   <a:srgbClr val="C1440E"/>
                 </a:solidFill>
@@ -51006,7 +51088,7 @@
               </a:spcAft>
             </a:pPr>
             <a:r>
-              <a:rPr sz="1050" b="0" i="0">
+              <a:rPr sz="1000" b="0" i="0">
                 <a:solidFill>
                   <a:srgbClr val="14262E"/>
                 </a:solidFill>
@@ -51025,8 +51107,8 @@
         </p:nvSpPr>
         <p:spPr>
           <a:xfrm>
-            <a:off x="566928" y="5457139"/>
-            <a:ext cx="5781751" cy="897940"/>
+            <a:off x="566928" y="5358231"/>
+            <a:ext cx="4958791" cy="996848"/>
           </a:xfrm>
           <a:prstGeom prst="roundRect">
             <a:avLst>
@@ -51071,8 +51153,8 @@
         </p:nvSpPr>
         <p:spPr>
           <a:xfrm>
-            <a:off x="566928" y="5457139"/>
-            <a:ext cx="45720" cy="897940"/>
+            <a:off x="566928" y="5358231"/>
+            <a:ext cx="45720" cy="996848"/>
           </a:xfrm>
           <a:prstGeom prst="rect">
             <a:avLst/>
@@ -51115,8 +51197,8 @@
         </p:nvSpPr>
         <p:spPr>
           <a:xfrm>
-            <a:off x="768096" y="5594299"/>
-            <a:ext cx="5379415" cy="623620"/>
+            <a:off x="768096" y="5495391"/>
+            <a:ext cx="4556455" cy="722528"/>
           </a:xfrm>
           <a:prstGeom prst="rect">
             <a:avLst/>
@@ -51141,7 +51223,7 @@
               </a:spcAft>
             </a:pPr>
             <a:r>
-              <a:rPr sz="1150" b="1" i="0">
+              <a:rPr sz="1100" b="1" i="0">
                 <a:solidFill>
                   <a:srgbClr val="C1440E"/>
                 </a:solidFill>
@@ -51163,7 +51245,7 @@
               </a:spcAft>
             </a:pPr>
             <a:r>
-              <a:rPr sz="1050" b="0" i="0">
+              <a:rPr sz="1000" b="0" i="0">
                 <a:solidFill>
                   <a:srgbClr val="14262E"/>
                 </a:solidFill>
@@ -51648,7 +51730,7 @@
         <p:spPr>
           <a:xfrm>
             <a:off x="566928" y="2249424"/>
-            <a:ext cx="11057839" cy="749808"/>
+            <a:ext cx="11057839" cy="694944"/>
           </a:xfrm>
           <a:prstGeom prst="rect">
             <a:avLst/>
@@ -51692,7 +51774,7 @@
         <p:spPr>
           <a:xfrm>
             <a:off x="685800" y="2313432"/>
-            <a:ext cx="2322576" cy="658368"/>
+            <a:ext cx="2322576" cy="603504"/>
           </a:xfrm>
           <a:prstGeom prst="rect">
             <a:avLst/>
@@ -51717,7 +51799,7 @@
               </a:spcAft>
             </a:pPr>
             <a:r>
-              <a:rPr sz="1100" b="1" i="0">
+              <a:rPr sz="1050" b="1" i="0">
                 <a:solidFill>
                   <a:srgbClr val="14262E"/>
                 </a:solidFill>
@@ -51737,7 +51819,7 @@
         <p:spPr>
           <a:xfrm>
             <a:off x="3246120" y="2313432"/>
-            <a:ext cx="4608576" cy="658368"/>
+            <a:ext cx="4608576" cy="603504"/>
           </a:xfrm>
           <a:prstGeom prst="rect">
             <a:avLst/>
@@ -51762,7 +51844,7 @@
               </a:spcAft>
             </a:pPr>
             <a:r>
-              <a:rPr sz="1100" b="0" i="0">
+              <a:rPr sz="1050" b="0" i="0">
                 <a:solidFill>
                   <a:srgbClr val="14262E"/>
                 </a:solidFill>
@@ -51782,7 +51864,7 @@
         <p:spPr>
           <a:xfrm>
             <a:off x="8092440" y="2313432"/>
-            <a:ext cx="3410712" cy="658368"/>
+            <a:ext cx="3410712" cy="603504"/>
           </a:xfrm>
           <a:prstGeom prst="rect">
             <a:avLst/>
@@ -51807,7 +51889,7 @@
               </a:spcAft>
             </a:pPr>
             <a:r>
-              <a:rPr sz="1100" b="0" i="0">
+              <a:rPr sz="1050" b="0" i="0">
                 <a:solidFill>
                   <a:srgbClr val="14262E"/>
                 </a:solidFill>
@@ -51826,8 +51908,8 @@
         </p:nvSpPr>
         <p:spPr>
           <a:xfrm>
-            <a:off x="566928" y="2999232"/>
-            <a:ext cx="11057839" cy="749808"/>
+            <a:off x="566928" y="2944368"/>
+            <a:ext cx="11057839" cy="694944"/>
           </a:xfrm>
           <a:prstGeom prst="rect">
             <a:avLst/>
@@ -51870,8 +51952,8 @@
         </p:nvSpPr>
         <p:spPr>
           <a:xfrm>
-            <a:off x="685800" y="3063239"/>
-            <a:ext cx="2322576" cy="658368"/>
+            <a:off x="685800" y="3008375"/>
+            <a:ext cx="2322576" cy="603504"/>
           </a:xfrm>
           <a:prstGeom prst="rect">
             <a:avLst/>
@@ -51896,7 +51978,7 @@
               </a:spcAft>
             </a:pPr>
             <a:r>
-              <a:rPr sz="1100" b="1" i="0">
+              <a:rPr sz="1050" b="1" i="0">
                 <a:solidFill>
                   <a:srgbClr val="14262E"/>
                 </a:solidFill>
@@ -51915,8 +51997,8 @@
         </p:nvSpPr>
         <p:spPr>
           <a:xfrm>
-            <a:off x="3246120" y="3063239"/>
-            <a:ext cx="4608576" cy="658368"/>
+            <a:off x="3246120" y="3008375"/>
+            <a:ext cx="4608576" cy="603504"/>
           </a:xfrm>
           <a:prstGeom prst="rect">
             <a:avLst/>
@@ -51941,7 +52023,7 @@
               </a:spcAft>
             </a:pPr>
             <a:r>
-              <a:rPr sz="1100" b="0" i="0">
+              <a:rPr sz="1050" b="0" i="0">
                 <a:solidFill>
                   <a:srgbClr val="14262E"/>
                 </a:solidFill>
@@ -51960,8 +52042,8 @@
         </p:nvSpPr>
         <p:spPr>
           <a:xfrm>
-            <a:off x="8092440" y="3063239"/>
-            <a:ext cx="3410712" cy="658368"/>
+            <a:off x="8092440" y="3008375"/>
+            <a:ext cx="3410712" cy="603504"/>
           </a:xfrm>
           <a:prstGeom prst="rect">
             <a:avLst/>
@@ -51986,7 +52068,7 @@
               </a:spcAft>
             </a:pPr>
             <a:r>
-              <a:rPr sz="1100" b="0" i="0">
+              <a:rPr sz="1050" b="0" i="0">
                 <a:solidFill>
                   <a:srgbClr val="14262E"/>
                 </a:solidFill>
@@ -52005,8 +52087,8 @@
         </p:nvSpPr>
         <p:spPr>
           <a:xfrm>
-            <a:off x="566928" y="3749039"/>
-            <a:ext cx="11057839" cy="749808"/>
+            <a:off x="566928" y="3639311"/>
+            <a:ext cx="11057839" cy="694944"/>
           </a:xfrm>
           <a:prstGeom prst="rect">
             <a:avLst/>
@@ -52049,8 +52131,8 @@
         </p:nvSpPr>
         <p:spPr>
           <a:xfrm>
-            <a:off x="685800" y="3813048"/>
-            <a:ext cx="2322576" cy="658368"/>
+            <a:off x="685800" y="3703320"/>
+            <a:ext cx="2322576" cy="603504"/>
           </a:xfrm>
           <a:prstGeom prst="rect">
             <a:avLst/>
@@ -52075,7 +52157,7 @@
               </a:spcAft>
             </a:pPr>
             <a:r>
-              <a:rPr sz="1100" b="1" i="0">
+              <a:rPr sz="1050" b="1" i="0">
                 <a:solidFill>
                   <a:srgbClr val="14262E"/>
                 </a:solidFill>
@@ -52094,8 +52176,8 @@
         </p:nvSpPr>
         <p:spPr>
           <a:xfrm>
-            <a:off x="3246120" y="3813048"/>
-            <a:ext cx="4608576" cy="658368"/>
+            <a:off x="3246120" y="3703320"/>
+            <a:ext cx="4608576" cy="603504"/>
           </a:xfrm>
           <a:prstGeom prst="rect">
             <a:avLst/>
@@ -52120,7 +52202,7 @@
               </a:spcAft>
             </a:pPr>
             <a:r>
-              <a:rPr sz="1100" b="0" i="0">
+              <a:rPr sz="1050" b="0" i="0">
                 <a:solidFill>
                   <a:srgbClr val="14262E"/>
                 </a:solidFill>
@@ -52139,8 +52221,8 @@
         </p:nvSpPr>
         <p:spPr>
           <a:xfrm>
-            <a:off x="8092440" y="3813048"/>
-            <a:ext cx="3410712" cy="658368"/>
+            <a:off x="8092440" y="3703320"/>
+            <a:ext cx="3410712" cy="603504"/>
           </a:xfrm>
           <a:prstGeom prst="rect">
             <a:avLst/>
@@ -52165,7 +52247,7 @@
               </a:spcAft>
             </a:pPr>
             <a:r>
-              <a:rPr sz="1100" b="0" i="0">
+              <a:rPr sz="1050" b="0" i="0">
                 <a:solidFill>
                   <a:srgbClr val="14262E"/>
                 </a:solidFill>
@@ -52184,8 +52266,8 @@
         </p:nvSpPr>
         <p:spPr>
           <a:xfrm>
-            <a:off x="566928" y="4498848"/>
-            <a:ext cx="11057839" cy="749808"/>
+            <a:off x="566928" y="4334255"/>
+            <a:ext cx="11057839" cy="694944"/>
           </a:xfrm>
           <a:prstGeom prst="rect">
             <a:avLst/>
@@ -52228,8 +52310,8 @@
         </p:nvSpPr>
         <p:spPr>
           <a:xfrm>
-            <a:off x="685800" y="4562856"/>
-            <a:ext cx="2322576" cy="658368"/>
+            <a:off x="685800" y="4398264"/>
+            <a:ext cx="2322576" cy="603504"/>
           </a:xfrm>
           <a:prstGeom prst="rect">
             <a:avLst/>
@@ -52254,7 +52336,7 @@
               </a:spcAft>
             </a:pPr>
             <a:r>
-              <a:rPr sz="1100" b="1" i="0">
+              <a:rPr sz="1050" b="1" i="0">
                 <a:solidFill>
                   <a:srgbClr val="14262E"/>
                 </a:solidFill>
@@ -52273,8 +52355,8 @@
         </p:nvSpPr>
         <p:spPr>
           <a:xfrm>
-            <a:off x="3246120" y="4562856"/>
-            <a:ext cx="4608576" cy="658368"/>
+            <a:off x="3246120" y="4398264"/>
+            <a:ext cx="4608576" cy="603504"/>
           </a:xfrm>
           <a:prstGeom prst="rect">
             <a:avLst/>
@@ -52299,7 +52381,7 @@
               </a:spcAft>
             </a:pPr>
             <a:r>
-              <a:rPr sz="1100" b="0" i="0">
+              <a:rPr sz="1050" b="0" i="0">
                 <a:solidFill>
                   <a:srgbClr val="14262E"/>
                 </a:solidFill>
@@ -52318,8 +52400,8 @@
         </p:nvSpPr>
         <p:spPr>
           <a:xfrm>
-            <a:off x="8092440" y="4562856"/>
-            <a:ext cx="3410712" cy="658368"/>
+            <a:off x="8092440" y="4398264"/>
+            <a:ext cx="3410712" cy="603504"/>
           </a:xfrm>
           <a:prstGeom prst="rect">
             <a:avLst/>
@@ -52344,7 +52426,7 @@
               </a:spcAft>
             </a:pPr>
             <a:r>
-              <a:rPr sz="1100" b="0" i="0">
+              <a:rPr sz="1050" b="0" i="0">
                 <a:solidFill>
                   <a:srgbClr val="14262E"/>
                 </a:solidFill>
@@ -52363,8 +52445,8 @@
         </p:nvSpPr>
         <p:spPr>
           <a:xfrm>
-            <a:off x="566928" y="5248656"/>
-            <a:ext cx="11057839" cy="749808"/>
+            <a:off x="566928" y="5029199"/>
+            <a:ext cx="11057839" cy="694944"/>
           </a:xfrm>
           <a:prstGeom prst="rect">
             <a:avLst/>
@@ -52407,8 +52489,8 @@
         </p:nvSpPr>
         <p:spPr>
           <a:xfrm>
-            <a:off x="685800" y="5312664"/>
-            <a:ext cx="2322576" cy="658368"/>
+            <a:off x="685800" y="5093207"/>
+            <a:ext cx="2322576" cy="603504"/>
           </a:xfrm>
           <a:prstGeom prst="rect">
             <a:avLst/>
@@ -52433,7 +52515,7 @@
               </a:spcAft>
             </a:pPr>
             <a:r>
-              <a:rPr sz="1100" b="1" i="0">
+              <a:rPr sz="1050" b="1" i="0">
                 <a:solidFill>
                   <a:srgbClr val="14262E"/>
                 </a:solidFill>
@@ -52452,8 +52534,8 @@
         </p:nvSpPr>
         <p:spPr>
           <a:xfrm>
-            <a:off x="3246120" y="5312664"/>
-            <a:ext cx="4608576" cy="658368"/>
+            <a:off x="3246120" y="5093207"/>
+            <a:ext cx="4608576" cy="603504"/>
           </a:xfrm>
           <a:prstGeom prst="rect">
             <a:avLst/>
@@ -52478,7 +52560,7 @@
               </a:spcAft>
             </a:pPr>
             <a:r>
-              <a:rPr sz="1100" b="0" i="0">
+              <a:rPr sz="1050" b="0" i="0">
                 <a:solidFill>
                   <a:srgbClr val="14262E"/>
                 </a:solidFill>
@@ -52497,8 +52579,8 @@
         </p:nvSpPr>
         <p:spPr>
           <a:xfrm>
-            <a:off x="8092440" y="5312664"/>
-            <a:ext cx="3410712" cy="658368"/>
+            <a:off x="8092440" y="5093207"/>
+            <a:ext cx="3410712" cy="603504"/>
           </a:xfrm>
           <a:prstGeom prst="rect">
             <a:avLst/>
@@ -52523,7 +52605,7 @@
               </a:spcAft>
             </a:pPr>
             <a:r>
-              <a:rPr sz="1100" b="0" i="0">
+              <a:rPr sz="1050" b="0" i="0">
                 <a:solidFill>
                   <a:srgbClr val="14262E"/>
                 </a:solidFill>
@@ -52542,8 +52624,8 @@
         </p:nvSpPr>
         <p:spPr>
           <a:xfrm>
-            <a:off x="566928" y="5998464"/>
-            <a:ext cx="11057839" cy="749808"/>
+            <a:off x="566928" y="5724143"/>
+            <a:ext cx="11057839" cy="694944"/>
           </a:xfrm>
           <a:prstGeom prst="rect">
             <a:avLst/>
@@ -52586,8 +52668,8 @@
         </p:nvSpPr>
         <p:spPr>
           <a:xfrm>
-            <a:off x="685800" y="6062472"/>
-            <a:ext cx="2322576" cy="658368"/>
+            <a:off x="685800" y="5788151"/>
+            <a:ext cx="2322576" cy="603504"/>
           </a:xfrm>
           <a:prstGeom prst="rect">
             <a:avLst/>
@@ -52612,7 +52694,7 @@
               </a:spcAft>
             </a:pPr>
             <a:r>
-              <a:rPr sz="1100" b="1" i="0">
+              <a:rPr sz="1050" b="1" i="0">
                 <a:solidFill>
                   <a:srgbClr val="14262E"/>
                 </a:solidFill>
@@ -52631,8 +52713,8 @@
         </p:nvSpPr>
         <p:spPr>
           <a:xfrm>
-            <a:off x="3246120" y="6062472"/>
-            <a:ext cx="4608576" cy="658368"/>
+            <a:off x="3246120" y="5788151"/>
+            <a:ext cx="4608576" cy="603504"/>
           </a:xfrm>
           <a:prstGeom prst="rect">
             <a:avLst/>
@@ -52657,7 +52739,7 @@
               </a:spcAft>
             </a:pPr>
             <a:r>
-              <a:rPr sz="1100" b="0" i="0">
+              <a:rPr sz="1050" b="0" i="0">
                 <a:solidFill>
                   <a:srgbClr val="14262E"/>
                 </a:solidFill>
@@ -52676,8 +52758,8 @@
         </p:nvSpPr>
         <p:spPr>
           <a:xfrm>
-            <a:off x="8092440" y="6062472"/>
-            <a:ext cx="3410712" cy="658368"/>
+            <a:off x="8092440" y="5788151"/>
+            <a:ext cx="3410712" cy="603504"/>
           </a:xfrm>
           <a:prstGeom prst="rect">
             <a:avLst/>
@@ -52702,7 +52784,7 @@
               </a:spcAft>
             </a:pPr>
             <a:r>
-              <a:rPr sz="1100" b="0" i="0">
+              <a:rPr sz="1050" b="0" i="0">
                 <a:solidFill>
                   <a:srgbClr val="14262E"/>
                 </a:solidFill>
@@ -52964,15 +53046,14 @@
         </p:nvPicPr>
         <p:blipFill>
           <a:blip r:embed="rId2"/>
-          <a:srcRect t="2336" b="2336"/>
           <a:stretch>
             <a:fillRect/>
           </a:stretch>
         </p:blipFill>
         <p:spPr>
           <a:xfrm>
-            <a:off x="6732727" y="1417320"/>
-            <a:ext cx="4892040" cy="4663440"/>
+            <a:off x="5909767" y="1417320"/>
+            <a:ext cx="4617720" cy="4617720"/>
           </a:xfrm>
           <a:prstGeom prst="rect">
             <a:avLst/>
@@ -52987,8 +53068,8 @@
         </p:nvSpPr>
         <p:spPr>
           <a:xfrm>
-            <a:off x="6732727" y="1417320"/>
-            <a:ext cx="4892040" cy="59436"/>
+            <a:off x="5909767" y="1417320"/>
+            <a:ext cx="4617720" cy="59436"/>
           </a:xfrm>
           <a:prstGeom prst="rect">
             <a:avLst/>
@@ -53031,8 +53112,8 @@
         </p:nvSpPr>
         <p:spPr>
           <a:xfrm>
-            <a:off x="6732727" y="6144768"/>
-            <a:ext cx="4892040" cy="365760"/>
+            <a:off x="5909767" y="6080760"/>
+            <a:ext cx="4617720" cy="365760"/>
           </a:xfrm>
           <a:prstGeom prst="rect">
             <a:avLst/>
@@ -53077,7 +53158,7 @@
         <p:spPr>
           <a:xfrm>
             <a:off x="566928" y="1426464"/>
-            <a:ext cx="5781751" cy="991903"/>
+            <a:ext cx="4958791" cy="960582"/>
           </a:xfrm>
           <a:prstGeom prst="roundRect">
             <a:avLst>
@@ -53123,7 +53204,7 @@
         <p:spPr>
           <a:xfrm>
             <a:off x="566928" y="1426464"/>
-            <a:ext cx="45720" cy="991903"/>
+            <a:ext cx="45720" cy="960582"/>
           </a:xfrm>
           <a:prstGeom prst="rect">
             <a:avLst/>
@@ -53167,7 +53248,7 @@
         <p:spPr>
           <a:xfrm>
             <a:off x="768096" y="1563624"/>
-            <a:ext cx="5379415" cy="717583"/>
+            <a:ext cx="4556455" cy="686262"/>
           </a:xfrm>
           <a:prstGeom prst="rect">
             <a:avLst/>
@@ -53233,8 +53314,8 @@
         </p:nvSpPr>
         <p:spPr>
           <a:xfrm>
-            <a:off x="566928" y="2528095"/>
-            <a:ext cx="5781751" cy="835299"/>
+            <a:off x="566928" y="2496774"/>
+            <a:ext cx="4958791" cy="803978"/>
           </a:xfrm>
           <a:prstGeom prst="roundRect">
             <a:avLst>
@@ -53279,8 +53360,8 @@
         </p:nvSpPr>
         <p:spPr>
           <a:xfrm>
-            <a:off x="566928" y="2528095"/>
-            <a:ext cx="45720" cy="835299"/>
+            <a:off x="566928" y="2496774"/>
+            <a:ext cx="45720" cy="803978"/>
           </a:xfrm>
           <a:prstGeom prst="rect">
             <a:avLst/>
@@ -53323,8 +53404,8 @@
         </p:nvSpPr>
         <p:spPr>
           <a:xfrm>
-            <a:off x="768096" y="2665255"/>
-            <a:ext cx="5379415" cy="560979"/>
+            <a:off x="768096" y="2633934"/>
+            <a:ext cx="4556455" cy="529658"/>
           </a:xfrm>
           <a:prstGeom prst="rect">
             <a:avLst/>
@@ -53390,8 +53471,8 @@
         </p:nvSpPr>
         <p:spPr>
           <a:xfrm>
-            <a:off x="566928" y="3473122"/>
-            <a:ext cx="5781751" cy="835299"/>
+            <a:off x="566928" y="3410480"/>
+            <a:ext cx="4958791" cy="803978"/>
           </a:xfrm>
           <a:prstGeom prst="roundRect">
             <a:avLst>
@@ -53436,8 +53517,8 @@
         </p:nvSpPr>
         <p:spPr>
           <a:xfrm>
-            <a:off x="566928" y="3473122"/>
-            <a:ext cx="45720" cy="835299"/>
+            <a:off x="566928" y="3410480"/>
+            <a:ext cx="45720" cy="803978"/>
           </a:xfrm>
           <a:prstGeom prst="rect">
             <a:avLst/>
@@ -53480,8 +53561,8 @@
         </p:nvSpPr>
         <p:spPr>
           <a:xfrm>
-            <a:off x="768096" y="3610282"/>
-            <a:ext cx="5379415" cy="560979"/>
+            <a:off x="768096" y="3547640"/>
+            <a:ext cx="4556455" cy="529658"/>
           </a:xfrm>
           <a:prstGeom prst="rect">
             <a:avLst/>
@@ -53547,8 +53628,8 @@
         </p:nvSpPr>
         <p:spPr>
           <a:xfrm>
-            <a:off x="566928" y="4418149"/>
-            <a:ext cx="5781751" cy="835299"/>
+            <a:off x="566928" y="4324187"/>
+            <a:ext cx="4958791" cy="960582"/>
           </a:xfrm>
           <a:prstGeom prst="roundRect">
             <a:avLst>
@@ -53593,8 +53674,8 @@
         </p:nvSpPr>
         <p:spPr>
           <a:xfrm>
-            <a:off x="566928" y="4418149"/>
-            <a:ext cx="45720" cy="835299"/>
+            <a:off x="566928" y="4324187"/>
+            <a:ext cx="45720" cy="960582"/>
           </a:xfrm>
           <a:prstGeom prst="rect">
             <a:avLst/>
@@ -53637,8 +53718,8 @@
         </p:nvSpPr>
         <p:spPr>
           <a:xfrm>
-            <a:off x="768096" y="4555309"/>
-            <a:ext cx="5379415" cy="560979"/>
+            <a:off x="768096" y="4461347"/>
+            <a:ext cx="4556455" cy="686262"/>
           </a:xfrm>
           <a:prstGeom prst="rect">
             <a:avLst/>
@@ -53704,8 +53785,8 @@
         </p:nvSpPr>
         <p:spPr>
           <a:xfrm>
-            <a:off x="566928" y="5363176"/>
-            <a:ext cx="5781751" cy="991903"/>
+            <a:off x="566928" y="5394497"/>
+            <a:ext cx="4958791" cy="960582"/>
           </a:xfrm>
           <a:prstGeom prst="roundRect">
             <a:avLst>
@@ -53750,8 +53831,8 @@
         </p:nvSpPr>
         <p:spPr>
           <a:xfrm>
-            <a:off x="566928" y="5363176"/>
-            <a:ext cx="45720" cy="991903"/>
+            <a:off x="566928" y="5394497"/>
+            <a:ext cx="45720" cy="960582"/>
           </a:xfrm>
           <a:prstGeom prst="rect">
             <a:avLst/>
@@ -53794,8 +53875,8 @@
         </p:nvSpPr>
         <p:spPr>
           <a:xfrm>
-            <a:off x="768096" y="5500336"/>
-            <a:ext cx="5379415" cy="717583"/>
+            <a:off x="768096" y="5531657"/>
+            <a:ext cx="4556455" cy="686262"/>
           </a:xfrm>
           <a:prstGeom prst="rect">
             <a:avLst/>
@@ -54327,7 +54408,7 @@
         <p:spPr>
           <a:xfrm>
             <a:off x="566928" y="2231136"/>
-            <a:ext cx="11057839" cy="758952"/>
+            <a:ext cx="11057839" cy="694944"/>
           </a:xfrm>
           <a:prstGeom prst="rect">
             <a:avLst/>
@@ -54371,7 +54452,7 @@
         <p:spPr>
           <a:xfrm>
             <a:off x="685800" y="2295144"/>
-            <a:ext cx="2825496" cy="667512"/>
+            <a:ext cx="2825496" cy="603504"/>
           </a:xfrm>
           <a:prstGeom prst="rect">
             <a:avLst/>
@@ -54416,7 +54497,7 @@
         <p:spPr>
           <a:xfrm>
             <a:off x="3749040" y="2295144"/>
-            <a:ext cx="3374136" cy="667512"/>
+            <a:ext cx="3374136" cy="603504"/>
           </a:xfrm>
           <a:prstGeom prst="rect">
             <a:avLst/>
@@ -54461,7 +54542,7 @@
         <p:spPr>
           <a:xfrm>
             <a:off x="7360920" y="2295144"/>
-            <a:ext cx="4142232" cy="667512"/>
+            <a:ext cx="4142232" cy="603504"/>
           </a:xfrm>
           <a:prstGeom prst="rect">
             <a:avLst/>
@@ -54505,8 +54586,8 @@
         </p:nvSpPr>
         <p:spPr>
           <a:xfrm>
-            <a:off x="566928" y="2990088"/>
-            <a:ext cx="11057839" cy="758952"/>
+            <a:off x="566928" y="2926080"/>
+            <a:ext cx="11057839" cy="694944"/>
           </a:xfrm>
           <a:prstGeom prst="rect">
             <a:avLst/>
@@ -54549,8 +54630,8 @@
         </p:nvSpPr>
         <p:spPr>
           <a:xfrm>
-            <a:off x="685800" y="3054096"/>
-            <a:ext cx="2825496" cy="667512"/>
+            <a:off x="685800" y="2990088"/>
+            <a:ext cx="2825496" cy="603504"/>
           </a:xfrm>
           <a:prstGeom prst="rect">
             <a:avLst/>
@@ -54594,8 +54675,8 @@
         </p:nvSpPr>
         <p:spPr>
           <a:xfrm>
-            <a:off x="3749040" y="3054096"/>
-            <a:ext cx="3374136" cy="667512"/>
+            <a:off x="3749040" y="2990088"/>
+            <a:ext cx="3374136" cy="603504"/>
           </a:xfrm>
           <a:prstGeom prst="rect">
             <a:avLst/>
@@ -54639,8 +54720,8 @@
         </p:nvSpPr>
         <p:spPr>
           <a:xfrm>
-            <a:off x="7360920" y="3054096"/>
-            <a:ext cx="4142232" cy="667512"/>
+            <a:off x="7360920" y="2990088"/>
+            <a:ext cx="4142232" cy="603504"/>
           </a:xfrm>
           <a:prstGeom prst="rect">
             <a:avLst/>
@@ -54684,8 +54765,8 @@
         </p:nvSpPr>
         <p:spPr>
           <a:xfrm>
-            <a:off x="566928" y="3749039"/>
-            <a:ext cx="11057839" cy="758952"/>
+            <a:off x="566928" y="3621024"/>
+            <a:ext cx="11057839" cy="694944"/>
           </a:xfrm>
           <a:prstGeom prst="rect">
             <a:avLst/>
@@ -54728,8 +54809,8 @@
         </p:nvSpPr>
         <p:spPr>
           <a:xfrm>
-            <a:off x="685800" y="3813048"/>
-            <a:ext cx="2825496" cy="667512"/>
+            <a:off x="685800" y="3685032"/>
+            <a:ext cx="2825496" cy="603504"/>
           </a:xfrm>
           <a:prstGeom prst="rect">
             <a:avLst/>
@@ -54773,8 +54854,8 @@
         </p:nvSpPr>
         <p:spPr>
           <a:xfrm>
-            <a:off x="3749040" y="3813048"/>
-            <a:ext cx="3374136" cy="667512"/>
+            <a:off x="3749040" y="3685032"/>
+            <a:ext cx="3374136" cy="603504"/>
           </a:xfrm>
           <a:prstGeom prst="rect">
             <a:avLst/>
@@ -54818,8 +54899,8 @@
         </p:nvSpPr>
         <p:spPr>
           <a:xfrm>
-            <a:off x="7360920" y="3813048"/>
-            <a:ext cx="4142232" cy="667512"/>
+            <a:off x="7360920" y="3685032"/>
+            <a:ext cx="4142232" cy="603504"/>
           </a:xfrm>
           <a:prstGeom prst="rect">
             <a:avLst/>
@@ -54863,8 +54944,8 @@
         </p:nvSpPr>
         <p:spPr>
           <a:xfrm>
-            <a:off x="566928" y="4507992"/>
-            <a:ext cx="11057839" cy="758952"/>
+            <a:off x="566928" y="4315968"/>
+            <a:ext cx="11057839" cy="694944"/>
           </a:xfrm>
           <a:prstGeom prst="rect">
             <a:avLst/>
@@ -54907,8 +54988,8 @@
         </p:nvSpPr>
         <p:spPr>
           <a:xfrm>
-            <a:off x="685800" y="4572000"/>
-            <a:ext cx="2825496" cy="667512"/>
+            <a:off x="685800" y="4379976"/>
+            <a:ext cx="2825496" cy="603504"/>
           </a:xfrm>
           <a:prstGeom prst="rect">
             <a:avLst/>
@@ -54952,8 +55033,8 @@
         </p:nvSpPr>
         <p:spPr>
           <a:xfrm>
-            <a:off x="3749040" y="4572000"/>
-            <a:ext cx="3374136" cy="667512"/>
+            <a:off x="3749040" y="4379976"/>
+            <a:ext cx="3374136" cy="603504"/>
           </a:xfrm>
           <a:prstGeom prst="rect">
             <a:avLst/>
@@ -54997,8 +55078,8 @@
         </p:nvSpPr>
         <p:spPr>
           <a:xfrm>
-            <a:off x="7360920" y="4572000"/>
-            <a:ext cx="4142232" cy="667512"/>
+            <a:off x="7360920" y="4379976"/>
+            <a:ext cx="4142232" cy="603504"/>
           </a:xfrm>
           <a:prstGeom prst="rect">
             <a:avLst/>
@@ -55042,8 +55123,8 @@
         </p:nvSpPr>
         <p:spPr>
           <a:xfrm>
-            <a:off x="566928" y="5266944"/>
-            <a:ext cx="11057839" cy="758952"/>
+            <a:off x="566928" y="5010912"/>
+            <a:ext cx="11057839" cy="694944"/>
           </a:xfrm>
           <a:prstGeom prst="rect">
             <a:avLst/>
@@ -55086,8 +55167,8 @@
         </p:nvSpPr>
         <p:spPr>
           <a:xfrm>
-            <a:off x="685800" y="5330952"/>
-            <a:ext cx="2825496" cy="667512"/>
+            <a:off x="685800" y="5074920"/>
+            <a:ext cx="2825496" cy="603504"/>
           </a:xfrm>
           <a:prstGeom prst="rect">
             <a:avLst/>
@@ -55131,8 +55212,8 @@
         </p:nvSpPr>
         <p:spPr>
           <a:xfrm>
-            <a:off x="3749040" y="5330952"/>
-            <a:ext cx="3374136" cy="667512"/>
+            <a:off x="3749040" y="5074920"/>
+            <a:ext cx="3374136" cy="603504"/>
           </a:xfrm>
           <a:prstGeom prst="rect">
             <a:avLst/>
@@ -55176,8 +55257,8 @@
         </p:nvSpPr>
         <p:spPr>
           <a:xfrm>
-            <a:off x="7360920" y="5330952"/>
-            <a:ext cx="4142232" cy="667512"/>
+            <a:off x="7360920" y="5074920"/>
+            <a:ext cx="4142232" cy="603504"/>
           </a:xfrm>
           <a:prstGeom prst="rect">
             <a:avLst/>
@@ -55221,8 +55302,8 @@
         </p:nvSpPr>
         <p:spPr>
           <a:xfrm>
-            <a:off x="566928" y="6025896"/>
-            <a:ext cx="11057839" cy="758952"/>
+            <a:off x="566928" y="5705855"/>
+            <a:ext cx="11057839" cy="694944"/>
           </a:xfrm>
           <a:prstGeom prst="rect">
             <a:avLst/>
@@ -55265,8 +55346,8 @@
         </p:nvSpPr>
         <p:spPr>
           <a:xfrm>
-            <a:off x="685800" y="6089904"/>
-            <a:ext cx="2825496" cy="667512"/>
+            <a:off x="685800" y="5769864"/>
+            <a:ext cx="2825496" cy="603504"/>
           </a:xfrm>
           <a:prstGeom prst="rect">
             <a:avLst/>
@@ -55310,8 +55391,8 @@
         </p:nvSpPr>
         <p:spPr>
           <a:xfrm>
-            <a:off x="3749040" y="6089904"/>
-            <a:ext cx="3374136" cy="667512"/>
+            <a:off x="3749040" y="5769864"/>
+            <a:ext cx="3374136" cy="603504"/>
           </a:xfrm>
           <a:prstGeom prst="rect">
             <a:avLst/>
@@ -55355,8 +55436,8 @@
         </p:nvSpPr>
         <p:spPr>
           <a:xfrm>
-            <a:off x="7360920" y="6089904"/>
-            <a:ext cx="4142232" cy="667512"/>
+            <a:off x="7360920" y="5769864"/>
+            <a:ext cx="4142232" cy="603504"/>
           </a:xfrm>
           <a:prstGeom prst="rect">
             <a:avLst/>
@@ -55951,15 +56032,14 @@
         </p:nvPicPr>
         <p:blipFill>
           <a:blip r:embed="rId2"/>
-          <a:srcRect l="15033" r="15033"/>
           <a:stretch>
             <a:fillRect/>
           </a:stretch>
         </p:blipFill>
         <p:spPr>
           <a:xfrm>
-            <a:off x="6732727" y="1417320"/>
-            <a:ext cx="4892040" cy="4663440"/>
+            <a:off x="5909767" y="1417320"/>
+            <a:ext cx="5715000" cy="3810000"/>
           </a:xfrm>
           <a:prstGeom prst="rect">
             <a:avLst/>
@@ -55974,8 +56054,8 @@
         </p:nvSpPr>
         <p:spPr>
           <a:xfrm>
-            <a:off x="6732727" y="1417320"/>
-            <a:ext cx="4892040" cy="59436"/>
+            <a:off x="5909767" y="1417320"/>
+            <a:ext cx="5715000" cy="59436"/>
           </a:xfrm>
           <a:prstGeom prst="rect">
             <a:avLst/>
@@ -56018,8 +56098,8 @@
         </p:nvSpPr>
         <p:spPr>
           <a:xfrm>
-            <a:off x="6732727" y="6144768"/>
-            <a:ext cx="4892040" cy="365760"/>
+            <a:off x="5909767" y="5273040"/>
+            <a:ext cx="5715000" cy="365760"/>
           </a:xfrm>
           <a:prstGeom prst="rect">
             <a:avLst/>
@@ -56064,7 +56144,7 @@
         <p:spPr>
           <a:xfrm>
             <a:off x="566928" y="1426464"/>
-            <a:ext cx="5781751" cy="863323"/>
+            <a:ext cx="4958791" cy="832002"/>
           </a:xfrm>
           <a:prstGeom prst="roundRect">
             <a:avLst>
@@ -56110,7 +56190,7 @@
         <p:spPr>
           <a:xfrm>
             <a:off x="566928" y="1426464"/>
-            <a:ext cx="45720" cy="863323"/>
+            <a:ext cx="45720" cy="832002"/>
           </a:xfrm>
           <a:prstGeom prst="rect">
             <a:avLst/>
@@ -56154,7 +56234,7 @@
         <p:spPr>
           <a:xfrm>
             <a:off x="768096" y="1563624"/>
-            <a:ext cx="5379415" cy="589003"/>
+            <a:ext cx="4556455" cy="557682"/>
           </a:xfrm>
           <a:prstGeom prst="rect">
             <a:avLst/>
@@ -56179,7 +56259,7 @@
               </a:spcAft>
             </a:pPr>
             <a:r>
-              <a:rPr sz="1150" b="1" i="0">
+              <a:rPr sz="1100" b="1" i="0">
                 <a:solidFill>
                   <a:srgbClr val="0B6E4F"/>
                 </a:solidFill>
@@ -56201,7 +56281,7 @@
               </a:spcAft>
             </a:pPr>
             <a:r>
-              <a:rPr sz="1050" b="0" i="0">
+              <a:rPr sz="1000" b="0" i="0">
                 <a:solidFill>
                   <a:srgbClr val="14262E"/>
                 </a:solidFill>
@@ -56220,8 +56300,8 @@
         </p:nvSpPr>
         <p:spPr>
           <a:xfrm>
-            <a:off x="566928" y="2399515"/>
-            <a:ext cx="5781751" cy="863323"/>
+            <a:off x="566928" y="2368194"/>
+            <a:ext cx="4958791" cy="996848"/>
           </a:xfrm>
           <a:prstGeom prst="roundRect">
             <a:avLst>
@@ -56266,8 +56346,8 @@
         </p:nvSpPr>
         <p:spPr>
           <a:xfrm>
-            <a:off x="566928" y="2399515"/>
-            <a:ext cx="45720" cy="863323"/>
+            <a:off x="566928" y="2368194"/>
+            <a:ext cx="45720" cy="996848"/>
           </a:xfrm>
           <a:prstGeom prst="rect">
             <a:avLst/>
@@ -56310,8 +56390,8 @@
         </p:nvSpPr>
         <p:spPr>
           <a:xfrm>
-            <a:off x="768096" y="2536675"/>
-            <a:ext cx="5379415" cy="589003"/>
+            <a:off x="768096" y="2505354"/>
+            <a:ext cx="4556455" cy="722528"/>
           </a:xfrm>
           <a:prstGeom prst="rect">
             <a:avLst/>
@@ -56336,7 +56416,7 @@
               </a:spcAft>
             </a:pPr>
             <a:r>
-              <a:rPr sz="1150" b="1" i="0">
+              <a:rPr sz="1100" b="1" i="0">
                 <a:solidFill>
                   <a:srgbClr val="0B6E4F"/>
                 </a:solidFill>
@@ -56358,7 +56438,7 @@
               </a:spcAft>
             </a:pPr>
             <a:r>
-              <a:rPr sz="1050" b="0" i="0">
+              <a:rPr sz="1000" b="0" i="0">
                 <a:solidFill>
                   <a:srgbClr val="14262E"/>
                 </a:solidFill>
@@ -56377,8 +56457,8 @@
         </p:nvSpPr>
         <p:spPr>
           <a:xfrm>
-            <a:off x="566928" y="3372566"/>
-            <a:ext cx="5781751" cy="863323"/>
+            <a:off x="566928" y="3474770"/>
+            <a:ext cx="4958791" cy="832002"/>
           </a:xfrm>
           <a:prstGeom prst="roundRect">
             <a:avLst>
@@ -56423,8 +56503,8 @@
         </p:nvSpPr>
         <p:spPr>
           <a:xfrm>
-            <a:off x="566928" y="3372566"/>
-            <a:ext cx="45720" cy="863323"/>
+            <a:off x="566928" y="3474770"/>
+            <a:ext cx="45720" cy="832002"/>
           </a:xfrm>
           <a:prstGeom prst="rect">
             <a:avLst/>
@@ -56467,8 +56547,8 @@
         </p:nvSpPr>
         <p:spPr>
           <a:xfrm>
-            <a:off x="768096" y="3509726"/>
-            <a:ext cx="5379415" cy="589003"/>
+            <a:off x="768096" y="3611930"/>
+            <a:ext cx="4556455" cy="557682"/>
           </a:xfrm>
           <a:prstGeom prst="rect">
             <a:avLst/>
@@ -56493,7 +56573,7 @@
               </a:spcAft>
             </a:pPr>
             <a:r>
-              <a:rPr sz="1150" b="1" i="0">
+              <a:rPr sz="1100" b="1" i="0">
                 <a:solidFill>
                   <a:srgbClr val="0B6E4F"/>
                 </a:solidFill>
@@ -56515,7 +56595,7 @@
               </a:spcAft>
             </a:pPr>
             <a:r>
-              <a:rPr sz="1050" b="0" i="0">
+              <a:rPr sz="1000" b="0" i="0">
                 <a:solidFill>
                   <a:srgbClr val="14262E"/>
                 </a:solidFill>
@@ -56534,8 +56614,8 @@
         </p:nvSpPr>
         <p:spPr>
           <a:xfrm>
-            <a:off x="566928" y="4345617"/>
-            <a:ext cx="5781751" cy="863323"/>
+            <a:off x="566928" y="4416501"/>
+            <a:ext cx="4958791" cy="832002"/>
           </a:xfrm>
           <a:prstGeom prst="roundRect">
             <a:avLst>
@@ -56580,8 +56660,8 @@
         </p:nvSpPr>
         <p:spPr>
           <a:xfrm>
-            <a:off x="566928" y="4345617"/>
-            <a:ext cx="45720" cy="863323"/>
+            <a:off x="566928" y="4416501"/>
+            <a:ext cx="45720" cy="832002"/>
           </a:xfrm>
           <a:prstGeom prst="rect">
             <a:avLst/>
@@ -56624,8 +56704,8 @@
         </p:nvSpPr>
         <p:spPr>
           <a:xfrm>
-            <a:off x="768096" y="4482777"/>
-            <a:ext cx="5379415" cy="589003"/>
+            <a:off x="768096" y="4553661"/>
+            <a:ext cx="4556455" cy="557682"/>
           </a:xfrm>
           <a:prstGeom prst="rect">
             <a:avLst/>
@@ -56650,7 +56730,7 @@
               </a:spcAft>
             </a:pPr>
             <a:r>
-              <a:rPr sz="1150" b="1" i="0">
+              <a:rPr sz="1100" b="1" i="0">
                 <a:solidFill>
                   <a:srgbClr val="0B6E4F"/>
                 </a:solidFill>
@@ -56672,7 +56752,7 @@
               </a:spcAft>
             </a:pPr>
             <a:r>
-              <a:rPr sz="1050" b="0" i="0">
+              <a:rPr sz="1000" b="0" i="0">
                 <a:solidFill>
                   <a:srgbClr val="14262E"/>
                 </a:solidFill>
@@ -56691,8 +56771,8 @@
         </p:nvSpPr>
         <p:spPr>
           <a:xfrm>
-            <a:off x="566928" y="5318668"/>
-            <a:ext cx="5781751" cy="1036411"/>
+            <a:off x="566928" y="5358231"/>
+            <a:ext cx="4958791" cy="996848"/>
           </a:xfrm>
           <a:prstGeom prst="roundRect">
             <a:avLst>
@@ -56737,8 +56817,8 @@
         </p:nvSpPr>
         <p:spPr>
           <a:xfrm>
-            <a:off x="566928" y="5318668"/>
-            <a:ext cx="45720" cy="1036411"/>
+            <a:off x="566928" y="5358231"/>
+            <a:ext cx="45720" cy="996848"/>
           </a:xfrm>
           <a:prstGeom prst="rect">
             <a:avLst/>
@@ -56781,8 +56861,8 @@
         </p:nvSpPr>
         <p:spPr>
           <a:xfrm>
-            <a:off x="768096" y="5455828"/>
-            <a:ext cx="5379415" cy="762091"/>
+            <a:off x="768096" y="5495391"/>
+            <a:ext cx="4556455" cy="722528"/>
           </a:xfrm>
           <a:prstGeom prst="rect">
             <a:avLst/>
@@ -56807,7 +56887,7 @@
               </a:spcAft>
             </a:pPr>
             <a:r>
-              <a:rPr sz="1150" b="1" i="0">
+              <a:rPr sz="1100" b="1" i="0">
                 <a:solidFill>
                   <a:srgbClr val="0B6E4F"/>
                 </a:solidFill>
@@ -56829,7 +56909,7 @@
               </a:spcAft>
             </a:pPr>
             <a:r>
-              <a:rPr sz="1050" b="0" i="0">
+              <a:rPr sz="1000" b="0" i="0">
                 <a:solidFill>
                   <a:srgbClr val="14262E"/>
                 </a:solidFill>
@@ -58097,15 +58177,14 @@
         </p:nvPicPr>
         <p:blipFill>
           <a:blip r:embed="rId2"/>
-          <a:srcRect l="15033" r="15033"/>
           <a:stretch>
             <a:fillRect/>
           </a:stretch>
         </p:blipFill>
         <p:spPr>
           <a:xfrm>
-            <a:off x="6732727" y="1417320"/>
-            <a:ext cx="4892040" cy="4663440"/>
+            <a:off x="5909767" y="1417320"/>
+            <a:ext cx="5715000" cy="3810000"/>
           </a:xfrm>
           <a:prstGeom prst="rect">
             <a:avLst/>
@@ -58120,8 +58199,8 @@
         </p:nvSpPr>
         <p:spPr>
           <a:xfrm>
-            <a:off x="6732727" y="1417320"/>
-            <a:ext cx="4892040" cy="59436"/>
+            <a:off x="5909767" y="1417320"/>
+            <a:ext cx="5715000" cy="59436"/>
           </a:xfrm>
           <a:prstGeom prst="rect">
             <a:avLst/>
@@ -58164,8 +58243,8 @@
         </p:nvSpPr>
         <p:spPr>
           <a:xfrm>
-            <a:off x="6732727" y="6144768"/>
-            <a:ext cx="4892040" cy="365760"/>
+            <a:off x="5909767" y="5273040"/>
+            <a:ext cx="5715000" cy="365760"/>
           </a:xfrm>
           <a:prstGeom prst="rect">
             <a:avLst/>
@@ -58210,7 +58289,7 @@
         <p:spPr>
           <a:xfrm>
             <a:off x="566928" y="1426464"/>
-            <a:ext cx="5781751" cy="897940"/>
+            <a:ext cx="4958791" cy="897940"/>
           </a:xfrm>
           <a:prstGeom prst="roundRect">
             <a:avLst>
@@ -58300,7 +58379,7 @@
         <p:spPr>
           <a:xfrm>
             <a:off x="768096" y="1563624"/>
-            <a:ext cx="5379415" cy="623620"/>
+            <a:ext cx="4556455" cy="623620"/>
           </a:xfrm>
           <a:prstGeom prst="rect">
             <a:avLst/>
@@ -58325,7 +58404,7 @@
               </a:spcAft>
             </a:pPr>
             <a:r>
-              <a:rPr sz="1250" b="1" i="0">
+              <a:rPr sz="1200" b="1" i="0">
                 <a:solidFill>
                   <a:srgbClr val="0B6E4F"/>
                 </a:solidFill>
@@ -58347,7 +58426,7 @@
               </a:spcAft>
             </a:pPr>
             <a:r>
-              <a:rPr sz="1150" b="0" i="0">
+              <a:rPr sz="1100" b="0" i="0">
                 <a:solidFill>
                   <a:srgbClr val="14262E"/>
                 </a:solidFill>
@@ -58367,7 +58446,7 @@
         <p:spPr>
           <a:xfrm>
             <a:off x="566928" y="2434132"/>
-            <a:ext cx="5781751" cy="897940"/>
+            <a:ext cx="4958791" cy="897940"/>
           </a:xfrm>
           <a:prstGeom prst="roundRect">
             <a:avLst>
@@ -58457,7 +58536,7 @@
         <p:spPr>
           <a:xfrm>
             <a:off x="768096" y="2571292"/>
-            <a:ext cx="5379415" cy="623620"/>
+            <a:ext cx="4556455" cy="623620"/>
           </a:xfrm>
           <a:prstGeom prst="rect">
             <a:avLst/>
@@ -58482,7 +58561,7 @@
               </a:spcAft>
             </a:pPr>
             <a:r>
-              <a:rPr sz="1250" b="1" i="0">
+              <a:rPr sz="1200" b="1" i="0">
                 <a:solidFill>
                   <a:srgbClr val="0B6E4F"/>
                 </a:solidFill>
@@ -58504,7 +58583,7 @@
               </a:spcAft>
             </a:pPr>
             <a:r>
-              <a:rPr sz="1150" b="0" i="0">
+              <a:rPr sz="1100" b="0" i="0">
                 <a:solidFill>
                   <a:srgbClr val="14262E"/>
                 </a:solidFill>
@@ -58524,7 +58603,7 @@
         <p:spPr>
           <a:xfrm>
             <a:off x="566928" y="3441801"/>
-            <a:ext cx="5781751" cy="897940"/>
+            <a:ext cx="4958791" cy="897940"/>
           </a:xfrm>
           <a:prstGeom prst="roundRect">
             <a:avLst>
@@ -58614,7 +58693,7 @@
         <p:spPr>
           <a:xfrm>
             <a:off x="768096" y="3578961"/>
-            <a:ext cx="5379415" cy="623620"/>
+            <a:ext cx="4556455" cy="623620"/>
           </a:xfrm>
           <a:prstGeom prst="rect">
             <a:avLst/>
@@ -58639,7 +58718,7 @@
               </a:spcAft>
             </a:pPr>
             <a:r>
-              <a:rPr sz="1250" b="1" i="0">
+              <a:rPr sz="1200" b="1" i="0">
                 <a:solidFill>
                   <a:srgbClr val="0B6E4F"/>
                 </a:solidFill>
@@ -58661,7 +58740,7 @@
               </a:spcAft>
             </a:pPr>
             <a:r>
-              <a:rPr sz="1150" b="0" i="0">
+              <a:rPr sz="1100" b="0" i="0">
                 <a:solidFill>
                   <a:srgbClr val="14262E"/>
                 </a:solidFill>
@@ -58681,7 +58760,7 @@
         <p:spPr>
           <a:xfrm>
             <a:off x="566928" y="4449470"/>
-            <a:ext cx="5781751" cy="897940"/>
+            <a:ext cx="4958791" cy="897940"/>
           </a:xfrm>
           <a:prstGeom prst="roundRect">
             <a:avLst>
@@ -58771,7 +58850,7 @@
         <p:spPr>
           <a:xfrm>
             <a:off x="768096" y="4586630"/>
-            <a:ext cx="5379415" cy="623620"/>
+            <a:ext cx="4556455" cy="623620"/>
           </a:xfrm>
           <a:prstGeom prst="rect">
             <a:avLst/>
@@ -58796,7 +58875,7 @@
               </a:spcAft>
             </a:pPr>
             <a:r>
-              <a:rPr sz="1250" b="1" i="0">
+              <a:rPr sz="1200" b="1" i="0">
                 <a:solidFill>
                   <a:srgbClr val="0B6E4F"/>
                 </a:solidFill>
@@ -58818,7 +58897,7 @@
               </a:spcAft>
             </a:pPr>
             <a:r>
-              <a:rPr sz="1150" b="0" i="0">
+              <a:rPr sz="1100" b="0" i="0">
                 <a:solidFill>
                   <a:srgbClr val="14262E"/>
                 </a:solidFill>
@@ -58838,7 +58917,7 @@
         <p:spPr>
           <a:xfrm>
             <a:off x="566928" y="5457139"/>
-            <a:ext cx="5781751" cy="897940"/>
+            <a:ext cx="4958791" cy="897940"/>
           </a:xfrm>
           <a:prstGeom prst="roundRect">
             <a:avLst>
@@ -58928,7 +59007,7 @@
         <p:spPr>
           <a:xfrm>
             <a:off x="768096" y="5594299"/>
-            <a:ext cx="5379415" cy="623620"/>
+            <a:ext cx="4556455" cy="623620"/>
           </a:xfrm>
           <a:prstGeom prst="rect">
             <a:avLst/>
@@ -58953,7 +59032,7 @@
               </a:spcAft>
             </a:pPr>
             <a:r>
-              <a:rPr sz="1250" b="1" i="0">
+              <a:rPr sz="1200" b="1" i="0">
                 <a:solidFill>
                   <a:srgbClr val="0B6E4F"/>
                 </a:solidFill>
@@ -58975,7 +59054,7 @@
               </a:spcAft>
             </a:pPr>
             <a:r>
-              <a:rPr sz="1150" b="0" i="0">
+              <a:rPr sz="1100" b="0" i="0">
                 <a:solidFill>
                   <a:srgbClr val="14262E"/>
                 </a:solidFill>

--- a/deliverables/Effective-Assessment-Practices-KATON-2026.pptx
+++ b/deliverables/Effective-Assessment-Practices-KATON-2026.pptx
@@ -3926,12 +3926,6 @@
           <a:p>
             <a:r>
               <a:t>DO NOT let anyone feel accused. Frame it as something we inherited, not something we chose. Then move on briskly - do not let the icebreaker run past five minutes.</a:t>
-            </a:r>
-          </a:p>
-          <a:p/>
-          <a:p>
-            <a:r>
-              <a:t>KEEP THE BOARD. You will call back to these words on the closing slide.</a:t>
             </a:r>
           </a:p>
         </p:txBody>
@@ -14629,14 +14623,15 @@
         </p:nvPicPr>
         <p:blipFill>
           <a:blip r:embed="rId2"/>
+          <a:srcRect l="15033" r="15033"/>
           <a:stretch>
             <a:fillRect/>
           </a:stretch>
         </p:blipFill>
         <p:spPr>
           <a:xfrm>
-            <a:off x="5909767" y="1417320"/>
-            <a:ext cx="5715000" cy="3810000"/>
+            <a:off x="6732727" y="1417320"/>
+            <a:ext cx="4892040" cy="4663440"/>
           </a:xfrm>
           <a:prstGeom prst="rect">
             <a:avLst/>
@@ -14651,8 +14646,8 @@
         </p:nvSpPr>
         <p:spPr>
           <a:xfrm>
-            <a:off x="5909767" y="1417320"/>
-            <a:ext cx="5715000" cy="59436"/>
+            <a:off x="6732727" y="1417320"/>
+            <a:ext cx="4892040" cy="59436"/>
           </a:xfrm>
           <a:prstGeom prst="rect">
             <a:avLst/>
@@ -14695,8 +14690,8 @@
         </p:nvSpPr>
         <p:spPr>
           <a:xfrm>
-            <a:off x="5909767" y="5273040"/>
-            <a:ext cx="5715000" cy="365760"/>
+            <a:off x="6732727" y="6144768"/>
+            <a:ext cx="4892040" cy="365760"/>
           </a:xfrm>
           <a:prstGeom prst="rect">
             <a:avLst/>
@@ -14741,7 +14736,7 @@
         <p:spPr>
           <a:xfrm>
             <a:off x="566928" y="1426464"/>
-            <a:ext cx="4958791" cy="729996"/>
+            <a:ext cx="5781751" cy="804176"/>
           </a:xfrm>
           <a:prstGeom prst="roundRect">
             <a:avLst>
@@ -14787,7 +14782,7 @@
         <p:spPr>
           <a:xfrm>
             <a:off x="566928" y="1426464"/>
-            <a:ext cx="45720" cy="729996"/>
+            <a:ext cx="45720" cy="804176"/>
           </a:xfrm>
           <a:prstGeom prst="rect">
             <a:avLst/>
@@ -14831,7 +14826,7 @@
         <p:spPr>
           <a:xfrm>
             <a:off x="768096" y="1563624"/>
-            <a:ext cx="4556455" cy="455676"/>
+            <a:ext cx="5379415" cy="529856"/>
           </a:xfrm>
           <a:prstGeom prst="rect">
             <a:avLst/>
@@ -14897,8 +14892,8 @@
         </p:nvSpPr>
         <p:spPr>
           <a:xfrm>
-            <a:off x="566928" y="2266188"/>
-            <a:ext cx="4958791" cy="729996"/>
+            <a:off x="566928" y="2340368"/>
+            <a:ext cx="5781751" cy="655815"/>
           </a:xfrm>
           <a:prstGeom prst="roundRect">
             <a:avLst>
@@ -14943,8 +14938,8 @@
         </p:nvSpPr>
         <p:spPr>
           <a:xfrm>
-            <a:off x="566928" y="2266188"/>
-            <a:ext cx="45720" cy="729996"/>
+            <a:off x="566928" y="2340368"/>
+            <a:ext cx="45720" cy="655815"/>
           </a:xfrm>
           <a:prstGeom prst="rect">
             <a:avLst/>
@@ -14987,8 +14982,8 @@
         </p:nvSpPr>
         <p:spPr>
           <a:xfrm>
-            <a:off x="768096" y="2403348"/>
-            <a:ext cx="4556455" cy="455676"/>
+            <a:off x="768096" y="2477528"/>
+            <a:ext cx="5379415" cy="381495"/>
           </a:xfrm>
           <a:prstGeom prst="rect">
             <a:avLst/>
@@ -15055,7 +15050,7 @@
         <p:spPr>
           <a:xfrm>
             <a:off x="566928" y="3105912"/>
-            <a:ext cx="4958791" cy="729996"/>
+            <a:ext cx="5781751" cy="655815"/>
           </a:xfrm>
           <a:prstGeom prst="roundRect">
             <a:avLst>
@@ -15101,7 +15096,7 @@
         <p:spPr>
           <a:xfrm>
             <a:off x="566928" y="3105912"/>
-            <a:ext cx="45720" cy="729996"/>
+            <a:ext cx="45720" cy="655815"/>
           </a:xfrm>
           <a:prstGeom prst="rect">
             <a:avLst/>
@@ -15145,7 +15140,7 @@
         <p:spPr>
           <a:xfrm>
             <a:off x="768096" y="3243072"/>
-            <a:ext cx="4556455" cy="455676"/>
+            <a:ext cx="5379415" cy="381495"/>
           </a:xfrm>
           <a:prstGeom prst="rect">
             <a:avLst/>
@@ -15211,8 +15206,8 @@
         </p:nvSpPr>
         <p:spPr>
           <a:xfrm>
-            <a:off x="566928" y="3945636"/>
-            <a:ext cx="4958791" cy="729996"/>
+            <a:off x="566928" y="3871455"/>
+            <a:ext cx="5781751" cy="655815"/>
           </a:xfrm>
           <a:prstGeom prst="roundRect">
             <a:avLst>
@@ -15257,8 +15252,8 @@
         </p:nvSpPr>
         <p:spPr>
           <a:xfrm>
-            <a:off x="566928" y="3945636"/>
-            <a:ext cx="45720" cy="729996"/>
+            <a:off x="566928" y="3871455"/>
+            <a:ext cx="45720" cy="655815"/>
           </a:xfrm>
           <a:prstGeom prst="rect">
             <a:avLst/>
@@ -15301,8 +15296,8 @@
         </p:nvSpPr>
         <p:spPr>
           <a:xfrm>
-            <a:off x="768096" y="4082796"/>
-            <a:ext cx="4556455" cy="455676"/>
+            <a:off x="768096" y="4008615"/>
+            <a:ext cx="5379415" cy="381495"/>
           </a:xfrm>
           <a:prstGeom prst="rect">
             <a:avLst/>
@@ -15368,8 +15363,8 @@
         </p:nvSpPr>
         <p:spPr>
           <a:xfrm>
-            <a:off x="566928" y="4785360"/>
-            <a:ext cx="4958791" cy="729996"/>
+            <a:off x="566928" y="4636998"/>
+            <a:ext cx="5781751" cy="804176"/>
           </a:xfrm>
           <a:prstGeom prst="roundRect">
             <a:avLst>
@@ -15414,8 +15409,8 @@
         </p:nvSpPr>
         <p:spPr>
           <a:xfrm>
-            <a:off x="566928" y="4785360"/>
-            <a:ext cx="45720" cy="729996"/>
+            <a:off x="566928" y="4636998"/>
+            <a:ext cx="45720" cy="804176"/>
           </a:xfrm>
           <a:prstGeom prst="rect">
             <a:avLst/>
@@ -15458,8 +15453,8 @@
         </p:nvSpPr>
         <p:spPr>
           <a:xfrm>
-            <a:off x="768096" y="4922520"/>
-            <a:ext cx="4556455" cy="455676"/>
+            <a:off x="768096" y="4774158"/>
+            <a:ext cx="5379415" cy="529856"/>
           </a:xfrm>
           <a:prstGeom prst="rect">
             <a:avLst/>
@@ -15525,8 +15520,8 @@
         </p:nvSpPr>
         <p:spPr>
           <a:xfrm>
-            <a:off x="566928" y="5625084"/>
-            <a:ext cx="4958791" cy="729996"/>
+            <a:off x="566928" y="5550903"/>
+            <a:ext cx="5781751" cy="804176"/>
           </a:xfrm>
           <a:prstGeom prst="roundRect">
             <a:avLst>
@@ -15571,8 +15566,8 @@
         </p:nvSpPr>
         <p:spPr>
           <a:xfrm>
-            <a:off x="566928" y="5625084"/>
-            <a:ext cx="45720" cy="729996"/>
+            <a:off x="566928" y="5550903"/>
+            <a:ext cx="45720" cy="804176"/>
           </a:xfrm>
           <a:prstGeom prst="rect">
             <a:avLst/>
@@ -15615,8 +15610,8 @@
         </p:nvSpPr>
         <p:spPr>
           <a:xfrm>
-            <a:off x="768096" y="5762244"/>
-            <a:ext cx="4556455" cy="455676"/>
+            <a:off x="768096" y="5688063"/>
+            <a:ext cx="5379415" cy="529856"/>
           </a:xfrm>
           <a:prstGeom prst="rect">
             <a:avLst/>
@@ -17107,14 +17102,15 @@
         </p:nvPicPr>
         <p:blipFill>
           <a:blip r:embed="rId2"/>
+          <a:srcRect l="15033" r="15033"/>
           <a:stretch>
             <a:fillRect/>
           </a:stretch>
         </p:blipFill>
         <p:spPr>
           <a:xfrm>
-            <a:off x="5909767" y="1417320"/>
-            <a:ext cx="5715000" cy="3810000"/>
+            <a:off x="6732727" y="1417320"/>
+            <a:ext cx="4892040" cy="4663440"/>
           </a:xfrm>
           <a:prstGeom prst="rect">
             <a:avLst/>
@@ -17129,8 +17125,8 @@
         </p:nvSpPr>
         <p:spPr>
           <a:xfrm>
-            <a:off x="5909767" y="1417320"/>
-            <a:ext cx="5715000" cy="59436"/>
+            <a:off x="6732727" y="1417320"/>
+            <a:ext cx="4892040" cy="59436"/>
           </a:xfrm>
           <a:prstGeom prst="rect">
             <a:avLst/>
@@ -17173,8 +17169,8 @@
         </p:nvSpPr>
         <p:spPr>
           <a:xfrm>
-            <a:off x="5909767" y="5273040"/>
-            <a:ext cx="5715000" cy="365760"/>
+            <a:off x="6732727" y="6144768"/>
+            <a:ext cx="4892040" cy="365760"/>
           </a:xfrm>
           <a:prstGeom prst="rect">
             <a:avLst/>
@@ -17219,7 +17215,7 @@
         <p:spPr>
           <a:xfrm>
             <a:off x="566928" y="1426464"/>
-            <a:ext cx="4958791" cy="803978"/>
+            <a:ext cx="5781751" cy="832002"/>
           </a:xfrm>
           <a:prstGeom prst="roundRect">
             <a:avLst>
@@ -17265,7 +17261,7 @@
         <p:spPr>
           <a:xfrm>
             <a:off x="566928" y="1426464"/>
-            <a:ext cx="45720" cy="803978"/>
+            <a:ext cx="45720" cy="832002"/>
           </a:xfrm>
           <a:prstGeom prst="rect">
             <a:avLst/>
@@ -17309,7 +17305,7 @@
         <p:spPr>
           <a:xfrm>
             <a:off x="768096" y="1563624"/>
-            <a:ext cx="4556455" cy="529658"/>
+            <a:ext cx="5379415" cy="557682"/>
           </a:xfrm>
           <a:prstGeom prst="rect">
             <a:avLst/>
@@ -17334,7 +17330,7 @@
               </a:spcAft>
             </a:pPr>
             <a:r>
-              <a:rPr sz="1050" b="1" i="0">
+              <a:rPr sz="1100" b="1" i="0">
                 <a:solidFill>
                   <a:srgbClr val="C1440E"/>
                 </a:solidFill>
@@ -17356,7 +17352,7 @@
               </a:spcAft>
             </a:pPr>
             <a:r>
-              <a:rPr sz="950" b="0" i="0">
+              <a:rPr sz="1000" b="0" i="0">
                 <a:solidFill>
                   <a:srgbClr val="14262E"/>
                 </a:solidFill>
@@ -17375,8 +17371,8 @@
         </p:nvSpPr>
         <p:spPr>
           <a:xfrm>
-            <a:off x="566928" y="2340170"/>
-            <a:ext cx="4958791" cy="960582"/>
+            <a:off x="566928" y="2368194"/>
+            <a:ext cx="5781751" cy="832002"/>
           </a:xfrm>
           <a:prstGeom prst="roundRect">
             <a:avLst>
@@ -17421,8 +17417,8 @@
         </p:nvSpPr>
         <p:spPr>
           <a:xfrm>
-            <a:off x="566928" y="2340170"/>
-            <a:ext cx="45720" cy="960582"/>
+            <a:off x="566928" y="2368194"/>
+            <a:ext cx="45720" cy="832002"/>
           </a:xfrm>
           <a:prstGeom prst="rect">
             <a:avLst/>
@@ -17465,8 +17461,8 @@
         </p:nvSpPr>
         <p:spPr>
           <a:xfrm>
-            <a:off x="768096" y="2477330"/>
-            <a:ext cx="4556455" cy="686262"/>
+            <a:off x="768096" y="2505354"/>
+            <a:ext cx="5379415" cy="557682"/>
           </a:xfrm>
           <a:prstGeom prst="rect">
             <a:avLst/>
@@ -17491,7 +17487,7 @@
               </a:spcAft>
             </a:pPr>
             <a:r>
-              <a:rPr sz="1050" b="1" i="0">
+              <a:rPr sz="1100" b="1" i="0">
                 <a:solidFill>
                   <a:srgbClr val="C1440E"/>
                 </a:solidFill>
@@ -17513,7 +17509,7 @@
               </a:spcAft>
             </a:pPr>
             <a:r>
-              <a:rPr sz="950" b="0" i="0">
+              <a:rPr sz="1000" b="0" i="0">
                 <a:solidFill>
                   <a:srgbClr val="14262E"/>
                 </a:solidFill>
@@ -17532,8 +17528,8 @@
         </p:nvSpPr>
         <p:spPr>
           <a:xfrm>
-            <a:off x="566928" y="3410480"/>
-            <a:ext cx="4958791" cy="960582"/>
+            <a:off x="566928" y="3309924"/>
+            <a:ext cx="5781751" cy="996848"/>
           </a:xfrm>
           <a:prstGeom prst="roundRect">
             <a:avLst>
@@ -17578,8 +17574,8 @@
         </p:nvSpPr>
         <p:spPr>
           <a:xfrm>
-            <a:off x="566928" y="3410480"/>
-            <a:ext cx="45720" cy="960582"/>
+            <a:off x="566928" y="3309924"/>
+            <a:ext cx="45720" cy="996848"/>
           </a:xfrm>
           <a:prstGeom prst="rect">
             <a:avLst/>
@@ -17622,8 +17618,8 @@
         </p:nvSpPr>
         <p:spPr>
           <a:xfrm>
-            <a:off x="768096" y="3547640"/>
-            <a:ext cx="4556455" cy="686262"/>
+            <a:off x="768096" y="3447084"/>
+            <a:ext cx="5379415" cy="722528"/>
           </a:xfrm>
           <a:prstGeom prst="rect">
             <a:avLst/>
@@ -17648,7 +17644,7 @@
               </a:spcAft>
             </a:pPr>
             <a:r>
-              <a:rPr sz="1050" b="1" i="0">
+              <a:rPr sz="1100" b="1" i="0">
                 <a:solidFill>
                   <a:srgbClr val="C1440E"/>
                 </a:solidFill>
@@ -17670,7 +17666,7 @@
               </a:spcAft>
             </a:pPr>
             <a:r>
-              <a:rPr sz="950" b="0" i="0">
+              <a:rPr sz="1000" b="0" i="0">
                 <a:solidFill>
                   <a:srgbClr val="14262E"/>
                 </a:solidFill>
@@ -17689,8 +17685,8 @@
         </p:nvSpPr>
         <p:spPr>
           <a:xfrm>
-            <a:off x="566928" y="4480791"/>
-            <a:ext cx="4958791" cy="960582"/>
+            <a:off x="566928" y="4416501"/>
+            <a:ext cx="5781751" cy="996848"/>
           </a:xfrm>
           <a:prstGeom prst="roundRect">
             <a:avLst>
@@ -17735,8 +17731,8 @@
         </p:nvSpPr>
         <p:spPr>
           <a:xfrm>
-            <a:off x="566928" y="4480791"/>
-            <a:ext cx="45720" cy="960582"/>
+            <a:off x="566928" y="4416501"/>
+            <a:ext cx="45720" cy="996848"/>
           </a:xfrm>
           <a:prstGeom prst="rect">
             <a:avLst/>
@@ -17779,8 +17775,8 @@
         </p:nvSpPr>
         <p:spPr>
           <a:xfrm>
-            <a:off x="768096" y="4617951"/>
-            <a:ext cx="4556455" cy="686262"/>
+            <a:off x="768096" y="4553661"/>
+            <a:ext cx="5379415" cy="722528"/>
           </a:xfrm>
           <a:prstGeom prst="rect">
             <a:avLst/>
@@ -17805,7 +17801,7 @@
               </a:spcAft>
             </a:pPr>
             <a:r>
-              <a:rPr sz="1050" b="1" i="0">
+              <a:rPr sz="1100" b="1" i="0">
                 <a:solidFill>
                   <a:srgbClr val="C1440E"/>
                 </a:solidFill>
@@ -17827,7 +17823,7 @@
               </a:spcAft>
             </a:pPr>
             <a:r>
-              <a:rPr sz="950" b="0" i="0">
+              <a:rPr sz="1000" b="0" i="0">
                 <a:solidFill>
                   <a:srgbClr val="14262E"/>
                 </a:solidFill>
@@ -17846,8 +17842,8 @@
         </p:nvSpPr>
         <p:spPr>
           <a:xfrm>
-            <a:off x="566928" y="5551101"/>
-            <a:ext cx="4958791" cy="803978"/>
+            <a:off x="566928" y="5523077"/>
+            <a:ext cx="5781751" cy="832002"/>
           </a:xfrm>
           <a:prstGeom prst="roundRect">
             <a:avLst>
@@ -17892,8 +17888,8 @@
         </p:nvSpPr>
         <p:spPr>
           <a:xfrm>
-            <a:off x="566928" y="5551101"/>
-            <a:ext cx="45720" cy="803978"/>
+            <a:off x="566928" y="5523077"/>
+            <a:ext cx="45720" cy="832002"/>
           </a:xfrm>
           <a:prstGeom prst="rect">
             <a:avLst/>
@@ -17936,8 +17932,8 @@
         </p:nvSpPr>
         <p:spPr>
           <a:xfrm>
-            <a:off x="768096" y="5688261"/>
-            <a:ext cx="4556455" cy="529658"/>
+            <a:off x="768096" y="5660237"/>
+            <a:ext cx="5379415" cy="557682"/>
           </a:xfrm>
           <a:prstGeom prst="rect">
             <a:avLst/>
@@ -17962,7 +17958,7 @@
               </a:spcAft>
             </a:pPr>
             <a:r>
-              <a:rPr sz="1050" b="1" i="0">
+              <a:rPr sz="1100" b="1" i="0">
                 <a:solidFill>
                   <a:srgbClr val="C1440E"/>
                 </a:solidFill>
@@ -17984,7 +17980,7 @@
               </a:spcAft>
             </a:pPr>
             <a:r>
-              <a:rPr sz="950" b="0" i="0">
+              <a:rPr sz="1000" b="0" i="0">
                 <a:solidFill>
                   <a:srgbClr val="14262E"/>
                 </a:solidFill>
@@ -18469,7 +18465,7 @@
         <p:spPr>
           <a:xfrm>
             <a:off x="566928" y="2249424"/>
-            <a:ext cx="11057839" cy="672084"/>
+            <a:ext cx="11057839" cy="859536"/>
           </a:xfrm>
           <a:prstGeom prst="rect">
             <a:avLst/>
@@ -18513,7 +18509,7 @@
         <p:spPr>
           <a:xfrm>
             <a:off x="685800" y="2313432"/>
-            <a:ext cx="2642615" cy="580644"/>
+            <a:ext cx="2642615" cy="768096"/>
           </a:xfrm>
           <a:prstGeom prst="rect">
             <a:avLst/>
@@ -18538,7 +18534,7 @@
               </a:spcAft>
             </a:pPr>
             <a:r>
-              <a:rPr sz="960" b="1" i="0">
+              <a:rPr sz="1100" b="1" i="0">
                 <a:solidFill>
                   <a:srgbClr val="14262E"/>
                 </a:solidFill>
@@ -18558,7 +18554,7 @@
         <p:spPr>
           <a:xfrm>
             <a:off x="3566160" y="2313432"/>
-            <a:ext cx="4151376" cy="580644"/>
+            <a:ext cx="4151376" cy="768096"/>
           </a:xfrm>
           <a:prstGeom prst="rect">
             <a:avLst/>
@@ -18583,7 +18579,7 @@
               </a:spcAft>
             </a:pPr>
             <a:r>
-              <a:rPr sz="960" b="0" i="0">
+              <a:rPr sz="1100" b="0" i="0">
                 <a:solidFill>
                   <a:srgbClr val="14262E"/>
                 </a:solidFill>
@@ -18603,7 +18599,7 @@
         <p:spPr>
           <a:xfrm>
             <a:off x="7955280" y="2313432"/>
-            <a:ext cx="3547872" cy="580644"/>
+            <a:ext cx="3547872" cy="768096"/>
           </a:xfrm>
           <a:prstGeom prst="rect">
             <a:avLst/>
@@ -18628,7 +18624,7 @@
               </a:spcAft>
             </a:pPr>
             <a:r>
-              <a:rPr sz="960" b="0" i="0">
+              <a:rPr sz="1100" b="0" i="0">
                 <a:solidFill>
                   <a:srgbClr val="14262E"/>
                 </a:solidFill>
@@ -18647,8 +18643,8 @@
         </p:nvSpPr>
         <p:spPr>
           <a:xfrm>
-            <a:off x="566928" y="2921508"/>
-            <a:ext cx="11057839" cy="672084"/>
+            <a:off x="566928" y="3108960"/>
+            <a:ext cx="11057839" cy="859536"/>
           </a:xfrm>
           <a:prstGeom prst="rect">
             <a:avLst/>
@@ -18691,8 +18687,8 @@
         </p:nvSpPr>
         <p:spPr>
           <a:xfrm>
-            <a:off x="685800" y="2985515"/>
-            <a:ext cx="2642615" cy="580644"/>
+            <a:off x="685800" y="3172968"/>
+            <a:ext cx="2642615" cy="768096"/>
           </a:xfrm>
           <a:prstGeom prst="rect">
             <a:avLst/>
@@ -18717,7 +18713,7 @@
               </a:spcAft>
             </a:pPr>
             <a:r>
-              <a:rPr sz="960" b="1" i="0">
+              <a:rPr sz="1100" b="1" i="0">
                 <a:solidFill>
                   <a:srgbClr val="14262E"/>
                 </a:solidFill>
@@ -18736,8 +18732,8 @@
         </p:nvSpPr>
         <p:spPr>
           <a:xfrm>
-            <a:off x="3566160" y="2985515"/>
-            <a:ext cx="4151376" cy="580644"/>
+            <a:off x="3566160" y="3172968"/>
+            <a:ext cx="4151376" cy="768096"/>
           </a:xfrm>
           <a:prstGeom prst="rect">
             <a:avLst/>
@@ -18762,7 +18758,7 @@
               </a:spcAft>
             </a:pPr>
             <a:r>
-              <a:rPr sz="960" b="0" i="0">
+              <a:rPr sz="1100" b="0" i="0">
                 <a:solidFill>
                   <a:srgbClr val="14262E"/>
                 </a:solidFill>
@@ -18781,8 +18777,8 @@
         </p:nvSpPr>
         <p:spPr>
           <a:xfrm>
-            <a:off x="7955280" y="2985515"/>
-            <a:ext cx="3547872" cy="580644"/>
+            <a:off x="7955280" y="3172968"/>
+            <a:ext cx="3547872" cy="768096"/>
           </a:xfrm>
           <a:prstGeom prst="rect">
             <a:avLst/>
@@ -18807,7 +18803,7 @@
               </a:spcAft>
             </a:pPr>
             <a:r>
-              <a:rPr sz="960" b="0" i="0">
+              <a:rPr sz="1100" b="0" i="0">
                 <a:solidFill>
                   <a:srgbClr val="14262E"/>
                 </a:solidFill>
@@ -18826,8 +18822,8 @@
         </p:nvSpPr>
         <p:spPr>
           <a:xfrm>
-            <a:off x="566928" y="3593591"/>
-            <a:ext cx="11057839" cy="672084"/>
+            <a:off x="566928" y="3968496"/>
+            <a:ext cx="11057839" cy="859536"/>
           </a:xfrm>
           <a:prstGeom prst="rect">
             <a:avLst/>
@@ -18870,8 +18866,8 @@
         </p:nvSpPr>
         <p:spPr>
           <a:xfrm>
-            <a:off x="685800" y="3657599"/>
-            <a:ext cx="2642615" cy="580644"/>
+            <a:off x="685800" y="4032504"/>
+            <a:ext cx="2642615" cy="768096"/>
           </a:xfrm>
           <a:prstGeom prst="rect">
             <a:avLst/>
@@ -18896,7 +18892,7 @@
               </a:spcAft>
             </a:pPr>
             <a:r>
-              <a:rPr sz="960" b="1" i="0">
+              <a:rPr sz="1100" b="1" i="0">
                 <a:solidFill>
                   <a:srgbClr val="14262E"/>
                 </a:solidFill>
@@ -18915,8 +18911,8 @@
         </p:nvSpPr>
         <p:spPr>
           <a:xfrm>
-            <a:off x="3566160" y="3657599"/>
-            <a:ext cx="4151376" cy="580644"/>
+            <a:off x="3566160" y="4032504"/>
+            <a:ext cx="4151376" cy="768096"/>
           </a:xfrm>
           <a:prstGeom prst="rect">
             <a:avLst/>
@@ -18941,7 +18937,7 @@
               </a:spcAft>
             </a:pPr>
             <a:r>
-              <a:rPr sz="960" b="0" i="0">
+              <a:rPr sz="1100" b="0" i="0">
                 <a:solidFill>
                   <a:srgbClr val="14262E"/>
                 </a:solidFill>
@@ -18960,8 +18956,8 @@
         </p:nvSpPr>
         <p:spPr>
           <a:xfrm>
-            <a:off x="7955280" y="3657599"/>
-            <a:ext cx="3547872" cy="580644"/>
+            <a:off x="7955280" y="4032504"/>
+            <a:ext cx="3547872" cy="768096"/>
           </a:xfrm>
           <a:prstGeom prst="rect">
             <a:avLst/>
@@ -18986,7 +18982,7 @@
               </a:spcAft>
             </a:pPr>
             <a:r>
-              <a:rPr sz="960" b="0" i="0">
+              <a:rPr sz="1100" b="0" i="0">
                 <a:solidFill>
                   <a:srgbClr val="14262E"/>
                 </a:solidFill>
@@ -19005,8 +19001,8 @@
         </p:nvSpPr>
         <p:spPr>
           <a:xfrm>
-            <a:off x="566928" y="4265676"/>
-            <a:ext cx="11057839" cy="672084"/>
+            <a:off x="566928" y="4828031"/>
+            <a:ext cx="11057839" cy="859536"/>
           </a:xfrm>
           <a:prstGeom prst="rect">
             <a:avLst/>
@@ -19049,8 +19045,8 @@
         </p:nvSpPr>
         <p:spPr>
           <a:xfrm>
-            <a:off x="685800" y="4329684"/>
-            <a:ext cx="2642615" cy="580644"/>
+            <a:off x="685800" y="4892040"/>
+            <a:ext cx="2642615" cy="768096"/>
           </a:xfrm>
           <a:prstGeom prst="rect">
             <a:avLst/>
@@ -19075,7 +19071,7 @@
               </a:spcAft>
             </a:pPr>
             <a:r>
-              <a:rPr sz="960" b="1" i="0">
+              <a:rPr sz="1100" b="1" i="0">
                 <a:solidFill>
                   <a:srgbClr val="14262E"/>
                 </a:solidFill>
@@ -19094,8 +19090,8 @@
         </p:nvSpPr>
         <p:spPr>
           <a:xfrm>
-            <a:off x="3566160" y="4329684"/>
-            <a:ext cx="4151376" cy="580644"/>
+            <a:off x="3566160" y="4892040"/>
+            <a:ext cx="4151376" cy="768096"/>
           </a:xfrm>
           <a:prstGeom prst="rect">
             <a:avLst/>
@@ -19120,7 +19116,7 @@
               </a:spcAft>
             </a:pPr>
             <a:r>
-              <a:rPr sz="960" b="0" i="0">
+              <a:rPr sz="1100" b="0" i="0">
                 <a:solidFill>
                   <a:srgbClr val="14262E"/>
                 </a:solidFill>
@@ -19139,8 +19135,8 @@
         </p:nvSpPr>
         <p:spPr>
           <a:xfrm>
-            <a:off x="7955280" y="4329684"/>
-            <a:ext cx="3547872" cy="580644"/>
+            <a:off x="7955280" y="4892040"/>
+            <a:ext cx="3547872" cy="768096"/>
           </a:xfrm>
           <a:prstGeom prst="rect">
             <a:avLst/>
@@ -19165,7 +19161,7 @@
               </a:spcAft>
             </a:pPr>
             <a:r>
-              <a:rPr sz="960" b="0" i="0">
+              <a:rPr sz="1100" b="0" i="0">
                 <a:solidFill>
                   <a:srgbClr val="14262E"/>
                 </a:solidFill>
@@ -19184,8 +19180,8 @@
         </p:nvSpPr>
         <p:spPr>
           <a:xfrm>
-            <a:off x="566928" y="4937760"/>
-            <a:ext cx="11057839" cy="672084"/>
+            <a:off x="566928" y="5687567"/>
+            <a:ext cx="11057839" cy="859536"/>
           </a:xfrm>
           <a:prstGeom prst="rect">
             <a:avLst/>
@@ -19228,8 +19224,8 @@
         </p:nvSpPr>
         <p:spPr>
           <a:xfrm>
-            <a:off x="685800" y="5001768"/>
-            <a:ext cx="2642615" cy="580644"/>
+            <a:off x="685800" y="5751575"/>
+            <a:ext cx="2642615" cy="768096"/>
           </a:xfrm>
           <a:prstGeom prst="rect">
             <a:avLst/>
@@ -19254,7 +19250,7 @@
               </a:spcAft>
             </a:pPr>
             <a:r>
-              <a:rPr sz="960" b="1" i="0">
+              <a:rPr sz="1100" b="1" i="0">
                 <a:solidFill>
                   <a:srgbClr val="14262E"/>
                 </a:solidFill>
@@ -19273,8 +19269,8 @@
         </p:nvSpPr>
         <p:spPr>
           <a:xfrm>
-            <a:off x="3566160" y="5001768"/>
-            <a:ext cx="4151376" cy="580644"/>
+            <a:off x="3566160" y="5751575"/>
+            <a:ext cx="4151376" cy="768096"/>
           </a:xfrm>
           <a:prstGeom prst="rect">
             <a:avLst/>
@@ -19299,7 +19295,7 @@
               </a:spcAft>
             </a:pPr>
             <a:r>
-              <a:rPr sz="960" b="0" i="0">
+              <a:rPr sz="1100" b="0" i="0">
                 <a:solidFill>
                   <a:srgbClr val="14262E"/>
                 </a:solidFill>
@@ -19318,8 +19314,8 @@
         </p:nvSpPr>
         <p:spPr>
           <a:xfrm>
-            <a:off x="7955280" y="5001768"/>
-            <a:ext cx="3547872" cy="580644"/>
+            <a:off x="7955280" y="5751575"/>
+            <a:ext cx="3547872" cy="768096"/>
           </a:xfrm>
           <a:prstGeom prst="rect">
             <a:avLst/>
@@ -19344,7 +19340,7 @@
               </a:spcAft>
             </a:pPr>
             <a:r>
-              <a:rPr sz="960" b="0" i="0">
+              <a:rPr sz="1100" b="0" i="0">
                 <a:solidFill>
                   <a:srgbClr val="14262E"/>
                 </a:solidFill>
@@ -19363,8 +19359,8 @@
         </p:nvSpPr>
         <p:spPr>
           <a:xfrm>
-            <a:off x="566928" y="5609844"/>
-            <a:ext cx="11057839" cy="672084"/>
+            <a:off x="566928" y="6547103"/>
+            <a:ext cx="11057839" cy="859536"/>
           </a:xfrm>
           <a:prstGeom prst="rect">
             <a:avLst/>
@@ -19407,8 +19403,8 @@
         </p:nvSpPr>
         <p:spPr>
           <a:xfrm>
-            <a:off x="685800" y="5673852"/>
-            <a:ext cx="2642615" cy="580644"/>
+            <a:off x="685800" y="6611111"/>
+            <a:ext cx="2642615" cy="768096"/>
           </a:xfrm>
           <a:prstGeom prst="rect">
             <a:avLst/>
@@ -19433,7 +19429,7 @@
               </a:spcAft>
             </a:pPr>
             <a:r>
-              <a:rPr sz="960" b="1" i="0">
+              <a:rPr sz="1100" b="1" i="0">
                 <a:solidFill>
                   <a:srgbClr val="14262E"/>
                 </a:solidFill>
@@ -19452,8 +19448,8 @@
         </p:nvSpPr>
         <p:spPr>
           <a:xfrm>
-            <a:off x="3566160" y="5673852"/>
-            <a:ext cx="4151376" cy="580644"/>
+            <a:off x="3566160" y="6611111"/>
+            <a:ext cx="4151376" cy="768096"/>
           </a:xfrm>
           <a:prstGeom prst="rect">
             <a:avLst/>
@@ -19478,7 +19474,7 @@
               </a:spcAft>
             </a:pPr>
             <a:r>
-              <a:rPr sz="960" b="0" i="0">
+              <a:rPr sz="1100" b="0" i="0">
                 <a:solidFill>
                   <a:srgbClr val="14262E"/>
                 </a:solidFill>
@@ -19497,8 +19493,8 @@
         </p:nvSpPr>
         <p:spPr>
           <a:xfrm>
-            <a:off x="7955280" y="5673852"/>
-            <a:ext cx="3547872" cy="580644"/>
+            <a:off x="7955280" y="6611111"/>
+            <a:ext cx="3547872" cy="768096"/>
           </a:xfrm>
           <a:prstGeom prst="rect">
             <a:avLst/>
@@ -19523,7 +19519,7 @@
               </a:spcAft>
             </a:pPr>
             <a:r>
-              <a:rPr sz="960" b="0" i="0">
+              <a:rPr sz="1100" b="0" i="0">
                 <a:solidFill>
                   <a:srgbClr val="14262E"/>
                 </a:solidFill>
@@ -23973,6 +23969,7 @@
         </p:nvPicPr>
         <p:blipFill>
           <a:blip r:embed="rId2"/>
+          <a:srcRect l="21895" r="21895"/>
           <a:stretch>
             <a:fillRect/>
           </a:stretch>
@@ -23980,7 +23977,7 @@
         <p:spPr>
           <a:xfrm>
             <a:off x="566928" y="1417320"/>
-            <a:ext cx="4160520" cy="2773680"/>
+            <a:ext cx="3931920" cy="4663440"/>
           </a:xfrm>
           <a:prstGeom prst="rect">
             <a:avLst/>
@@ -23996,7 +23993,7 @@
         <p:spPr>
           <a:xfrm>
             <a:off x="566928" y="1417320"/>
-            <a:ext cx="4160520" cy="59436"/>
+            <a:ext cx="3931920" cy="59436"/>
           </a:xfrm>
           <a:prstGeom prst="rect">
             <a:avLst/>
@@ -24039,8 +24036,8 @@
         </p:nvSpPr>
         <p:spPr>
           <a:xfrm>
-            <a:off x="566928" y="4236720"/>
-            <a:ext cx="4160520" cy="365760"/>
+            <a:off x="566928" y="6144768"/>
+            <a:ext cx="3931920" cy="365760"/>
           </a:xfrm>
           <a:prstGeom prst="rect">
             <a:avLst/>
@@ -24084,8 +24081,8 @@
         </p:nvSpPr>
         <p:spPr>
           <a:xfrm>
-            <a:off x="5093208" y="1426464"/>
-            <a:ext cx="3165195" cy="1149858"/>
+            <a:off x="4864608" y="1426464"/>
+            <a:ext cx="3279495" cy="1149858"/>
           </a:xfrm>
           <a:prstGeom prst="roundRect">
             <a:avLst>
@@ -24130,8 +24127,8 @@
         </p:nvSpPr>
         <p:spPr>
           <a:xfrm>
-            <a:off x="5093208" y="1426464"/>
-            <a:ext cx="3165195" cy="50292"/>
+            <a:off x="4864608" y="1426464"/>
+            <a:ext cx="3279495" cy="50292"/>
           </a:xfrm>
           <a:prstGeom prst="rect">
             <a:avLst/>
@@ -24174,8 +24171,8 @@
         </p:nvSpPr>
         <p:spPr>
           <a:xfrm>
-            <a:off x="5294376" y="1609344"/>
-            <a:ext cx="2762859" cy="820674"/>
+            <a:off x="5065776" y="1609344"/>
+            <a:ext cx="2877159" cy="820674"/>
           </a:xfrm>
           <a:prstGeom prst="rect">
             <a:avLst/>
@@ -24241,8 +24238,8 @@
         </p:nvSpPr>
         <p:spPr>
           <a:xfrm>
-            <a:off x="8459571" y="1426464"/>
-            <a:ext cx="3165195" cy="1149858"/>
+            <a:off x="8345271" y="1426464"/>
+            <a:ext cx="3279495" cy="1149858"/>
           </a:xfrm>
           <a:prstGeom prst="roundRect">
             <a:avLst>
@@ -24287,8 +24284,8 @@
         </p:nvSpPr>
         <p:spPr>
           <a:xfrm>
-            <a:off x="8459571" y="1426464"/>
-            <a:ext cx="3165195" cy="50292"/>
+            <a:off x="8345271" y="1426464"/>
+            <a:ext cx="3279495" cy="50292"/>
           </a:xfrm>
           <a:prstGeom prst="rect">
             <a:avLst/>
@@ -24331,8 +24328,8 @@
         </p:nvSpPr>
         <p:spPr>
           <a:xfrm>
-            <a:off x="8660739" y="1609344"/>
-            <a:ext cx="2762859" cy="820674"/>
+            <a:off x="8546439" y="1609344"/>
+            <a:ext cx="2877159" cy="820674"/>
           </a:xfrm>
           <a:prstGeom prst="rect">
             <a:avLst/>
@@ -24398,8 +24395,8 @@
         </p:nvSpPr>
         <p:spPr>
           <a:xfrm>
-            <a:off x="5093208" y="2686050"/>
-            <a:ext cx="3165195" cy="1149858"/>
+            <a:off x="4864608" y="2686050"/>
+            <a:ext cx="3279495" cy="1149858"/>
           </a:xfrm>
           <a:prstGeom prst="roundRect">
             <a:avLst>
@@ -24444,8 +24441,8 @@
         </p:nvSpPr>
         <p:spPr>
           <a:xfrm>
-            <a:off x="5093208" y="2686050"/>
-            <a:ext cx="3165195" cy="50292"/>
+            <a:off x="4864608" y="2686050"/>
+            <a:ext cx="3279495" cy="50292"/>
           </a:xfrm>
           <a:prstGeom prst="rect">
             <a:avLst/>
@@ -24488,8 +24485,8 @@
         </p:nvSpPr>
         <p:spPr>
           <a:xfrm>
-            <a:off x="5294376" y="2868930"/>
-            <a:ext cx="2762859" cy="820674"/>
+            <a:off x="5065776" y="2868930"/>
+            <a:ext cx="2877159" cy="820674"/>
           </a:xfrm>
           <a:prstGeom prst="rect">
             <a:avLst/>
@@ -24555,8 +24552,8 @@
         </p:nvSpPr>
         <p:spPr>
           <a:xfrm>
-            <a:off x="8459571" y="2686050"/>
-            <a:ext cx="3165195" cy="1149858"/>
+            <a:off x="8345271" y="2686050"/>
+            <a:ext cx="3279495" cy="1149858"/>
           </a:xfrm>
           <a:prstGeom prst="roundRect">
             <a:avLst>
@@ -24601,8 +24598,8 @@
         </p:nvSpPr>
         <p:spPr>
           <a:xfrm>
-            <a:off x="8459571" y="2686050"/>
-            <a:ext cx="3165195" cy="50292"/>
+            <a:off x="8345271" y="2686050"/>
+            <a:ext cx="3279495" cy="50292"/>
           </a:xfrm>
           <a:prstGeom prst="rect">
             <a:avLst/>
@@ -24645,8 +24642,8 @@
         </p:nvSpPr>
         <p:spPr>
           <a:xfrm>
-            <a:off x="8660739" y="2868930"/>
-            <a:ext cx="2762859" cy="820674"/>
+            <a:off x="8546439" y="2868930"/>
+            <a:ext cx="2877159" cy="820674"/>
           </a:xfrm>
           <a:prstGeom prst="rect">
             <a:avLst/>
@@ -24712,8 +24709,8 @@
         </p:nvSpPr>
         <p:spPr>
           <a:xfrm>
-            <a:off x="5093208" y="3945635"/>
-            <a:ext cx="3165195" cy="1149858"/>
+            <a:off x="4864608" y="3945635"/>
+            <a:ext cx="3279495" cy="1149858"/>
           </a:xfrm>
           <a:prstGeom prst="roundRect">
             <a:avLst>
@@ -24758,8 +24755,8 @@
         </p:nvSpPr>
         <p:spPr>
           <a:xfrm>
-            <a:off x="5093208" y="3945635"/>
-            <a:ext cx="3165195" cy="50292"/>
+            <a:off x="4864608" y="3945635"/>
+            <a:ext cx="3279495" cy="50292"/>
           </a:xfrm>
           <a:prstGeom prst="rect">
             <a:avLst/>
@@ -24802,8 +24799,8 @@
         </p:nvSpPr>
         <p:spPr>
           <a:xfrm>
-            <a:off x="5294376" y="4128515"/>
-            <a:ext cx="2762859" cy="820674"/>
+            <a:off x="5065776" y="4128515"/>
+            <a:ext cx="2877159" cy="820674"/>
           </a:xfrm>
           <a:prstGeom prst="rect">
             <a:avLst/>
@@ -24869,8 +24866,8 @@
         </p:nvSpPr>
         <p:spPr>
           <a:xfrm>
-            <a:off x="8459571" y="3945635"/>
-            <a:ext cx="3165195" cy="1149858"/>
+            <a:off x="8345271" y="3945635"/>
+            <a:ext cx="3279495" cy="1149858"/>
           </a:xfrm>
           <a:prstGeom prst="roundRect">
             <a:avLst>
@@ -24915,8 +24912,8 @@
         </p:nvSpPr>
         <p:spPr>
           <a:xfrm>
-            <a:off x="8459571" y="3945635"/>
-            <a:ext cx="3165195" cy="50292"/>
+            <a:off x="8345271" y="3945635"/>
+            <a:ext cx="3279495" cy="50292"/>
           </a:xfrm>
           <a:prstGeom prst="rect">
             <a:avLst/>
@@ -24959,8 +24956,8 @@
         </p:nvSpPr>
         <p:spPr>
           <a:xfrm>
-            <a:off x="8660739" y="4128515"/>
-            <a:ext cx="2762859" cy="820674"/>
+            <a:off x="8546439" y="4128515"/>
+            <a:ext cx="2877159" cy="820674"/>
           </a:xfrm>
           <a:prstGeom prst="rect">
             <a:avLst/>
@@ -25026,8 +25023,8 @@
         </p:nvSpPr>
         <p:spPr>
           <a:xfrm>
-            <a:off x="5093208" y="5205222"/>
-            <a:ext cx="3165195" cy="1149858"/>
+            <a:off x="4864608" y="5205222"/>
+            <a:ext cx="3279495" cy="1149858"/>
           </a:xfrm>
           <a:prstGeom prst="roundRect">
             <a:avLst>
@@ -25072,8 +25069,8 @@
         </p:nvSpPr>
         <p:spPr>
           <a:xfrm>
-            <a:off x="5093208" y="5205222"/>
-            <a:ext cx="3165195" cy="50292"/>
+            <a:off x="4864608" y="5205222"/>
+            <a:ext cx="3279495" cy="50292"/>
           </a:xfrm>
           <a:prstGeom prst="rect">
             <a:avLst/>
@@ -25116,8 +25113,8 @@
         </p:nvSpPr>
         <p:spPr>
           <a:xfrm>
-            <a:off x="5294376" y="5388102"/>
-            <a:ext cx="2762859" cy="820674"/>
+            <a:off x="5065776" y="5388102"/>
+            <a:ext cx="2877159" cy="820674"/>
           </a:xfrm>
           <a:prstGeom prst="rect">
             <a:avLst/>
@@ -26121,14 +26118,15 @@
         </p:nvPicPr>
         <p:blipFill>
           <a:blip r:embed="rId2"/>
+          <a:srcRect l="21250" r="21250"/>
           <a:stretch>
             <a:fillRect/>
           </a:stretch>
         </p:blipFill>
         <p:spPr>
           <a:xfrm>
-            <a:off x="5909767" y="1417320"/>
-            <a:ext cx="5715000" cy="3132534"/>
+            <a:off x="6732727" y="1417320"/>
+            <a:ext cx="4892040" cy="4663440"/>
           </a:xfrm>
           <a:prstGeom prst="rect">
             <a:avLst/>
@@ -26143,8 +26141,8 @@
         </p:nvSpPr>
         <p:spPr>
           <a:xfrm>
-            <a:off x="5909767" y="1417320"/>
-            <a:ext cx="5715000" cy="59436"/>
+            <a:off x="6732727" y="1417320"/>
+            <a:ext cx="4892040" cy="59436"/>
           </a:xfrm>
           <a:prstGeom prst="rect">
             <a:avLst/>
@@ -26187,8 +26185,8 @@
         </p:nvSpPr>
         <p:spPr>
           <a:xfrm>
-            <a:off x="5909767" y="4595574"/>
-            <a:ext cx="5715000" cy="365760"/>
+            <a:off x="6732727" y="6144768"/>
+            <a:ext cx="4892040" cy="365760"/>
           </a:xfrm>
           <a:prstGeom prst="rect">
             <a:avLst/>
@@ -26233,7 +26231,7 @@
         <p:spPr>
           <a:xfrm>
             <a:off x="566928" y="1426464"/>
-            <a:ext cx="4958791" cy="877862"/>
+            <a:ext cx="5781751" cy="912891"/>
           </a:xfrm>
           <a:prstGeom prst="roundRect">
             <a:avLst>
@@ -26279,7 +26277,7 @@
         <p:spPr>
           <a:xfrm>
             <a:off x="566928" y="1426464"/>
-            <a:ext cx="45720" cy="877862"/>
+            <a:ext cx="45720" cy="912891"/>
           </a:xfrm>
           <a:prstGeom prst="rect">
             <a:avLst/>
@@ -26323,7 +26321,7 @@
         <p:spPr>
           <a:xfrm>
             <a:off x="768096" y="1563624"/>
-            <a:ext cx="4556455" cy="603542"/>
+            <a:ext cx="5379415" cy="638571"/>
           </a:xfrm>
           <a:prstGeom prst="rect">
             <a:avLst/>
@@ -26348,7 +26346,7 @@
               </a:spcAft>
             </a:pPr>
             <a:r>
-              <a:rPr sz="1200" b="1" i="0">
+              <a:rPr sz="1250" b="1" i="0">
                 <a:solidFill>
                   <a:srgbClr val="0B6E4F"/>
                 </a:solidFill>
@@ -26370,7 +26368,7 @@
               </a:spcAft>
             </a:pPr>
             <a:r>
-              <a:rPr sz="1100" b="0" i="0">
+              <a:rPr sz="1150" b="0" i="0">
                 <a:solidFill>
                   <a:srgbClr val="14262E"/>
                 </a:solidFill>
@@ -26389,8 +26387,8 @@
         </p:nvSpPr>
         <p:spPr>
           <a:xfrm>
-            <a:off x="566928" y="2414054"/>
-            <a:ext cx="4958791" cy="1240523"/>
+            <a:off x="566928" y="2449083"/>
+            <a:ext cx="5781751" cy="1292037"/>
           </a:xfrm>
           <a:prstGeom prst="roundRect">
             <a:avLst>
@@ -26435,8 +26433,8 @@
         </p:nvSpPr>
         <p:spPr>
           <a:xfrm>
-            <a:off x="566928" y="2414054"/>
-            <a:ext cx="45720" cy="1240523"/>
+            <a:off x="566928" y="2449083"/>
+            <a:ext cx="45720" cy="1292037"/>
           </a:xfrm>
           <a:prstGeom prst="rect">
             <a:avLst/>
@@ -26479,8 +26477,8 @@
         </p:nvSpPr>
         <p:spPr>
           <a:xfrm>
-            <a:off x="768096" y="2551214"/>
-            <a:ext cx="4556455" cy="966203"/>
+            <a:off x="768096" y="2586243"/>
+            <a:ext cx="5379415" cy="1017717"/>
           </a:xfrm>
           <a:prstGeom prst="rect">
             <a:avLst/>
@@ -26505,7 +26503,7 @@
               </a:spcAft>
             </a:pPr>
             <a:r>
-              <a:rPr sz="1200" b="1" i="0">
+              <a:rPr sz="1250" b="1" i="0">
                 <a:solidFill>
                   <a:srgbClr val="0B6E4F"/>
                 </a:solidFill>
@@ -26527,7 +26525,7 @@
               </a:spcAft>
             </a:pPr>
             <a:r>
-              <a:rPr sz="1100" b="0" i="0">
+              <a:rPr sz="1150" b="0" i="0">
                 <a:solidFill>
                   <a:srgbClr val="14262E"/>
                 </a:solidFill>
@@ -26546,8 +26544,8 @@
         </p:nvSpPr>
         <p:spPr>
           <a:xfrm>
-            <a:off x="566928" y="3764305"/>
-            <a:ext cx="4958791" cy="1240523"/>
+            <a:off x="566928" y="3850849"/>
+            <a:ext cx="5781751" cy="1292037"/>
           </a:xfrm>
           <a:prstGeom prst="roundRect">
             <a:avLst>
@@ -26592,8 +26590,8 @@
         </p:nvSpPr>
         <p:spPr>
           <a:xfrm>
-            <a:off x="566928" y="3764305"/>
-            <a:ext cx="45720" cy="1240523"/>
+            <a:off x="566928" y="3850849"/>
+            <a:ext cx="45720" cy="1292037"/>
           </a:xfrm>
           <a:prstGeom prst="rect">
             <a:avLst/>
@@ -26636,8 +26634,8 @@
         </p:nvSpPr>
         <p:spPr>
           <a:xfrm>
-            <a:off x="768096" y="3901465"/>
-            <a:ext cx="4556455" cy="966203"/>
+            <a:off x="768096" y="3988009"/>
+            <a:ext cx="5379415" cy="1017717"/>
           </a:xfrm>
           <a:prstGeom prst="rect">
             <a:avLst/>
@@ -26662,7 +26660,7 @@
               </a:spcAft>
             </a:pPr>
             <a:r>
-              <a:rPr sz="1200" b="1" i="0">
+              <a:rPr sz="1250" b="1" i="0">
                 <a:solidFill>
                   <a:srgbClr val="0B6E4F"/>
                 </a:solidFill>
@@ -26684,7 +26682,7 @@
               </a:spcAft>
             </a:pPr>
             <a:r>
-              <a:rPr sz="1100" b="0" i="0">
+              <a:rPr sz="1150" b="0" i="0">
                 <a:solidFill>
                   <a:srgbClr val="14262E"/>
                 </a:solidFill>
@@ -26703,8 +26701,8 @@
         </p:nvSpPr>
         <p:spPr>
           <a:xfrm>
-            <a:off x="566928" y="5114556"/>
-            <a:ext cx="4958791" cy="1240523"/>
+            <a:off x="566928" y="5252615"/>
+            <a:ext cx="5781751" cy="1102464"/>
           </a:xfrm>
           <a:prstGeom prst="roundRect">
             <a:avLst>
@@ -26749,8 +26747,8 @@
         </p:nvSpPr>
         <p:spPr>
           <a:xfrm>
-            <a:off x="566928" y="5114556"/>
-            <a:ext cx="45720" cy="1240523"/>
+            <a:off x="566928" y="5252615"/>
+            <a:ext cx="45720" cy="1102464"/>
           </a:xfrm>
           <a:prstGeom prst="rect">
             <a:avLst/>
@@ -26793,8 +26791,8 @@
         </p:nvSpPr>
         <p:spPr>
           <a:xfrm>
-            <a:off x="768096" y="5251716"/>
-            <a:ext cx="4556455" cy="966203"/>
+            <a:off x="768096" y="5389775"/>
+            <a:ext cx="5379415" cy="828144"/>
           </a:xfrm>
           <a:prstGeom prst="rect">
             <a:avLst/>
@@ -26819,7 +26817,7 @@
               </a:spcAft>
             </a:pPr>
             <a:r>
-              <a:rPr sz="1200" b="1" i="0">
+              <a:rPr sz="1250" b="1" i="0">
                 <a:solidFill>
                   <a:srgbClr val="0B6E4F"/>
                 </a:solidFill>
@@ -26841,7 +26839,7 @@
               </a:spcAft>
             </a:pPr>
             <a:r>
-              <a:rPr sz="1100" b="0" i="0">
+              <a:rPr sz="1150" b="0" i="0">
                 <a:solidFill>
                   <a:srgbClr val="14262E"/>
                 </a:solidFill>
@@ -32098,14 +32096,15 @@
         </p:nvPicPr>
         <p:blipFill>
           <a:blip r:embed="rId2"/>
+          <a:srcRect l="15033" r="15033"/>
           <a:stretch>
             <a:fillRect/>
           </a:stretch>
         </p:blipFill>
         <p:spPr>
           <a:xfrm>
-            <a:off x="5909767" y="1417320"/>
-            <a:ext cx="5715000" cy="3810000"/>
+            <a:off x="6732727" y="1417320"/>
+            <a:ext cx="4892040" cy="4663440"/>
           </a:xfrm>
           <a:prstGeom prst="rect">
             <a:avLst/>
@@ -32120,8 +32119,8 @@
         </p:nvSpPr>
         <p:spPr>
           <a:xfrm>
-            <a:off x="5909767" y="1417320"/>
-            <a:ext cx="5715000" cy="59436"/>
+            <a:off x="6732727" y="1417320"/>
+            <a:ext cx="4892040" cy="59436"/>
           </a:xfrm>
           <a:prstGeom prst="rect">
             <a:avLst/>
@@ -32164,8 +32163,8 @@
         </p:nvSpPr>
         <p:spPr>
           <a:xfrm>
-            <a:off x="5909767" y="5273040"/>
-            <a:ext cx="5715000" cy="365760"/>
+            <a:off x="6732727" y="6144768"/>
+            <a:ext cx="4892040" cy="365760"/>
           </a:xfrm>
           <a:prstGeom prst="rect">
             <a:avLst/>
@@ -32210,7 +32209,7 @@
         <p:spPr>
           <a:xfrm>
             <a:off x="566928" y="1426464"/>
-            <a:ext cx="4958791" cy="960582"/>
+            <a:ext cx="5781751" cy="996848"/>
           </a:xfrm>
           <a:prstGeom prst="roundRect">
             <a:avLst>
@@ -32256,7 +32255,7 @@
         <p:spPr>
           <a:xfrm>
             <a:off x="566928" y="1426464"/>
-            <a:ext cx="45720" cy="960582"/>
+            <a:ext cx="45720" cy="996848"/>
           </a:xfrm>
           <a:prstGeom prst="rect">
             <a:avLst/>
@@ -32300,7 +32299,7 @@
         <p:spPr>
           <a:xfrm>
             <a:off x="768096" y="1563624"/>
-            <a:ext cx="4556455" cy="686262"/>
+            <a:ext cx="5379415" cy="722528"/>
           </a:xfrm>
           <a:prstGeom prst="rect">
             <a:avLst/>
@@ -32325,7 +32324,7 @@
               </a:spcAft>
             </a:pPr>
             <a:r>
-              <a:rPr sz="1050" b="1" i="0">
+              <a:rPr sz="1100" b="1" i="0">
                 <a:solidFill>
                   <a:srgbClr val="0B6E4F"/>
                 </a:solidFill>
@@ -32347,7 +32346,7 @@
               </a:spcAft>
             </a:pPr>
             <a:r>
-              <a:rPr sz="950" b="0" i="0">
+              <a:rPr sz="1000" b="0" i="0">
                 <a:solidFill>
                   <a:srgbClr val="14262E"/>
                 </a:solidFill>
@@ -32366,8 +32365,8 @@
         </p:nvSpPr>
         <p:spPr>
           <a:xfrm>
-            <a:off x="566928" y="2496774"/>
-            <a:ext cx="4958791" cy="960582"/>
+            <a:off x="566928" y="2533040"/>
+            <a:ext cx="5781751" cy="996848"/>
           </a:xfrm>
           <a:prstGeom prst="roundRect">
             <a:avLst>
@@ -32412,8 +32411,8 @@
         </p:nvSpPr>
         <p:spPr>
           <a:xfrm>
-            <a:off x="566928" y="2496774"/>
-            <a:ext cx="45720" cy="960582"/>
+            <a:off x="566928" y="2533040"/>
+            <a:ext cx="45720" cy="996848"/>
           </a:xfrm>
           <a:prstGeom prst="rect">
             <a:avLst/>
@@ -32456,8 +32455,8 @@
         </p:nvSpPr>
         <p:spPr>
           <a:xfrm>
-            <a:off x="768096" y="2633934"/>
-            <a:ext cx="4556455" cy="686262"/>
+            <a:off x="768096" y="2670200"/>
+            <a:ext cx="5379415" cy="722528"/>
           </a:xfrm>
           <a:prstGeom prst="rect">
             <a:avLst/>
@@ -32482,7 +32481,7 @@
               </a:spcAft>
             </a:pPr>
             <a:r>
-              <a:rPr sz="1050" b="1" i="0">
+              <a:rPr sz="1100" b="1" i="0">
                 <a:solidFill>
                   <a:srgbClr val="0B6E4F"/>
                 </a:solidFill>
@@ -32504,7 +32503,7 @@
               </a:spcAft>
             </a:pPr>
             <a:r>
-              <a:rPr sz="950" b="0" i="0">
+              <a:rPr sz="1000" b="0" i="0">
                 <a:solidFill>
                   <a:srgbClr val="14262E"/>
                 </a:solidFill>
@@ -32523,8 +32522,8 @@
         </p:nvSpPr>
         <p:spPr>
           <a:xfrm>
-            <a:off x="566928" y="3567084"/>
-            <a:ext cx="4958791" cy="960582"/>
+            <a:off x="566928" y="3639616"/>
+            <a:ext cx="5781751" cy="832002"/>
           </a:xfrm>
           <a:prstGeom prst="roundRect">
             <a:avLst>
@@ -32569,8 +32568,8 @@
         </p:nvSpPr>
         <p:spPr>
           <a:xfrm>
-            <a:off x="566928" y="3567084"/>
-            <a:ext cx="45720" cy="960582"/>
+            <a:off x="566928" y="3639616"/>
+            <a:ext cx="45720" cy="832002"/>
           </a:xfrm>
           <a:prstGeom prst="rect">
             <a:avLst/>
@@ -32613,8 +32612,8 @@
         </p:nvSpPr>
         <p:spPr>
           <a:xfrm>
-            <a:off x="768096" y="3704244"/>
-            <a:ext cx="4556455" cy="686262"/>
+            <a:off x="768096" y="3776776"/>
+            <a:ext cx="5379415" cy="557682"/>
           </a:xfrm>
           <a:prstGeom prst="rect">
             <a:avLst/>
@@ -32639,7 +32638,7 @@
               </a:spcAft>
             </a:pPr>
             <a:r>
-              <a:rPr sz="1050" b="1" i="0">
+              <a:rPr sz="1100" b="1" i="0">
                 <a:solidFill>
                   <a:srgbClr val="0B6E4F"/>
                 </a:solidFill>
@@ -32661,7 +32660,7 @@
               </a:spcAft>
             </a:pPr>
             <a:r>
-              <a:rPr sz="950" b="0" i="0">
+              <a:rPr sz="1000" b="0" i="0">
                 <a:solidFill>
                   <a:srgbClr val="14262E"/>
                 </a:solidFill>
@@ -32680,8 +32679,8 @@
         </p:nvSpPr>
         <p:spPr>
           <a:xfrm>
-            <a:off x="566928" y="4637394"/>
-            <a:ext cx="4958791" cy="803978"/>
+            <a:off x="566928" y="4581347"/>
+            <a:ext cx="5781751" cy="832002"/>
           </a:xfrm>
           <a:prstGeom prst="roundRect">
             <a:avLst>
@@ -32726,8 +32725,8 @@
         </p:nvSpPr>
         <p:spPr>
           <a:xfrm>
-            <a:off x="566928" y="4637394"/>
-            <a:ext cx="45720" cy="803978"/>
+            <a:off x="566928" y="4581347"/>
+            <a:ext cx="45720" cy="832002"/>
           </a:xfrm>
           <a:prstGeom prst="rect">
             <a:avLst/>
@@ -32770,8 +32769,8 @@
         </p:nvSpPr>
         <p:spPr>
           <a:xfrm>
-            <a:off x="768096" y="4774554"/>
-            <a:ext cx="4556455" cy="529658"/>
+            <a:off x="768096" y="4718507"/>
+            <a:ext cx="5379415" cy="557682"/>
           </a:xfrm>
           <a:prstGeom prst="rect">
             <a:avLst/>
@@ -32796,7 +32795,7 @@
               </a:spcAft>
             </a:pPr>
             <a:r>
-              <a:rPr sz="1050" b="1" i="0">
+              <a:rPr sz="1100" b="1" i="0">
                 <a:solidFill>
                   <a:srgbClr val="0B6E4F"/>
                 </a:solidFill>
@@ -32818,7 +32817,7 @@
               </a:spcAft>
             </a:pPr>
             <a:r>
-              <a:rPr sz="950" b="0" i="0">
+              <a:rPr sz="1000" b="0" i="0">
                 <a:solidFill>
                   <a:srgbClr val="14262E"/>
                 </a:solidFill>
@@ -32837,8 +32836,8 @@
         </p:nvSpPr>
         <p:spPr>
           <a:xfrm>
-            <a:off x="566928" y="5551101"/>
-            <a:ext cx="4958791" cy="803978"/>
+            <a:off x="566928" y="5523077"/>
+            <a:ext cx="5781751" cy="832002"/>
           </a:xfrm>
           <a:prstGeom prst="roundRect">
             <a:avLst>
@@ -32883,8 +32882,8 @@
         </p:nvSpPr>
         <p:spPr>
           <a:xfrm>
-            <a:off x="566928" y="5551101"/>
-            <a:ext cx="45720" cy="803978"/>
+            <a:off x="566928" y="5523077"/>
+            <a:ext cx="45720" cy="832002"/>
           </a:xfrm>
           <a:prstGeom prst="rect">
             <a:avLst/>
@@ -32927,8 +32926,8 @@
         </p:nvSpPr>
         <p:spPr>
           <a:xfrm>
-            <a:off x="768096" y="5688261"/>
-            <a:ext cx="4556455" cy="529658"/>
+            <a:off x="768096" y="5660237"/>
+            <a:ext cx="5379415" cy="557682"/>
           </a:xfrm>
           <a:prstGeom prst="rect">
             <a:avLst/>
@@ -32953,7 +32952,7 @@
               </a:spcAft>
             </a:pPr>
             <a:r>
-              <a:rPr sz="1050" b="1" i="0">
+              <a:rPr sz="1100" b="1" i="0">
                 <a:solidFill>
                   <a:srgbClr val="0B6E4F"/>
                 </a:solidFill>
@@ -32975,7 +32974,7 @@
               </a:spcAft>
             </a:pPr>
             <a:r>
-              <a:rPr sz="950" b="0" i="0">
+              <a:rPr sz="1000" b="0" i="0">
                 <a:solidFill>
                   <a:srgbClr val="14262E"/>
                 </a:solidFill>
@@ -34643,14 +34642,15 @@
         </p:nvPicPr>
         <p:blipFill>
           <a:blip r:embed="rId2"/>
+          <a:srcRect l="15033" r="15033"/>
           <a:stretch>
             <a:fillRect/>
           </a:stretch>
         </p:blipFill>
         <p:spPr>
           <a:xfrm>
-            <a:off x="5909767" y="1417320"/>
-            <a:ext cx="5715000" cy="3810000"/>
+            <a:off x="6732727" y="1417320"/>
+            <a:ext cx="4892040" cy="4663440"/>
           </a:xfrm>
           <a:prstGeom prst="rect">
             <a:avLst/>
@@ -34665,8 +34665,8 @@
         </p:nvSpPr>
         <p:spPr>
           <a:xfrm>
-            <a:off x="5909767" y="1417320"/>
-            <a:ext cx="5715000" cy="59436"/>
+            <a:off x="6732727" y="1417320"/>
+            <a:ext cx="4892040" cy="59436"/>
           </a:xfrm>
           <a:prstGeom prst="rect">
             <a:avLst/>
@@ -34709,8 +34709,8 @@
         </p:nvSpPr>
         <p:spPr>
           <a:xfrm>
-            <a:off x="5909767" y="5273040"/>
-            <a:ext cx="5715000" cy="365760"/>
+            <a:off x="6732727" y="6144768"/>
+            <a:ext cx="4892040" cy="365760"/>
           </a:xfrm>
           <a:prstGeom prst="rect">
             <a:avLst/>
@@ -34755,7 +34755,7 @@
         <p:spPr>
           <a:xfrm>
             <a:off x="566928" y="1426464"/>
-            <a:ext cx="4958791" cy="927613"/>
+            <a:ext cx="5781751" cy="996848"/>
           </a:xfrm>
           <a:prstGeom prst="roundRect">
             <a:avLst>
@@ -34801,7 +34801,7 @@
         <p:spPr>
           <a:xfrm>
             <a:off x="566928" y="1426464"/>
-            <a:ext cx="45720" cy="927613"/>
+            <a:ext cx="45720" cy="996848"/>
           </a:xfrm>
           <a:prstGeom prst="rect">
             <a:avLst/>
@@ -34845,7 +34845,7 @@
         <p:spPr>
           <a:xfrm>
             <a:off x="768096" y="1563624"/>
-            <a:ext cx="4556455" cy="653293"/>
+            <a:ext cx="5379415" cy="722528"/>
           </a:xfrm>
           <a:prstGeom prst="rect">
             <a:avLst/>
@@ -34870,7 +34870,7 @@
               </a:spcAft>
             </a:pPr>
             <a:r>
-              <a:rPr sz="1000" b="1" i="0">
+              <a:rPr sz="1100" b="1" i="0">
                 <a:solidFill>
                   <a:srgbClr val="0B6E4F"/>
                 </a:solidFill>
@@ -34892,7 +34892,7 @@
               </a:spcAft>
             </a:pPr>
             <a:r>
-              <a:rPr sz="900" b="0" i="0">
+              <a:rPr sz="1000" b="0" i="0">
                 <a:solidFill>
                   <a:srgbClr val="14262E"/>
                 </a:solidFill>
@@ -34911,8 +34911,8 @@
         </p:nvSpPr>
         <p:spPr>
           <a:xfrm>
-            <a:off x="566928" y="2463805"/>
-            <a:ext cx="4958791" cy="1075974"/>
+            <a:off x="566928" y="2533040"/>
+            <a:ext cx="5781751" cy="996848"/>
           </a:xfrm>
           <a:prstGeom prst="roundRect">
             <a:avLst>
@@ -34957,8 +34957,8 @@
         </p:nvSpPr>
         <p:spPr>
           <a:xfrm>
-            <a:off x="566928" y="2463805"/>
-            <a:ext cx="45720" cy="1075974"/>
+            <a:off x="566928" y="2533040"/>
+            <a:ext cx="45720" cy="996848"/>
           </a:xfrm>
           <a:prstGeom prst="rect">
             <a:avLst/>
@@ -35001,8 +35001,8 @@
         </p:nvSpPr>
         <p:spPr>
           <a:xfrm>
-            <a:off x="768096" y="2600965"/>
-            <a:ext cx="4556455" cy="801654"/>
+            <a:off x="768096" y="2670200"/>
+            <a:ext cx="5379415" cy="722528"/>
           </a:xfrm>
           <a:prstGeom prst="rect">
             <a:avLst/>
@@ -35027,7 +35027,7 @@
               </a:spcAft>
             </a:pPr>
             <a:r>
-              <a:rPr sz="1000" b="1" i="0">
+              <a:rPr sz="1100" b="1" i="0">
                 <a:solidFill>
                   <a:srgbClr val="0B6E4F"/>
                 </a:solidFill>
@@ -35049,7 +35049,7 @@
               </a:spcAft>
             </a:pPr>
             <a:r>
-              <a:rPr sz="900" b="0" i="0">
+              <a:rPr sz="1000" b="0" i="0">
                 <a:solidFill>
                   <a:srgbClr val="14262E"/>
                 </a:solidFill>
@@ -35068,8 +35068,8 @@
         </p:nvSpPr>
         <p:spPr>
           <a:xfrm>
-            <a:off x="566928" y="3649507"/>
-            <a:ext cx="4958791" cy="927613"/>
+            <a:off x="566928" y="3639616"/>
+            <a:ext cx="5781751" cy="832002"/>
           </a:xfrm>
           <a:prstGeom prst="roundRect">
             <a:avLst>
@@ -35114,8 +35114,8 @@
         </p:nvSpPr>
         <p:spPr>
           <a:xfrm>
-            <a:off x="566928" y="3649507"/>
-            <a:ext cx="45720" cy="927613"/>
+            <a:off x="566928" y="3639616"/>
+            <a:ext cx="45720" cy="832002"/>
           </a:xfrm>
           <a:prstGeom prst="rect">
             <a:avLst/>
@@ -35158,8 +35158,8 @@
         </p:nvSpPr>
         <p:spPr>
           <a:xfrm>
-            <a:off x="768096" y="3786667"/>
-            <a:ext cx="4556455" cy="653293"/>
+            <a:off x="768096" y="3776776"/>
+            <a:ext cx="5379415" cy="557682"/>
           </a:xfrm>
           <a:prstGeom prst="rect">
             <a:avLst/>
@@ -35184,7 +35184,7 @@
               </a:spcAft>
             </a:pPr>
             <a:r>
-              <a:rPr sz="1000" b="1" i="0">
+              <a:rPr sz="1100" b="1" i="0">
                 <a:solidFill>
                   <a:srgbClr val="0B6E4F"/>
                 </a:solidFill>
@@ -35206,7 +35206,7 @@
               </a:spcAft>
             </a:pPr>
             <a:r>
-              <a:rPr sz="900" b="0" i="0">
+              <a:rPr sz="1000" b="0" i="0">
                 <a:solidFill>
                   <a:srgbClr val="14262E"/>
                 </a:solidFill>
@@ -35225,8 +35225,8 @@
         </p:nvSpPr>
         <p:spPr>
           <a:xfrm>
-            <a:off x="566928" y="4686848"/>
-            <a:ext cx="4958791" cy="779251"/>
+            <a:off x="566928" y="4581347"/>
+            <a:ext cx="5781751" cy="832002"/>
           </a:xfrm>
           <a:prstGeom prst="roundRect">
             <a:avLst>
@@ -35271,8 +35271,8 @@
         </p:nvSpPr>
         <p:spPr>
           <a:xfrm>
-            <a:off x="566928" y="4686848"/>
-            <a:ext cx="45720" cy="779251"/>
+            <a:off x="566928" y="4581347"/>
+            <a:ext cx="45720" cy="832002"/>
           </a:xfrm>
           <a:prstGeom prst="rect">
             <a:avLst/>
@@ -35315,8 +35315,8 @@
         </p:nvSpPr>
         <p:spPr>
           <a:xfrm>
-            <a:off x="768096" y="4824008"/>
-            <a:ext cx="4556455" cy="504931"/>
+            <a:off x="768096" y="4718507"/>
+            <a:ext cx="5379415" cy="557682"/>
           </a:xfrm>
           <a:prstGeom prst="rect">
             <a:avLst/>
@@ -35341,7 +35341,7 @@
               </a:spcAft>
             </a:pPr>
             <a:r>
-              <a:rPr sz="1000" b="1" i="0">
+              <a:rPr sz="1100" b="1" i="0">
                 <a:solidFill>
                   <a:srgbClr val="0B6E4F"/>
                 </a:solidFill>
@@ -35363,7 +35363,7 @@
               </a:spcAft>
             </a:pPr>
             <a:r>
-              <a:rPr sz="900" b="0" i="0">
+              <a:rPr sz="1000" b="0" i="0">
                 <a:solidFill>
                   <a:srgbClr val="14262E"/>
                 </a:solidFill>
@@ -35382,8 +35382,8 @@
         </p:nvSpPr>
         <p:spPr>
           <a:xfrm>
-            <a:off x="566928" y="5575828"/>
-            <a:ext cx="4958791" cy="779251"/>
+            <a:off x="566928" y="5523077"/>
+            <a:ext cx="5781751" cy="832002"/>
           </a:xfrm>
           <a:prstGeom prst="roundRect">
             <a:avLst>
@@ -35428,8 +35428,8 @@
         </p:nvSpPr>
         <p:spPr>
           <a:xfrm>
-            <a:off x="566928" y="5575828"/>
-            <a:ext cx="45720" cy="779251"/>
+            <a:off x="566928" y="5523077"/>
+            <a:ext cx="45720" cy="832002"/>
           </a:xfrm>
           <a:prstGeom prst="rect">
             <a:avLst/>
@@ -35472,8 +35472,8 @@
         </p:nvSpPr>
         <p:spPr>
           <a:xfrm>
-            <a:off x="768096" y="5712988"/>
-            <a:ext cx="4556455" cy="504931"/>
+            <a:off x="768096" y="5660237"/>
+            <a:ext cx="5379415" cy="557682"/>
           </a:xfrm>
           <a:prstGeom prst="rect">
             <a:avLst/>
@@ -35498,7 +35498,7 @@
               </a:spcAft>
             </a:pPr>
             <a:r>
-              <a:rPr sz="1000" b="1" i="0">
+              <a:rPr sz="1100" b="1" i="0">
                 <a:solidFill>
                   <a:srgbClr val="0B6E4F"/>
                 </a:solidFill>
@@ -35520,7 +35520,7 @@
               </a:spcAft>
             </a:pPr>
             <a:r>
-              <a:rPr sz="900" b="0" i="0">
+              <a:rPr sz="1000" b="0" i="0">
                 <a:solidFill>
                   <a:srgbClr val="14262E"/>
                 </a:solidFill>
@@ -35782,6 +35782,7 @@
         </p:nvPicPr>
         <p:blipFill>
           <a:blip r:embed="rId2"/>
+          <a:srcRect l="15033" r="15033"/>
           <a:stretch>
             <a:fillRect/>
           </a:stretch>
@@ -35789,7 +35790,7 @@
         <p:spPr>
           <a:xfrm>
             <a:off x="566928" y="1417320"/>
-            <a:ext cx="5715000" cy="3810000"/>
+            <a:ext cx="4892040" cy="4663440"/>
           </a:xfrm>
           <a:prstGeom prst="rect">
             <a:avLst/>
@@ -35805,7 +35806,7 @@
         <p:spPr>
           <a:xfrm>
             <a:off x="566928" y="1417320"/>
-            <a:ext cx="5715000" cy="59436"/>
+            <a:ext cx="4892040" cy="59436"/>
           </a:xfrm>
           <a:prstGeom prst="rect">
             <a:avLst/>
@@ -35848,8 +35849,8 @@
         </p:nvSpPr>
         <p:spPr>
           <a:xfrm>
-            <a:off x="566928" y="5273040"/>
-            <a:ext cx="5715000" cy="365760"/>
+            <a:off x="566928" y="6144768"/>
+            <a:ext cx="4892040" cy="365760"/>
           </a:xfrm>
           <a:prstGeom prst="rect">
             <a:avLst/>
@@ -35893,8 +35894,8 @@
         </p:nvSpPr>
         <p:spPr>
           <a:xfrm>
-            <a:off x="6665976" y="1426464"/>
-            <a:ext cx="4958791" cy="1149858"/>
+            <a:off x="5843016" y="1426464"/>
+            <a:ext cx="5781751" cy="1149858"/>
           </a:xfrm>
           <a:prstGeom prst="roundRect">
             <a:avLst>
@@ -35939,7 +35940,7 @@
         </p:nvSpPr>
         <p:spPr>
           <a:xfrm>
-            <a:off x="6665976" y="1426464"/>
+            <a:off x="5843016" y="1426464"/>
             <a:ext cx="45720" cy="1149858"/>
           </a:xfrm>
           <a:prstGeom prst="rect">
@@ -35983,8 +35984,8 @@
         </p:nvSpPr>
         <p:spPr>
           <a:xfrm>
-            <a:off x="6867144" y="1563624"/>
-            <a:ext cx="4556455" cy="875538"/>
+            <a:off x="6044183" y="1563624"/>
+            <a:ext cx="5379415" cy="875538"/>
           </a:xfrm>
           <a:prstGeom prst="rect">
             <a:avLst/>
@@ -36050,8 +36051,8 @@
         </p:nvSpPr>
         <p:spPr>
           <a:xfrm>
-            <a:off x="6665976" y="2686050"/>
-            <a:ext cx="4958791" cy="1149858"/>
+            <a:off x="5843016" y="2686050"/>
+            <a:ext cx="5781751" cy="1149858"/>
           </a:xfrm>
           <a:prstGeom prst="roundRect">
             <a:avLst>
@@ -36096,7 +36097,7 @@
         </p:nvSpPr>
         <p:spPr>
           <a:xfrm>
-            <a:off x="6665976" y="2686050"/>
+            <a:off x="5843016" y="2686050"/>
             <a:ext cx="45720" cy="1149858"/>
           </a:xfrm>
           <a:prstGeom prst="rect">
@@ -36140,8 +36141,8 @@
         </p:nvSpPr>
         <p:spPr>
           <a:xfrm>
-            <a:off x="6867144" y="2823210"/>
-            <a:ext cx="4556455" cy="875538"/>
+            <a:off x="6044183" y="2823210"/>
+            <a:ext cx="5379415" cy="875538"/>
           </a:xfrm>
           <a:prstGeom prst="rect">
             <a:avLst/>
@@ -36207,8 +36208,8 @@
         </p:nvSpPr>
         <p:spPr>
           <a:xfrm>
-            <a:off x="6665976" y="3945635"/>
-            <a:ext cx="4958791" cy="1149858"/>
+            <a:off x="5843016" y="3945635"/>
+            <a:ext cx="5781751" cy="1149858"/>
           </a:xfrm>
           <a:prstGeom prst="roundRect">
             <a:avLst>
@@ -36253,7 +36254,7 @@
         </p:nvSpPr>
         <p:spPr>
           <a:xfrm>
-            <a:off x="6665976" y="3945635"/>
+            <a:off x="5843016" y="3945635"/>
             <a:ext cx="45720" cy="1149858"/>
           </a:xfrm>
           <a:prstGeom prst="rect">
@@ -36297,8 +36298,8 @@
         </p:nvSpPr>
         <p:spPr>
           <a:xfrm>
-            <a:off x="6867144" y="4082796"/>
-            <a:ext cx="4556455" cy="875538"/>
+            <a:off x="6044183" y="4082796"/>
+            <a:ext cx="5379415" cy="875538"/>
           </a:xfrm>
           <a:prstGeom prst="rect">
             <a:avLst/>
@@ -36364,8 +36365,8 @@
         </p:nvSpPr>
         <p:spPr>
           <a:xfrm>
-            <a:off x="6665976" y="5205221"/>
-            <a:ext cx="4958791" cy="1149858"/>
+            <a:off x="5843016" y="5205221"/>
+            <a:ext cx="5781751" cy="1149858"/>
           </a:xfrm>
           <a:prstGeom prst="roundRect">
             <a:avLst>
@@ -36410,7 +36411,7 @@
         </p:nvSpPr>
         <p:spPr>
           <a:xfrm>
-            <a:off x="6665976" y="5205221"/>
+            <a:off x="5843016" y="5205221"/>
             <a:ext cx="45720" cy="1149858"/>
           </a:xfrm>
           <a:prstGeom prst="rect">
@@ -36454,8 +36455,8 @@
         </p:nvSpPr>
         <p:spPr>
           <a:xfrm>
-            <a:off x="6867144" y="5342381"/>
-            <a:ext cx="4556455" cy="875538"/>
+            <a:off x="6044183" y="5342381"/>
+            <a:ext cx="5379415" cy="875538"/>
           </a:xfrm>
           <a:prstGeom prst="rect">
             <a:avLst/>
@@ -36764,14 +36765,15 @@
         </p:nvPicPr>
         <p:blipFill>
           <a:blip r:embed="rId2"/>
+          <a:srcRect l="15033" r="15033"/>
           <a:stretch>
             <a:fillRect/>
           </a:stretch>
         </p:blipFill>
         <p:spPr>
           <a:xfrm>
-            <a:off x="5909767" y="1417320"/>
-            <a:ext cx="5715000" cy="3810000"/>
+            <a:off x="6732727" y="1417320"/>
+            <a:ext cx="4892040" cy="4663440"/>
           </a:xfrm>
           <a:prstGeom prst="rect">
             <a:avLst/>
@@ -36786,8 +36788,8 @@
         </p:nvSpPr>
         <p:spPr>
           <a:xfrm>
-            <a:off x="5909767" y="1417320"/>
-            <a:ext cx="5715000" cy="59436"/>
+            <a:off x="6732727" y="1417320"/>
+            <a:ext cx="4892040" cy="59436"/>
           </a:xfrm>
           <a:prstGeom prst="rect">
             <a:avLst/>
@@ -36830,8 +36832,8 @@
         </p:nvSpPr>
         <p:spPr>
           <a:xfrm>
-            <a:off x="5909767" y="5273040"/>
-            <a:ext cx="5715000" cy="365760"/>
+            <a:off x="6732727" y="6144768"/>
+            <a:ext cx="4892040" cy="365760"/>
           </a:xfrm>
           <a:prstGeom prst="rect">
             <a:avLst/>
@@ -36876,7 +36878,7 @@
         <p:spPr>
           <a:xfrm>
             <a:off x="566928" y="1426464"/>
-            <a:ext cx="4958791" cy="808923"/>
+            <a:ext cx="5781751" cy="832002"/>
           </a:xfrm>
           <a:prstGeom prst="roundRect">
             <a:avLst>
@@ -36922,7 +36924,7 @@
         <p:spPr>
           <a:xfrm>
             <a:off x="566928" y="1426464"/>
-            <a:ext cx="45720" cy="808923"/>
+            <a:ext cx="45720" cy="832002"/>
           </a:xfrm>
           <a:prstGeom prst="rect">
             <a:avLst/>
@@ -36966,7 +36968,7 @@
         <p:spPr>
           <a:xfrm>
             <a:off x="768096" y="1563624"/>
-            <a:ext cx="4556455" cy="534603"/>
+            <a:ext cx="5379415" cy="557682"/>
           </a:xfrm>
           <a:prstGeom prst="rect">
             <a:avLst/>
@@ -36991,7 +36993,7 @@
               </a:spcAft>
             </a:pPr>
             <a:r>
-              <a:rPr sz="1000" b="1" i="0">
+              <a:rPr sz="1100" b="1" i="0">
                 <a:solidFill>
                   <a:srgbClr val="0B6E4F"/>
                 </a:solidFill>
@@ -37013,7 +37015,7 @@
               </a:spcAft>
             </a:pPr>
             <a:r>
-              <a:rPr sz="900" b="0" i="0">
+              <a:rPr sz="1000" b="0" i="0">
                 <a:solidFill>
                   <a:srgbClr val="14262E"/>
                 </a:solidFill>
@@ -37032,8 +37034,8 @@
         </p:nvSpPr>
         <p:spPr>
           <a:xfrm>
-            <a:off x="566928" y="2345115"/>
-            <a:ext cx="4958791" cy="957285"/>
+            <a:off x="566928" y="2368194"/>
+            <a:ext cx="5781751" cy="996848"/>
           </a:xfrm>
           <a:prstGeom prst="roundRect">
             <a:avLst>
@@ -37078,8 +37080,8 @@
         </p:nvSpPr>
         <p:spPr>
           <a:xfrm>
-            <a:off x="566928" y="2345115"/>
-            <a:ext cx="45720" cy="957285"/>
+            <a:off x="566928" y="2368194"/>
+            <a:ext cx="45720" cy="996848"/>
           </a:xfrm>
           <a:prstGeom prst="rect">
             <a:avLst/>
@@ -37122,8 +37124,8 @@
         </p:nvSpPr>
         <p:spPr>
           <a:xfrm>
-            <a:off x="768096" y="2482275"/>
-            <a:ext cx="4556455" cy="682965"/>
+            <a:off x="768096" y="2505354"/>
+            <a:ext cx="5379415" cy="722528"/>
           </a:xfrm>
           <a:prstGeom prst="rect">
             <a:avLst/>
@@ -37148,7 +37150,7 @@
               </a:spcAft>
             </a:pPr>
             <a:r>
-              <a:rPr sz="1000" b="1" i="0">
+              <a:rPr sz="1100" b="1" i="0">
                 <a:solidFill>
                   <a:srgbClr val="0B6E4F"/>
                 </a:solidFill>
@@ -37170,7 +37172,7 @@
               </a:spcAft>
             </a:pPr>
             <a:r>
-              <a:rPr sz="900" b="0" i="0">
+              <a:rPr sz="1000" b="0" i="0">
                 <a:solidFill>
                   <a:srgbClr val="14262E"/>
                 </a:solidFill>
@@ -37189,8 +37191,8 @@
         </p:nvSpPr>
         <p:spPr>
           <a:xfrm>
-            <a:off x="566928" y="3412129"/>
-            <a:ext cx="4958791" cy="957285"/>
+            <a:off x="566928" y="3474770"/>
+            <a:ext cx="5781751" cy="996848"/>
           </a:xfrm>
           <a:prstGeom prst="roundRect">
             <a:avLst>
@@ -37235,8 +37237,8 @@
         </p:nvSpPr>
         <p:spPr>
           <a:xfrm>
-            <a:off x="566928" y="3412129"/>
-            <a:ext cx="45720" cy="957285"/>
+            <a:off x="566928" y="3474770"/>
+            <a:ext cx="45720" cy="996848"/>
           </a:xfrm>
           <a:prstGeom prst="rect">
             <a:avLst/>
@@ -37279,8 +37281,8 @@
         </p:nvSpPr>
         <p:spPr>
           <a:xfrm>
-            <a:off x="768096" y="3549289"/>
-            <a:ext cx="4556455" cy="682965"/>
+            <a:off x="768096" y="3611930"/>
+            <a:ext cx="5379415" cy="722528"/>
           </a:xfrm>
           <a:prstGeom prst="rect">
             <a:avLst/>
@@ -37305,7 +37307,7 @@
               </a:spcAft>
             </a:pPr>
             <a:r>
-              <a:rPr sz="1000" b="1" i="0">
+              <a:rPr sz="1100" b="1" i="0">
                 <a:solidFill>
                   <a:srgbClr val="0B6E4F"/>
                 </a:solidFill>
@@ -37327,7 +37329,7 @@
               </a:spcAft>
             </a:pPr>
             <a:r>
-              <a:rPr sz="900" b="0" i="0">
+              <a:rPr sz="1000" b="0" i="0">
                 <a:solidFill>
                   <a:srgbClr val="14262E"/>
                 </a:solidFill>
@@ -37346,8 +37348,8 @@
         </p:nvSpPr>
         <p:spPr>
           <a:xfrm>
-            <a:off x="566928" y="4479142"/>
-            <a:ext cx="4958791" cy="957285"/>
+            <a:off x="566928" y="4581347"/>
+            <a:ext cx="5781751" cy="832002"/>
           </a:xfrm>
           <a:prstGeom prst="roundRect">
             <a:avLst>
@@ -37392,8 +37394,8 @@
         </p:nvSpPr>
         <p:spPr>
           <a:xfrm>
-            <a:off x="566928" y="4479142"/>
-            <a:ext cx="45720" cy="957285"/>
+            <a:off x="566928" y="4581347"/>
+            <a:ext cx="45720" cy="832002"/>
           </a:xfrm>
           <a:prstGeom prst="rect">
             <a:avLst/>
@@ -37436,8 +37438,8 @@
         </p:nvSpPr>
         <p:spPr>
           <a:xfrm>
-            <a:off x="768096" y="4616302"/>
-            <a:ext cx="4556455" cy="682965"/>
+            <a:off x="768096" y="4718507"/>
+            <a:ext cx="5379415" cy="557682"/>
           </a:xfrm>
           <a:prstGeom prst="rect">
             <a:avLst/>
@@ -37462,7 +37464,7 @@
               </a:spcAft>
             </a:pPr>
             <a:r>
-              <a:rPr sz="1000" b="1" i="0">
+              <a:rPr sz="1100" b="1" i="0">
                 <a:solidFill>
                   <a:srgbClr val="0B6E4F"/>
                 </a:solidFill>
@@ -37484,7 +37486,7 @@
               </a:spcAft>
             </a:pPr>
             <a:r>
-              <a:rPr sz="900" b="0" i="0">
+              <a:rPr sz="1000" b="0" i="0">
                 <a:solidFill>
                   <a:srgbClr val="14262E"/>
                 </a:solidFill>
@@ -37503,8 +37505,8 @@
         </p:nvSpPr>
         <p:spPr>
           <a:xfrm>
-            <a:off x="566928" y="5546156"/>
-            <a:ext cx="4958791" cy="808923"/>
+            <a:off x="566928" y="5523077"/>
+            <a:ext cx="5781751" cy="832002"/>
           </a:xfrm>
           <a:prstGeom prst="roundRect">
             <a:avLst>
@@ -37549,8 +37551,8 @@
         </p:nvSpPr>
         <p:spPr>
           <a:xfrm>
-            <a:off x="566928" y="5546156"/>
-            <a:ext cx="45720" cy="808923"/>
+            <a:off x="566928" y="5523077"/>
+            <a:ext cx="45720" cy="832002"/>
           </a:xfrm>
           <a:prstGeom prst="rect">
             <a:avLst/>
@@ -37593,8 +37595,8 @@
         </p:nvSpPr>
         <p:spPr>
           <a:xfrm>
-            <a:off x="768096" y="5683316"/>
-            <a:ext cx="4556455" cy="534603"/>
+            <a:off x="768096" y="5660237"/>
+            <a:ext cx="5379415" cy="557682"/>
           </a:xfrm>
           <a:prstGeom prst="rect">
             <a:avLst/>
@@ -37619,7 +37621,7 @@
               </a:spcAft>
             </a:pPr>
             <a:r>
-              <a:rPr sz="1000" b="1" i="0">
+              <a:rPr sz="1100" b="1" i="0">
                 <a:solidFill>
                   <a:srgbClr val="0B6E4F"/>
                 </a:solidFill>
@@ -37641,7 +37643,7 @@
               </a:spcAft>
             </a:pPr>
             <a:r>
-              <a:rPr sz="900" b="0" i="0">
+              <a:rPr sz="1000" b="0" i="0">
                 <a:solidFill>
                   <a:srgbClr val="14262E"/>
                 </a:solidFill>
@@ -37903,6 +37905,7 @@
         </p:nvPicPr>
         <p:blipFill>
           <a:blip r:embed="rId2"/>
+          <a:srcRect l="15033" r="15033"/>
           <a:stretch>
             <a:fillRect/>
           </a:stretch>
@@ -37910,7 +37913,7 @@
         <p:spPr>
           <a:xfrm>
             <a:off x="566928" y="1417320"/>
-            <a:ext cx="5715000" cy="3810000"/>
+            <a:ext cx="4892040" cy="4663440"/>
           </a:xfrm>
           <a:prstGeom prst="rect">
             <a:avLst/>
@@ -37926,7 +37929,7 @@
         <p:spPr>
           <a:xfrm>
             <a:off x="566928" y="1417320"/>
-            <a:ext cx="5715000" cy="59436"/>
+            <a:ext cx="4892040" cy="59436"/>
           </a:xfrm>
           <a:prstGeom prst="rect">
             <a:avLst/>
@@ -37969,8 +37972,8 @@
         </p:nvSpPr>
         <p:spPr>
           <a:xfrm>
-            <a:off x="566928" y="5273040"/>
-            <a:ext cx="5715000" cy="365760"/>
+            <a:off x="566928" y="6144768"/>
+            <a:ext cx="4892040" cy="365760"/>
           </a:xfrm>
           <a:prstGeom prst="rect">
             <a:avLst/>
@@ -38014,8 +38017,8 @@
         </p:nvSpPr>
         <p:spPr>
           <a:xfrm>
-            <a:off x="6665976" y="1426464"/>
-            <a:ext cx="4958791" cy="832002"/>
+            <a:off x="5843016" y="1426464"/>
+            <a:ext cx="5781751" cy="863323"/>
           </a:xfrm>
           <a:prstGeom prst="roundRect">
             <a:avLst>
@@ -38060,8 +38063,8 @@
         </p:nvSpPr>
         <p:spPr>
           <a:xfrm>
-            <a:off x="6665976" y="1426464"/>
-            <a:ext cx="45720" cy="832002"/>
+            <a:off x="5843016" y="1426464"/>
+            <a:ext cx="45720" cy="863323"/>
           </a:xfrm>
           <a:prstGeom prst="rect">
             <a:avLst/>
@@ -38104,8 +38107,8 @@
         </p:nvSpPr>
         <p:spPr>
           <a:xfrm>
-            <a:off x="6867144" y="1563624"/>
-            <a:ext cx="4556455" cy="557682"/>
+            <a:off x="6044183" y="1563624"/>
+            <a:ext cx="5379415" cy="589003"/>
           </a:xfrm>
           <a:prstGeom prst="rect">
             <a:avLst/>
@@ -38130,7 +38133,7 @@
               </a:spcAft>
             </a:pPr>
             <a:r>
-              <a:rPr sz="1100" b="1" i="0">
+              <a:rPr sz="1150" b="1" i="0">
                 <a:solidFill>
                   <a:srgbClr val="F4B400"/>
                 </a:solidFill>
@@ -38152,7 +38155,7 @@
               </a:spcAft>
             </a:pPr>
             <a:r>
-              <a:rPr sz="1000" b="0" i="0">
+              <a:rPr sz="1050" b="0" i="0">
                 <a:solidFill>
                   <a:srgbClr val="14262E"/>
                 </a:solidFill>
@@ -38171,8 +38174,8 @@
         </p:nvSpPr>
         <p:spPr>
           <a:xfrm>
-            <a:off x="6665976" y="2368194"/>
-            <a:ext cx="4958791" cy="996848"/>
+            <a:off x="5843016" y="2399515"/>
+            <a:ext cx="5781751" cy="1036411"/>
           </a:xfrm>
           <a:prstGeom prst="roundRect">
             <a:avLst>
@@ -38217,8 +38220,8 @@
         </p:nvSpPr>
         <p:spPr>
           <a:xfrm>
-            <a:off x="6665976" y="2368194"/>
-            <a:ext cx="45720" cy="996848"/>
+            <a:off x="5843016" y="2399515"/>
+            <a:ext cx="45720" cy="1036411"/>
           </a:xfrm>
           <a:prstGeom prst="rect">
             <a:avLst/>
@@ -38261,8 +38264,8 @@
         </p:nvSpPr>
         <p:spPr>
           <a:xfrm>
-            <a:off x="6867144" y="2505354"/>
-            <a:ext cx="4556455" cy="722528"/>
+            <a:off x="6044183" y="2536675"/>
+            <a:ext cx="5379415" cy="762091"/>
           </a:xfrm>
           <a:prstGeom prst="rect">
             <a:avLst/>
@@ -38287,7 +38290,7 @@
               </a:spcAft>
             </a:pPr>
             <a:r>
-              <a:rPr sz="1100" b="1" i="0">
+              <a:rPr sz="1150" b="1" i="0">
                 <a:solidFill>
                   <a:srgbClr val="F4B400"/>
                 </a:solidFill>
@@ -38309,7 +38312,7 @@
               </a:spcAft>
             </a:pPr>
             <a:r>
-              <a:rPr sz="1000" b="0" i="0">
+              <a:rPr sz="1050" b="0" i="0">
                 <a:solidFill>
                   <a:srgbClr val="14262E"/>
                 </a:solidFill>
@@ -38328,8 +38331,8 @@
         </p:nvSpPr>
         <p:spPr>
           <a:xfrm>
-            <a:off x="6665976" y="3474770"/>
-            <a:ext cx="4958791" cy="996848"/>
+            <a:off x="5843016" y="3545654"/>
+            <a:ext cx="5781751" cy="863323"/>
           </a:xfrm>
           <a:prstGeom prst="roundRect">
             <a:avLst>
@@ -38374,8 +38377,8 @@
         </p:nvSpPr>
         <p:spPr>
           <a:xfrm>
-            <a:off x="6665976" y="3474770"/>
-            <a:ext cx="45720" cy="996848"/>
+            <a:off x="5843016" y="3545654"/>
+            <a:ext cx="45720" cy="863323"/>
           </a:xfrm>
           <a:prstGeom prst="rect">
             <a:avLst/>
@@ -38418,8 +38421,8 @@
         </p:nvSpPr>
         <p:spPr>
           <a:xfrm>
-            <a:off x="6867144" y="3611930"/>
-            <a:ext cx="4556455" cy="722528"/>
+            <a:off x="6044183" y="3682814"/>
+            <a:ext cx="5379415" cy="589003"/>
           </a:xfrm>
           <a:prstGeom prst="rect">
             <a:avLst/>
@@ -38444,7 +38447,7 @@
               </a:spcAft>
             </a:pPr>
             <a:r>
-              <a:rPr sz="1100" b="1" i="0">
+              <a:rPr sz="1150" b="1" i="0">
                 <a:solidFill>
                   <a:srgbClr val="F4B400"/>
                 </a:solidFill>
@@ -38466,7 +38469,7 @@
               </a:spcAft>
             </a:pPr>
             <a:r>
-              <a:rPr sz="1000" b="0" i="0">
+              <a:rPr sz="1050" b="0" i="0">
                 <a:solidFill>
                   <a:srgbClr val="14262E"/>
                 </a:solidFill>
@@ -38485,8 +38488,8 @@
         </p:nvSpPr>
         <p:spPr>
           <a:xfrm>
-            <a:off x="6665976" y="4581347"/>
-            <a:ext cx="4958791" cy="832002"/>
+            <a:off x="5843016" y="4518705"/>
+            <a:ext cx="5781751" cy="863323"/>
           </a:xfrm>
           <a:prstGeom prst="roundRect">
             <a:avLst>
@@ -38531,8 +38534,8 @@
         </p:nvSpPr>
         <p:spPr>
           <a:xfrm>
-            <a:off x="6665976" y="4581347"/>
-            <a:ext cx="45720" cy="832002"/>
+            <a:off x="5843016" y="4518705"/>
+            <a:ext cx="45720" cy="863323"/>
           </a:xfrm>
           <a:prstGeom prst="rect">
             <a:avLst/>
@@ -38575,8 +38578,8 @@
         </p:nvSpPr>
         <p:spPr>
           <a:xfrm>
-            <a:off x="6867144" y="4718507"/>
-            <a:ext cx="4556455" cy="557682"/>
+            <a:off x="6044183" y="4655865"/>
+            <a:ext cx="5379415" cy="589003"/>
           </a:xfrm>
           <a:prstGeom prst="rect">
             <a:avLst/>
@@ -38601,7 +38604,7 @@
               </a:spcAft>
             </a:pPr>
             <a:r>
-              <a:rPr sz="1100" b="1" i="0">
+              <a:rPr sz="1150" b="1" i="0">
                 <a:solidFill>
                   <a:srgbClr val="F4B400"/>
                 </a:solidFill>
@@ -38623,7 +38626,7 @@
               </a:spcAft>
             </a:pPr>
             <a:r>
-              <a:rPr sz="1000" b="0" i="0">
+              <a:rPr sz="1050" b="0" i="0">
                 <a:solidFill>
                   <a:srgbClr val="14262E"/>
                 </a:solidFill>
@@ -38642,8 +38645,8 @@
         </p:nvSpPr>
         <p:spPr>
           <a:xfrm>
-            <a:off x="6665976" y="5523077"/>
-            <a:ext cx="4958791" cy="832002"/>
+            <a:off x="5843016" y="5491756"/>
+            <a:ext cx="5781751" cy="863323"/>
           </a:xfrm>
           <a:prstGeom prst="roundRect">
             <a:avLst>
@@ -38688,8 +38691,8 @@
         </p:nvSpPr>
         <p:spPr>
           <a:xfrm>
-            <a:off x="6665976" y="5523077"/>
-            <a:ext cx="45720" cy="832002"/>
+            <a:off x="5843016" y="5491756"/>
+            <a:ext cx="45720" cy="863323"/>
           </a:xfrm>
           <a:prstGeom prst="rect">
             <a:avLst/>
@@ -38732,8 +38735,8 @@
         </p:nvSpPr>
         <p:spPr>
           <a:xfrm>
-            <a:off x="6867144" y="5660237"/>
-            <a:ext cx="4556455" cy="557682"/>
+            <a:off x="6044183" y="5628916"/>
+            <a:ext cx="5379415" cy="589003"/>
           </a:xfrm>
           <a:prstGeom prst="rect">
             <a:avLst/>
@@ -38758,7 +38761,7 @@
               </a:spcAft>
             </a:pPr>
             <a:r>
-              <a:rPr sz="1100" b="1" i="0">
+              <a:rPr sz="1150" b="1" i="0">
                 <a:solidFill>
                   <a:srgbClr val="F4B400"/>
                 </a:solidFill>
@@ -38780,7 +38783,7 @@
               </a:spcAft>
             </a:pPr>
             <a:r>
-              <a:rPr sz="1000" b="0" i="0">
+              <a:rPr sz="1050" b="0" i="0">
                 <a:solidFill>
                   <a:srgbClr val="14262E"/>
                 </a:solidFill>
@@ -40672,14 +40675,15 @@
         </p:nvPicPr>
         <p:blipFill>
           <a:blip r:embed="rId2"/>
+          <a:srcRect l="15033" r="15033"/>
           <a:stretch>
             <a:fillRect/>
           </a:stretch>
         </p:blipFill>
         <p:spPr>
           <a:xfrm>
-            <a:off x="5909767" y="1417320"/>
-            <a:ext cx="5715000" cy="3810000"/>
+            <a:off x="6732727" y="1417320"/>
+            <a:ext cx="4892040" cy="4663440"/>
           </a:xfrm>
           <a:prstGeom prst="rect">
             <a:avLst/>
@@ -40694,8 +40698,8 @@
         </p:nvSpPr>
         <p:spPr>
           <a:xfrm>
-            <a:off x="5909767" y="1417320"/>
-            <a:ext cx="5715000" cy="59436"/>
+            <a:off x="6732727" y="1417320"/>
+            <a:ext cx="4892040" cy="59436"/>
           </a:xfrm>
           <a:prstGeom prst="rect">
             <a:avLst/>
@@ -40738,8 +40742,8 @@
         </p:nvSpPr>
         <p:spPr>
           <a:xfrm>
-            <a:off x="5909767" y="5273040"/>
-            <a:ext cx="5715000" cy="365760"/>
+            <a:off x="6732727" y="6144768"/>
+            <a:ext cx="4892040" cy="365760"/>
           </a:xfrm>
           <a:prstGeom prst="rect">
             <a:avLst/>
@@ -40784,7 +40788,7 @@
         <p:spPr>
           <a:xfrm>
             <a:off x="566928" y="1426464"/>
-            <a:ext cx="4958791" cy="960582"/>
+            <a:ext cx="5781751" cy="996848"/>
           </a:xfrm>
           <a:prstGeom prst="roundRect">
             <a:avLst>
@@ -40830,7 +40834,7 @@
         <p:spPr>
           <a:xfrm>
             <a:off x="566928" y="1426464"/>
-            <a:ext cx="45720" cy="960582"/>
+            <a:ext cx="45720" cy="996848"/>
           </a:xfrm>
           <a:prstGeom prst="rect">
             <a:avLst/>
@@ -40874,7 +40878,7 @@
         <p:spPr>
           <a:xfrm>
             <a:off x="768096" y="1563624"/>
-            <a:ext cx="4556455" cy="686262"/>
+            <a:ext cx="5379415" cy="722528"/>
           </a:xfrm>
           <a:prstGeom prst="rect">
             <a:avLst/>
@@ -40899,7 +40903,7 @@
               </a:spcAft>
             </a:pPr>
             <a:r>
-              <a:rPr sz="1050" b="1" i="0">
+              <a:rPr sz="1100" b="1" i="0">
                 <a:solidFill>
                   <a:srgbClr val="F4B400"/>
                 </a:solidFill>
@@ -40921,7 +40925,7 @@
               </a:spcAft>
             </a:pPr>
             <a:r>
-              <a:rPr sz="950" b="0" i="0">
+              <a:rPr sz="1000" b="0" i="0">
                 <a:solidFill>
                   <a:srgbClr val="14262E"/>
                 </a:solidFill>
@@ -40940,8 +40944,8 @@
         </p:nvSpPr>
         <p:spPr>
           <a:xfrm>
-            <a:off x="566928" y="2496774"/>
-            <a:ext cx="4958791" cy="803978"/>
+            <a:off x="566928" y="2533040"/>
+            <a:ext cx="5781751" cy="832002"/>
           </a:xfrm>
           <a:prstGeom prst="roundRect">
             <a:avLst>
@@ -40986,8 +40990,8 @@
         </p:nvSpPr>
         <p:spPr>
           <a:xfrm>
-            <a:off x="566928" y="2496774"/>
-            <a:ext cx="45720" cy="803978"/>
+            <a:off x="566928" y="2533040"/>
+            <a:ext cx="45720" cy="832002"/>
           </a:xfrm>
           <a:prstGeom prst="rect">
             <a:avLst/>
@@ -41030,8 +41034,8 @@
         </p:nvSpPr>
         <p:spPr>
           <a:xfrm>
-            <a:off x="768096" y="2633934"/>
-            <a:ext cx="4556455" cy="529658"/>
+            <a:off x="768096" y="2670200"/>
+            <a:ext cx="5379415" cy="557682"/>
           </a:xfrm>
           <a:prstGeom prst="rect">
             <a:avLst/>
@@ -41056,7 +41060,7 @@
               </a:spcAft>
             </a:pPr>
             <a:r>
-              <a:rPr sz="1050" b="1" i="0">
+              <a:rPr sz="1100" b="1" i="0">
                 <a:solidFill>
                   <a:srgbClr val="F4B400"/>
                 </a:solidFill>
@@ -41078,7 +41082,7 @@
               </a:spcAft>
             </a:pPr>
             <a:r>
-              <a:rPr sz="950" b="0" i="0">
+              <a:rPr sz="1000" b="0" i="0">
                 <a:solidFill>
                   <a:srgbClr val="14262E"/>
                 </a:solidFill>
@@ -41097,8 +41101,8 @@
         </p:nvSpPr>
         <p:spPr>
           <a:xfrm>
-            <a:off x="566928" y="3410480"/>
-            <a:ext cx="4958791" cy="960582"/>
+            <a:off x="566928" y="3474770"/>
+            <a:ext cx="5781751" cy="996848"/>
           </a:xfrm>
           <a:prstGeom prst="roundRect">
             <a:avLst>
@@ -41143,8 +41147,8 @@
         </p:nvSpPr>
         <p:spPr>
           <a:xfrm>
-            <a:off x="566928" y="3410480"/>
-            <a:ext cx="45720" cy="960582"/>
+            <a:off x="566928" y="3474770"/>
+            <a:ext cx="45720" cy="996848"/>
           </a:xfrm>
           <a:prstGeom prst="rect">
             <a:avLst/>
@@ -41187,8 +41191,8 @@
         </p:nvSpPr>
         <p:spPr>
           <a:xfrm>
-            <a:off x="768096" y="3547640"/>
-            <a:ext cx="4556455" cy="686262"/>
+            <a:off x="768096" y="3611930"/>
+            <a:ext cx="5379415" cy="722528"/>
           </a:xfrm>
           <a:prstGeom prst="rect">
             <a:avLst/>
@@ -41213,7 +41217,7 @@
               </a:spcAft>
             </a:pPr>
             <a:r>
-              <a:rPr sz="1050" b="1" i="0">
+              <a:rPr sz="1100" b="1" i="0">
                 <a:solidFill>
                   <a:srgbClr val="F4B400"/>
                 </a:solidFill>
@@ -41235,7 +41239,7 @@
               </a:spcAft>
             </a:pPr>
             <a:r>
-              <a:rPr sz="950" b="0" i="0">
+              <a:rPr sz="1000" b="0" i="0">
                 <a:solidFill>
                   <a:srgbClr val="14262E"/>
                 </a:solidFill>
@@ -41254,8 +41258,8 @@
         </p:nvSpPr>
         <p:spPr>
           <a:xfrm>
-            <a:off x="566928" y="4480791"/>
-            <a:ext cx="4958791" cy="803978"/>
+            <a:off x="566928" y="4581347"/>
+            <a:ext cx="5781751" cy="832002"/>
           </a:xfrm>
           <a:prstGeom prst="roundRect">
             <a:avLst>
@@ -41300,8 +41304,8 @@
         </p:nvSpPr>
         <p:spPr>
           <a:xfrm>
-            <a:off x="566928" y="4480791"/>
-            <a:ext cx="45720" cy="803978"/>
+            <a:off x="566928" y="4581347"/>
+            <a:ext cx="45720" cy="832002"/>
           </a:xfrm>
           <a:prstGeom prst="rect">
             <a:avLst/>
@@ -41344,8 +41348,8 @@
         </p:nvSpPr>
         <p:spPr>
           <a:xfrm>
-            <a:off x="768096" y="4617951"/>
-            <a:ext cx="4556455" cy="529658"/>
+            <a:off x="768096" y="4718507"/>
+            <a:ext cx="5379415" cy="557682"/>
           </a:xfrm>
           <a:prstGeom prst="rect">
             <a:avLst/>
@@ -41370,7 +41374,7 @@
               </a:spcAft>
             </a:pPr>
             <a:r>
-              <a:rPr sz="1050" b="1" i="0">
+              <a:rPr sz="1100" b="1" i="0">
                 <a:solidFill>
                   <a:srgbClr val="F4B400"/>
                 </a:solidFill>
@@ -41392,7 +41396,7 @@
               </a:spcAft>
             </a:pPr>
             <a:r>
-              <a:rPr sz="950" b="0" i="0">
+              <a:rPr sz="1000" b="0" i="0">
                 <a:solidFill>
                   <a:srgbClr val="14262E"/>
                 </a:solidFill>
@@ -41411,8 +41415,8 @@
         </p:nvSpPr>
         <p:spPr>
           <a:xfrm>
-            <a:off x="566928" y="5394497"/>
-            <a:ext cx="4958791" cy="960582"/>
+            <a:off x="566928" y="5523077"/>
+            <a:ext cx="5781751" cy="832002"/>
           </a:xfrm>
           <a:prstGeom prst="roundRect">
             <a:avLst>
@@ -41457,8 +41461,8 @@
         </p:nvSpPr>
         <p:spPr>
           <a:xfrm>
-            <a:off x="566928" y="5394497"/>
-            <a:ext cx="45720" cy="960582"/>
+            <a:off x="566928" y="5523077"/>
+            <a:ext cx="45720" cy="832002"/>
           </a:xfrm>
           <a:prstGeom prst="rect">
             <a:avLst/>
@@ -41501,8 +41505,8 @@
         </p:nvSpPr>
         <p:spPr>
           <a:xfrm>
-            <a:off x="768096" y="5531657"/>
-            <a:ext cx="4556455" cy="686262"/>
+            <a:off x="768096" y="5660237"/>
+            <a:ext cx="5379415" cy="557682"/>
           </a:xfrm>
           <a:prstGeom prst="rect">
             <a:avLst/>
@@ -41527,7 +41531,7 @@
               </a:spcAft>
             </a:pPr>
             <a:r>
-              <a:rPr sz="1050" b="1" i="0">
+              <a:rPr sz="1100" b="1" i="0">
                 <a:solidFill>
                   <a:srgbClr val="F4B400"/>
                 </a:solidFill>
@@ -41549,7 +41553,7 @@
               </a:spcAft>
             </a:pPr>
             <a:r>
-              <a:rPr sz="950" b="0" i="0">
+              <a:rPr sz="1000" b="0" i="0">
                 <a:solidFill>
                   <a:srgbClr val="14262E"/>
                 </a:solidFill>
@@ -41776,7 +41780,7 @@
                 </a:solidFill>
                 <a:latin typeface="Trebuchet MS"/>
               </a:rPr>
-              <a:t>SESSION 5</a:t>
+              <a:t>PRACTICAL WORKSHOP</a:t>
             </a:r>
           </a:p>
         </p:txBody>
@@ -41886,7 +41890,7 @@
                 </a:solidFill>
                 <a:latin typeface="Trebuchet MS"/>
               </a:rPr>
-              <a:t>Practical Workshop</a:t>
+              <a:t>Design a Task &amp; Rubric</a:t>
             </a:r>
           </a:p>
           <a:p>
@@ -41908,7 +41912,7 @@
                 </a:solidFill>
                 <a:latin typeface="Calibri"/>
               </a:rPr>
-              <a:t>Design a Task &amp; Rubric — something you will actually use.</a:t>
+              <a:t>Something you will actually use — not something you plan to use.</a:t>
             </a:r>
           </a:p>
         </p:txBody>
@@ -42119,6 +42123,7 @@
         </p:nvPicPr>
         <p:blipFill>
           <a:blip r:embed="rId2"/>
+          <a:srcRect l="16667" r="16667"/>
           <a:stretch>
             <a:fillRect/>
           </a:stretch>
@@ -42126,7 +42131,7 @@
         <p:spPr>
           <a:xfrm>
             <a:off x="566928" y="1417320"/>
-            <a:ext cx="5074920" cy="3383279"/>
+            <a:ext cx="4663440" cy="4663440"/>
           </a:xfrm>
           <a:prstGeom prst="rect">
             <a:avLst/>
@@ -42142,7 +42147,7 @@
         <p:spPr>
           <a:xfrm>
             <a:off x="566928" y="1417320"/>
-            <a:ext cx="5074920" cy="59436"/>
+            <a:ext cx="4663440" cy="59436"/>
           </a:xfrm>
           <a:prstGeom prst="rect">
             <a:avLst/>
@@ -42185,8 +42190,544 @@
         </p:nvSpPr>
         <p:spPr>
           <a:xfrm>
-            <a:off x="566928" y="4919472"/>
-            <a:ext cx="5074920" cy="1481328"/>
+            <a:off x="5614416" y="1408176"/>
+            <a:ext cx="1417320" cy="384048"/>
+          </a:xfrm>
+          <a:prstGeom prst="roundRect">
+            <a:avLst>
+              <a:gd name="adj" fmla="val 40000"/>
+            </a:avLst>
+          </a:prstGeom>
+          <a:solidFill>
+            <a:srgbClr val="F4B400"/>
+          </a:solidFill>
+          <a:ln>
+            <a:noFill/>
+          </a:ln>
+          <a:effectLst/>
+        </p:spPr>
+        <p:style>
+          <a:lnRef idx="1">
+            <a:schemeClr val="accent1"/>
+          </a:lnRef>
+          <a:fillRef idx="3">
+            <a:schemeClr val="accent1"/>
+          </a:fillRef>
+          <a:effectRef idx="2">
+            <a:schemeClr val="accent1"/>
+          </a:effectRef>
+          <a:fontRef idx="minor">
+            <a:schemeClr val="lt1"/>
+          </a:fontRef>
+        </p:style>
+        <p:txBody>
+          <a:bodyPr rtlCol="0" anchor="ctr"/>
+          <a:lstStyle/>
+          <a:p>
+            <a:pPr algn="ctr">
+              <a:lnSpc>
+                <a:spcPct val="100000"/>
+              </a:lnSpc>
+              <a:spcBef>
+                <a:spcPts val="0"/>
+              </a:spcBef>
+              <a:spcAft>
+                <a:spcPts val="0"/>
+              </a:spcAft>
+            </a:pPr>
+            <a:r>
+              <a:rPr sz="1150" b="1" i="0">
+                <a:solidFill>
+                  <a:srgbClr val="074A35"/>
+                </a:solidFill>
+                <a:latin typeface="Trebuchet MS"/>
+              </a:rPr>
+              <a:t>5 MINUTES</a:t>
+            </a:r>
+          </a:p>
+        </p:txBody>
+      </p:sp>
+      <p:sp>
+        <p:nvSpPr>
+          <p:cNvPr id="9" name="Rounded Rectangle 8"/>
+          <p:cNvSpPr/>
+          <p:nvPr/>
+        </p:nvSpPr>
+        <p:spPr>
+          <a:xfrm>
+            <a:off x="5614416" y="1938528"/>
+            <a:ext cx="6010351" cy="1097280"/>
+          </a:xfrm>
+          <a:prstGeom prst="roundRect">
+            <a:avLst>
+              <a:gd name="adj" fmla="val 8000"/>
+            </a:avLst>
+          </a:prstGeom>
+          <a:solidFill>
+            <a:srgbClr val="FFFFFF"/>
+          </a:solidFill>
+          <a:ln>
+            <a:noFill/>
+          </a:ln>
+          <a:effectLst/>
+        </p:spPr>
+        <p:style>
+          <a:lnRef idx="1">
+            <a:schemeClr val="accent1"/>
+          </a:lnRef>
+          <a:fillRef idx="3">
+            <a:schemeClr val="accent1"/>
+          </a:fillRef>
+          <a:effectRef idx="2">
+            <a:schemeClr val="accent1"/>
+          </a:effectRef>
+          <a:fontRef idx="minor">
+            <a:schemeClr val="lt1"/>
+          </a:fontRef>
+        </p:style>
+        <p:txBody>
+          <a:bodyPr rtlCol="0" anchor="ctr"/>
+          <a:lstStyle/>
+          <a:p>
+            <a:pPr algn="ctr"/>
+          </a:p>
+        </p:txBody>
+      </p:sp>
+      <p:sp>
+        <p:nvSpPr>
+          <p:cNvPr id="10" name="Rectangle 9"/>
+          <p:cNvSpPr/>
+          <p:nvPr/>
+        </p:nvSpPr>
+        <p:spPr>
+          <a:xfrm>
+            <a:off x="5614416" y="1938528"/>
+            <a:ext cx="50292" cy="1097280"/>
+          </a:xfrm>
+          <a:prstGeom prst="rect">
+            <a:avLst/>
+          </a:prstGeom>
+          <a:solidFill>
+            <a:srgbClr val="F4B400"/>
+          </a:solidFill>
+          <a:ln>
+            <a:noFill/>
+          </a:ln>
+          <a:effectLst/>
+        </p:spPr>
+        <p:style>
+          <a:lnRef idx="1">
+            <a:schemeClr val="accent1"/>
+          </a:lnRef>
+          <a:fillRef idx="3">
+            <a:schemeClr val="accent1"/>
+          </a:fillRef>
+          <a:effectRef idx="2">
+            <a:schemeClr val="accent1"/>
+          </a:effectRef>
+          <a:fontRef idx="minor">
+            <a:schemeClr val="lt1"/>
+          </a:fontRef>
+        </p:style>
+        <p:txBody>
+          <a:bodyPr rtlCol="0" anchor="ctr"/>
+          <a:lstStyle/>
+          <a:p>
+            <a:pPr algn="ctr"/>
+          </a:p>
+        </p:txBody>
+      </p:sp>
+      <p:sp>
+        <p:nvSpPr>
+          <p:cNvPr id="11" name="TextBox 10"/>
+          <p:cNvSpPr txBox="1"/>
+          <p:nvPr/>
+        </p:nvSpPr>
+        <p:spPr>
+          <a:xfrm>
+            <a:off x="5833872" y="2066544"/>
+            <a:ext cx="5571439" cy="841247"/>
+          </a:xfrm>
+          <a:prstGeom prst="rect">
+            <a:avLst/>
+          </a:prstGeom>
+          <a:noFill/>
+        </p:spPr>
+        <p:txBody>
+          <a:bodyPr wrap="square" lIns="0" rIns="0" tIns="0" bIns="0">
+            <a:spAutoFit/>
+          </a:bodyPr>
+          <a:lstStyle/>
+          <a:p>
+            <a:pPr algn="l">
+              <a:lnSpc>
+                <a:spcPct val="100000"/>
+              </a:lnSpc>
+              <a:spcBef>
+                <a:spcPts val="0"/>
+              </a:spcBef>
+              <a:spcAft>
+                <a:spcPts val="300"/>
+              </a:spcAft>
+            </a:pPr>
+            <a:r>
+              <a:rPr sz="1250" b="1" i="0">
+                <a:solidFill>
+                  <a:srgbClr val="C1440E"/>
+                </a:solidFill>
+                <a:latin typeface="Trebuchet MS"/>
+              </a:rPr>
+              <a:t>Think</a:t>
+            </a:r>
+          </a:p>
+          <a:p>
+            <a:pPr algn="l">
+              <a:lnSpc>
+                <a:spcPct val="110000"/>
+              </a:lnSpc>
+              <a:spcBef>
+                <a:spcPts val="0"/>
+              </a:spcBef>
+              <a:spcAft>
+                <a:spcPts val="0"/>
+              </a:spcAft>
+            </a:pPr>
+            <a:r>
+              <a:rPr sz="1150" b="0" i="0">
+                <a:solidFill>
+                  <a:srgbClr val="14262E"/>
+                </a:solidFill>
+                <a:latin typeface="Calibri"/>
+              </a:rPr>
+              <a:t>When you hear the word “assessment”, what is the FIRST word that comes into your mind? Not the textbook word. Your honest word.</a:t>
+            </a:r>
+          </a:p>
+        </p:txBody>
+      </p:sp>
+      <p:sp>
+        <p:nvSpPr>
+          <p:cNvPr id="12" name="Rounded Rectangle 11"/>
+          <p:cNvSpPr/>
+          <p:nvPr/>
+        </p:nvSpPr>
+        <p:spPr>
+          <a:xfrm>
+            <a:off x="5614416" y="3127248"/>
+            <a:ext cx="6010351" cy="1097280"/>
+          </a:xfrm>
+          <a:prstGeom prst="roundRect">
+            <a:avLst>
+              <a:gd name="adj" fmla="val 8000"/>
+            </a:avLst>
+          </a:prstGeom>
+          <a:solidFill>
+            <a:srgbClr val="FFFFFF"/>
+          </a:solidFill>
+          <a:ln>
+            <a:noFill/>
+          </a:ln>
+          <a:effectLst/>
+        </p:spPr>
+        <p:style>
+          <a:lnRef idx="1">
+            <a:schemeClr val="accent1"/>
+          </a:lnRef>
+          <a:fillRef idx="3">
+            <a:schemeClr val="accent1"/>
+          </a:fillRef>
+          <a:effectRef idx="2">
+            <a:schemeClr val="accent1"/>
+          </a:effectRef>
+          <a:fontRef idx="minor">
+            <a:schemeClr val="lt1"/>
+          </a:fontRef>
+        </p:style>
+        <p:txBody>
+          <a:bodyPr rtlCol="0" anchor="ctr"/>
+          <a:lstStyle/>
+          <a:p>
+            <a:pPr algn="ctr"/>
+          </a:p>
+        </p:txBody>
+      </p:sp>
+      <p:sp>
+        <p:nvSpPr>
+          <p:cNvPr id="13" name="Rectangle 12"/>
+          <p:cNvSpPr/>
+          <p:nvPr/>
+        </p:nvSpPr>
+        <p:spPr>
+          <a:xfrm>
+            <a:off x="5614416" y="3127248"/>
+            <a:ext cx="50292" cy="1097280"/>
+          </a:xfrm>
+          <a:prstGeom prst="rect">
+            <a:avLst/>
+          </a:prstGeom>
+          <a:solidFill>
+            <a:srgbClr val="F4B400"/>
+          </a:solidFill>
+          <a:ln>
+            <a:noFill/>
+          </a:ln>
+          <a:effectLst/>
+        </p:spPr>
+        <p:style>
+          <a:lnRef idx="1">
+            <a:schemeClr val="accent1"/>
+          </a:lnRef>
+          <a:fillRef idx="3">
+            <a:schemeClr val="accent1"/>
+          </a:fillRef>
+          <a:effectRef idx="2">
+            <a:schemeClr val="accent1"/>
+          </a:effectRef>
+          <a:fontRef idx="minor">
+            <a:schemeClr val="lt1"/>
+          </a:fontRef>
+        </p:style>
+        <p:txBody>
+          <a:bodyPr rtlCol="0" anchor="ctr"/>
+          <a:lstStyle/>
+          <a:p>
+            <a:pPr algn="ctr"/>
+          </a:p>
+        </p:txBody>
+      </p:sp>
+      <p:sp>
+        <p:nvSpPr>
+          <p:cNvPr id="14" name="TextBox 13"/>
+          <p:cNvSpPr txBox="1"/>
+          <p:nvPr/>
+        </p:nvSpPr>
+        <p:spPr>
+          <a:xfrm>
+            <a:off x="5833872" y="3255264"/>
+            <a:ext cx="5571439" cy="841247"/>
+          </a:xfrm>
+          <a:prstGeom prst="rect">
+            <a:avLst/>
+          </a:prstGeom>
+          <a:noFill/>
+        </p:spPr>
+        <p:txBody>
+          <a:bodyPr wrap="square" lIns="0" rIns="0" tIns="0" bIns="0">
+            <a:spAutoFit/>
+          </a:bodyPr>
+          <a:lstStyle/>
+          <a:p>
+            <a:pPr algn="l">
+              <a:lnSpc>
+                <a:spcPct val="100000"/>
+              </a:lnSpc>
+              <a:spcBef>
+                <a:spcPts val="0"/>
+              </a:spcBef>
+              <a:spcAft>
+                <a:spcPts val="300"/>
+              </a:spcAft>
+            </a:pPr>
+            <a:r>
+              <a:rPr sz="1250" b="1" i="0">
+                <a:solidFill>
+                  <a:srgbClr val="C1440E"/>
+                </a:solidFill>
+                <a:latin typeface="Trebuchet MS"/>
+              </a:rPr>
+              <a:t>Share</a:t>
+            </a:r>
+          </a:p>
+          <a:p>
+            <a:pPr algn="l">
+              <a:lnSpc>
+                <a:spcPct val="110000"/>
+              </a:lnSpc>
+              <a:spcBef>
+                <a:spcPts val="0"/>
+              </a:spcBef>
+              <a:spcAft>
+                <a:spcPts val="0"/>
+              </a:spcAft>
+            </a:pPr>
+            <a:r>
+              <a:rPr sz="1150" b="0" i="0">
+                <a:solidFill>
+                  <a:srgbClr val="14262E"/>
+                </a:solidFill>
+                <a:latin typeface="Calibri"/>
+              </a:rPr>
+              <a:t>Turn to the person beside you. One word each. Thirty seconds. No explaining, no defending — just the word.</a:t>
+            </a:r>
+          </a:p>
+        </p:txBody>
+      </p:sp>
+      <p:sp>
+        <p:nvSpPr>
+          <p:cNvPr id="15" name="Rounded Rectangle 14"/>
+          <p:cNvSpPr/>
+          <p:nvPr/>
+        </p:nvSpPr>
+        <p:spPr>
+          <a:xfrm>
+            <a:off x="5614416" y="4315968"/>
+            <a:ext cx="6010351" cy="1097280"/>
+          </a:xfrm>
+          <a:prstGeom prst="roundRect">
+            <a:avLst>
+              <a:gd name="adj" fmla="val 8000"/>
+            </a:avLst>
+          </a:prstGeom>
+          <a:solidFill>
+            <a:srgbClr val="FFFFFF"/>
+          </a:solidFill>
+          <a:ln>
+            <a:noFill/>
+          </a:ln>
+          <a:effectLst/>
+        </p:spPr>
+        <p:style>
+          <a:lnRef idx="1">
+            <a:schemeClr val="accent1"/>
+          </a:lnRef>
+          <a:fillRef idx="3">
+            <a:schemeClr val="accent1"/>
+          </a:fillRef>
+          <a:effectRef idx="2">
+            <a:schemeClr val="accent1"/>
+          </a:effectRef>
+          <a:fontRef idx="minor">
+            <a:schemeClr val="lt1"/>
+          </a:fontRef>
+        </p:style>
+        <p:txBody>
+          <a:bodyPr rtlCol="0" anchor="ctr"/>
+          <a:lstStyle/>
+          <a:p>
+            <a:pPr algn="ctr"/>
+          </a:p>
+        </p:txBody>
+      </p:sp>
+      <p:sp>
+        <p:nvSpPr>
+          <p:cNvPr id="16" name="Rectangle 15"/>
+          <p:cNvSpPr/>
+          <p:nvPr/>
+        </p:nvSpPr>
+        <p:spPr>
+          <a:xfrm>
+            <a:off x="5614416" y="4315968"/>
+            <a:ext cx="50292" cy="1097280"/>
+          </a:xfrm>
+          <a:prstGeom prst="rect">
+            <a:avLst/>
+          </a:prstGeom>
+          <a:solidFill>
+            <a:srgbClr val="F4B400"/>
+          </a:solidFill>
+          <a:ln>
+            <a:noFill/>
+          </a:ln>
+          <a:effectLst/>
+        </p:spPr>
+        <p:style>
+          <a:lnRef idx="1">
+            <a:schemeClr val="accent1"/>
+          </a:lnRef>
+          <a:fillRef idx="3">
+            <a:schemeClr val="accent1"/>
+          </a:fillRef>
+          <a:effectRef idx="2">
+            <a:schemeClr val="accent1"/>
+          </a:effectRef>
+          <a:fontRef idx="minor">
+            <a:schemeClr val="lt1"/>
+          </a:fontRef>
+        </p:style>
+        <p:txBody>
+          <a:bodyPr rtlCol="0" anchor="ctr"/>
+          <a:lstStyle/>
+          <a:p>
+            <a:pPr algn="ctr"/>
+          </a:p>
+        </p:txBody>
+      </p:sp>
+      <p:sp>
+        <p:nvSpPr>
+          <p:cNvPr id="17" name="TextBox 16"/>
+          <p:cNvSpPr txBox="1"/>
+          <p:nvPr/>
+        </p:nvSpPr>
+        <p:spPr>
+          <a:xfrm>
+            <a:off x="5833872" y="4443984"/>
+            <a:ext cx="5571439" cy="841247"/>
+          </a:xfrm>
+          <a:prstGeom prst="rect">
+            <a:avLst/>
+          </a:prstGeom>
+          <a:noFill/>
+        </p:spPr>
+        <p:txBody>
+          <a:bodyPr wrap="square" lIns="0" rIns="0" tIns="0" bIns="0">
+            <a:spAutoFit/>
+          </a:bodyPr>
+          <a:lstStyle/>
+          <a:p>
+            <a:pPr algn="l">
+              <a:lnSpc>
+                <a:spcPct val="100000"/>
+              </a:lnSpc>
+              <a:spcBef>
+                <a:spcPts val="0"/>
+              </a:spcBef>
+              <a:spcAft>
+                <a:spcPts val="300"/>
+              </a:spcAft>
+            </a:pPr>
+            <a:r>
+              <a:rPr sz="1250" b="1" i="0">
+                <a:solidFill>
+                  <a:srgbClr val="C1440E"/>
+                </a:solidFill>
+                <a:latin typeface="Trebuchet MS"/>
+              </a:rPr>
+              <a:t>Collect</a:t>
+            </a:r>
+          </a:p>
+          <a:p>
+            <a:pPr algn="l">
+              <a:lnSpc>
+                <a:spcPct val="110000"/>
+              </a:lnSpc>
+              <a:spcBef>
+                <a:spcPts val="0"/>
+              </a:spcBef>
+              <a:spcAft>
+                <a:spcPts val="0"/>
+              </a:spcAft>
+            </a:pPr>
+            <a:r>
+              <a:rPr sz="1150" b="0" i="0">
+                <a:solidFill>
+                  <a:srgbClr val="14262E"/>
+                </a:solidFill>
+                <a:latin typeface="Calibri"/>
+              </a:rPr>
+              <a:t>We will hear a few out loud. Every word is welcome — including the uncomfortable ones.</a:t>
+            </a:r>
+          </a:p>
+        </p:txBody>
+      </p:sp>
+      <p:sp>
+        <p:nvSpPr>
+          <p:cNvPr id="18" name="Rounded Rectangle 17"/>
+          <p:cNvSpPr/>
+          <p:nvPr/>
+        </p:nvSpPr>
+        <p:spPr>
+          <a:xfrm>
+            <a:off x="5614416" y="5413248"/>
+            <a:ext cx="6010351" cy="1572768"/>
           </a:xfrm>
           <a:prstGeom prst="roundRect">
             <a:avLst>
@@ -42225,14 +42766,14 @@
       </p:sp>
       <p:sp>
         <p:nvSpPr>
-          <p:cNvPr id="9" name="Rectangle 8"/>
+          <p:cNvPr id="19" name="Rectangle 18"/>
           <p:cNvSpPr/>
           <p:nvPr/>
         </p:nvSpPr>
         <p:spPr>
           <a:xfrm>
-            <a:off x="566928" y="4919472"/>
-            <a:ext cx="50292" cy="1481328"/>
+            <a:off x="5614416" y="5413248"/>
+            <a:ext cx="50292" cy="1572768"/>
           </a:xfrm>
           <a:prstGeom prst="rect">
             <a:avLst/>
@@ -42269,14 +42810,14 @@
       </p:sp>
       <p:sp>
         <p:nvSpPr>
-          <p:cNvPr id="10" name="TextBox 9"/>
+          <p:cNvPr id="20" name="TextBox 19"/>
           <p:cNvSpPr txBox="1"/>
           <p:nvPr/>
         </p:nvSpPr>
         <p:spPr>
           <a:xfrm>
-            <a:off x="804672" y="5084064"/>
-            <a:ext cx="4599431" cy="1152144"/>
+            <a:off x="5833872" y="5559552"/>
+            <a:ext cx="5571439" cy="1316736"/>
           </a:xfrm>
           <a:prstGeom prst="rect">
             <a:avLst/>
@@ -42330,542 +42871,6 @@
                 <a:latin typeface="Calibri"/>
               </a:rPr>
               <a:t>You will hear words like stress, marks, fear, pressure, paperwork, ranking. You may also hear growth, feedback, help, understanding. Both sets are honest — and the difference between them is the whole point of today.</a:t>
-            </a:r>
-          </a:p>
-        </p:txBody>
-      </p:sp>
-      <p:sp>
-        <p:nvSpPr>
-          <p:cNvPr id="11" name="Rounded Rectangle 10"/>
-          <p:cNvSpPr/>
-          <p:nvPr/>
-        </p:nvSpPr>
-        <p:spPr>
-          <a:xfrm>
-            <a:off x="6053328" y="1408176"/>
-            <a:ext cx="1417320" cy="384048"/>
-          </a:xfrm>
-          <a:prstGeom prst="roundRect">
-            <a:avLst>
-              <a:gd name="adj" fmla="val 40000"/>
-            </a:avLst>
-          </a:prstGeom>
-          <a:solidFill>
-            <a:srgbClr val="F4B400"/>
-          </a:solidFill>
-          <a:ln>
-            <a:noFill/>
-          </a:ln>
-          <a:effectLst/>
-        </p:spPr>
-        <p:style>
-          <a:lnRef idx="1">
-            <a:schemeClr val="accent1"/>
-          </a:lnRef>
-          <a:fillRef idx="3">
-            <a:schemeClr val="accent1"/>
-          </a:fillRef>
-          <a:effectRef idx="2">
-            <a:schemeClr val="accent1"/>
-          </a:effectRef>
-          <a:fontRef idx="minor">
-            <a:schemeClr val="lt1"/>
-          </a:fontRef>
-        </p:style>
-        <p:txBody>
-          <a:bodyPr rtlCol="0" anchor="ctr"/>
-          <a:lstStyle/>
-          <a:p>
-            <a:pPr algn="ctr">
-              <a:lnSpc>
-                <a:spcPct val="100000"/>
-              </a:lnSpc>
-              <a:spcBef>
-                <a:spcPts val="0"/>
-              </a:spcBef>
-              <a:spcAft>
-                <a:spcPts val="0"/>
-              </a:spcAft>
-            </a:pPr>
-            <a:r>
-              <a:rPr sz="1150" b="1" i="0">
-                <a:solidFill>
-                  <a:srgbClr val="074A35"/>
-                </a:solidFill>
-                <a:latin typeface="Trebuchet MS"/>
-              </a:rPr>
-              <a:t>5 MINUTES</a:t>
-            </a:r>
-          </a:p>
-        </p:txBody>
-      </p:sp>
-      <p:sp>
-        <p:nvSpPr>
-          <p:cNvPr id="12" name="Rounded Rectangle 11"/>
-          <p:cNvSpPr/>
-          <p:nvPr/>
-        </p:nvSpPr>
-        <p:spPr>
-          <a:xfrm>
-            <a:off x="6053328" y="1938528"/>
-            <a:ext cx="5571439" cy="1359408"/>
-          </a:xfrm>
-          <a:prstGeom prst="roundRect">
-            <a:avLst>
-              <a:gd name="adj" fmla="val 8000"/>
-            </a:avLst>
-          </a:prstGeom>
-          <a:solidFill>
-            <a:srgbClr val="FFFFFF"/>
-          </a:solidFill>
-          <a:ln>
-            <a:noFill/>
-          </a:ln>
-          <a:effectLst/>
-        </p:spPr>
-        <p:style>
-          <a:lnRef idx="1">
-            <a:schemeClr val="accent1"/>
-          </a:lnRef>
-          <a:fillRef idx="3">
-            <a:schemeClr val="accent1"/>
-          </a:fillRef>
-          <a:effectRef idx="2">
-            <a:schemeClr val="accent1"/>
-          </a:effectRef>
-          <a:fontRef idx="minor">
-            <a:schemeClr val="lt1"/>
-          </a:fontRef>
-        </p:style>
-        <p:txBody>
-          <a:bodyPr rtlCol="0" anchor="ctr"/>
-          <a:lstStyle/>
-          <a:p>
-            <a:pPr algn="ctr"/>
-          </a:p>
-        </p:txBody>
-      </p:sp>
-      <p:sp>
-        <p:nvSpPr>
-          <p:cNvPr id="13" name="Rectangle 12"/>
-          <p:cNvSpPr/>
-          <p:nvPr/>
-        </p:nvSpPr>
-        <p:spPr>
-          <a:xfrm>
-            <a:off x="6053328" y="1938528"/>
-            <a:ext cx="50292" cy="1359408"/>
-          </a:xfrm>
-          <a:prstGeom prst="rect">
-            <a:avLst/>
-          </a:prstGeom>
-          <a:solidFill>
-            <a:srgbClr val="F4B400"/>
-          </a:solidFill>
-          <a:ln>
-            <a:noFill/>
-          </a:ln>
-          <a:effectLst/>
-        </p:spPr>
-        <p:style>
-          <a:lnRef idx="1">
-            <a:schemeClr val="accent1"/>
-          </a:lnRef>
-          <a:fillRef idx="3">
-            <a:schemeClr val="accent1"/>
-          </a:fillRef>
-          <a:effectRef idx="2">
-            <a:schemeClr val="accent1"/>
-          </a:effectRef>
-          <a:fontRef idx="minor">
-            <a:schemeClr val="lt1"/>
-          </a:fontRef>
-        </p:style>
-        <p:txBody>
-          <a:bodyPr rtlCol="0" anchor="ctr"/>
-          <a:lstStyle/>
-          <a:p>
-            <a:pPr algn="ctr"/>
-          </a:p>
-        </p:txBody>
-      </p:sp>
-      <p:sp>
-        <p:nvSpPr>
-          <p:cNvPr id="14" name="TextBox 13"/>
-          <p:cNvSpPr txBox="1"/>
-          <p:nvPr/>
-        </p:nvSpPr>
-        <p:spPr>
-          <a:xfrm>
-            <a:off x="6291072" y="2139696"/>
-            <a:ext cx="5095951" cy="957072"/>
-          </a:xfrm>
-          <a:prstGeom prst="rect">
-            <a:avLst/>
-          </a:prstGeom>
-          <a:noFill/>
-        </p:spPr>
-        <p:txBody>
-          <a:bodyPr wrap="square" lIns="0" rIns="0" tIns="0" bIns="0">
-            <a:spAutoFit/>
-          </a:bodyPr>
-          <a:lstStyle/>
-          <a:p>
-            <a:pPr algn="l">
-              <a:lnSpc>
-                <a:spcPct val="100000"/>
-              </a:lnSpc>
-              <a:spcBef>
-                <a:spcPts val="0"/>
-              </a:spcBef>
-              <a:spcAft>
-                <a:spcPts val="600"/>
-              </a:spcAft>
-            </a:pPr>
-            <a:r>
-              <a:rPr sz="1350" b="1" i="0">
-                <a:solidFill>
-                  <a:srgbClr val="C1440E"/>
-                </a:solidFill>
-                <a:latin typeface="Trebuchet MS"/>
-              </a:rPr>
-              <a:t>Think</a:t>
-            </a:r>
-          </a:p>
-          <a:p>
-            <a:pPr algn="l">
-              <a:lnSpc>
-                <a:spcPct val="114000"/>
-              </a:lnSpc>
-              <a:spcBef>
-                <a:spcPts val="0"/>
-              </a:spcBef>
-              <a:spcAft>
-                <a:spcPts val="0"/>
-              </a:spcAft>
-            </a:pPr>
-            <a:r>
-              <a:rPr sz="1200" b="0" i="0">
-                <a:solidFill>
-                  <a:srgbClr val="14262E"/>
-                </a:solidFill>
-                <a:latin typeface="Calibri"/>
-              </a:rPr>
-              <a:t>When you hear the word “assessment”, what is the FIRST word that comes into your mind? Not the textbook word. Your honest word.</a:t>
-            </a:r>
-          </a:p>
-        </p:txBody>
-      </p:sp>
-      <p:sp>
-        <p:nvSpPr>
-          <p:cNvPr id="15" name="Rounded Rectangle 14"/>
-          <p:cNvSpPr/>
-          <p:nvPr/>
-        </p:nvSpPr>
-        <p:spPr>
-          <a:xfrm>
-            <a:off x="6053328" y="3444240"/>
-            <a:ext cx="5571439" cy="1359408"/>
-          </a:xfrm>
-          <a:prstGeom prst="roundRect">
-            <a:avLst>
-              <a:gd name="adj" fmla="val 8000"/>
-            </a:avLst>
-          </a:prstGeom>
-          <a:solidFill>
-            <a:srgbClr val="FFFFFF"/>
-          </a:solidFill>
-          <a:ln>
-            <a:noFill/>
-          </a:ln>
-          <a:effectLst/>
-        </p:spPr>
-        <p:style>
-          <a:lnRef idx="1">
-            <a:schemeClr val="accent1"/>
-          </a:lnRef>
-          <a:fillRef idx="3">
-            <a:schemeClr val="accent1"/>
-          </a:fillRef>
-          <a:effectRef idx="2">
-            <a:schemeClr val="accent1"/>
-          </a:effectRef>
-          <a:fontRef idx="minor">
-            <a:schemeClr val="lt1"/>
-          </a:fontRef>
-        </p:style>
-        <p:txBody>
-          <a:bodyPr rtlCol="0" anchor="ctr"/>
-          <a:lstStyle/>
-          <a:p>
-            <a:pPr algn="ctr"/>
-          </a:p>
-        </p:txBody>
-      </p:sp>
-      <p:sp>
-        <p:nvSpPr>
-          <p:cNvPr id="16" name="Rectangle 15"/>
-          <p:cNvSpPr/>
-          <p:nvPr/>
-        </p:nvSpPr>
-        <p:spPr>
-          <a:xfrm>
-            <a:off x="6053328" y="3444240"/>
-            <a:ext cx="50292" cy="1359408"/>
-          </a:xfrm>
-          <a:prstGeom prst="rect">
-            <a:avLst/>
-          </a:prstGeom>
-          <a:solidFill>
-            <a:srgbClr val="F4B400"/>
-          </a:solidFill>
-          <a:ln>
-            <a:noFill/>
-          </a:ln>
-          <a:effectLst/>
-        </p:spPr>
-        <p:style>
-          <a:lnRef idx="1">
-            <a:schemeClr val="accent1"/>
-          </a:lnRef>
-          <a:fillRef idx="3">
-            <a:schemeClr val="accent1"/>
-          </a:fillRef>
-          <a:effectRef idx="2">
-            <a:schemeClr val="accent1"/>
-          </a:effectRef>
-          <a:fontRef idx="minor">
-            <a:schemeClr val="lt1"/>
-          </a:fontRef>
-        </p:style>
-        <p:txBody>
-          <a:bodyPr rtlCol="0" anchor="ctr"/>
-          <a:lstStyle/>
-          <a:p>
-            <a:pPr algn="ctr"/>
-          </a:p>
-        </p:txBody>
-      </p:sp>
-      <p:sp>
-        <p:nvSpPr>
-          <p:cNvPr id="17" name="TextBox 16"/>
-          <p:cNvSpPr txBox="1"/>
-          <p:nvPr/>
-        </p:nvSpPr>
-        <p:spPr>
-          <a:xfrm>
-            <a:off x="6291072" y="3645408"/>
-            <a:ext cx="5095951" cy="957072"/>
-          </a:xfrm>
-          <a:prstGeom prst="rect">
-            <a:avLst/>
-          </a:prstGeom>
-          <a:noFill/>
-        </p:spPr>
-        <p:txBody>
-          <a:bodyPr wrap="square" lIns="0" rIns="0" tIns="0" bIns="0">
-            <a:spAutoFit/>
-          </a:bodyPr>
-          <a:lstStyle/>
-          <a:p>
-            <a:pPr algn="l">
-              <a:lnSpc>
-                <a:spcPct val="100000"/>
-              </a:lnSpc>
-              <a:spcBef>
-                <a:spcPts val="0"/>
-              </a:spcBef>
-              <a:spcAft>
-                <a:spcPts val="600"/>
-              </a:spcAft>
-            </a:pPr>
-            <a:r>
-              <a:rPr sz="1350" b="1" i="0">
-                <a:solidFill>
-                  <a:srgbClr val="C1440E"/>
-                </a:solidFill>
-                <a:latin typeface="Trebuchet MS"/>
-              </a:rPr>
-              <a:t>Share</a:t>
-            </a:r>
-          </a:p>
-          <a:p>
-            <a:pPr algn="l">
-              <a:lnSpc>
-                <a:spcPct val="114000"/>
-              </a:lnSpc>
-              <a:spcBef>
-                <a:spcPts val="0"/>
-              </a:spcBef>
-              <a:spcAft>
-                <a:spcPts val="0"/>
-              </a:spcAft>
-            </a:pPr>
-            <a:r>
-              <a:rPr sz="1200" b="0" i="0">
-                <a:solidFill>
-                  <a:srgbClr val="14262E"/>
-                </a:solidFill>
-                <a:latin typeface="Calibri"/>
-              </a:rPr>
-              <a:t>Turn to the person beside you. One word each. Thirty seconds. No explaining, no defending — just the word.</a:t>
-            </a:r>
-          </a:p>
-        </p:txBody>
-      </p:sp>
-      <p:sp>
-        <p:nvSpPr>
-          <p:cNvPr id="18" name="Rounded Rectangle 17"/>
-          <p:cNvSpPr/>
-          <p:nvPr/>
-        </p:nvSpPr>
-        <p:spPr>
-          <a:xfrm>
-            <a:off x="6053328" y="4949952"/>
-            <a:ext cx="5571439" cy="1359408"/>
-          </a:xfrm>
-          <a:prstGeom prst="roundRect">
-            <a:avLst>
-              <a:gd name="adj" fmla="val 8000"/>
-            </a:avLst>
-          </a:prstGeom>
-          <a:solidFill>
-            <a:srgbClr val="FFFFFF"/>
-          </a:solidFill>
-          <a:ln>
-            <a:noFill/>
-          </a:ln>
-          <a:effectLst/>
-        </p:spPr>
-        <p:style>
-          <a:lnRef idx="1">
-            <a:schemeClr val="accent1"/>
-          </a:lnRef>
-          <a:fillRef idx="3">
-            <a:schemeClr val="accent1"/>
-          </a:fillRef>
-          <a:effectRef idx="2">
-            <a:schemeClr val="accent1"/>
-          </a:effectRef>
-          <a:fontRef idx="minor">
-            <a:schemeClr val="lt1"/>
-          </a:fontRef>
-        </p:style>
-        <p:txBody>
-          <a:bodyPr rtlCol="0" anchor="ctr"/>
-          <a:lstStyle/>
-          <a:p>
-            <a:pPr algn="ctr"/>
-          </a:p>
-        </p:txBody>
-      </p:sp>
-      <p:sp>
-        <p:nvSpPr>
-          <p:cNvPr id="19" name="Rectangle 18"/>
-          <p:cNvSpPr/>
-          <p:nvPr/>
-        </p:nvSpPr>
-        <p:spPr>
-          <a:xfrm>
-            <a:off x="6053328" y="4949952"/>
-            <a:ext cx="50292" cy="1359408"/>
-          </a:xfrm>
-          <a:prstGeom prst="rect">
-            <a:avLst/>
-          </a:prstGeom>
-          <a:solidFill>
-            <a:srgbClr val="F4B400"/>
-          </a:solidFill>
-          <a:ln>
-            <a:noFill/>
-          </a:ln>
-          <a:effectLst/>
-        </p:spPr>
-        <p:style>
-          <a:lnRef idx="1">
-            <a:schemeClr val="accent1"/>
-          </a:lnRef>
-          <a:fillRef idx="3">
-            <a:schemeClr val="accent1"/>
-          </a:fillRef>
-          <a:effectRef idx="2">
-            <a:schemeClr val="accent1"/>
-          </a:effectRef>
-          <a:fontRef idx="minor">
-            <a:schemeClr val="lt1"/>
-          </a:fontRef>
-        </p:style>
-        <p:txBody>
-          <a:bodyPr rtlCol="0" anchor="ctr"/>
-          <a:lstStyle/>
-          <a:p>
-            <a:pPr algn="ctr"/>
-          </a:p>
-        </p:txBody>
-      </p:sp>
-      <p:sp>
-        <p:nvSpPr>
-          <p:cNvPr id="20" name="TextBox 19"/>
-          <p:cNvSpPr txBox="1"/>
-          <p:nvPr/>
-        </p:nvSpPr>
-        <p:spPr>
-          <a:xfrm>
-            <a:off x="6291072" y="5151120"/>
-            <a:ext cx="5095951" cy="957072"/>
-          </a:xfrm>
-          <a:prstGeom prst="rect">
-            <a:avLst/>
-          </a:prstGeom>
-          <a:noFill/>
-        </p:spPr>
-        <p:txBody>
-          <a:bodyPr wrap="square" lIns="0" rIns="0" tIns="0" bIns="0">
-            <a:spAutoFit/>
-          </a:bodyPr>
-          <a:lstStyle/>
-          <a:p>
-            <a:pPr algn="l">
-              <a:lnSpc>
-                <a:spcPct val="100000"/>
-              </a:lnSpc>
-              <a:spcBef>
-                <a:spcPts val="0"/>
-              </a:spcBef>
-              <a:spcAft>
-                <a:spcPts val="600"/>
-              </a:spcAft>
-            </a:pPr>
-            <a:r>
-              <a:rPr sz="1350" b="1" i="0">
-                <a:solidFill>
-                  <a:srgbClr val="C1440E"/>
-                </a:solidFill>
-                <a:latin typeface="Trebuchet MS"/>
-              </a:rPr>
-              <a:t>Collect</a:t>
-            </a:r>
-          </a:p>
-          <a:p>
-            <a:pPr algn="l">
-              <a:lnSpc>
-                <a:spcPct val="114000"/>
-              </a:lnSpc>
-              <a:spcBef>
-                <a:spcPts val="0"/>
-              </a:spcBef>
-              <a:spcAft>
-                <a:spcPts val="0"/>
-              </a:spcAft>
-            </a:pPr>
-            <a:r>
-              <a:rPr sz="1200" b="0" i="0">
-                <a:solidFill>
-                  <a:srgbClr val="14262E"/>
-                </a:solidFill>
-                <a:latin typeface="Calibri"/>
-              </a:rPr>
-              <a:t>We will hear a few out loud. Every word is welcome — including the uncomfortable ones.</a:t>
             </a:r>
           </a:p>
         </p:txBody>
@@ -43121,6 +43126,7 @@
         </p:nvPicPr>
         <p:blipFill>
           <a:blip r:embed="rId2"/>
+          <a:srcRect l="23529" r="23529"/>
           <a:stretch>
             <a:fillRect/>
           </a:stretch>
@@ -43128,7 +43134,7 @@
         <p:spPr>
           <a:xfrm>
             <a:off x="566928" y="1417320"/>
-            <a:ext cx="4160520" cy="2773680"/>
+            <a:ext cx="3703320" cy="4663440"/>
           </a:xfrm>
           <a:prstGeom prst="rect">
             <a:avLst/>
@@ -43144,7 +43150,7 @@
         <p:spPr>
           <a:xfrm>
             <a:off x="566928" y="1417320"/>
-            <a:ext cx="4160520" cy="59436"/>
+            <a:ext cx="3703320" cy="59436"/>
           </a:xfrm>
           <a:prstGeom prst="rect">
             <a:avLst/>
@@ -43181,58 +43187,13 @@
       </p:sp>
       <p:sp>
         <p:nvSpPr>
-          <p:cNvPr id="8" name="TextBox 7"/>
-          <p:cNvSpPr txBox="1"/>
-          <p:nvPr/>
-        </p:nvSpPr>
-        <p:spPr>
-          <a:xfrm>
-            <a:off x="566928" y="4273296"/>
-            <a:ext cx="4160520" cy="411480"/>
-          </a:xfrm>
-          <a:prstGeom prst="rect">
-            <a:avLst/>
-          </a:prstGeom>
-          <a:noFill/>
-        </p:spPr>
-        <p:txBody>
-          <a:bodyPr wrap="square" lIns="0" rIns="0" tIns="0" bIns="0">
-            <a:spAutoFit/>
-          </a:bodyPr>
-          <a:lstStyle/>
-          <a:p>
-            <a:pPr algn="ctr">
-              <a:lnSpc>
-                <a:spcPct val="108000"/>
-              </a:lnSpc>
-              <a:spcBef>
-                <a:spcPts val="0"/>
-              </a:spcBef>
-              <a:spcAft>
-                <a:spcPts val="0"/>
-              </a:spcAft>
-            </a:pPr>
-            <a:r>
-              <a:rPr sz="1050" b="0" i="1">
-                <a:solidFill>
-                  <a:srgbClr val="5A6B72"/>
-                </a:solidFill>
-                <a:latin typeface="Calibri"/>
-              </a:rPr>
-              <a:t>You will need: A3 or flip-chart paper, marker pens, sticky notes.</a:t>
-            </a:r>
-          </a:p>
-        </p:txBody>
-      </p:sp>
-      <p:sp>
-        <p:nvSpPr>
-          <p:cNvPr id="9" name="Rounded Rectangle 8"/>
+          <p:cNvPr id="8" name="Rounded Rectangle 7"/>
           <p:cNvSpPr/>
           <p:nvPr/>
         </p:nvSpPr>
         <p:spPr>
           <a:xfrm>
-            <a:off x="5138928" y="1389888"/>
+            <a:off x="4654296" y="1389888"/>
             <a:ext cx="1691640" cy="402336"/>
           </a:xfrm>
           <a:prstGeom prst="roundRect">
@@ -43291,14 +43252,14 @@
       </p:sp>
       <p:sp>
         <p:nvSpPr>
-          <p:cNvPr id="10" name="Rounded Rectangle 9"/>
+          <p:cNvPr id="9" name="Rounded Rectangle 8"/>
           <p:cNvSpPr/>
           <p:nvPr/>
         </p:nvSpPr>
         <p:spPr>
           <a:xfrm>
-            <a:off x="5138928" y="1920240"/>
-            <a:ext cx="6485839" cy="826617"/>
+            <a:off x="4654296" y="1920240"/>
+            <a:ext cx="6970471" cy="826617"/>
           </a:xfrm>
           <a:prstGeom prst="roundRect">
             <a:avLst>
@@ -43337,13 +43298,13 @@
       </p:sp>
       <p:sp>
         <p:nvSpPr>
-          <p:cNvPr id="11" name="Rectangle 10"/>
+          <p:cNvPr id="10" name="Rectangle 9"/>
           <p:cNvSpPr/>
           <p:nvPr/>
         </p:nvSpPr>
         <p:spPr>
           <a:xfrm>
-            <a:off x="5138928" y="1920240"/>
+            <a:off x="4654296" y="1920240"/>
             <a:ext cx="50292" cy="826617"/>
           </a:xfrm>
           <a:prstGeom prst="rect">
@@ -43381,13 +43342,13 @@
       </p:sp>
       <p:sp>
         <p:nvSpPr>
-          <p:cNvPr id="12" name="Oval 11"/>
+          <p:cNvPr id="11" name="Oval 10"/>
           <p:cNvSpPr/>
           <p:nvPr/>
         </p:nvSpPr>
         <p:spPr>
           <a:xfrm>
-            <a:off x="5321808" y="2178100"/>
+            <a:off x="4837176" y="2178100"/>
             <a:ext cx="310896" cy="310896"/>
           </a:xfrm>
           <a:prstGeom prst="ellipse">
@@ -43444,14 +43405,14 @@
       </p:sp>
       <p:sp>
         <p:nvSpPr>
-          <p:cNvPr id="13" name="TextBox 12"/>
+          <p:cNvPr id="12" name="TextBox 11"/>
           <p:cNvSpPr txBox="1"/>
           <p:nvPr/>
         </p:nvSpPr>
         <p:spPr>
           <a:xfrm>
-            <a:off x="5760720" y="2011680"/>
-            <a:ext cx="5644591" cy="643737"/>
+            <a:off x="5276088" y="2011680"/>
+            <a:ext cx="6129223" cy="643737"/>
           </a:xfrm>
           <a:prstGeom prst="rect">
             <a:avLst/>
@@ -43511,14 +43472,14 @@
       </p:sp>
       <p:sp>
         <p:nvSpPr>
-          <p:cNvPr id="14" name="Rounded Rectangle 13"/>
+          <p:cNvPr id="13" name="Rounded Rectangle 12"/>
           <p:cNvSpPr/>
           <p:nvPr/>
         </p:nvSpPr>
         <p:spPr>
           <a:xfrm>
-            <a:off x="5138928" y="2829153"/>
-            <a:ext cx="6485839" cy="826617"/>
+            <a:off x="4654296" y="2829153"/>
+            <a:ext cx="6970471" cy="826617"/>
           </a:xfrm>
           <a:prstGeom prst="roundRect">
             <a:avLst>
@@ -43557,13 +43518,13 @@
       </p:sp>
       <p:sp>
         <p:nvSpPr>
-          <p:cNvPr id="15" name="Rectangle 14"/>
+          <p:cNvPr id="14" name="Rectangle 13"/>
           <p:cNvSpPr/>
           <p:nvPr/>
         </p:nvSpPr>
         <p:spPr>
           <a:xfrm>
-            <a:off x="5138928" y="2829153"/>
+            <a:off x="4654296" y="2829153"/>
             <a:ext cx="50292" cy="826617"/>
           </a:xfrm>
           <a:prstGeom prst="rect">
@@ -43601,13 +43562,13 @@
       </p:sp>
       <p:sp>
         <p:nvSpPr>
-          <p:cNvPr id="16" name="Oval 15"/>
+          <p:cNvPr id="15" name="Oval 14"/>
           <p:cNvSpPr/>
           <p:nvPr/>
         </p:nvSpPr>
         <p:spPr>
           <a:xfrm>
-            <a:off x="5321808" y="3087014"/>
+            <a:off x="4837176" y="3087014"/>
             <a:ext cx="310896" cy="310896"/>
           </a:xfrm>
           <a:prstGeom prst="ellipse">
@@ -43664,14 +43625,14 @@
       </p:sp>
       <p:sp>
         <p:nvSpPr>
-          <p:cNvPr id="17" name="TextBox 16"/>
+          <p:cNvPr id="16" name="TextBox 15"/>
           <p:cNvSpPr txBox="1"/>
           <p:nvPr/>
         </p:nvSpPr>
         <p:spPr>
           <a:xfrm>
-            <a:off x="5760720" y="2920593"/>
-            <a:ext cx="5644591" cy="643737"/>
+            <a:off x="5276088" y="2920593"/>
+            <a:ext cx="6129223" cy="643737"/>
           </a:xfrm>
           <a:prstGeom prst="rect">
             <a:avLst/>
@@ -43731,14 +43692,14 @@
       </p:sp>
       <p:sp>
         <p:nvSpPr>
-          <p:cNvPr id="18" name="Rounded Rectangle 17"/>
+          <p:cNvPr id="17" name="Rounded Rectangle 16"/>
           <p:cNvSpPr/>
           <p:nvPr/>
         </p:nvSpPr>
         <p:spPr>
           <a:xfrm>
-            <a:off x="5138928" y="3738067"/>
-            <a:ext cx="6485839" cy="826617"/>
+            <a:off x="4654296" y="3738067"/>
+            <a:ext cx="6970471" cy="826617"/>
           </a:xfrm>
           <a:prstGeom prst="roundRect">
             <a:avLst>
@@ -43777,13 +43738,13 @@
       </p:sp>
       <p:sp>
         <p:nvSpPr>
-          <p:cNvPr id="19" name="Rectangle 18"/>
+          <p:cNvPr id="18" name="Rectangle 17"/>
           <p:cNvSpPr/>
           <p:nvPr/>
         </p:nvSpPr>
         <p:spPr>
           <a:xfrm>
-            <a:off x="5138928" y="3738067"/>
+            <a:off x="4654296" y="3738067"/>
             <a:ext cx="50292" cy="826617"/>
           </a:xfrm>
           <a:prstGeom prst="rect">
@@ -43821,13 +43782,13 @@
       </p:sp>
       <p:sp>
         <p:nvSpPr>
-          <p:cNvPr id="20" name="Oval 19"/>
+          <p:cNvPr id="19" name="Oval 18"/>
           <p:cNvSpPr/>
           <p:nvPr/>
         </p:nvSpPr>
         <p:spPr>
           <a:xfrm>
-            <a:off x="5321808" y="3995928"/>
+            <a:off x="4837176" y="3995928"/>
             <a:ext cx="310896" cy="310896"/>
           </a:xfrm>
           <a:prstGeom prst="ellipse">
@@ -43884,14 +43845,14 @@
       </p:sp>
       <p:sp>
         <p:nvSpPr>
-          <p:cNvPr id="21" name="TextBox 20"/>
+          <p:cNvPr id="20" name="TextBox 19"/>
           <p:cNvSpPr txBox="1"/>
           <p:nvPr/>
         </p:nvSpPr>
         <p:spPr>
           <a:xfrm>
-            <a:off x="5760720" y="3829507"/>
-            <a:ext cx="5644591" cy="643737"/>
+            <a:off x="5276088" y="3829507"/>
+            <a:ext cx="6129223" cy="643737"/>
           </a:xfrm>
           <a:prstGeom prst="rect">
             <a:avLst/>
@@ -43951,14 +43912,14 @@
       </p:sp>
       <p:sp>
         <p:nvSpPr>
-          <p:cNvPr id="22" name="Rounded Rectangle 21"/>
+          <p:cNvPr id="21" name="Rounded Rectangle 20"/>
           <p:cNvSpPr/>
           <p:nvPr/>
         </p:nvSpPr>
         <p:spPr>
           <a:xfrm>
-            <a:off x="5138928" y="4646980"/>
-            <a:ext cx="6485839" cy="826617"/>
+            <a:off x="4654296" y="4646980"/>
+            <a:ext cx="6970471" cy="826617"/>
           </a:xfrm>
           <a:prstGeom prst="roundRect">
             <a:avLst>
@@ -43997,13 +43958,13 @@
       </p:sp>
       <p:sp>
         <p:nvSpPr>
-          <p:cNvPr id="23" name="Rectangle 22"/>
+          <p:cNvPr id="22" name="Rectangle 21"/>
           <p:cNvSpPr/>
           <p:nvPr/>
         </p:nvSpPr>
         <p:spPr>
           <a:xfrm>
-            <a:off x="5138928" y="4646980"/>
+            <a:off x="4654296" y="4646980"/>
             <a:ext cx="50292" cy="826617"/>
           </a:xfrm>
           <a:prstGeom prst="rect">
@@ -44041,13 +44002,13 @@
       </p:sp>
       <p:sp>
         <p:nvSpPr>
-          <p:cNvPr id="24" name="Oval 23"/>
+          <p:cNvPr id="23" name="Oval 22"/>
           <p:cNvSpPr/>
           <p:nvPr/>
         </p:nvSpPr>
         <p:spPr>
           <a:xfrm>
-            <a:off x="5321808" y="4904841"/>
+            <a:off x="4837176" y="4904841"/>
             <a:ext cx="310896" cy="310896"/>
           </a:xfrm>
           <a:prstGeom prst="ellipse">
@@ -44104,14 +44065,14 @@
       </p:sp>
       <p:sp>
         <p:nvSpPr>
-          <p:cNvPr id="25" name="TextBox 24"/>
+          <p:cNvPr id="24" name="TextBox 23"/>
           <p:cNvSpPr txBox="1"/>
           <p:nvPr/>
         </p:nvSpPr>
         <p:spPr>
           <a:xfrm>
-            <a:off x="5760720" y="4738420"/>
-            <a:ext cx="5644591" cy="643737"/>
+            <a:off x="5276088" y="4738420"/>
+            <a:ext cx="6129223" cy="643737"/>
           </a:xfrm>
           <a:prstGeom prst="rect">
             <a:avLst/>
@@ -44171,14 +44132,14 @@
       </p:sp>
       <p:sp>
         <p:nvSpPr>
-          <p:cNvPr id="26" name="Rounded Rectangle 25"/>
+          <p:cNvPr id="25" name="Rounded Rectangle 24"/>
           <p:cNvSpPr/>
           <p:nvPr/>
         </p:nvSpPr>
         <p:spPr>
           <a:xfrm>
-            <a:off x="5138928" y="5555894"/>
-            <a:ext cx="6485839" cy="826617"/>
+            <a:off x="4654296" y="5555894"/>
+            <a:ext cx="6970471" cy="826617"/>
           </a:xfrm>
           <a:prstGeom prst="roundRect">
             <a:avLst>
@@ -44217,13 +44178,13 @@
       </p:sp>
       <p:sp>
         <p:nvSpPr>
-          <p:cNvPr id="27" name="Rectangle 26"/>
+          <p:cNvPr id="26" name="Rectangle 25"/>
           <p:cNvSpPr/>
           <p:nvPr/>
         </p:nvSpPr>
         <p:spPr>
           <a:xfrm>
-            <a:off x="5138928" y="5555894"/>
+            <a:off x="4654296" y="5555894"/>
             <a:ext cx="50292" cy="826617"/>
           </a:xfrm>
           <a:prstGeom prst="rect">
@@ -44261,13 +44222,13 @@
       </p:sp>
       <p:sp>
         <p:nvSpPr>
-          <p:cNvPr id="28" name="Oval 27"/>
+          <p:cNvPr id="27" name="Oval 26"/>
           <p:cNvSpPr/>
           <p:nvPr/>
         </p:nvSpPr>
         <p:spPr>
           <a:xfrm>
-            <a:off x="5321808" y="5813755"/>
+            <a:off x="4837176" y="5813755"/>
             <a:ext cx="310896" cy="310896"/>
           </a:xfrm>
           <a:prstGeom prst="ellipse">
@@ -44324,14 +44285,14 @@
       </p:sp>
       <p:sp>
         <p:nvSpPr>
-          <p:cNvPr id="29" name="TextBox 28"/>
+          <p:cNvPr id="28" name="TextBox 27"/>
           <p:cNvSpPr txBox="1"/>
           <p:nvPr/>
         </p:nvSpPr>
         <p:spPr>
           <a:xfrm>
-            <a:off x="5760720" y="5647334"/>
-            <a:ext cx="5644591" cy="643737"/>
+            <a:off x="5276088" y="5647334"/>
+            <a:ext cx="6129223" cy="643737"/>
           </a:xfrm>
           <a:prstGeom prst="rect">
             <a:avLst/>
@@ -44391,7 +44352,7 @@
       </p:sp>
       <p:sp>
         <p:nvSpPr>
-          <p:cNvPr id="30" name="TextBox 29"/>
+          <p:cNvPr id="29" name="TextBox 28"/>
           <p:cNvSpPr txBox="1"/>
           <p:nvPr/>
         </p:nvSpPr>
@@ -47225,7 +47186,7 @@
         <p:spPr>
           <a:xfrm>
             <a:off x="566928" y="2249424"/>
-            <a:ext cx="11057839" cy="694944"/>
+            <a:ext cx="11057839" cy="758952"/>
           </a:xfrm>
           <a:prstGeom prst="rect">
             <a:avLst/>
@@ -47269,7 +47230,7 @@
         <p:spPr>
           <a:xfrm>
             <a:off x="685800" y="2313432"/>
-            <a:ext cx="1728216" cy="603504"/>
+            <a:ext cx="1728216" cy="667512"/>
           </a:xfrm>
           <a:prstGeom prst="rect">
             <a:avLst/>
@@ -47294,7 +47255,7 @@
               </a:spcAft>
             </a:pPr>
             <a:r>
-              <a:rPr sz="1050" b="1" i="0">
+              <a:rPr sz="1100" b="1" i="0">
                 <a:solidFill>
                   <a:srgbClr val="14262E"/>
                 </a:solidFill>
@@ -47314,7 +47275,7 @@
         <p:spPr>
           <a:xfrm>
             <a:off x="2651760" y="2313432"/>
-            <a:ext cx="5568696" cy="603504"/>
+            <a:ext cx="5568696" cy="667512"/>
           </a:xfrm>
           <a:prstGeom prst="rect">
             <a:avLst/>
@@ -47339,7 +47300,7 @@
               </a:spcAft>
             </a:pPr>
             <a:r>
-              <a:rPr sz="1050" b="0" i="0">
+              <a:rPr sz="1100" b="0" i="0">
                 <a:solidFill>
                   <a:srgbClr val="14262E"/>
                 </a:solidFill>
@@ -47359,7 +47320,7 @@
         <p:spPr>
           <a:xfrm>
             <a:off x="8458200" y="2313432"/>
-            <a:ext cx="3044952" cy="603504"/>
+            <a:ext cx="3044952" cy="667512"/>
           </a:xfrm>
           <a:prstGeom prst="rect">
             <a:avLst/>
@@ -47384,7 +47345,7 @@
               </a:spcAft>
             </a:pPr>
             <a:r>
-              <a:rPr sz="1050" b="0" i="0">
+              <a:rPr sz="1100" b="0" i="0">
                 <a:solidFill>
                   <a:srgbClr val="14262E"/>
                 </a:solidFill>
@@ -47403,8 +47364,8 @@
         </p:nvSpPr>
         <p:spPr>
           <a:xfrm>
-            <a:off x="566928" y="2944368"/>
-            <a:ext cx="11057839" cy="694944"/>
+            <a:off x="566928" y="3008376"/>
+            <a:ext cx="11057839" cy="758952"/>
           </a:xfrm>
           <a:prstGeom prst="rect">
             <a:avLst/>
@@ -47447,8 +47408,8 @@
         </p:nvSpPr>
         <p:spPr>
           <a:xfrm>
-            <a:off x="685800" y="3008375"/>
-            <a:ext cx="1728216" cy="603504"/>
+            <a:off x="685800" y="3072384"/>
+            <a:ext cx="1728216" cy="667512"/>
           </a:xfrm>
           <a:prstGeom prst="rect">
             <a:avLst/>
@@ -47473,7 +47434,7 @@
               </a:spcAft>
             </a:pPr>
             <a:r>
-              <a:rPr sz="1050" b="1" i="0">
+              <a:rPr sz="1100" b="1" i="0">
                 <a:solidFill>
                   <a:srgbClr val="14262E"/>
                 </a:solidFill>
@@ -47492,8 +47453,8 @@
         </p:nvSpPr>
         <p:spPr>
           <a:xfrm>
-            <a:off x="2651760" y="3008375"/>
-            <a:ext cx="5568696" cy="603504"/>
+            <a:off x="2651760" y="3072384"/>
+            <a:ext cx="5568696" cy="667512"/>
           </a:xfrm>
           <a:prstGeom prst="rect">
             <a:avLst/>
@@ -47518,7 +47479,7 @@
               </a:spcAft>
             </a:pPr>
             <a:r>
-              <a:rPr sz="1050" b="0" i="0">
+              <a:rPr sz="1100" b="0" i="0">
                 <a:solidFill>
                   <a:srgbClr val="14262E"/>
                 </a:solidFill>
@@ -47537,8 +47498,8 @@
         </p:nvSpPr>
         <p:spPr>
           <a:xfrm>
-            <a:off x="8458200" y="3008375"/>
-            <a:ext cx="3044952" cy="603504"/>
+            <a:off x="8458200" y="3072384"/>
+            <a:ext cx="3044952" cy="667512"/>
           </a:xfrm>
           <a:prstGeom prst="rect">
             <a:avLst/>
@@ -47563,7 +47524,7 @@
               </a:spcAft>
             </a:pPr>
             <a:r>
-              <a:rPr sz="1050" b="0" i="0">
+              <a:rPr sz="1100" b="0" i="0">
                 <a:solidFill>
                   <a:srgbClr val="14262E"/>
                 </a:solidFill>
@@ -47582,8 +47543,8 @@
         </p:nvSpPr>
         <p:spPr>
           <a:xfrm>
-            <a:off x="566928" y="3639311"/>
-            <a:ext cx="11057839" cy="694944"/>
+            <a:off x="566928" y="3767328"/>
+            <a:ext cx="11057839" cy="758952"/>
           </a:xfrm>
           <a:prstGeom prst="rect">
             <a:avLst/>
@@ -47626,8 +47587,8 @@
         </p:nvSpPr>
         <p:spPr>
           <a:xfrm>
-            <a:off x="685800" y="3703320"/>
-            <a:ext cx="1728216" cy="603504"/>
+            <a:off x="685800" y="3831336"/>
+            <a:ext cx="1728216" cy="667512"/>
           </a:xfrm>
           <a:prstGeom prst="rect">
             <a:avLst/>
@@ -47652,7 +47613,7 @@
               </a:spcAft>
             </a:pPr>
             <a:r>
-              <a:rPr sz="1050" b="1" i="0">
+              <a:rPr sz="1100" b="1" i="0">
                 <a:solidFill>
                   <a:srgbClr val="14262E"/>
                 </a:solidFill>
@@ -47671,8 +47632,8 @@
         </p:nvSpPr>
         <p:spPr>
           <a:xfrm>
-            <a:off x="2651760" y="3703320"/>
-            <a:ext cx="5568696" cy="603504"/>
+            <a:off x="2651760" y="3831336"/>
+            <a:ext cx="5568696" cy="667512"/>
           </a:xfrm>
           <a:prstGeom prst="rect">
             <a:avLst/>
@@ -47697,7 +47658,7 @@
               </a:spcAft>
             </a:pPr>
             <a:r>
-              <a:rPr sz="1050" b="0" i="0">
+              <a:rPr sz="1100" b="0" i="0">
                 <a:solidFill>
                   <a:srgbClr val="14262E"/>
                 </a:solidFill>
@@ -47716,8 +47677,8 @@
         </p:nvSpPr>
         <p:spPr>
           <a:xfrm>
-            <a:off x="8458200" y="3703320"/>
-            <a:ext cx="3044952" cy="603504"/>
+            <a:off x="8458200" y="3831336"/>
+            <a:ext cx="3044952" cy="667512"/>
           </a:xfrm>
           <a:prstGeom prst="rect">
             <a:avLst/>
@@ -47742,7 +47703,7 @@
               </a:spcAft>
             </a:pPr>
             <a:r>
-              <a:rPr sz="1050" b="0" i="0">
+              <a:rPr sz="1100" b="0" i="0">
                 <a:solidFill>
                   <a:srgbClr val="14262E"/>
                 </a:solidFill>
@@ -47761,8 +47722,8 @@
         </p:nvSpPr>
         <p:spPr>
           <a:xfrm>
-            <a:off x="566928" y="4334255"/>
-            <a:ext cx="11057839" cy="694944"/>
+            <a:off x="566928" y="4526280"/>
+            <a:ext cx="11057839" cy="758952"/>
           </a:xfrm>
           <a:prstGeom prst="rect">
             <a:avLst/>
@@ -47805,8 +47766,8 @@
         </p:nvSpPr>
         <p:spPr>
           <a:xfrm>
-            <a:off x="685800" y="4398264"/>
-            <a:ext cx="1728216" cy="603504"/>
+            <a:off x="685800" y="4590288"/>
+            <a:ext cx="1728216" cy="667512"/>
           </a:xfrm>
           <a:prstGeom prst="rect">
             <a:avLst/>
@@ -47831,7 +47792,7 @@
               </a:spcAft>
             </a:pPr>
             <a:r>
-              <a:rPr sz="1050" b="1" i="0">
+              <a:rPr sz="1100" b="1" i="0">
                 <a:solidFill>
                   <a:srgbClr val="14262E"/>
                 </a:solidFill>
@@ -47850,8 +47811,8 @@
         </p:nvSpPr>
         <p:spPr>
           <a:xfrm>
-            <a:off x="2651760" y="4398264"/>
-            <a:ext cx="5568696" cy="603504"/>
+            <a:off x="2651760" y="4590288"/>
+            <a:ext cx="5568696" cy="667512"/>
           </a:xfrm>
           <a:prstGeom prst="rect">
             <a:avLst/>
@@ -47876,7 +47837,7 @@
               </a:spcAft>
             </a:pPr>
             <a:r>
-              <a:rPr sz="1050" b="0" i="0">
+              <a:rPr sz="1100" b="0" i="0">
                 <a:solidFill>
                   <a:srgbClr val="14262E"/>
                 </a:solidFill>
@@ -47895,8 +47856,8 @@
         </p:nvSpPr>
         <p:spPr>
           <a:xfrm>
-            <a:off x="8458200" y="4398264"/>
-            <a:ext cx="3044952" cy="603504"/>
+            <a:off x="8458200" y="4590288"/>
+            <a:ext cx="3044952" cy="667512"/>
           </a:xfrm>
           <a:prstGeom prst="rect">
             <a:avLst/>
@@ -47921,7 +47882,7 @@
               </a:spcAft>
             </a:pPr>
             <a:r>
-              <a:rPr sz="1050" b="0" i="0">
+              <a:rPr sz="1100" b="0" i="0">
                 <a:solidFill>
                   <a:srgbClr val="14262E"/>
                 </a:solidFill>
@@ -47940,8 +47901,8 @@
         </p:nvSpPr>
         <p:spPr>
           <a:xfrm>
-            <a:off x="566928" y="5029199"/>
-            <a:ext cx="11057839" cy="694944"/>
+            <a:off x="566928" y="5285232"/>
+            <a:ext cx="11057839" cy="758952"/>
           </a:xfrm>
           <a:prstGeom prst="rect">
             <a:avLst/>
@@ -47984,8 +47945,8 @@
         </p:nvSpPr>
         <p:spPr>
           <a:xfrm>
-            <a:off x="685800" y="5093207"/>
-            <a:ext cx="1728216" cy="603504"/>
+            <a:off x="685800" y="5349240"/>
+            <a:ext cx="1728216" cy="667512"/>
           </a:xfrm>
           <a:prstGeom prst="rect">
             <a:avLst/>
@@ -48010,7 +47971,7 @@
               </a:spcAft>
             </a:pPr>
             <a:r>
-              <a:rPr sz="1050" b="1" i="0">
+              <a:rPr sz="1100" b="1" i="0">
                 <a:solidFill>
                   <a:srgbClr val="14262E"/>
                 </a:solidFill>
@@ -48029,8 +47990,8 @@
         </p:nvSpPr>
         <p:spPr>
           <a:xfrm>
-            <a:off x="2651760" y="5093207"/>
-            <a:ext cx="5568696" cy="603504"/>
+            <a:off x="2651760" y="5349240"/>
+            <a:ext cx="5568696" cy="667512"/>
           </a:xfrm>
           <a:prstGeom prst="rect">
             <a:avLst/>
@@ -48055,7 +48016,7 @@
               </a:spcAft>
             </a:pPr>
             <a:r>
-              <a:rPr sz="1050" b="0" i="0">
+              <a:rPr sz="1100" b="0" i="0">
                 <a:solidFill>
                   <a:srgbClr val="14262E"/>
                 </a:solidFill>
@@ -48074,8 +48035,8 @@
         </p:nvSpPr>
         <p:spPr>
           <a:xfrm>
-            <a:off x="8458200" y="5093207"/>
-            <a:ext cx="3044952" cy="603504"/>
+            <a:off x="8458200" y="5349240"/>
+            <a:ext cx="3044952" cy="667512"/>
           </a:xfrm>
           <a:prstGeom prst="rect">
             <a:avLst/>
@@ -48100,7 +48061,7 @@
               </a:spcAft>
             </a:pPr>
             <a:r>
-              <a:rPr sz="1050" b="0" i="0">
+              <a:rPr sz="1100" b="0" i="0">
                 <a:solidFill>
                   <a:srgbClr val="14262E"/>
                 </a:solidFill>
@@ -48119,8 +48080,8 @@
         </p:nvSpPr>
         <p:spPr>
           <a:xfrm>
-            <a:off x="566928" y="5724143"/>
-            <a:ext cx="11057839" cy="694944"/>
+            <a:off x="566928" y="6044184"/>
+            <a:ext cx="11057839" cy="758952"/>
           </a:xfrm>
           <a:prstGeom prst="rect">
             <a:avLst/>
@@ -48163,8 +48124,8 @@
         </p:nvSpPr>
         <p:spPr>
           <a:xfrm>
-            <a:off x="685800" y="5788151"/>
-            <a:ext cx="1728216" cy="603504"/>
+            <a:off x="685800" y="6108192"/>
+            <a:ext cx="1728216" cy="667512"/>
           </a:xfrm>
           <a:prstGeom prst="rect">
             <a:avLst/>
@@ -48189,7 +48150,7 @@
               </a:spcAft>
             </a:pPr>
             <a:r>
-              <a:rPr sz="1050" b="1" i="0">
+              <a:rPr sz="1100" b="1" i="0">
                 <a:solidFill>
                   <a:srgbClr val="14262E"/>
                 </a:solidFill>
@@ -48208,8 +48169,8 @@
         </p:nvSpPr>
         <p:spPr>
           <a:xfrm>
-            <a:off x="2651760" y="5788151"/>
-            <a:ext cx="5568696" cy="603504"/>
+            <a:off x="2651760" y="6108192"/>
+            <a:ext cx="5568696" cy="667512"/>
           </a:xfrm>
           <a:prstGeom prst="rect">
             <a:avLst/>
@@ -48234,7 +48195,7 @@
               </a:spcAft>
             </a:pPr>
             <a:r>
-              <a:rPr sz="1050" b="0" i="0">
+              <a:rPr sz="1100" b="0" i="0">
                 <a:solidFill>
                   <a:srgbClr val="14262E"/>
                 </a:solidFill>
@@ -48253,8 +48214,8 @@
         </p:nvSpPr>
         <p:spPr>
           <a:xfrm>
-            <a:off x="8458200" y="5788151"/>
-            <a:ext cx="3044952" cy="603504"/>
+            <a:off x="8458200" y="6108192"/>
+            <a:ext cx="3044952" cy="667512"/>
           </a:xfrm>
           <a:prstGeom prst="rect">
             <a:avLst/>
@@ -48279,7 +48240,7 @@
               </a:spcAft>
             </a:pPr>
             <a:r>
-              <a:rPr sz="1050" b="0" i="0">
+              <a:rPr sz="1100" b="0" i="0">
                 <a:solidFill>
                   <a:srgbClr val="14262E"/>
                 </a:solidFill>
@@ -48541,6 +48502,7 @@
         </p:nvPicPr>
         <p:blipFill>
           <a:blip r:embed="rId2"/>
+          <a:srcRect l="23529" r="23529"/>
           <a:stretch>
             <a:fillRect/>
           </a:stretch>
@@ -48548,7 +48510,7 @@
         <p:spPr>
           <a:xfrm>
             <a:off x="566928" y="1417320"/>
-            <a:ext cx="4160520" cy="2773680"/>
+            <a:ext cx="3703320" cy="4663440"/>
           </a:xfrm>
           <a:prstGeom prst="rect">
             <a:avLst/>
@@ -48564,7 +48526,7 @@
         <p:spPr>
           <a:xfrm>
             <a:off x="566928" y="1417320"/>
-            <a:ext cx="4160520" cy="59436"/>
+            <a:ext cx="3703320" cy="59436"/>
           </a:xfrm>
           <a:prstGeom prst="rect">
             <a:avLst/>
@@ -48601,58 +48563,13 @@
       </p:sp>
       <p:sp>
         <p:nvSpPr>
-          <p:cNvPr id="8" name="TextBox 7"/>
-          <p:cNvSpPr txBox="1"/>
-          <p:nvPr/>
-        </p:nvSpPr>
-        <p:spPr>
-          <a:xfrm>
-            <a:off x="566928" y="4273296"/>
-            <a:ext cx="4160520" cy="411480"/>
-          </a:xfrm>
-          <a:prstGeom prst="rect">
-            <a:avLst/>
-          </a:prstGeom>
-          <a:noFill/>
-        </p:spPr>
-        <p:txBody>
-          <a:bodyPr wrap="square" lIns="0" rIns="0" tIns="0" bIns="0">
-            <a:spAutoFit/>
-          </a:bodyPr>
-          <a:lstStyle/>
-          <a:p>
-            <a:pPr algn="ctr">
-              <a:lnSpc>
-                <a:spcPct val="108000"/>
-              </a:lnSpc>
-              <a:spcBef>
-                <a:spcPts val="0"/>
-              </a:spcBef>
-              <a:spcAft>
-                <a:spcPts val="0"/>
-              </a:spcAft>
-            </a:pPr>
-            <a:r>
-              <a:rPr sz="1050" b="0" i="1">
-                <a:solidFill>
-                  <a:srgbClr val="5A6B72"/>
-                </a:solidFill>
-                <a:latin typeface="Calibri"/>
-              </a:rPr>
-              <a:t>You will need: A3 or flip-chart paper, marker pens, sticky notes.</a:t>
-            </a:r>
-          </a:p>
-        </p:txBody>
-      </p:sp>
-      <p:sp>
-        <p:nvSpPr>
-          <p:cNvPr id="9" name="Rounded Rectangle 8"/>
+          <p:cNvPr id="8" name="Rounded Rectangle 7"/>
           <p:cNvSpPr/>
           <p:nvPr/>
         </p:nvSpPr>
         <p:spPr>
           <a:xfrm>
-            <a:off x="5138928" y="1389888"/>
+            <a:off x="4654296" y="1389888"/>
             <a:ext cx="1691640" cy="402336"/>
           </a:xfrm>
           <a:prstGeom prst="roundRect">
@@ -48711,14 +48628,14 @@
       </p:sp>
       <p:sp>
         <p:nvSpPr>
-          <p:cNvPr id="10" name="Rounded Rectangle 9"/>
+          <p:cNvPr id="9" name="Rounded Rectangle 8"/>
           <p:cNvSpPr/>
           <p:nvPr/>
         </p:nvSpPr>
         <p:spPr>
           <a:xfrm>
-            <a:off x="5138928" y="1920240"/>
-            <a:ext cx="6485839" cy="826617"/>
+            <a:off x="4654296" y="1920240"/>
+            <a:ext cx="6970471" cy="826617"/>
           </a:xfrm>
           <a:prstGeom prst="roundRect">
             <a:avLst>
@@ -48757,13 +48674,13 @@
       </p:sp>
       <p:sp>
         <p:nvSpPr>
-          <p:cNvPr id="11" name="Rectangle 10"/>
+          <p:cNvPr id="10" name="Rectangle 9"/>
           <p:cNvSpPr/>
           <p:nvPr/>
         </p:nvSpPr>
         <p:spPr>
           <a:xfrm>
-            <a:off x="5138928" y="1920240"/>
+            <a:off x="4654296" y="1920240"/>
             <a:ext cx="50292" cy="826617"/>
           </a:xfrm>
           <a:prstGeom prst="rect">
@@ -48801,13 +48718,13 @@
       </p:sp>
       <p:sp>
         <p:nvSpPr>
-          <p:cNvPr id="12" name="Oval 11"/>
+          <p:cNvPr id="11" name="Oval 10"/>
           <p:cNvSpPr/>
           <p:nvPr/>
         </p:nvSpPr>
         <p:spPr>
           <a:xfrm>
-            <a:off x="5321808" y="2178100"/>
+            <a:off x="4837176" y="2178100"/>
             <a:ext cx="310896" cy="310896"/>
           </a:xfrm>
           <a:prstGeom prst="ellipse">
@@ -48864,14 +48781,14 @@
       </p:sp>
       <p:sp>
         <p:nvSpPr>
-          <p:cNvPr id="13" name="TextBox 12"/>
+          <p:cNvPr id="12" name="TextBox 11"/>
           <p:cNvSpPr txBox="1"/>
           <p:nvPr/>
         </p:nvSpPr>
         <p:spPr>
           <a:xfrm>
-            <a:off x="5760720" y="2011680"/>
-            <a:ext cx="5644591" cy="643737"/>
+            <a:off x="5276088" y="2011680"/>
+            <a:ext cx="6129223" cy="643737"/>
           </a:xfrm>
           <a:prstGeom prst="rect">
             <a:avLst/>
@@ -48931,14 +48848,14 @@
       </p:sp>
       <p:sp>
         <p:nvSpPr>
-          <p:cNvPr id="14" name="Rounded Rectangle 13"/>
+          <p:cNvPr id="13" name="Rounded Rectangle 12"/>
           <p:cNvSpPr/>
           <p:nvPr/>
         </p:nvSpPr>
         <p:spPr>
           <a:xfrm>
-            <a:off x="5138928" y="2829153"/>
-            <a:ext cx="6485839" cy="826617"/>
+            <a:off x="4654296" y="2829153"/>
+            <a:ext cx="6970471" cy="826617"/>
           </a:xfrm>
           <a:prstGeom prst="roundRect">
             <a:avLst>
@@ -48977,13 +48894,13 @@
       </p:sp>
       <p:sp>
         <p:nvSpPr>
-          <p:cNvPr id="15" name="Rectangle 14"/>
+          <p:cNvPr id="14" name="Rectangle 13"/>
           <p:cNvSpPr/>
           <p:nvPr/>
         </p:nvSpPr>
         <p:spPr>
           <a:xfrm>
-            <a:off x="5138928" y="2829153"/>
+            <a:off x="4654296" y="2829153"/>
             <a:ext cx="50292" cy="826617"/>
           </a:xfrm>
           <a:prstGeom prst="rect">
@@ -49021,13 +48938,13 @@
       </p:sp>
       <p:sp>
         <p:nvSpPr>
-          <p:cNvPr id="16" name="Oval 15"/>
+          <p:cNvPr id="15" name="Oval 14"/>
           <p:cNvSpPr/>
           <p:nvPr/>
         </p:nvSpPr>
         <p:spPr>
           <a:xfrm>
-            <a:off x="5321808" y="3087014"/>
+            <a:off x="4837176" y="3087014"/>
             <a:ext cx="310896" cy="310896"/>
           </a:xfrm>
           <a:prstGeom prst="ellipse">
@@ -49084,14 +49001,14 @@
       </p:sp>
       <p:sp>
         <p:nvSpPr>
-          <p:cNvPr id="17" name="TextBox 16"/>
+          <p:cNvPr id="16" name="TextBox 15"/>
           <p:cNvSpPr txBox="1"/>
           <p:nvPr/>
         </p:nvSpPr>
         <p:spPr>
           <a:xfrm>
-            <a:off x="5760720" y="2920593"/>
-            <a:ext cx="5644591" cy="643737"/>
+            <a:off x="5276088" y="2920593"/>
+            <a:ext cx="6129223" cy="643737"/>
           </a:xfrm>
           <a:prstGeom prst="rect">
             <a:avLst/>
@@ -49151,14 +49068,14 @@
       </p:sp>
       <p:sp>
         <p:nvSpPr>
-          <p:cNvPr id="18" name="Rounded Rectangle 17"/>
+          <p:cNvPr id="17" name="Rounded Rectangle 16"/>
           <p:cNvSpPr/>
           <p:nvPr/>
         </p:nvSpPr>
         <p:spPr>
           <a:xfrm>
-            <a:off x="5138928" y="3738067"/>
-            <a:ext cx="6485839" cy="826617"/>
+            <a:off x="4654296" y="3738067"/>
+            <a:ext cx="6970471" cy="826617"/>
           </a:xfrm>
           <a:prstGeom prst="roundRect">
             <a:avLst>
@@ -49197,13 +49114,13 @@
       </p:sp>
       <p:sp>
         <p:nvSpPr>
-          <p:cNvPr id="19" name="Rectangle 18"/>
+          <p:cNvPr id="18" name="Rectangle 17"/>
           <p:cNvSpPr/>
           <p:nvPr/>
         </p:nvSpPr>
         <p:spPr>
           <a:xfrm>
-            <a:off x="5138928" y="3738067"/>
+            <a:off x="4654296" y="3738067"/>
             <a:ext cx="50292" cy="826617"/>
           </a:xfrm>
           <a:prstGeom prst="rect">
@@ -49241,13 +49158,13 @@
       </p:sp>
       <p:sp>
         <p:nvSpPr>
-          <p:cNvPr id="20" name="Oval 19"/>
+          <p:cNvPr id="19" name="Oval 18"/>
           <p:cNvSpPr/>
           <p:nvPr/>
         </p:nvSpPr>
         <p:spPr>
           <a:xfrm>
-            <a:off x="5321808" y="3995928"/>
+            <a:off x="4837176" y="3995928"/>
             <a:ext cx="310896" cy="310896"/>
           </a:xfrm>
           <a:prstGeom prst="ellipse">
@@ -49304,14 +49221,14 @@
       </p:sp>
       <p:sp>
         <p:nvSpPr>
-          <p:cNvPr id="21" name="TextBox 20"/>
+          <p:cNvPr id="20" name="TextBox 19"/>
           <p:cNvSpPr txBox="1"/>
           <p:nvPr/>
         </p:nvSpPr>
         <p:spPr>
           <a:xfrm>
-            <a:off x="5760720" y="3829507"/>
-            <a:ext cx="5644591" cy="643737"/>
+            <a:off x="5276088" y="3829507"/>
+            <a:ext cx="6129223" cy="643737"/>
           </a:xfrm>
           <a:prstGeom prst="rect">
             <a:avLst/>
@@ -49371,14 +49288,14 @@
       </p:sp>
       <p:sp>
         <p:nvSpPr>
-          <p:cNvPr id="22" name="Rounded Rectangle 21"/>
+          <p:cNvPr id="21" name="Rounded Rectangle 20"/>
           <p:cNvSpPr/>
           <p:nvPr/>
         </p:nvSpPr>
         <p:spPr>
           <a:xfrm>
-            <a:off x="5138928" y="4646980"/>
-            <a:ext cx="6485839" cy="826617"/>
+            <a:off x="4654296" y="4646980"/>
+            <a:ext cx="6970471" cy="826617"/>
           </a:xfrm>
           <a:prstGeom prst="roundRect">
             <a:avLst>
@@ -49417,13 +49334,13 @@
       </p:sp>
       <p:sp>
         <p:nvSpPr>
-          <p:cNvPr id="23" name="Rectangle 22"/>
+          <p:cNvPr id="22" name="Rectangle 21"/>
           <p:cNvSpPr/>
           <p:nvPr/>
         </p:nvSpPr>
         <p:spPr>
           <a:xfrm>
-            <a:off x="5138928" y="4646980"/>
+            <a:off x="4654296" y="4646980"/>
             <a:ext cx="50292" cy="826617"/>
           </a:xfrm>
           <a:prstGeom prst="rect">
@@ -49461,13 +49378,13 @@
       </p:sp>
       <p:sp>
         <p:nvSpPr>
-          <p:cNvPr id="24" name="Oval 23"/>
+          <p:cNvPr id="23" name="Oval 22"/>
           <p:cNvSpPr/>
           <p:nvPr/>
         </p:nvSpPr>
         <p:spPr>
           <a:xfrm>
-            <a:off x="5321808" y="4904841"/>
+            <a:off x="4837176" y="4904841"/>
             <a:ext cx="310896" cy="310896"/>
           </a:xfrm>
           <a:prstGeom prst="ellipse">
@@ -49524,14 +49441,14 @@
       </p:sp>
       <p:sp>
         <p:nvSpPr>
-          <p:cNvPr id="25" name="TextBox 24"/>
+          <p:cNvPr id="24" name="TextBox 23"/>
           <p:cNvSpPr txBox="1"/>
           <p:nvPr/>
         </p:nvSpPr>
         <p:spPr>
           <a:xfrm>
-            <a:off x="5760720" y="4738420"/>
-            <a:ext cx="5644591" cy="643737"/>
+            <a:off x="5276088" y="4738420"/>
+            <a:ext cx="6129223" cy="643737"/>
           </a:xfrm>
           <a:prstGeom prst="rect">
             <a:avLst/>
@@ -49591,14 +49508,14 @@
       </p:sp>
       <p:sp>
         <p:nvSpPr>
-          <p:cNvPr id="26" name="Rounded Rectangle 25"/>
+          <p:cNvPr id="25" name="Rounded Rectangle 24"/>
           <p:cNvSpPr/>
           <p:nvPr/>
         </p:nvSpPr>
         <p:spPr>
           <a:xfrm>
-            <a:off x="5138928" y="5555894"/>
-            <a:ext cx="6485839" cy="826617"/>
+            <a:off x="4654296" y="5555894"/>
+            <a:ext cx="6970471" cy="826617"/>
           </a:xfrm>
           <a:prstGeom prst="roundRect">
             <a:avLst>
@@ -49637,13 +49554,13 @@
       </p:sp>
       <p:sp>
         <p:nvSpPr>
-          <p:cNvPr id="27" name="Rectangle 26"/>
+          <p:cNvPr id="26" name="Rectangle 25"/>
           <p:cNvSpPr/>
           <p:nvPr/>
         </p:nvSpPr>
         <p:spPr>
           <a:xfrm>
-            <a:off x="5138928" y="5555894"/>
+            <a:off x="4654296" y="5555894"/>
             <a:ext cx="50292" cy="826617"/>
           </a:xfrm>
           <a:prstGeom prst="rect">
@@ -49681,13 +49598,13 @@
       </p:sp>
       <p:sp>
         <p:nvSpPr>
-          <p:cNvPr id="28" name="Oval 27"/>
+          <p:cNvPr id="27" name="Oval 26"/>
           <p:cNvSpPr/>
           <p:nvPr/>
         </p:nvSpPr>
         <p:spPr>
           <a:xfrm>
-            <a:off x="5321808" y="5813755"/>
+            <a:off x="4837176" y="5813755"/>
             <a:ext cx="310896" cy="310896"/>
           </a:xfrm>
           <a:prstGeom prst="ellipse">
@@ -49744,14 +49661,14 @@
       </p:sp>
       <p:sp>
         <p:nvSpPr>
-          <p:cNvPr id="29" name="TextBox 28"/>
+          <p:cNvPr id="28" name="TextBox 27"/>
           <p:cNvSpPr txBox="1"/>
           <p:nvPr/>
         </p:nvSpPr>
         <p:spPr>
           <a:xfrm>
-            <a:off x="5760720" y="5647334"/>
-            <a:ext cx="5644591" cy="643737"/>
+            <a:off x="5276088" y="5647334"/>
+            <a:ext cx="6129223" cy="643737"/>
           </a:xfrm>
           <a:prstGeom prst="rect">
             <a:avLst/>
@@ -49811,7 +49728,7 @@
       </p:sp>
       <p:sp>
         <p:nvSpPr>
-          <p:cNvPr id="30" name="TextBox 29"/>
+          <p:cNvPr id="29" name="TextBox 28"/>
           <p:cNvSpPr txBox="1"/>
           <p:nvPr/>
         </p:nvSpPr>
@@ -50025,7 +49942,7 @@
                 </a:solidFill>
                 <a:latin typeface="Trebuchet MS"/>
               </a:rPr>
-              <a:t>SESSION 6</a:t>
+              <a:t>USING ASSESSMENT DATA</a:t>
             </a:r>
           </a:p>
         </p:txBody>
@@ -50135,7 +50052,7 @@
                 </a:solidFill>
                 <a:latin typeface="Trebuchet MS"/>
               </a:rPr>
-              <a:t>Using Assessment Data</a:t>
+              <a:t>Feedback &amp; Records</a:t>
             </a:r>
           </a:p>
           <a:p>
@@ -50157,7 +50074,7 @@
                 </a:solidFill>
                 <a:latin typeface="Calibri"/>
               </a:rPr>
-              <a:t>Feedback and records — turning marks into learning.</a:t>
+              <a:t>Turning marks into learning — and into records you can defend.</a:t>
             </a:r>
           </a:p>
         </p:txBody>
@@ -50368,14 +50285,15 @@
         </p:nvPicPr>
         <p:blipFill>
           <a:blip r:embed="rId2"/>
+          <a:srcRect l="15033" r="15033"/>
           <a:stretch>
             <a:fillRect/>
           </a:stretch>
         </p:blipFill>
         <p:spPr>
           <a:xfrm>
-            <a:off x="5909767" y="1417320"/>
-            <a:ext cx="5715000" cy="3810000"/>
+            <a:off x="6732727" y="1417320"/>
+            <a:ext cx="4892040" cy="4663440"/>
           </a:xfrm>
           <a:prstGeom prst="rect">
             <a:avLst/>
@@ -50390,8 +50308,8 @@
         </p:nvSpPr>
         <p:spPr>
           <a:xfrm>
-            <a:off x="5909767" y="1417320"/>
-            <a:ext cx="5715000" cy="59436"/>
+            <a:off x="6732727" y="1417320"/>
+            <a:ext cx="4892040" cy="59436"/>
           </a:xfrm>
           <a:prstGeom prst="rect">
             <a:avLst/>
@@ -50434,8 +50352,8 @@
         </p:nvSpPr>
         <p:spPr>
           <a:xfrm>
-            <a:off x="5909767" y="5273040"/>
-            <a:ext cx="5715000" cy="365760"/>
+            <a:off x="6732727" y="6144768"/>
+            <a:ext cx="4892040" cy="365760"/>
           </a:xfrm>
           <a:prstGeom prst="rect">
             <a:avLst/>
@@ -50480,7 +50398,7 @@
         <p:spPr>
           <a:xfrm>
             <a:off x="566928" y="1426464"/>
-            <a:ext cx="4958791" cy="832002"/>
+            <a:ext cx="5781751" cy="897940"/>
           </a:xfrm>
           <a:prstGeom prst="roundRect">
             <a:avLst>
@@ -50526,7 +50444,7 @@
         <p:spPr>
           <a:xfrm>
             <a:off x="566928" y="1426464"/>
-            <a:ext cx="45720" cy="832002"/>
+            <a:ext cx="45720" cy="897940"/>
           </a:xfrm>
           <a:prstGeom prst="rect">
             <a:avLst/>
@@ -50570,7 +50488,7 @@
         <p:spPr>
           <a:xfrm>
             <a:off x="768096" y="1563624"/>
-            <a:ext cx="4556455" cy="557682"/>
+            <a:ext cx="5379415" cy="623620"/>
           </a:xfrm>
           <a:prstGeom prst="rect">
             <a:avLst/>
@@ -50595,7 +50513,7 @@
               </a:spcAft>
             </a:pPr>
             <a:r>
-              <a:rPr sz="1100" b="1" i="0">
+              <a:rPr sz="1150" b="1" i="0">
                 <a:solidFill>
                   <a:srgbClr val="C1440E"/>
                 </a:solidFill>
@@ -50617,7 +50535,7 @@
               </a:spcAft>
             </a:pPr>
             <a:r>
-              <a:rPr sz="1000" b="0" i="0">
+              <a:rPr sz="1050" b="0" i="0">
                 <a:solidFill>
                   <a:srgbClr val="14262E"/>
                 </a:solidFill>
@@ -50636,8 +50554,8 @@
         </p:nvSpPr>
         <p:spPr>
           <a:xfrm>
-            <a:off x="566928" y="2368194"/>
-            <a:ext cx="4958791" cy="832002"/>
+            <a:off x="566928" y="2434132"/>
+            <a:ext cx="5781751" cy="897940"/>
           </a:xfrm>
           <a:prstGeom prst="roundRect">
             <a:avLst>
@@ -50682,8 +50600,8 @@
         </p:nvSpPr>
         <p:spPr>
           <a:xfrm>
-            <a:off x="566928" y="2368194"/>
-            <a:ext cx="45720" cy="832002"/>
+            <a:off x="566928" y="2434132"/>
+            <a:ext cx="45720" cy="897940"/>
           </a:xfrm>
           <a:prstGeom prst="rect">
             <a:avLst/>
@@ -50726,8 +50644,8 @@
         </p:nvSpPr>
         <p:spPr>
           <a:xfrm>
-            <a:off x="768096" y="2505354"/>
-            <a:ext cx="4556455" cy="557682"/>
+            <a:off x="768096" y="2571292"/>
+            <a:ext cx="5379415" cy="623620"/>
           </a:xfrm>
           <a:prstGeom prst="rect">
             <a:avLst/>
@@ -50752,7 +50670,7 @@
               </a:spcAft>
             </a:pPr>
             <a:r>
-              <a:rPr sz="1100" b="1" i="0">
+              <a:rPr sz="1150" b="1" i="0">
                 <a:solidFill>
                   <a:srgbClr val="C1440E"/>
                 </a:solidFill>
@@ -50774,7 +50692,7 @@
               </a:spcAft>
             </a:pPr>
             <a:r>
-              <a:rPr sz="1000" b="0" i="0">
+              <a:rPr sz="1050" b="0" i="0">
                 <a:solidFill>
                   <a:srgbClr val="14262E"/>
                 </a:solidFill>
@@ -50793,8 +50711,8 @@
         </p:nvSpPr>
         <p:spPr>
           <a:xfrm>
-            <a:off x="566928" y="3309924"/>
-            <a:ext cx="4958791" cy="832002"/>
+            <a:off x="566928" y="3441801"/>
+            <a:ext cx="5781751" cy="897940"/>
           </a:xfrm>
           <a:prstGeom prst="roundRect">
             <a:avLst>
@@ -50839,8 +50757,8 @@
         </p:nvSpPr>
         <p:spPr>
           <a:xfrm>
-            <a:off x="566928" y="3309924"/>
-            <a:ext cx="45720" cy="832002"/>
+            <a:off x="566928" y="3441801"/>
+            <a:ext cx="45720" cy="897940"/>
           </a:xfrm>
           <a:prstGeom prst="rect">
             <a:avLst/>
@@ -50883,8 +50801,8 @@
         </p:nvSpPr>
         <p:spPr>
           <a:xfrm>
-            <a:off x="768096" y="3447084"/>
-            <a:ext cx="4556455" cy="557682"/>
+            <a:off x="768096" y="3578961"/>
+            <a:ext cx="5379415" cy="623620"/>
           </a:xfrm>
           <a:prstGeom prst="rect">
             <a:avLst/>
@@ -50909,7 +50827,7 @@
               </a:spcAft>
             </a:pPr>
             <a:r>
-              <a:rPr sz="1100" b="1" i="0">
+              <a:rPr sz="1150" b="1" i="0">
                 <a:solidFill>
                   <a:srgbClr val="C1440E"/>
                 </a:solidFill>
@@ -50931,7 +50849,7 @@
               </a:spcAft>
             </a:pPr>
             <a:r>
-              <a:rPr sz="1000" b="0" i="0">
+              <a:rPr sz="1050" b="0" i="0">
                 <a:solidFill>
                   <a:srgbClr val="14262E"/>
                 </a:solidFill>
@@ -50950,8 +50868,8 @@
         </p:nvSpPr>
         <p:spPr>
           <a:xfrm>
-            <a:off x="566928" y="4251655"/>
-            <a:ext cx="4958791" cy="996848"/>
+            <a:off x="566928" y="4449470"/>
+            <a:ext cx="5781751" cy="897940"/>
           </a:xfrm>
           <a:prstGeom prst="roundRect">
             <a:avLst>
@@ -50996,8 +50914,8 @@
         </p:nvSpPr>
         <p:spPr>
           <a:xfrm>
-            <a:off x="566928" y="4251655"/>
-            <a:ext cx="45720" cy="996848"/>
+            <a:off x="566928" y="4449470"/>
+            <a:ext cx="45720" cy="897940"/>
           </a:xfrm>
           <a:prstGeom prst="rect">
             <a:avLst/>
@@ -51040,8 +50958,8 @@
         </p:nvSpPr>
         <p:spPr>
           <a:xfrm>
-            <a:off x="768096" y="4388815"/>
-            <a:ext cx="4556455" cy="722528"/>
+            <a:off x="768096" y="4586630"/>
+            <a:ext cx="5379415" cy="623620"/>
           </a:xfrm>
           <a:prstGeom prst="rect">
             <a:avLst/>
@@ -51066,7 +50984,7 @@
               </a:spcAft>
             </a:pPr>
             <a:r>
-              <a:rPr sz="1100" b="1" i="0">
+              <a:rPr sz="1150" b="1" i="0">
                 <a:solidFill>
                   <a:srgbClr val="C1440E"/>
                 </a:solidFill>
@@ -51088,7 +51006,7 @@
               </a:spcAft>
             </a:pPr>
             <a:r>
-              <a:rPr sz="1000" b="0" i="0">
+              <a:rPr sz="1050" b="0" i="0">
                 <a:solidFill>
                   <a:srgbClr val="14262E"/>
                 </a:solidFill>
@@ -51107,8 +51025,8 @@
         </p:nvSpPr>
         <p:spPr>
           <a:xfrm>
-            <a:off x="566928" y="5358231"/>
-            <a:ext cx="4958791" cy="996848"/>
+            <a:off x="566928" y="5457139"/>
+            <a:ext cx="5781751" cy="897940"/>
           </a:xfrm>
           <a:prstGeom prst="roundRect">
             <a:avLst>
@@ -51153,8 +51071,8 @@
         </p:nvSpPr>
         <p:spPr>
           <a:xfrm>
-            <a:off x="566928" y="5358231"/>
-            <a:ext cx="45720" cy="996848"/>
+            <a:off x="566928" y="5457139"/>
+            <a:ext cx="45720" cy="897940"/>
           </a:xfrm>
           <a:prstGeom prst="rect">
             <a:avLst/>
@@ -51197,8 +51115,8 @@
         </p:nvSpPr>
         <p:spPr>
           <a:xfrm>
-            <a:off x="768096" y="5495391"/>
-            <a:ext cx="4556455" cy="722528"/>
+            <a:off x="768096" y="5594299"/>
+            <a:ext cx="5379415" cy="623620"/>
           </a:xfrm>
           <a:prstGeom prst="rect">
             <a:avLst/>
@@ -51223,7 +51141,7 @@
               </a:spcAft>
             </a:pPr>
             <a:r>
-              <a:rPr sz="1100" b="1" i="0">
+              <a:rPr sz="1150" b="1" i="0">
                 <a:solidFill>
                   <a:srgbClr val="C1440E"/>
                 </a:solidFill>
@@ -51245,7 +51163,7 @@
               </a:spcAft>
             </a:pPr>
             <a:r>
-              <a:rPr sz="1000" b="0" i="0">
+              <a:rPr sz="1050" b="0" i="0">
                 <a:solidFill>
                   <a:srgbClr val="14262E"/>
                 </a:solidFill>
@@ -51730,7 +51648,7 @@
         <p:spPr>
           <a:xfrm>
             <a:off x="566928" y="2249424"/>
-            <a:ext cx="11057839" cy="694944"/>
+            <a:ext cx="11057839" cy="749808"/>
           </a:xfrm>
           <a:prstGeom prst="rect">
             <a:avLst/>
@@ -51774,7 +51692,7 @@
         <p:spPr>
           <a:xfrm>
             <a:off x="685800" y="2313432"/>
-            <a:ext cx="2322576" cy="603504"/>
+            <a:ext cx="2322576" cy="658368"/>
           </a:xfrm>
           <a:prstGeom prst="rect">
             <a:avLst/>
@@ -51799,7 +51717,7 @@
               </a:spcAft>
             </a:pPr>
             <a:r>
-              <a:rPr sz="1050" b="1" i="0">
+              <a:rPr sz="1100" b="1" i="0">
                 <a:solidFill>
                   <a:srgbClr val="14262E"/>
                 </a:solidFill>
@@ -51819,7 +51737,7 @@
         <p:spPr>
           <a:xfrm>
             <a:off x="3246120" y="2313432"/>
-            <a:ext cx="4608576" cy="603504"/>
+            <a:ext cx="4608576" cy="658368"/>
           </a:xfrm>
           <a:prstGeom prst="rect">
             <a:avLst/>
@@ -51844,7 +51762,7 @@
               </a:spcAft>
             </a:pPr>
             <a:r>
-              <a:rPr sz="1050" b="0" i="0">
+              <a:rPr sz="1100" b="0" i="0">
                 <a:solidFill>
                   <a:srgbClr val="14262E"/>
                 </a:solidFill>
@@ -51864,7 +51782,7 @@
         <p:spPr>
           <a:xfrm>
             <a:off x="8092440" y="2313432"/>
-            <a:ext cx="3410712" cy="603504"/>
+            <a:ext cx="3410712" cy="658368"/>
           </a:xfrm>
           <a:prstGeom prst="rect">
             <a:avLst/>
@@ -51889,7 +51807,7 @@
               </a:spcAft>
             </a:pPr>
             <a:r>
-              <a:rPr sz="1050" b="0" i="0">
+              <a:rPr sz="1100" b="0" i="0">
                 <a:solidFill>
                   <a:srgbClr val="14262E"/>
                 </a:solidFill>
@@ -51908,8 +51826,8 @@
         </p:nvSpPr>
         <p:spPr>
           <a:xfrm>
-            <a:off x="566928" y="2944368"/>
-            <a:ext cx="11057839" cy="694944"/>
+            <a:off x="566928" y="2999232"/>
+            <a:ext cx="11057839" cy="749808"/>
           </a:xfrm>
           <a:prstGeom prst="rect">
             <a:avLst/>
@@ -51952,8 +51870,8 @@
         </p:nvSpPr>
         <p:spPr>
           <a:xfrm>
-            <a:off x="685800" y="3008375"/>
-            <a:ext cx="2322576" cy="603504"/>
+            <a:off x="685800" y="3063239"/>
+            <a:ext cx="2322576" cy="658368"/>
           </a:xfrm>
           <a:prstGeom prst="rect">
             <a:avLst/>
@@ -51978,7 +51896,7 @@
               </a:spcAft>
             </a:pPr>
             <a:r>
-              <a:rPr sz="1050" b="1" i="0">
+              <a:rPr sz="1100" b="1" i="0">
                 <a:solidFill>
                   <a:srgbClr val="14262E"/>
                 </a:solidFill>
@@ -51997,8 +51915,8 @@
         </p:nvSpPr>
         <p:spPr>
           <a:xfrm>
-            <a:off x="3246120" y="3008375"/>
-            <a:ext cx="4608576" cy="603504"/>
+            <a:off x="3246120" y="3063239"/>
+            <a:ext cx="4608576" cy="658368"/>
           </a:xfrm>
           <a:prstGeom prst="rect">
             <a:avLst/>
@@ -52023,7 +51941,7 @@
               </a:spcAft>
             </a:pPr>
             <a:r>
-              <a:rPr sz="1050" b="0" i="0">
+              <a:rPr sz="1100" b="0" i="0">
                 <a:solidFill>
                   <a:srgbClr val="14262E"/>
                 </a:solidFill>
@@ -52042,8 +51960,8 @@
         </p:nvSpPr>
         <p:spPr>
           <a:xfrm>
-            <a:off x="8092440" y="3008375"/>
-            <a:ext cx="3410712" cy="603504"/>
+            <a:off x="8092440" y="3063239"/>
+            <a:ext cx="3410712" cy="658368"/>
           </a:xfrm>
           <a:prstGeom prst="rect">
             <a:avLst/>
@@ -52068,7 +51986,7 @@
               </a:spcAft>
             </a:pPr>
             <a:r>
-              <a:rPr sz="1050" b="0" i="0">
+              <a:rPr sz="1100" b="0" i="0">
                 <a:solidFill>
                   <a:srgbClr val="14262E"/>
                 </a:solidFill>
@@ -52087,8 +52005,8 @@
         </p:nvSpPr>
         <p:spPr>
           <a:xfrm>
-            <a:off x="566928" y="3639311"/>
-            <a:ext cx="11057839" cy="694944"/>
+            <a:off x="566928" y="3749039"/>
+            <a:ext cx="11057839" cy="749808"/>
           </a:xfrm>
           <a:prstGeom prst="rect">
             <a:avLst/>
@@ -52131,8 +52049,8 @@
         </p:nvSpPr>
         <p:spPr>
           <a:xfrm>
-            <a:off x="685800" y="3703320"/>
-            <a:ext cx="2322576" cy="603504"/>
+            <a:off x="685800" y="3813048"/>
+            <a:ext cx="2322576" cy="658368"/>
           </a:xfrm>
           <a:prstGeom prst="rect">
             <a:avLst/>
@@ -52157,7 +52075,7 @@
               </a:spcAft>
             </a:pPr>
             <a:r>
-              <a:rPr sz="1050" b="1" i="0">
+              <a:rPr sz="1100" b="1" i="0">
                 <a:solidFill>
                   <a:srgbClr val="14262E"/>
                 </a:solidFill>
@@ -52176,8 +52094,8 @@
         </p:nvSpPr>
         <p:spPr>
           <a:xfrm>
-            <a:off x="3246120" y="3703320"/>
-            <a:ext cx="4608576" cy="603504"/>
+            <a:off x="3246120" y="3813048"/>
+            <a:ext cx="4608576" cy="658368"/>
           </a:xfrm>
           <a:prstGeom prst="rect">
             <a:avLst/>
@@ -52202,7 +52120,7 @@
               </a:spcAft>
             </a:pPr>
             <a:r>
-              <a:rPr sz="1050" b="0" i="0">
+              <a:rPr sz="1100" b="0" i="0">
                 <a:solidFill>
                   <a:srgbClr val="14262E"/>
                 </a:solidFill>
@@ -52221,8 +52139,8 @@
         </p:nvSpPr>
         <p:spPr>
           <a:xfrm>
-            <a:off x="8092440" y="3703320"/>
-            <a:ext cx="3410712" cy="603504"/>
+            <a:off x="8092440" y="3813048"/>
+            <a:ext cx="3410712" cy="658368"/>
           </a:xfrm>
           <a:prstGeom prst="rect">
             <a:avLst/>
@@ -52247,7 +52165,7 @@
               </a:spcAft>
             </a:pPr>
             <a:r>
-              <a:rPr sz="1050" b="0" i="0">
+              <a:rPr sz="1100" b="0" i="0">
                 <a:solidFill>
                   <a:srgbClr val="14262E"/>
                 </a:solidFill>
@@ -52266,8 +52184,8 @@
         </p:nvSpPr>
         <p:spPr>
           <a:xfrm>
-            <a:off x="566928" y="4334255"/>
-            <a:ext cx="11057839" cy="694944"/>
+            <a:off x="566928" y="4498848"/>
+            <a:ext cx="11057839" cy="749808"/>
           </a:xfrm>
           <a:prstGeom prst="rect">
             <a:avLst/>
@@ -52310,8 +52228,8 @@
         </p:nvSpPr>
         <p:spPr>
           <a:xfrm>
-            <a:off x="685800" y="4398264"/>
-            <a:ext cx="2322576" cy="603504"/>
+            <a:off x="685800" y="4562856"/>
+            <a:ext cx="2322576" cy="658368"/>
           </a:xfrm>
           <a:prstGeom prst="rect">
             <a:avLst/>
@@ -52336,7 +52254,7 @@
               </a:spcAft>
             </a:pPr>
             <a:r>
-              <a:rPr sz="1050" b="1" i="0">
+              <a:rPr sz="1100" b="1" i="0">
                 <a:solidFill>
                   <a:srgbClr val="14262E"/>
                 </a:solidFill>
@@ -52355,8 +52273,8 @@
         </p:nvSpPr>
         <p:spPr>
           <a:xfrm>
-            <a:off x="3246120" y="4398264"/>
-            <a:ext cx="4608576" cy="603504"/>
+            <a:off x="3246120" y="4562856"/>
+            <a:ext cx="4608576" cy="658368"/>
           </a:xfrm>
           <a:prstGeom prst="rect">
             <a:avLst/>
@@ -52381,7 +52299,7 @@
               </a:spcAft>
             </a:pPr>
             <a:r>
-              <a:rPr sz="1050" b="0" i="0">
+              <a:rPr sz="1100" b="0" i="0">
                 <a:solidFill>
                   <a:srgbClr val="14262E"/>
                 </a:solidFill>
@@ -52400,8 +52318,8 @@
         </p:nvSpPr>
         <p:spPr>
           <a:xfrm>
-            <a:off x="8092440" y="4398264"/>
-            <a:ext cx="3410712" cy="603504"/>
+            <a:off x="8092440" y="4562856"/>
+            <a:ext cx="3410712" cy="658368"/>
           </a:xfrm>
           <a:prstGeom prst="rect">
             <a:avLst/>
@@ -52426,7 +52344,7 @@
               </a:spcAft>
             </a:pPr>
             <a:r>
-              <a:rPr sz="1050" b="0" i="0">
+              <a:rPr sz="1100" b="0" i="0">
                 <a:solidFill>
                   <a:srgbClr val="14262E"/>
                 </a:solidFill>
@@ -52445,8 +52363,8 @@
         </p:nvSpPr>
         <p:spPr>
           <a:xfrm>
-            <a:off x="566928" y="5029199"/>
-            <a:ext cx="11057839" cy="694944"/>
+            <a:off x="566928" y="5248656"/>
+            <a:ext cx="11057839" cy="749808"/>
           </a:xfrm>
           <a:prstGeom prst="rect">
             <a:avLst/>
@@ -52489,8 +52407,8 @@
         </p:nvSpPr>
         <p:spPr>
           <a:xfrm>
-            <a:off x="685800" y="5093207"/>
-            <a:ext cx="2322576" cy="603504"/>
+            <a:off x="685800" y="5312664"/>
+            <a:ext cx="2322576" cy="658368"/>
           </a:xfrm>
           <a:prstGeom prst="rect">
             <a:avLst/>
@@ -52515,7 +52433,7 @@
               </a:spcAft>
             </a:pPr>
             <a:r>
-              <a:rPr sz="1050" b="1" i="0">
+              <a:rPr sz="1100" b="1" i="0">
                 <a:solidFill>
                   <a:srgbClr val="14262E"/>
                 </a:solidFill>
@@ -52534,8 +52452,8 @@
         </p:nvSpPr>
         <p:spPr>
           <a:xfrm>
-            <a:off x="3246120" y="5093207"/>
-            <a:ext cx="4608576" cy="603504"/>
+            <a:off x="3246120" y="5312664"/>
+            <a:ext cx="4608576" cy="658368"/>
           </a:xfrm>
           <a:prstGeom prst="rect">
             <a:avLst/>
@@ -52560,7 +52478,7 @@
               </a:spcAft>
             </a:pPr>
             <a:r>
-              <a:rPr sz="1050" b="0" i="0">
+              <a:rPr sz="1100" b="0" i="0">
                 <a:solidFill>
                   <a:srgbClr val="14262E"/>
                 </a:solidFill>
@@ -52579,8 +52497,8 @@
         </p:nvSpPr>
         <p:spPr>
           <a:xfrm>
-            <a:off x="8092440" y="5093207"/>
-            <a:ext cx="3410712" cy="603504"/>
+            <a:off x="8092440" y="5312664"/>
+            <a:ext cx="3410712" cy="658368"/>
           </a:xfrm>
           <a:prstGeom prst="rect">
             <a:avLst/>
@@ -52605,7 +52523,7 @@
               </a:spcAft>
             </a:pPr>
             <a:r>
-              <a:rPr sz="1050" b="0" i="0">
+              <a:rPr sz="1100" b="0" i="0">
                 <a:solidFill>
                   <a:srgbClr val="14262E"/>
                 </a:solidFill>
@@ -52624,8 +52542,8 @@
         </p:nvSpPr>
         <p:spPr>
           <a:xfrm>
-            <a:off x="566928" y="5724143"/>
-            <a:ext cx="11057839" cy="694944"/>
+            <a:off x="566928" y="5998464"/>
+            <a:ext cx="11057839" cy="749808"/>
           </a:xfrm>
           <a:prstGeom prst="rect">
             <a:avLst/>
@@ -52668,8 +52586,8 @@
         </p:nvSpPr>
         <p:spPr>
           <a:xfrm>
-            <a:off x="685800" y="5788151"/>
-            <a:ext cx="2322576" cy="603504"/>
+            <a:off x="685800" y="6062472"/>
+            <a:ext cx="2322576" cy="658368"/>
           </a:xfrm>
           <a:prstGeom prst="rect">
             <a:avLst/>
@@ -52694,7 +52612,7 @@
               </a:spcAft>
             </a:pPr>
             <a:r>
-              <a:rPr sz="1050" b="1" i="0">
+              <a:rPr sz="1100" b="1" i="0">
                 <a:solidFill>
                   <a:srgbClr val="14262E"/>
                 </a:solidFill>
@@ -52713,8 +52631,8 @@
         </p:nvSpPr>
         <p:spPr>
           <a:xfrm>
-            <a:off x="3246120" y="5788151"/>
-            <a:ext cx="4608576" cy="603504"/>
+            <a:off x="3246120" y="6062472"/>
+            <a:ext cx="4608576" cy="658368"/>
           </a:xfrm>
           <a:prstGeom prst="rect">
             <a:avLst/>
@@ -52739,7 +52657,7 @@
               </a:spcAft>
             </a:pPr>
             <a:r>
-              <a:rPr sz="1050" b="0" i="0">
+              <a:rPr sz="1100" b="0" i="0">
                 <a:solidFill>
                   <a:srgbClr val="14262E"/>
                 </a:solidFill>
@@ -52758,8 +52676,8 @@
         </p:nvSpPr>
         <p:spPr>
           <a:xfrm>
-            <a:off x="8092440" y="5788151"/>
-            <a:ext cx="3410712" cy="603504"/>
+            <a:off x="8092440" y="6062472"/>
+            <a:ext cx="3410712" cy="658368"/>
           </a:xfrm>
           <a:prstGeom prst="rect">
             <a:avLst/>
@@ -52784,7 +52702,7 @@
               </a:spcAft>
             </a:pPr>
             <a:r>
-              <a:rPr sz="1050" b="0" i="0">
+              <a:rPr sz="1100" b="0" i="0">
                 <a:solidFill>
                   <a:srgbClr val="14262E"/>
                 </a:solidFill>
@@ -53046,14 +52964,15 @@
         </p:nvPicPr>
         <p:blipFill>
           <a:blip r:embed="rId2"/>
+          <a:srcRect t="2336" b="2336"/>
           <a:stretch>
             <a:fillRect/>
           </a:stretch>
         </p:blipFill>
         <p:spPr>
           <a:xfrm>
-            <a:off x="5909767" y="1417320"/>
-            <a:ext cx="4617720" cy="4617720"/>
+            <a:off x="6732727" y="1417320"/>
+            <a:ext cx="4892040" cy="4663440"/>
           </a:xfrm>
           <a:prstGeom prst="rect">
             <a:avLst/>
@@ -53068,8 +52987,8 @@
         </p:nvSpPr>
         <p:spPr>
           <a:xfrm>
-            <a:off x="5909767" y="1417320"/>
-            <a:ext cx="4617720" cy="59436"/>
+            <a:off x="6732727" y="1417320"/>
+            <a:ext cx="4892040" cy="59436"/>
           </a:xfrm>
           <a:prstGeom prst="rect">
             <a:avLst/>
@@ -53112,8 +53031,8 @@
         </p:nvSpPr>
         <p:spPr>
           <a:xfrm>
-            <a:off x="5909767" y="6080760"/>
-            <a:ext cx="4617720" cy="365760"/>
+            <a:off x="6732727" y="6144768"/>
+            <a:ext cx="4892040" cy="365760"/>
           </a:xfrm>
           <a:prstGeom prst="rect">
             <a:avLst/>
@@ -53158,7 +53077,7 @@
         <p:spPr>
           <a:xfrm>
             <a:off x="566928" y="1426464"/>
-            <a:ext cx="4958791" cy="960582"/>
+            <a:ext cx="5781751" cy="991903"/>
           </a:xfrm>
           <a:prstGeom prst="roundRect">
             <a:avLst>
@@ -53204,7 +53123,7 @@
         <p:spPr>
           <a:xfrm>
             <a:off x="566928" y="1426464"/>
-            <a:ext cx="45720" cy="960582"/>
+            <a:ext cx="45720" cy="991903"/>
           </a:xfrm>
           <a:prstGeom prst="rect">
             <a:avLst/>
@@ -53248,7 +53167,7 @@
         <p:spPr>
           <a:xfrm>
             <a:off x="768096" y="1563624"/>
-            <a:ext cx="4556455" cy="686262"/>
+            <a:ext cx="5379415" cy="717583"/>
           </a:xfrm>
           <a:prstGeom prst="rect">
             <a:avLst/>
@@ -53314,8 +53233,8 @@
         </p:nvSpPr>
         <p:spPr>
           <a:xfrm>
-            <a:off x="566928" y="2496774"/>
-            <a:ext cx="4958791" cy="803978"/>
+            <a:off x="566928" y="2528095"/>
+            <a:ext cx="5781751" cy="835299"/>
           </a:xfrm>
           <a:prstGeom prst="roundRect">
             <a:avLst>
@@ -53360,8 +53279,8 @@
         </p:nvSpPr>
         <p:spPr>
           <a:xfrm>
-            <a:off x="566928" y="2496774"/>
-            <a:ext cx="45720" cy="803978"/>
+            <a:off x="566928" y="2528095"/>
+            <a:ext cx="45720" cy="835299"/>
           </a:xfrm>
           <a:prstGeom prst="rect">
             <a:avLst/>
@@ -53404,8 +53323,8 @@
         </p:nvSpPr>
         <p:spPr>
           <a:xfrm>
-            <a:off x="768096" y="2633934"/>
-            <a:ext cx="4556455" cy="529658"/>
+            <a:off x="768096" y="2665255"/>
+            <a:ext cx="5379415" cy="560979"/>
           </a:xfrm>
           <a:prstGeom prst="rect">
             <a:avLst/>
@@ -53471,8 +53390,8 @@
         </p:nvSpPr>
         <p:spPr>
           <a:xfrm>
-            <a:off x="566928" y="3410480"/>
-            <a:ext cx="4958791" cy="803978"/>
+            <a:off x="566928" y="3473122"/>
+            <a:ext cx="5781751" cy="835299"/>
           </a:xfrm>
           <a:prstGeom prst="roundRect">
             <a:avLst>
@@ -53517,8 +53436,8 @@
         </p:nvSpPr>
         <p:spPr>
           <a:xfrm>
-            <a:off x="566928" y="3410480"/>
-            <a:ext cx="45720" cy="803978"/>
+            <a:off x="566928" y="3473122"/>
+            <a:ext cx="45720" cy="835299"/>
           </a:xfrm>
           <a:prstGeom prst="rect">
             <a:avLst/>
@@ -53561,8 +53480,8 @@
         </p:nvSpPr>
         <p:spPr>
           <a:xfrm>
-            <a:off x="768096" y="3547640"/>
-            <a:ext cx="4556455" cy="529658"/>
+            <a:off x="768096" y="3610282"/>
+            <a:ext cx="5379415" cy="560979"/>
           </a:xfrm>
           <a:prstGeom prst="rect">
             <a:avLst/>
@@ -53628,8 +53547,8 @@
         </p:nvSpPr>
         <p:spPr>
           <a:xfrm>
-            <a:off x="566928" y="4324187"/>
-            <a:ext cx="4958791" cy="960582"/>
+            <a:off x="566928" y="4418149"/>
+            <a:ext cx="5781751" cy="835299"/>
           </a:xfrm>
           <a:prstGeom prst="roundRect">
             <a:avLst>
@@ -53674,8 +53593,8 @@
         </p:nvSpPr>
         <p:spPr>
           <a:xfrm>
-            <a:off x="566928" y="4324187"/>
-            <a:ext cx="45720" cy="960582"/>
+            <a:off x="566928" y="4418149"/>
+            <a:ext cx="45720" cy="835299"/>
           </a:xfrm>
           <a:prstGeom prst="rect">
             <a:avLst/>
@@ -53718,8 +53637,8 @@
         </p:nvSpPr>
         <p:spPr>
           <a:xfrm>
-            <a:off x="768096" y="4461347"/>
-            <a:ext cx="4556455" cy="686262"/>
+            <a:off x="768096" y="4555309"/>
+            <a:ext cx="5379415" cy="560979"/>
           </a:xfrm>
           <a:prstGeom prst="rect">
             <a:avLst/>
@@ -53785,8 +53704,8 @@
         </p:nvSpPr>
         <p:spPr>
           <a:xfrm>
-            <a:off x="566928" y="5394497"/>
-            <a:ext cx="4958791" cy="960582"/>
+            <a:off x="566928" y="5363176"/>
+            <a:ext cx="5781751" cy="991903"/>
           </a:xfrm>
           <a:prstGeom prst="roundRect">
             <a:avLst>
@@ -53831,8 +53750,8 @@
         </p:nvSpPr>
         <p:spPr>
           <a:xfrm>
-            <a:off x="566928" y="5394497"/>
-            <a:ext cx="45720" cy="960582"/>
+            <a:off x="566928" y="5363176"/>
+            <a:ext cx="45720" cy="991903"/>
           </a:xfrm>
           <a:prstGeom prst="rect">
             <a:avLst/>
@@ -53875,8 +53794,8 @@
         </p:nvSpPr>
         <p:spPr>
           <a:xfrm>
-            <a:off x="768096" y="5531657"/>
-            <a:ext cx="4556455" cy="686262"/>
+            <a:off x="768096" y="5500336"/>
+            <a:ext cx="5379415" cy="717583"/>
           </a:xfrm>
           <a:prstGeom prst="rect">
             <a:avLst/>
@@ -54408,7 +54327,7 @@
         <p:spPr>
           <a:xfrm>
             <a:off x="566928" y="2231136"/>
-            <a:ext cx="11057839" cy="694944"/>
+            <a:ext cx="11057839" cy="758952"/>
           </a:xfrm>
           <a:prstGeom prst="rect">
             <a:avLst/>
@@ -54452,7 +54371,7 @@
         <p:spPr>
           <a:xfrm>
             <a:off x="685800" y="2295144"/>
-            <a:ext cx="2825496" cy="603504"/>
+            <a:ext cx="2825496" cy="667512"/>
           </a:xfrm>
           <a:prstGeom prst="rect">
             <a:avLst/>
@@ -54497,7 +54416,7 @@
         <p:spPr>
           <a:xfrm>
             <a:off x="3749040" y="2295144"/>
-            <a:ext cx="3374136" cy="603504"/>
+            <a:ext cx="3374136" cy="667512"/>
           </a:xfrm>
           <a:prstGeom prst="rect">
             <a:avLst/>
@@ -54542,7 +54461,7 @@
         <p:spPr>
           <a:xfrm>
             <a:off x="7360920" y="2295144"/>
-            <a:ext cx="4142232" cy="603504"/>
+            <a:ext cx="4142232" cy="667512"/>
           </a:xfrm>
           <a:prstGeom prst="rect">
             <a:avLst/>
@@ -54586,8 +54505,8 @@
         </p:nvSpPr>
         <p:spPr>
           <a:xfrm>
-            <a:off x="566928" y="2926080"/>
-            <a:ext cx="11057839" cy="694944"/>
+            <a:off x="566928" y="2990088"/>
+            <a:ext cx="11057839" cy="758952"/>
           </a:xfrm>
           <a:prstGeom prst="rect">
             <a:avLst/>
@@ -54630,8 +54549,8 @@
         </p:nvSpPr>
         <p:spPr>
           <a:xfrm>
-            <a:off x="685800" y="2990088"/>
-            <a:ext cx="2825496" cy="603504"/>
+            <a:off x="685800" y="3054096"/>
+            <a:ext cx="2825496" cy="667512"/>
           </a:xfrm>
           <a:prstGeom prst="rect">
             <a:avLst/>
@@ -54675,8 +54594,8 @@
         </p:nvSpPr>
         <p:spPr>
           <a:xfrm>
-            <a:off x="3749040" y="2990088"/>
-            <a:ext cx="3374136" cy="603504"/>
+            <a:off x="3749040" y="3054096"/>
+            <a:ext cx="3374136" cy="667512"/>
           </a:xfrm>
           <a:prstGeom prst="rect">
             <a:avLst/>
@@ -54720,8 +54639,8 @@
         </p:nvSpPr>
         <p:spPr>
           <a:xfrm>
-            <a:off x="7360920" y="2990088"/>
-            <a:ext cx="4142232" cy="603504"/>
+            <a:off x="7360920" y="3054096"/>
+            <a:ext cx="4142232" cy="667512"/>
           </a:xfrm>
           <a:prstGeom prst="rect">
             <a:avLst/>
@@ -54765,8 +54684,8 @@
         </p:nvSpPr>
         <p:spPr>
           <a:xfrm>
-            <a:off x="566928" y="3621024"/>
-            <a:ext cx="11057839" cy="694944"/>
+            <a:off x="566928" y="3749039"/>
+            <a:ext cx="11057839" cy="758952"/>
           </a:xfrm>
           <a:prstGeom prst="rect">
             <a:avLst/>
@@ -54809,8 +54728,8 @@
         </p:nvSpPr>
         <p:spPr>
           <a:xfrm>
-            <a:off x="685800" y="3685032"/>
-            <a:ext cx="2825496" cy="603504"/>
+            <a:off x="685800" y="3813048"/>
+            <a:ext cx="2825496" cy="667512"/>
           </a:xfrm>
           <a:prstGeom prst="rect">
             <a:avLst/>
@@ -54854,8 +54773,8 @@
         </p:nvSpPr>
         <p:spPr>
           <a:xfrm>
-            <a:off x="3749040" y="3685032"/>
-            <a:ext cx="3374136" cy="603504"/>
+            <a:off x="3749040" y="3813048"/>
+            <a:ext cx="3374136" cy="667512"/>
           </a:xfrm>
           <a:prstGeom prst="rect">
             <a:avLst/>
@@ -54899,8 +54818,8 @@
         </p:nvSpPr>
         <p:spPr>
           <a:xfrm>
-            <a:off x="7360920" y="3685032"/>
-            <a:ext cx="4142232" cy="603504"/>
+            <a:off x="7360920" y="3813048"/>
+            <a:ext cx="4142232" cy="667512"/>
           </a:xfrm>
           <a:prstGeom prst="rect">
             <a:avLst/>
@@ -54944,8 +54863,8 @@
         </p:nvSpPr>
         <p:spPr>
           <a:xfrm>
-            <a:off x="566928" y="4315968"/>
-            <a:ext cx="11057839" cy="694944"/>
+            <a:off x="566928" y="4507992"/>
+            <a:ext cx="11057839" cy="758952"/>
           </a:xfrm>
           <a:prstGeom prst="rect">
             <a:avLst/>
@@ -54988,8 +54907,8 @@
         </p:nvSpPr>
         <p:spPr>
           <a:xfrm>
-            <a:off x="685800" y="4379976"/>
-            <a:ext cx="2825496" cy="603504"/>
+            <a:off x="685800" y="4572000"/>
+            <a:ext cx="2825496" cy="667512"/>
           </a:xfrm>
           <a:prstGeom prst="rect">
             <a:avLst/>
@@ -55033,8 +54952,8 @@
         </p:nvSpPr>
         <p:spPr>
           <a:xfrm>
-            <a:off x="3749040" y="4379976"/>
-            <a:ext cx="3374136" cy="603504"/>
+            <a:off x="3749040" y="4572000"/>
+            <a:ext cx="3374136" cy="667512"/>
           </a:xfrm>
           <a:prstGeom prst="rect">
             <a:avLst/>
@@ -55078,8 +54997,8 @@
         </p:nvSpPr>
         <p:spPr>
           <a:xfrm>
-            <a:off x="7360920" y="4379976"/>
-            <a:ext cx="4142232" cy="603504"/>
+            <a:off x="7360920" y="4572000"/>
+            <a:ext cx="4142232" cy="667512"/>
           </a:xfrm>
           <a:prstGeom prst="rect">
             <a:avLst/>
@@ -55123,8 +55042,8 @@
         </p:nvSpPr>
         <p:spPr>
           <a:xfrm>
-            <a:off x="566928" y="5010912"/>
-            <a:ext cx="11057839" cy="694944"/>
+            <a:off x="566928" y="5266944"/>
+            <a:ext cx="11057839" cy="758952"/>
           </a:xfrm>
           <a:prstGeom prst="rect">
             <a:avLst/>
@@ -55167,8 +55086,8 @@
         </p:nvSpPr>
         <p:spPr>
           <a:xfrm>
-            <a:off x="685800" y="5074920"/>
-            <a:ext cx="2825496" cy="603504"/>
+            <a:off x="685800" y="5330952"/>
+            <a:ext cx="2825496" cy="667512"/>
           </a:xfrm>
           <a:prstGeom prst="rect">
             <a:avLst/>
@@ -55212,8 +55131,8 @@
         </p:nvSpPr>
         <p:spPr>
           <a:xfrm>
-            <a:off x="3749040" y="5074920"/>
-            <a:ext cx="3374136" cy="603504"/>
+            <a:off x="3749040" y="5330952"/>
+            <a:ext cx="3374136" cy="667512"/>
           </a:xfrm>
           <a:prstGeom prst="rect">
             <a:avLst/>
@@ -55257,8 +55176,8 @@
         </p:nvSpPr>
         <p:spPr>
           <a:xfrm>
-            <a:off x="7360920" y="5074920"/>
-            <a:ext cx="4142232" cy="603504"/>
+            <a:off x="7360920" y="5330952"/>
+            <a:ext cx="4142232" cy="667512"/>
           </a:xfrm>
           <a:prstGeom prst="rect">
             <a:avLst/>
@@ -55302,8 +55221,8 @@
         </p:nvSpPr>
         <p:spPr>
           <a:xfrm>
-            <a:off x="566928" y="5705855"/>
-            <a:ext cx="11057839" cy="694944"/>
+            <a:off x="566928" y="6025896"/>
+            <a:ext cx="11057839" cy="758952"/>
           </a:xfrm>
           <a:prstGeom prst="rect">
             <a:avLst/>
@@ -55346,8 +55265,8 @@
         </p:nvSpPr>
         <p:spPr>
           <a:xfrm>
-            <a:off x="685800" y="5769864"/>
-            <a:ext cx="2825496" cy="603504"/>
+            <a:off x="685800" y="6089904"/>
+            <a:ext cx="2825496" cy="667512"/>
           </a:xfrm>
           <a:prstGeom prst="rect">
             <a:avLst/>
@@ -55391,8 +55310,8 @@
         </p:nvSpPr>
         <p:spPr>
           <a:xfrm>
-            <a:off x="3749040" y="5769864"/>
-            <a:ext cx="3374136" cy="603504"/>
+            <a:off x="3749040" y="6089904"/>
+            <a:ext cx="3374136" cy="667512"/>
           </a:xfrm>
           <a:prstGeom prst="rect">
             <a:avLst/>
@@ -55436,8 +55355,8 @@
         </p:nvSpPr>
         <p:spPr>
           <a:xfrm>
-            <a:off x="7360920" y="5769864"/>
-            <a:ext cx="4142232" cy="603504"/>
+            <a:off x="7360920" y="6089904"/>
+            <a:ext cx="4142232" cy="667512"/>
           </a:xfrm>
           <a:prstGeom prst="rect">
             <a:avLst/>
@@ -56032,14 +55951,15 @@
         </p:nvPicPr>
         <p:blipFill>
           <a:blip r:embed="rId2"/>
+          <a:srcRect l="15033" r="15033"/>
           <a:stretch>
             <a:fillRect/>
           </a:stretch>
         </p:blipFill>
         <p:spPr>
           <a:xfrm>
-            <a:off x="5909767" y="1417320"/>
-            <a:ext cx="5715000" cy="3810000"/>
+            <a:off x="6732727" y="1417320"/>
+            <a:ext cx="4892040" cy="4663440"/>
           </a:xfrm>
           <a:prstGeom prst="rect">
             <a:avLst/>
@@ -56054,8 +55974,8 @@
         </p:nvSpPr>
         <p:spPr>
           <a:xfrm>
-            <a:off x="5909767" y="1417320"/>
-            <a:ext cx="5715000" cy="59436"/>
+            <a:off x="6732727" y="1417320"/>
+            <a:ext cx="4892040" cy="59436"/>
           </a:xfrm>
           <a:prstGeom prst="rect">
             <a:avLst/>
@@ -56098,8 +56018,8 @@
         </p:nvSpPr>
         <p:spPr>
           <a:xfrm>
-            <a:off x="5909767" y="5273040"/>
-            <a:ext cx="5715000" cy="365760"/>
+            <a:off x="6732727" y="6144768"/>
+            <a:ext cx="4892040" cy="365760"/>
           </a:xfrm>
           <a:prstGeom prst="rect">
             <a:avLst/>
@@ -56144,7 +56064,7 @@
         <p:spPr>
           <a:xfrm>
             <a:off x="566928" y="1426464"/>
-            <a:ext cx="4958791" cy="832002"/>
+            <a:ext cx="5781751" cy="863323"/>
           </a:xfrm>
           <a:prstGeom prst="roundRect">
             <a:avLst>
@@ -56190,7 +56110,7 @@
         <p:spPr>
           <a:xfrm>
             <a:off x="566928" y="1426464"/>
-            <a:ext cx="45720" cy="832002"/>
+            <a:ext cx="45720" cy="863323"/>
           </a:xfrm>
           <a:prstGeom prst="rect">
             <a:avLst/>
@@ -56234,7 +56154,7 @@
         <p:spPr>
           <a:xfrm>
             <a:off x="768096" y="1563624"/>
-            <a:ext cx="4556455" cy="557682"/>
+            <a:ext cx="5379415" cy="589003"/>
           </a:xfrm>
           <a:prstGeom prst="rect">
             <a:avLst/>
@@ -56259,7 +56179,7 @@
               </a:spcAft>
             </a:pPr>
             <a:r>
-              <a:rPr sz="1100" b="1" i="0">
+              <a:rPr sz="1150" b="1" i="0">
                 <a:solidFill>
                   <a:srgbClr val="0B6E4F"/>
                 </a:solidFill>
@@ -56281,7 +56201,7 @@
               </a:spcAft>
             </a:pPr>
             <a:r>
-              <a:rPr sz="1000" b="0" i="0">
+              <a:rPr sz="1050" b="0" i="0">
                 <a:solidFill>
                   <a:srgbClr val="14262E"/>
                 </a:solidFill>
@@ -56300,8 +56220,8 @@
         </p:nvSpPr>
         <p:spPr>
           <a:xfrm>
-            <a:off x="566928" y="2368194"/>
-            <a:ext cx="4958791" cy="996848"/>
+            <a:off x="566928" y="2399515"/>
+            <a:ext cx="5781751" cy="863323"/>
           </a:xfrm>
           <a:prstGeom prst="roundRect">
             <a:avLst>
@@ -56346,8 +56266,8 @@
         </p:nvSpPr>
         <p:spPr>
           <a:xfrm>
-            <a:off x="566928" y="2368194"/>
-            <a:ext cx="45720" cy="996848"/>
+            <a:off x="566928" y="2399515"/>
+            <a:ext cx="45720" cy="863323"/>
           </a:xfrm>
           <a:prstGeom prst="rect">
             <a:avLst/>
@@ -56390,8 +56310,8 @@
         </p:nvSpPr>
         <p:spPr>
           <a:xfrm>
-            <a:off x="768096" y="2505354"/>
-            <a:ext cx="4556455" cy="722528"/>
+            <a:off x="768096" y="2536675"/>
+            <a:ext cx="5379415" cy="589003"/>
           </a:xfrm>
           <a:prstGeom prst="rect">
             <a:avLst/>
@@ -56416,7 +56336,7 @@
               </a:spcAft>
             </a:pPr>
             <a:r>
-              <a:rPr sz="1100" b="1" i="0">
+              <a:rPr sz="1150" b="1" i="0">
                 <a:solidFill>
                   <a:srgbClr val="0B6E4F"/>
                 </a:solidFill>
@@ -56438,7 +56358,7 @@
               </a:spcAft>
             </a:pPr>
             <a:r>
-              <a:rPr sz="1000" b="0" i="0">
+              <a:rPr sz="1050" b="0" i="0">
                 <a:solidFill>
                   <a:srgbClr val="14262E"/>
                 </a:solidFill>
@@ -56457,8 +56377,8 @@
         </p:nvSpPr>
         <p:spPr>
           <a:xfrm>
-            <a:off x="566928" y="3474770"/>
-            <a:ext cx="4958791" cy="832002"/>
+            <a:off x="566928" y="3372566"/>
+            <a:ext cx="5781751" cy="863323"/>
           </a:xfrm>
           <a:prstGeom prst="roundRect">
             <a:avLst>
@@ -56503,8 +56423,8 @@
         </p:nvSpPr>
         <p:spPr>
           <a:xfrm>
-            <a:off x="566928" y="3474770"/>
-            <a:ext cx="45720" cy="832002"/>
+            <a:off x="566928" y="3372566"/>
+            <a:ext cx="45720" cy="863323"/>
           </a:xfrm>
           <a:prstGeom prst="rect">
             <a:avLst/>
@@ -56547,8 +56467,8 @@
         </p:nvSpPr>
         <p:spPr>
           <a:xfrm>
-            <a:off x="768096" y="3611930"/>
-            <a:ext cx="4556455" cy="557682"/>
+            <a:off x="768096" y="3509726"/>
+            <a:ext cx="5379415" cy="589003"/>
           </a:xfrm>
           <a:prstGeom prst="rect">
             <a:avLst/>
@@ -56573,7 +56493,7 @@
               </a:spcAft>
             </a:pPr>
             <a:r>
-              <a:rPr sz="1100" b="1" i="0">
+              <a:rPr sz="1150" b="1" i="0">
                 <a:solidFill>
                   <a:srgbClr val="0B6E4F"/>
                 </a:solidFill>
@@ -56595,7 +56515,7 @@
               </a:spcAft>
             </a:pPr>
             <a:r>
-              <a:rPr sz="1000" b="0" i="0">
+              <a:rPr sz="1050" b="0" i="0">
                 <a:solidFill>
                   <a:srgbClr val="14262E"/>
                 </a:solidFill>
@@ -56614,8 +56534,8 @@
         </p:nvSpPr>
         <p:spPr>
           <a:xfrm>
-            <a:off x="566928" y="4416501"/>
-            <a:ext cx="4958791" cy="832002"/>
+            <a:off x="566928" y="4345617"/>
+            <a:ext cx="5781751" cy="863323"/>
           </a:xfrm>
           <a:prstGeom prst="roundRect">
             <a:avLst>
@@ -56660,8 +56580,8 @@
         </p:nvSpPr>
         <p:spPr>
           <a:xfrm>
-            <a:off x="566928" y="4416501"/>
-            <a:ext cx="45720" cy="832002"/>
+            <a:off x="566928" y="4345617"/>
+            <a:ext cx="45720" cy="863323"/>
           </a:xfrm>
           <a:prstGeom prst="rect">
             <a:avLst/>
@@ -56704,8 +56624,8 @@
         </p:nvSpPr>
         <p:spPr>
           <a:xfrm>
-            <a:off x="768096" y="4553661"/>
-            <a:ext cx="4556455" cy="557682"/>
+            <a:off x="768096" y="4482777"/>
+            <a:ext cx="5379415" cy="589003"/>
           </a:xfrm>
           <a:prstGeom prst="rect">
             <a:avLst/>
@@ -56730,7 +56650,7 @@
               </a:spcAft>
             </a:pPr>
             <a:r>
-              <a:rPr sz="1100" b="1" i="0">
+              <a:rPr sz="1150" b="1" i="0">
                 <a:solidFill>
                   <a:srgbClr val="0B6E4F"/>
                 </a:solidFill>
@@ -56752,7 +56672,7 @@
               </a:spcAft>
             </a:pPr>
             <a:r>
-              <a:rPr sz="1000" b="0" i="0">
+              <a:rPr sz="1050" b="0" i="0">
                 <a:solidFill>
                   <a:srgbClr val="14262E"/>
                 </a:solidFill>
@@ -56771,8 +56691,8 @@
         </p:nvSpPr>
         <p:spPr>
           <a:xfrm>
-            <a:off x="566928" y="5358231"/>
-            <a:ext cx="4958791" cy="996848"/>
+            <a:off x="566928" y="5318668"/>
+            <a:ext cx="5781751" cy="1036411"/>
           </a:xfrm>
           <a:prstGeom prst="roundRect">
             <a:avLst>
@@ -56817,8 +56737,8 @@
         </p:nvSpPr>
         <p:spPr>
           <a:xfrm>
-            <a:off x="566928" y="5358231"/>
-            <a:ext cx="45720" cy="996848"/>
+            <a:off x="566928" y="5318668"/>
+            <a:ext cx="45720" cy="1036411"/>
           </a:xfrm>
           <a:prstGeom prst="rect">
             <a:avLst/>
@@ -56861,8 +56781,8 @@
         </p:nvSpPr>
         <p:spPr>
           <a:xfrm>
-            <a:off x="768096" y="5495391"/>
-            <a:ext cx="4556455" cy="722528"/>
+            <a:off x="768096" y="5455828"/>
+            <a:ext cx="5379415" cy="762091"/>
           </a:xfrm>
           <a:prstGeom prst="rect">
             <a:avLst/>
@@ -56887,7 +56807,7 @@
               </a:spcAft>
             </a:pPr>
             <a:r>
-              <a:rPr sz="1100" b="1" i="0">
+              <a:rPr sz="1150" b="1" i="0">
                 <a:solidFill>
                   <a:srgbClr val="0B6E4F"/>
                 </a:solidFill>
@@ -56909,7 +56829,7 @@
               </a:spcAft>
             </a:pPr>
             <a:r>
-              <a:rPr sz="1000" b="0" i="0">
+              <a:rPr sz="1050" b="0" i="0">
                 <a:solidFill>
                   <a:srgbClr val="14262E"/>
                 </a:solidFill>
@@ -58177,14 +58097,15 @@
         </p:nvPicPr>
         <p:blipFill>
           <a:blip r:embed="rId2"/>
+          <a:srcRect l="15033" r="15033"/>
           <a:stretch>
             <a:fillRect/>
           </a:stretch>
         </p:blipFill>
         <p:spPr>
           <a:xfrm>
-            <a:off x="5909767" y="1417320"/>
-            <a:ext cx="5715000" cy="3810000"/>
+            <a:off x="6732727" y="1417320"/>
+            <a:ext cx="4892040" cy="4663440"/>
           </a:xfrm>
           <a:prstGeom prst="rect">
             <a:avLst/>
@@ -58199,8 +58120,8 @@
         </p:nvSpPr>
         <p:spPr>
           <a:xfrm>
-            <a:off x="5909767" y="1417320"/>
-            <a:ext cx="5715000" cy="59436"/>
+            <a:off x="6732727" y="1417320"/>
+            <a:ext cx="4892040" cy="59436"/>
           </a:xfrm>
           <a:prstGeom prst="rect">
             <a:avLst/>
@@ -58243,8 +58164,8 @@
         </p:nvSpPr>
         <p:spPr>
           <a:xfrm>
-            <a:off x="5909767" y="5273040"/>
-            <a:ext cx="5715000" cy="365760"/>
+            <a:off x="6732727" y="6144768"/>
+            <a:ext cx="4892040" cy="365760"/>
           </a:xfrm>
           <a:prstGeom prst="rect">
             <a:avLst/>
@@ -58289,7 +58210,7 @@
         <p:spPr>
           <a:xfrm>
             <a:off x="566928" y="1426464"/>
-            <a:ext cx="4958791" cy="897940"/>
+            <a:ext cx="5781751" cy="897940"/>
           </a:xfrm>
           <a:prstGeom prst="roundRect">
             <a:avLst>
@@ -58379,7 +58300,7 @@
         <p:spPr>
           <a:xfrm>
             <a:off x="768096" y="1563624"/>
-            <a:ext cx="4556455" cy="623620"/>
+            <a:ext cx="5379415" cy="623620"/>
           </a:xfrm>
           <a:prstGeom prst="rect">
             <a:avLst/>
@@ -58404,7 +58325,7 @@
               </a:spcAft>
             </a:pPr>
             <a:r>
-              <a:rPr sz="1200" b="1" i="0">
+              <a:rPr sz="1250" b="1" i="0">
                 <a:solidFill>
                   <a:srgbClr val="0B6E4F"/>
                 </a:solidFill>
@@ -58426,7 +58347,7 @@
               </a:spcAft>
             </a:pPr>
             <a:r>
-              <a:rPr sz="1100" b="0" i="0">
+              <a:rPr sz="1150" b="0" i="0">
                 <a:solidFill>
                   <a:srgbClr val="14262E"/>
                 </a:solidFill>
@@ -58446,7 +58367,7 @@
         <p:spPr>
           <a:xfrm>
             <a:off x="566928" y="2434132"/>
-            <a:ext cx="4958791" cy="897940"/>
+            <a:ext cx="5781751" cy="897940"/>
           </a:xfrm>
           <a:prstGeom prst="roundRect">
             <a:avLst>
@@ -58536,7 +58457,7 @@
         <p:spPr>
           <a:xfrm>
             <a:off x="768096" y="2571292"/>
-            <a:ext cx="4556455" cy="623620"/>
+            <a:ext cx="5379415" cy="623620"/>
           </a:xfrm>
           <a:prstGeom prst="rect">
             <a:avLst/>
@@ -58561,7 +58482,7 @@
               </a:spcAft>
             </a:pPr>
             <a:r>
-              <a:rPr sz="1200" b="1" i="0">
+              <a:rPr sz="1250" b="1" i="0">
                 <a:solidFill>
                   <a:srgbClr val="0B6E4F"/>
                 </a:solidFill>
@@ -58583,7 +58504,7 @@
               </a:spcAft>
             </a:pPr>
             <a:r>
-              <a:rPr sz="1100" b="0" i="0">
+              <a:rPr sz="1150" b="0" i="0">
                 <a:solidFill>
                   <a:srgbClr val="14262E"/>
                 </a:solidFill>
@@ -58603,7 +58524,7 @@
         <p:spPr>
           <a:xfrm>
             <a:off x="566928" y="3441801"/>
-            <a:ext cx="4958791" cy="897940"/>
+            <a:ext cx="5781751" cy="897940"/>
           </a:xfrm>
           <a:prstGeom prst="roundRect">
             <a:avLst>
@@ -58693,7 +58614,7 @@
         <p:spPr>
           <a:xfrm>
             <a:off x="768096" y="3578961"/>
-            <a:ext cx="4556455" cy="623620"/>
+            <a:ext cx="5379415" cy="623620"/>
           </a:xfrm>
           <a:prstGeom prst="rect">
             <a:avLst/>
@@ -58718,7 +58639,7 @@
               </a:spcAft>
             </a:pPr>
             <a:r>
-              <a:rPr sz="1200" b="1" i="0">
+              <a:rPr sz="1250" b="1" i="0">
                 <a:solidFill>
                   <a:srgbClr val="0B6E4F"/>
                 </a:solidFill>
@@ -58740,7 +58661,7 @@
               </a:spcAft>
             </a:pPr>
             <a:r>
-              <a:rPr sz="1100" b="0" i="0">
+              <a:rPr sz="1150" b="0" i="0">
                 <a:solidFill>
                   <a:srgbClr val="14262E"/>
                 </a:solidFill>
@@ -58760,7 +58681,7 @@
         <p:spPr>
           <a:xfrm>
             <a:off x="566928" y="4449470"/>
-            <a:ext cx="4958791" cy="897940"/>
+            <a:ext cx="5781751" cy="897940"/>
           </a:xfrm>
           <a:prstGeom prst="roundRect">
             <a:avLst>
@@ -58850,7 +58771,7 @@
         <p:spPr>
           <a:xfrm>
             <a:off x="768096" y="4586630"/>
-            <a:ext cx="4556455" cy="623620"/>
+            <a:ext cx="5379415" cy="623620"/>
           </a:xfrm>
           <a:prstGeom prst="rect">
             <a:avLst/>
@@ -58875,7 +58796,7 @@
               </a:spcAft>
             </a:pPr>
             <a:r>
-              <a:rPr sz="1200" b="1" i="0">
+              <a:rPr sz="1250" b="1" i="0">
                 <a:solidFill>
                   <a:srgbClr val="0B6E4F"/>
                 </a:solidFill>
@@ -58897,7 +58818,7 @@
               </a:spcAft>
             </a:pPr>
             <a:r>
-              <a:rPr sz="1100" b="0" i="0">
+              <a:rPr sz="1150" b="0" i="0">
                 <a:solidFill>
                   <a:srgbClr val="14262E"/>
                 </a:solidFill>
@@ -58917,7 +58838,7 @@
         <p:spPr>
           <a:xfrm>
             <a:off x="566928" y="5457139"/>
-            <a:ext cx="4958791" cy="897940"/>
+            <a:ext cx="5781751" cy="897940"/>
           </a:xfrm>
           <a:prstGeom prst="roundRect">
             <a:avLst>
@@ -59007,7 +58928,7 @@
         <p:spPr>
           <a:xfrm>
             <a:off x="768096" y="5594299"/>
-            <a:ext cx="4556455" cy="623620"/>
+            <a:ext cx="5379415" cy="623620"/>
           </a:xfrm>
           <a:prstGeom prst="rect">
             <a:avLst/>
@@ -59032,7 +58953,7 @@
               </a:spcAft>
             </a:pPr>
             <a:r>
-              <a:rPr sz="1200" b="1" i="0">
+              <a:rPr sz="1250" b="1" i="0">
                 <a:solidFill>
                   <a:srgbClr val="0B6E4F"/>
                 </a:solidFill>
@@ -59054,7 +58975,7 @@
               </a:spcAft>
             </a:pPr>
             <a:r>
-              <a:rPr sz="1100" b="0" i="0">
+              <a:rPr sz="1150" b="0" i="0">
                 <a:solidFill>
                   <a:srgbClr val="14262E"/>
                 </a:solidFill>
